--- a/docs/PowerPlatform_DefaultEnv_Governance_Report.pptx
+++ b/docs/PowerPlatform_DefaultEnv_Governance_Report.pptx
@@ -3602,7 +3602,7 @@
         <p:spPr>
           <a:xfrm>
             <a:off x="502920" y="1298448"/>
-            <a:ext cx="3108960" cy="457200"/>
+            <a:ext cx="2011680" cy="457200"/>
           </a:xfrm>
           <a:prstGeom prst="roundRect">
             <a:avLst>
@@ -3610,7 +3610,7 @@
             </a:avLst>
           </a:prstGeom>
           <a:solidFill>
-            <a:srgbClr val="FBEADA"/>
+            <a:srgbClr val="FCEED9"/>
           </a:solidFill>
           <a:ln>
             <a:noFill/>
@@ -3637,13 +3637,13 @@
           <a:p>
             <a:pPr algn="ctr"/>
             <a:r>
-              <a:rPr sz="1250" b="1">
-                <a:solidFill>
-                  <a:srgbClr val="C45911"/>
-                </a:solidFill>
-                <a:latin typeface="Yu Gothic"/>
-              </a:rPr>
-              <a:t>判定：Default環境の全体マネージド化には制約あり</a:t>
+              <a:rPr sz="1200" b="1">
+                <a:solidFill>
+                  <a:srgbClr val="B86E00"/>
+                </a:solidFill>
+                <a:latin typeface="Yu Gothic"/>
+              </a:rPr>
+              <a:t>判定：制約あり</a:t>
             </a:r>
           </a:p>
         </p:txBody>
@@ -3656,8 +3656,8 @@
         </p:nvSpPr>
         <p:spPr>
           <a:xfrm>
-            <a:off x="502920" y="1874519"/>
-            <a:ext cx="11155680" cy="457200"/>
+            <a:off x="2651760" y="1298448"/>
+            <a:ext cx="9052560" cy="457200"/>
           </a:xfrm>
           <a:prstGeom prst="rect">
             <a:avLst/>
@@ -3665,7 +3665,7 @@
           <a:noFill/>
         </p:spPr>
         <p:txBody>
-          <a:bodyPr wrap="square" anchor="t" lIns="0" rIns="0" tIns="0" bIns="0">
+          <a:bodyPr wrap="square" anchor="ctr" lIns="0" rIns="0" tIns="0" bIns="0">
             <a:spAutoFit/>
           </a:bodyPr>
           <a:lstStyle/>
@@ -3676,13 +3676,13 @@
               </a:lnSpc>
             </a:pPr>
             <a:r>
-              <a:rPr sz="1250" b="0" i="1">
+              <a:rPr sz="1200" b="0" i="1">
                 <a:solidFill>
                   <a:srgbClr val="262626"/>
                 </a:solidFill>
                 <a:latin typeface="Yu Gothic"/>
               </a:rPr>
-              <a:t>制約の理由：Default環境は全社員が標準アクセス可能 → 有効化すると事実上「全社Premiumライセンス化」が前提となる [3][7]</a:t>
+              <a:t>制約の理由：Default環境は全社員が標準アクセス可能なため、有効化すると事実上「全社Premium化」が前提となる</a:t>
             </a:r>
           </a:p>
         </p:txBody>
@@ -3695,8 +3695,8 @@
         </p:nvSpPr>
         <p:spPr>
           <a:xfrm>
-            <a:off x="502920" y="2468880"/>
-            <a:ext cx="5532120" cy="1828800"/>
+            <a:off x="502920" y="1965960"/>
+            <a:ext cx="5532120" cy="1965960"/>
           </a:xfrm>
           <a:prstGeom prst="rect">
             <a:avLst/>
@@ -3741,14 +3741,14 @@
         </p:nvSpPr>
         <p:spPr>
           <a:xfrm>
-            <a:off x="502920" y="2468880"/>
+            <a:off x="502920" y="1965960"/>
             <a:ext cx="5532120" cy="73152"/>
           </a:xfrm>
           <a:prstGeom prst="rect">
             <a:avLst/>
           </a:prstGeom>
           <a:solidFill>
-            <a:srgbClr val="1D8A70"/>
+            <a:srgbClr val="1E8A4A"/>
           </a:solidFill>
           <a:ln>
             <a:noFill/>
@@ -3785,8 +3785,8 @@
         </p:nvSpPr>
         <p:spPr>
           <a:xfrm>
-            <a:off x="685800" y="2615184"/>
-            <a:ext cx="4526280" cy="548640"/>
+            <a:off x="685800" y="2112264"/>
+            <a:ext cx="5166360" cy="502920"/>
           </a:xfrm>
           <a:prstGeom prst="rect">
             <a:avLst/>
@@ -3801,7 +3801,7 @@
           <a:p>
             <a:pPr algn="l">
               <a:lnSpc>
-                <a:spcPct val="105000"/>
+                <a:spcPct val="100000"/>
               </a:lnSpc>
             </a:pPr>
             <a:r>
@@ -3817,7 +3817,7 @@
           <a:p>
             <a:pPr algn="l">
               <a:lnSpc>
-                <a:spcPct val="105000"/>
+                <a:spcPct val="100000"/>
               </a:lnSpc>
             </a:pPr>
             <a:r>
@@ -3834,69 +3834,14 @@
       </p:sp>
       <p:sp>
         <p:nvSpPr>
-          <p:cNvPr id="11" name="Rounded Rectangle 10"/>
-          <p:cNvSpPr/>
-          <p:nvPr/>
-        </p:nvSpPr>
-        <p:spPr>
-          <a:xfrm>
-            <a:off x="5257800" y="2615184"/>
-            <a:ext cx="594360" cy="292608"/>
-          </a:xfrm>
-          <a:prstGeom prst="roundRect">
-            <a:avLst>
-              <a:gd name="adj" fmla="val 50000"/>
-            </a:avLst>
-          </a:prstGeom>
-          <a:solidFill>
-            <a:srgbClr val="E3F3EE"/>
-          </a:solidFill>
-          <a:ln>
-            <a:noFill/>
-          </a:ln>
-          <a:effectLst/>
-        </p:spPr>
-        <p:style>
-          <a:lnRef idx="1">
-            <a:schemeClr val="accent1"/>
-          </a:lnRef>
-          <a:fillRef idx="3">
-            <a:schemeClr val="accent1"/>
-          </a:fillRef>
-          <a:effectRef idx="2">
-            <a:schemeClr val="accent1"/>
-          </a:effectRef>
-          <a:fontRef idx="minor">
-            <a:schemeClr val="lt1"/>
-          </a:fontRef>
-        </p:style>
-        <p:txBody>
-          <a:bodyPr rtlCol="0" anchor="ctr" wrap="none" lIns="25400" rIns="25400" tIns="12700" bIns="12700"/>
-          <a:lstStyle/>
-          <a:p>
-            <a:pPr algn="ctr"/>
-            <a:r>
-              <a:rPr sz="1100" b="1">
-                <a:solidFill>
-                  <a:srgbClr val="1D8A70"/>
-                </a:solidFill>
-                <a:latin typeface="Yu Gothic"/>
-              </a:rPr>
-              <a:t>[9]</a:t>
-            </a:r>
-          </a:p>
-        </p:txBody>
-      </p:sp>
-      <p:sp>
-        <p:nvSpPr>
-          <p:cNvPr id="12" name="TextBox 11"/>
+          <p:cNvPr id="11" name="TextBox 10"/>
           <p:cNvSpPr txBox="1"/>
           <p:nvPr/>
         </p:nvSpPr>
         <p:spPr>
           <a:xfrm>
-            <a:off x="685800" y="3154680"/>
-            <a:ext cx="5166360" cy="1005840"/>
+            <a:off x="685800" y="2587752"/>
+            <a:ext cx="5166360" cy="822960"/>
           </a:xfrm>
           <a:prstGeom prst="rect">
             <a:avLst/>
@@ -3911,7 +3856,7 @@
           <a:p>
             <a:pPr algn="l">
               <a:lnSpc>
-                <a:spcPct val="120000"/>
+                <a:spcPct val="115000"/>
               </a:lnSpc>
             </a:pPr>
             <a:r>
@@ -3927,7 +3872,7 @@
           <a:p>
             <a:pPr algn="l">
               <a:lnSpc>
-                <a:spcPct val="120000"/>
+                <a:spcPct val="115000"/>
               </a:lnSpc>
             </a:pPr>
             <a:r>
@@ -3943,7 +3888,7 @@
           <a:p>
             <a:pPr algn="l">
               <a:lnSpc>
-                <a:spcPct val="120000"/>
+                <a:spcPct val="115000"/>
               </a:lnSpc>
             </a:pPr>
             <a:r>
@@ -3954,6 +3899,45 @@
                 <a:latin typeface="Yu Gothic"/>
               </a:rPr>
               <a:t>意図しない作成を抑制する。</a:t>
+            </a:r>
+          </a:p>
+        </p:txBody>
+      </p:sp>
+      <p:sp>
+        <p:nvSpPr>
+          <p:cNvPr id="12" name="TextBox 11"/>
+          <p:cNvSpPr txBox="1"/>
+          <p:nvPr/>
+        </p:nvSpPr>
+        <p:spPr>
+          <a:xfrm>
+            <a:off x="685800" y="3639312"/>
+            <a:ext cx="5166360" cy="256032"/>
+          </a:xfrm>
+          <a:prstGeom prst="rect">
+            <a:avLst/>
+          </a:prstGeom>
+          <a:noFill/>
+        </p:spPr>
+        <p:txBody>
+          <a:bodyPr wrap="square" anchor="t" lIns="0" rIns="0" tIns="0" bIns="0">
+            <a:spAutoFit/>
+          </a:bodyPr>
+          <a:lstStyle/>
+          <a:p>
+            <a:pPr algn="l">
+              <a:lnSpc>
+                <a:spcPct val="100000"/>
+              </a:lnSpc>
+            </a:pPr>
+            <a:r>
+              <a:rPr sz="950" b="0" i="1">
+                <a:solidFill>
+                  <a:srgbClr val="6E6E6E"/>
+                </a:solidFill>
+                <a:latin typeface="Yu Gothic"/>
+              </a:rPr>
+              <a:t>根拠：「Environment routing」（Microsoft Learn）</a:t>
             </a:r>
           </a:p>
         </p:txBody>
@@ -3966,8 +3950,8 @@
         </p:nvSpPr>
         <p:spPr>
           <a:xfrm>
-            <a:off x="6172200" y="2468880"/>
-            <a:ext cx="5532120" cy="1828800"/>
+            <a:off x="6172200" y="1965960"/>
+            <a:ext cx="5532120" cy="1965960"/>
           </a:xfrm>
           <a:prstGeom prst="rect">
             <a:avLst/>
@@ -4012,14 +3996,14 @@
         </p:nvSpPr>
         <p:spPr>
           <a:xfrm>
-            <a:off x="6172200" y="2468880"/>
+            <a:off x="6172200" y="1965960"/>
             <a:ext cx="5532120" cy="73152"/>
           </a:xfrm>
           <a:prstGeom prst="rect">
             <a:avLst/>
           </a:prstGeom>
           <a:solidFill>
-            <a:srgbClr val="1D8A70"/>
+            <a:srgbClr val="1E8A4A"/>
           </a:solidFill>
           <a:ln>
             <a:noFill/>
@@ -4056,8 +4040,8 @@
         </p:nvSpPr>
         <p:spPr>
           <a:xfrm>
-            <a:off x="6355080" y="2615184"/>
-            <a:ext cx="4526280" cy="548640"/>
+            <a:off x="6355080" y="2112264"/>
+            <a:ext cx="5166360" cy="502920"/>
           </a:xfrm>
           <a:prstGeom prst="rect">
             <a:avLst/>
@@ -4072,7 +4056,7 @@
           <a:p>
             <a:pPr algn="l">
               <a:lnSpc>
-                <a:spcPct val="105000"/>
+                <a:spcPct val="100000"/>
               </a:lnSpc>
             </a:pPr>
             <a:r>
@@ -4089,69 +4073,14 @@
       </p:sp>
       <p:sp>
         <p:nvSpPr>
-          <p:cNvPr id="16" name="Rounded Rectangle 15"/>
-          <p:cNvSpPr/>
-          <p:nvPr/>
-        </p:nvSpPr>
-        <p:spPr>
-          <a:xfrm>
-            <a:off x="10927080" y="2615184"/>
-            <a:ext cx="594360" cy="292608"/>
-          </a:xfrm>
-          <a:prstGeom prst="roundRect">
-            <a:avLst>
-              <a:gd name="adj" fmla="val 50000"/>
-            </a:avLst>
-          </a:prstGeom>
-          <a:solidFill>
-            <a:srgbClr val="E3F3EE"/>
-          </a:solidFill>
-          <a:ln>
-            <a:noFill/>
-          </a:ln>
-          <a:effectLst/>
-        </p:spPr>
-        <p:style>
-          <a:lnRef idx="1">
-            <a:schemeClr val="accent1"/>
-          </a:lnRef>
-          <a:fillRef idx="3">
-            <a:schemeClr val="accent1"/>
-          </a:fillRef>
-          <a:effectRef idx="2">
-            <a:schemeClr val="accent1"/>
-          </a:effectRef>
-          <a:fontRef idx="minor">
-            <a:schemeClr val="lt1"/>
-          </a:fontRef>
-        </p:style>
-        <p:txBody>
-          <a:bodyPr rtlCol="0" anchor="ctr" wrap="none" lIns="25400" rIns="25400" tIns="12700" bIns="12700"/>
-          <a:lstStyle/>
-          <a:p>
-            <a:pPr algn="ctr"/>
-            <a:r>
-              <a:rPr sz="1100" b="1">
-                <a:solidFill>
-                  <a:srgbClr val="1D8A70"/>
-                </a:solidFill>
-                <a:latin typeface="Yu Gothic"/>
-              </a:rPr>
-              <a:t>[4][7]</a:t>
-            </a:r>
-          </a:p>
-        </p:txBody>
-      </p:sp>
-      <p:sp>
-        <p:nvSpPr>
-          <p:cNvPr id="17" name="TextBox 16"/>
+          <p:cNvPr id="16" name="TextBox 15"/>
           <p:cNvSpPr txBox="1"/>
           <p:nvPr/>
         </p:nvSpPr>
         <p:spPr>
           <a:xfrm>
-            <a:off x="6355080" y="3154680"/>
-            <a:ext cx="5166360" cy="1005840"/>
+            <a:off x="6355080" y="2587752"/>
+            <a:ext cx="5166360" cy="822960"/>
           </a:xfrm>
           <a:prstGeom prst="rect">
             <a:avLst/>
@@ -4166,7 +4095,7 @@
           <a:p>
             <a:pPr algn="l">
               <a:lnSpc>
-                <a:spcPct val="120000"/>
+                <a:spcPct val="115000"/>
               </a:lnSpc>
             </a:pPr>
             <a:r>
@@ -4182,7 +4111,7 @@
           <a:p>
             <a:pPr algn="l">
               <a:lnSpc>
-                <a:spcPct val="120000"/>
+                <a:spcPct val="115000"/>
               </a:lnSpc>
             </a:pPr>
             <a:r>
@@ -4193,6 +4122,45 @@
                 <a:latin typeface="Yu Gothic"/>
               </a:rPr>
               <a:t>既定を「ブロック済み」にする方式がMS推奨のベストプラクティス。</a:t>
+            </a:r>
+          </a:p>
+        </p:txBody>
+      </p:sp>
+      <p:sp>
+        <p:nvSpPr>
+          <p:cNvPr id="17" name="TextBox 16"/>
+          <p:cNvSpPr txBox="1"/>
+          <p:nvPr/>
+        </p:nvSpPr>
+        <p:spPr>
+          <a:xfrm>
+            <a:off x="6355080" y="3639312"/>
+            <a:ext cx="5166360" cy="256032"/>
+          </a:xfrm>
+          <a:prstGeom prst="rect">
+            <a:avLst/>
+          </a:prstGeom>
+          <a:noFill/>
+        </p:spPr>
+        <p:txBody>
+          <a:bodyPr wrap="square" anchor="t" lIns="0" rIns="0" tIns="0" bIns="0">
+            <a:spAutoFit/>
+          </a:bodyPr>
+          <a:lstStyle/>
+          <a:p>
+            <a:pPr algn="l">
+              <a:lnSpc>
+                <a:spcPct val="100000"/>
+              </a:lnSpc>
+            </a:pPr>
+            <a:r>
+              <a:rPr sz="950" b="0" i="1">
+                <a:solidFill>
+                  <a:srgbClr val="6E6E6E"/>
+                </a:solidFill>
+                <a:latin typeface="Yu Gothic"/>
+              </a:rPr>
+              <a:t>根拠：「Secure the default environment」（Microsoft Learn）</a:t>
             </a:r>
           </a:p>
         </p:txBody>
@@ -4205,8 +4173,8 @@
         </p:nvSpPr>
         <p:spPr>
           <a:xfrm>
-            <a:off x="502920" y="4434840"/>
-            <a:ext cx="5532120" cy="1828800"/>
+            <a:off x="502920" y="4069080"/>
+            <a:ext cx="5532120" cy="1965960"/>
           </a:xfrm>
           <a:prstGeom prst="rect">
             <a:avLst/>
@@ -4251,7 +4219,7 @@
         </p:nvSpPr>
         <p:spPr>
           <a:xfrm>
-            <a:off x="502920" y="4434840"/>
+            <a:off x="502920" y="4069080"/>
             <a:ext cx="5532120" cy="73152"/>
           </a:xfrm>
           <a:prstGeom prst="rect">
@@ -4295,8 +4263,8 @@
         </p:nvSpPr>
         <p:spPr>
           <a:xfrm>
-            <a:off x="685800" y="4581144"/>
-            <a:ext cx="4526280" cy="548640"/>
+            <a:off x="685800" y="4215384"/>
+            <a:ext cx="5166360" cy="502920"/>
           </a:xfrm>
           <a:prstGeom prst="rect">
             <a:avLst/>
@@ -4311,7 +4279,7 @@
           <a:p>
             <a:pPr algn="l">
               <a:lnSpc>
-                <a:spcPct val="105000"/>
+                <a:spcPct val="100000"/>
               </a:lnSpc>
             </a:pPr>
             <a:r>
@@ -4327,7 +4295,7 @@
           <a:p>
             <a:pPr algn="l">
               <a:lnSpc>
-                <a:spcPct val="105000"/>
+                <a:spcPct val="100000"/>
               </a:lnSpc>
             </a:pPr>
             <a:r>
@@ -4344,69 +4312,14 @@
       </p:sp>
       <p:sp>
         <p:nvSpPr>
-          <p:cNvPr id="21" name="Rounded Rectangle 20"/>
-          <p:cNvSpPr/>
-          <p:nvPr/>
-        </p:nvSpPr>
-        <p:spPr>
-          <a:xfrm>
-            <a:off x="5257800" y="4581144"/>
-            <a:ext cx="594360" cy="292608"/>
-          </a:xfrm>
-          <a:prstGeom prst="roundRect">
-            <a:avLst>
-              <a:gd name="adj" fmla="val 50000"/>
-            </a:avLst>
-          </a:prstGeom>
-          <a:solidFill>
-            <a:srgbClr val="E9EFF9"/>
-          </a:solidFill>
-          <a:ln>
-            <a:noFill/>
-          </a:ln>
-          <a:effectLst/>
-        </p:spPr>
-        <p:style>
-          <a:lnRef idx="1">
-            <a:schemeClr val="accent1"/>
-          </a:lnRef>
-          <a:fillRef idx="3">
-            <a:schemeClr val="accent1"/>
-          </a:fillRef>
-          <a:effectRef idx="2">
-            <a:schemeClr val="accent1"/>
-          </a:effectRef>
-          <a:fontRef idx="minor">
-            <a:schemeClr val="lt1"/>
-          </a:fontRef>
-        </p:style>
-        <p:txBody>
-          <a:bodyPr rtlCol="0" anchor="ctr" wrap="none" lIns="25400" rIns="25400" tIns="12700" bIns="12700"/>
-          <a:lstStyle/>
-          <a:p>
-            <a:pPr algn="ctr"/>
-            <a:r>
-              <a:rPr sz="1100" b="1">
-                <a:solidFill>
-                  <a:srgbClr val="2E5AAC"/>
-                </a:solidFill>
-                <a:latin typeface="Yu Gothic"/>
-              </a:rPr>
-              <a:t>[10]</a:t>
-            </a:r>
-          </a:p>
-        </p:txBody>
-      </p:sp>
-      <p:sp>
-        <p:nvSpPr>
-          <p:cNvPr id="22" name="TextBox 21"/>
+          <p:cNvPr id="21" name="TextBox 20"/>
           <p:cNvSpPr txBox="1"/>
           <p:nvPr/>
         </p:nvSpPr>
         <p:spPr>
           <a:xfrm>
-            <a:off x="685800" y="5120640"/>
-            <a:ext cx="5166360" cy="1005840"/>
+            <a:off x="685800" y="4690872"/>
+            <a:ext cx="5166360" cy="822960"/>
           </a:xfrm>
           <a:prstGeom prst="rect">
             <a:avLst/>
@@ -4421,7 +4334,7 @@
           <a:p>
             <a:pPr algn="l">
               <a:lnSpc>
-                <a:spcPct val="120000"/>
+                <a:spcPct val="115000"/>
               </a:lnSpc>
             </a:pPr>
             <a:r>
@@ -4437,7 +4350,7 @@
           <a:p>
             <a:pPr algn="l">
               <a:lnSpc>
-                <a:spcPct val="120000"/>
+                <a:spcPct val="115000"/>
               </a:lnSpc>
             </a:pPr>
             <a:r>
@@ -4448,6 +4361,45 @@
                 <a:latin typeface="Yu Gothic"/>
               </a:rPr>
               <a:t>一括適用するガバナンス機能。適用範囲は個別環境ごとに要確認。</a:t>
+            </a:r>
+          </a:p>
+        </p:txBody>
+      </p:sp>
+      <p:sp>
+        <p:nvSpPr>
+          <p:cNvPr id="22" name="TextBox 21"/>
+          <p:cNvSpPr txBox="1"/>
+          <p:nvPr/>
+        </p:nvSpPr>
+        <p:spPr>
+          <a:xfrm>
+            <a:off x="685800" y="5742432"/>
+            <a:ext cx="5166360" cy="256032"/>
+          </a:xfrm>
+          <a:prstGeom prst="rect">
+            <a:avLst/>
+          </a:prstGeom>
+          <a:noFill/>
+        </p:spPr>
+        <p:txBody>
+          <a:bodyPr wrap="square" anchor="t" lIns="0" rIns="0" tIns="0" bIns="0">
+            <a:spAutoFit/>
+          </a:bodyPr>
+          <a:lstStyle/>
+          <a:p>
+            <a:pPr algn="l">
+              <a:lnSpc>
+                <a:spcPct val="100000"/>
+              </a:lnSpc>
+            </a:pPr>
+            <a:r>
+              <a:rPr sz="950" b="0" i="1">
+                <a:solidFill>
+                  <a:srgbClr val="6E6E6E"/>
+                </a:solidFill>
+                <a:latin typeface="Yu Gothic"/>
+              </a:rPr>
+              <a:t>根拠：「Environment groups」（Microsoft Learn）</a:t>
             </a:r>
           </a:p>
         </p:txBody>
@@ -4460,8 +4412,8 @@
         </p:nvSpPr>
         <p:spPr>
           <a:xfrm>
-            <a:off x="6172200" y="4434840"/>
-            <a:ext cx="5532120" cy="1828800"/>
+            <a:off x="6172200" y="4069080"/>
+            <a:ext cx="5532120" cy="1965960"/>
           </a:xfrm>
           <a:prstGeom prst="rect">
             <a:avLst/>
@@ -4506,7 +4458,7 @@
         </p:nvSpPr>
         <p:spPr>
           <a:xfrm>
-            <a:off x="6172200" y="4434840"/>
+            <a:off x="6172200" y="4069080"/>
             <a:ext cx="5532120" cy="73152"/>
           </a:xfrm>
           <a:prstGeom prst="rect">
@@ -4550,8 +4502,8 @@
         </p:nvSpPr>
         <p:spPr>
           <a:xfrm>
-            <a:off x="6355080" y="4581144"/>
-            <a:ext cx="4526280" cy="548640"/>
+            <a:off x="6355080" y="4215384"/>
+            <a:ext cx="5166360" cy="502920"/>
           </a:xfrm>
           <a:prstGeom prst="rect">
             <a:avLst/>
@@ -4566,7 +4518,7 @@
           <a:p>
             <a:pPr algn="l">
               <a:lnSpc>
-                <a:spcPct val="105000"/>
+                <a:spcPct val="100000"/>
               </a:lnSpc>
             </a:pPr>
             <a:r>
@@ -4583,69 +4535,14 @@
       </p:sp>
       <p:sp>
         <p:nvSpPr>
-          <p:cNvPr id="26" name="Rounded Rectangle 25"/>
-          <p:cNvSpPr/>
-          <p:nvPr/>
-        </p:nvSpPr>
-        <p:spPr>
-          <a:xfrm>
-            <a:off x="10927080" y="4581144"/>
-            <a:ext cx="594360" cy="292608"/>
-          </a:xfrm>
-          <a:prstGeom prst="roundRect">
-            <a:avLst>
-              <a:gd name="adj" fmla="val 50000"/>
-            </a:avLst>
-          </a:prstGeom>
-          <a:solidFill>
-            <a:srgbClr val="E9EFF9"/>
-          </a:solidFill>
-          <a:ln>
-            <a:noFill/>
-          </a:ln>
-          <a:effectLst/>
-        </p:spPr>
-        <p:style>
-          <a:lnRef idx="1">
-            <a:schemeClr val="accent1"/>
-          </a:lnRef>
-          <a:fillRef idx="3">
-            <a:schemeClr val="accent1"/>
-          </a:fillRef>
-          <a:effectRef idx="2">
-            <a:schemeClr val="accent1"/>
-          </a:effectRef>
-          <a:fontRef idx="minor">
-            <a:schemeClr val="lt1"/>
-          </a:fontRef>
-        </p:style>
-        <p:txBody>
-          <a:bodyPr rtlCol="0" anchor="ctr" wrap="none" lIns="25400" rIns="25400" tIns="12700" bIns="12700"/>
-          <a:lstStyle/>
-          <a:p>
-            <a:pPr algn="ctr"/>
-            <a:r>
-              <a:rPr sz="1100" b="1">
-                <a:solidFill>
-                  <a:srgbClr val="2E5AAC"/>
-                </a:solidFill>
-                <a:latin typeface="Yu Gothic"/>
-              </a:rPr>
-              <a:t>[8]</a:t>
-            </a:r>
-          </a:p>
-        </p:txBody>
-      </p:sp>
-      <p:sp>
-        <p:nvSpPr>
-          <p:cNvPr id="27" name="TextBox 26"/>
+          <p:cNvPr id="26" name="TextBox 25"/>
           <p:cNvSpPr txBox="1"/>
           <p:nvPr/>
         </p:nvSpPr>
         <p:spPr>
           <a:xfrm>
-            <a:off x="6355080" y="5120640"/>
-            <a:ext cx="5166360" cy="1005840"/>
+            <a:off x="6355080" y="4690872"/>
+            <a:ext cx="5166360" cy="822960"/>
           </a:xfrm>
           <a:prstGeom prst="rect">
             <a:avLst/>
@@ -4660,7 +4557,7 @@
           <a:p>
             <a:pPr algn="l">
               <a:lnSpc>
-                <a:spcPct val="120000"/>
+                <a:spcPct val="115000"/>
               </a:lnSpc>
             </a:pPr>
             <a:r>
@@ -4676,7 +4573,7 @@
           <a:p>
             <a:pPr algn="l">
               <a:lnSpc>
-                <a:spcPct val="120000"/>
+                <a:spcPct val="115000"/>
               </a:lnSpc>
             </a:pPr>
             <a:r>
@@ -4687,6 +4584,45 @@
                 <a:latin typeface="Yu Gothic"/>
               </a:rPr>
               <a:t>（小規模な）マネージド環境へ移行し、Premium対象を限定する。</a:t>
+            </a:r>
+          </a:p>
+        </p:txBody>
+      </p:sp>
+      <p:sp>
+        <p:nvSpPr>
+          <p:cNvPr id="27" name="TextBox 26"/>
+          <p:cNvSpPr txBox="1"/>
+          <p:nvPr/>
+        </p:nvSpPr>
+        <p:spPr>
+          <a:xfrm>
+            <a:off x="6355080" y="5742432"/>
+            <a:ext cx="5166360" cy="256032"/>
+          </a:xfrm>
+          <a:prstGeom prst="rect">
+            <a:avLst/>
+          </a:prstGeom>
+          <a:noFill/>
+        </p:spPr>
+        <p:txBody>
+          <a:bodyPr wrap="square" anchor="t" lIns="0" rIns="0" tIns="0" bIns="0">
+            <a:spAutoFit/>
+          </a:bodyPr>
+          <a:lstStyle/>
+          <a:p>
+            <a:pPr algn="l">
+              <a:lnSpc>
+                <a:spcPct val="100000"/>
+              </a:lnSpc>
+            </a:pPr>
+            <a:r>
+              <a:rPr sz="950" b="0" i="1">
+                <a:solidFill>
+                  <a:srgbClr val="6E6E6E"/>
+                </a:solidFill>
+                <a:latin typeface="Yu Gothic"/>
+              </a:rPr>
+              <a:t>根拠：「Manage and govern the default environment」（Microsoft Learn）</a:t>
             </a:r>
           </a:p>
         </p:txBody>
@@ -4970,7 +4906,7 @@
         <p:spPr>
           <a:xfrm>
             <a:off x="502920" y="1371600"/>
-            <a:ext cx="11201400" cy="1097280"/>
+            <a:ext cx="11201400" cy="1115568"/>
           </a:xfrm>
           <a:prstGeom prst="rect">
             <a:avLst/>
@@ -5014,13 +4950,13 @@
         <p:spPr>
           <a:xfrm>
             <a:off x="502920" y="1371600"/>
-            <a:ext cx="91440" cy="1097280"/>
+            <a:ext cx="91440" cy="1115568"/>
           </a:xfrm>
           <a:prstGeom prst="rect">
             <a:avLst/>
           </a:prstGeom>
           <a:solidFill>
-            <a:srgbClr val="C45911"/>
+            <a:srgbClr val="B86E00"/>
           </a:solidFill>
           <a:ln>
             <a:noFill/>
@@ -5057,8 +4993,8 @@
         </p:nvSpPr>
         <p:spPr>
           <a:xfrm>
-            <a:off x="777240" y="1481328"/>
-            <a:ext cx="10698480" cy="320040"/>
+            <a:off x="777240" y="1463040"/>
+            <a:ext cx="10698480" cy="292608"/>
           </a:xfrm>
           <a:prstGeom prst="rect">
             <a:avLst/>
@@ -5096,8 +5032,8 @@
         </p:nvSpPr>
         <p:spPr>
           <a:xfrm>
-            <a:off x="777240" y="1810512"/>
-            <a:ext cx="10698480" cy="411480"/>
+            <a:off x="777240" y="1773936"/>
+            <a:ext cx="10698480" cy="384048"/>
           </a:xfrm>
           <a:prstGeom prst="rect">
             <a:avLst/>
@@ -5112,33 +5048,17 @@
           <a:p>
             <a:pPr algn="l">
               <a:lnSpc>
-                <a:spcPct val="115000"/>
-              </a:lnSpc>
-            </a:pPr>
-            <a:r>
-              <a:rPr sz="1150" b="0" i="0">
+                <a:spcPct val="110000"/>
+              </a:lnSpc>
+            </a:pPr>
+            <a:r>
+              <a:rPr sz="1100" b="0" i="0">
                 <a:solidFill>
                   <a:srgbClr val="262626"/>
                 </a:solidFill>
                 <a:latin typeface="Yu Gothic"/>
               </a:rPr>
-              <a:t>2026年3月より管理者向け、6月よりエンドユーザー向けにライセンス未充足の通知が順次導入されており、</a:t>
-            </a:r>
-          </a:p>
-          <a:p>
-            <a:pPr algn="l">
-              <a:lnSpc>
-                <a:spcPct val="115000"/>
-              </a:lnSpc>
-            </a:pPr>
-            <a:r>
-              <a:rPr sz="1150" b="0" i="0">
-                <a:solidFill>
-                  <a:srgbClr val="262626"/>
-                </a:solidFill>
-                <a:latin typeface="Yu Gothic"/>
-              </a:rPr>
-              <a:t>放置は将来的な利用制限リスクとなる。</a:t>
+              <a:t>2026年3月より管理者向け、6月よりエンドユーザー向けにライセンス未充足の通知が順次導入されており、放置は将来的な利用制限リスクとなる。</a:t>
             </a:r>
           </a:p>
         </p:txBody>
@@ -5151,7 +5071,7 @@
         </p:nvSpPr>
         <p:spPr>
           <a:xfrm>
-            <a:off x="777240" y="2221992"/>
+            <a:off x="777240" y="2167128"/>
             <a:ext cx="10698480" cy="274320"/>
           </a:xfrm>
           <a:prstGeom prst="rect">
@@ -5177,7 +5097,7 @@
                 </a:solidFill>
                 <a:latin typeface="Yu Gothic"/>
               </a:rPr>
-              <a:t>出典：[3] Licensing（Managed Environments）</a:t>
+              <a:t>根拠：Microsoft公式ドキュメント「Licensing（Managed Environments）」の説明があり、において、通知の段階的導入スケジュールが明記されている。</a:t>
             </a:r>
           </a:p>
         </p:txBody>
@@ -5191,7 +5111,7 @@
         <p:spPr>
           <a:xfrm>
             <a:off x="502920" y="2606040"/>
-            <a:ext cx="11201400" cy="1097280"/>
+            <a:ext cx="11201400" cy="1115568"/>
           </a:xfrm>
           <a:prstGeom prst="rect">
             <a:avLst/>
@@ -5235,13 +5155,13 @@
         <p:spPr>
           <a:xfrm>
             <a:off x="502920" y="2606040"/>
-            <a:ext cx="91440" cy="1097280"/>
+            <a:ext cx="91440" cy="1115568"/>
           </a:xfrm>
           <a:prstGeom prst="rect">
             <a:avLst/>
           </a:prstGeom>
           <a:solidFill>
-            <a:srgbClr val="C45911"/>
+            <a:srgbClr val="B86E00"/>
           </a:solidFill>
           <a:ln>
             <a:noFill/>
@@ -5278,8 +5198,8 @@
         </p:nvSpPr>
         <p:spPr>
           <a:xfrm>
-            <a:off x="777240" y="2715768"/>
-            <a:ext cx="10698480" cy="320040"/>
+            <a:off x="777240" y="2697480"/>
+            <a:ext cx="10698480" cy="292608"/>
           </a:xfrm>
           <a:prstGeom prst="rect">
             <a:avLst/>
@@ -5317,8 +5237,8 @@
         </p:nvSpPr>
         <p:spPr>
           <a:xfrm>
-            <a:off x="777240" y="3044952"/>
-            <a:ext cx="10698480" cy="411480"/>
+            <a:off x="777240" y="3008376"/>
+            <a:ext cx="10698480" cy="384048"/>
           </a:xfrm>
           <a:prstGeom prst="rect">
             <a:avLst/>
@@ -5333,33 +5253,17 @@
           <a:p>
             <a:pPr algn="l">
               <a:lnSpc>
-                <a:spcPct val="115000"/>
-              </a:lnSpc>
-            </a:pPr>
-            <a:r>
-              <a:rPr sz="1150" b="0" i="0">
+                <a:spcPct val="110000"/>
+              </a:lnSpc>
+            </a:pPr>
+            <a:r>
+              <a:rPr sz="1100" b="0" i="0">
                 <a:solidFill>
                   <a:srgbClr val="262626"/>
                 </a:solidFill>
                 <a:latin typeface="Yu Gothic"/>
               </a:rPr>
-              <a:t>一部の標準コネクタはDLPポリシーで「ブロック不可」に分類されており、完全な利用制御はできない</a:t>
-            </a:r>
-          </a:p>
-          <a:p>
-            <a:pPr algn="l">
-              <a:lnSpc>
-                <a:spcPct val="115000"/>
-              </a:lnSpc>
-            </a:pPr>
-            <a:r>
-              <a:rPr sz="1150" b="0" i="0">
-                <a:solidFill>
-                  <a:srgbClr val="262626"/>
-                </a:solidFill>
-                <a:latin typeface="Yu Gothic"/>
-              </a:rPr>
-              <a:t>点を事前に理解しておく必要がある。</a:t>
+              <a:t>一部の標準コネクタはDLPポリシーで「ブロック不可」に分類されており、完全な利用制御はできない点を事前に理解しておく必要がある。</a:t>
             </a:r>
           </a:p>
         </p:txBody>
@@ -5372,7 +5276,7 @@
         </p:nvSpPr>
         <p:spPr>
           <a:xfrm>
-            <a:off x="777240" y="3456432"/>
+            <a:off x="777240" y="3401568"/>
             <a:ext cx="10698480" cy="274320"/>
           </a:xfrm>
           <a:prstGeom prst="rect">
@@ -5398,7 +5302,7 @@
                 </a:solidFill>
                 <a:latin typeface="Yu Gothic"/>
               </a:rPr>
-              <a:t>出典：[8] Manage and govern the default environment</a:t>
+              <a:t>根拠：Microsoft公式ドキュメント「Manage and govern the default environment」の説明があり、において、一部コネクタがブロック不可である旨が明記されている。</a:t>
             </a:r>
           </a:p>
         </p:txBody>
@@ -5412,7 +5316,7 @@
         <p:spPr>
           <a:xfrm>
             <a:off x="502920" y="3840480"/>
-            <a:ext cx="11201400" cy="1097280"/>
+            <a:ext cx="11201400" cy="1115568"/>
           </a:xfrm>
           <a:prstGeom prst="rect">
             <a:avLst/>
@@ -5456,13 +5360,13 @@
         <p:spPr>
           <a:xfrm>
             <a:off x="502920" y="3840480"/>
-            <a:ext cx="91440" cy="1097280"/>
+            <a:ext cx="91440" cy="1115568"/>
           </a:xfrm>
           <a:prstGeom prst="rect">
             <a:avLst/>
           </a:prstGeom>
           <a:solidFill>
-            <a:srgbClr val="C45911"/>
+            <a:srgbClr val="B86E00"/>
           </a:solidFill>
           <a:ln>
             <a:noFill/>
@@ -5499,8 +5403,8 @@
         </p:nvSpPr>
         <p:spPr>
           <a:xfrm>
-            <a:off x="777240" y="3950208"/>
-            <a:ext cx="10698480" cy="320040"/>
+            <a:off x="777240" y="3931920"/>
+            <a:ext cx="10698480" cy="292608"/>
           </a:xfrm>
           <a:prstGeom prst="rect">
             <a:avLst/>
@@ -5538,8 +5442,8 @@
         </p:nvSpPr>
         <p:spPr>
           <a:xfrm>
-            <a:off x="777240" y="4279392"/>
-            <a:ext cx="10698480" cy="411480"/>
+            <a:off x="777240" y="4242816"/>
+            <a:ext cx="10698480" cy="384048"/>
           </a:xfrm>
           <a:prstGeom prst="rect">
             <a:avLst/>
@@ -5554,33 +5458,17 @@
           <a:p>
             <a:pPr algn="l">
               <a:lnSpc>
-                <a:spcPct val="115000"/>
-              </a:lnSpc>
-            </a:pPr>
-            <a:r>
-              <a:rPr sz="1150" b="0" i="0">
+                <a:spcPct val="110000"/>
+              </a:lnSpc>
+            </a:pPr>
+            <a:r>
+              <a:rPr sz="1100" b="0" i="0">
                 <a:solidFill>
                   <a:srgbClr val="262626"/>
                 </a:solidFill>
                 <a:latin typeface="Yu Gothic"/>
               </a:rPr>
-              <a:t>DLPポリシーの厳格化・環境ルーティングの導入は既存の正当な業務利用者の体験に影響し得るため、</a:t>
-            </a:r>
-          </a:p>
-          <a:p>
-            <a:pPr algn="l">
-              <a:lnSpc>
-                <a:spcPct val="115000"/>
-              </a:lnSpc>
-            </a:pPr>
-            <a:r>
-              <a:rPr sz="1150" b="0" i="0">
-                <a:solidFill>
-                  <a:srgbClr val="262626"/>
-                </a:solidFill>
-                <a:latin typeface="Yu Gothic"/>
-              </a:rPr>
-              <a:t>事前告知とエラーメッセージのカスタマイズ（Set-PowerAppDlpErrorSettings）で移行摩擦を軽減する。</a:t>
+              <a:t>DLPポリシーの厳格化・環境ルーティングの導入は既存の正当な業務利用者の体験に影響し得るため、事前告知とエラーメッセージのカスタマイズで移行摩擦を軽減する。</a:t>
             </a:r>
           </a:p>
         </p:txBody>
@@ -5593,7 +5481,7 @@
         </p:nvSpPr>
         <p:spPr>
           <a:xfrm>
-            <a:off x="777240" y="4690872"/>
+            <a:off x="777240" y="4636008"/>
             <a:ext cx="10698480" cy="274320"/>
           </a:xfrm>
           <a:prstGeom prst="rect">
@@ -5619,7 +5507,7 @@
                 </a:solidFill>
                 <a:latin typeface="Yu Gothic"/>
               </a:rPr>
-              <a:t>出典：[7] Secure the default environment</a:t>
+              <a:t>根拠：Microsoft公式ドキュメント「Secure the default environment」の説明があり、において、エラーメッセージのカスタマイズ手段（PowerShellコマンドレット）が案内されている。</a:t>
             </a:r>
           </a:p>
         </p:txBody>
@@ -5633,7 +5521,7 @@
         <p:spPr>
           <a:xfrm>
             <a:off x="502920" y="5074920"/>
-            <a:ext cx="11201400" cy="1097280"/>
+            <a:ext cx="11201400" cy="1115568"/>
           </a:xfrm>
           <a:prstGeom prst="rect">
             <a:avLst/>
@@ -5677,13 +5565,13 @@
         <p:spPr>
           <a:xfrm>
             <a:off x="502920" y="5074920"/>
-            <a:ext cx="91440" cy="1097280"/>
+            <a:ext cx="91440" cy="1115568"/>
           </a:xfrm>
           <a:prstGeom prst="rect">
             <a:avLst/>
           </a:prstGeom>
           <a:solidFill>
-            <a:srgbClr val="C45911"/>
+            <a:srgbClr val="B86E00"/>
           </a:solidFill>
           <a:ln>
             <a:noFill/>
@@ -5720,8 +5608,8 @@
         </p:nvSpPr>
         <p:spPr>
           <a:xfrm>
-            <a:off x="777240" y="5184648"/>
-            <a:ext cx="10698480" cy="320040"/>
+            <a:off x="777240" y="5166360"/>
+            <a:ext cx="10698480" cy="292608"/>
           </a:xfrm>
           <a:prstGeom prst="rect">
             <a:avLst/>
@@ -5759,8 +5647,8 @@
         </p:nvSpPr>
         <p:spPr>
           <a:xfrm>
-            <a:off x="777240" y="5513832"/>
-            <a:ext cx="10698480" cy="411480"/>
+            <a:off x="777240" y="5477256"/>
+            <a:ext cx="10698480" cy="384048"/>
           </a:xfrm>
           <a:prstGeom prst="rect">
             <a:avLst/>
@@ -5775,33 +5663,17 @@
           <a:p>
             <a:pPr algn="l">
               <a:lnSpc>
-                <a:spcPct val="115000"/>
-              </a:lnSpc>
-            </a:pPr>
-            <a:r>
-              <a:rPr sz="1150" b="0" i="0">
+                <a:spcPct val="110000"/>
+              </a:lnSpc>
+            </a:pPr>
+            <a:r>
+              <a:rPr sz="1100" b="0" i="0">
                 <a:solidFill>
                   <a:srgbClr val="262626"/>
                 </a:solidFill>
                 <a:latin typeface="Yu Gothic"/>
               </a:rPr>
-              <a:t>Power PlatformのライセンスポリシーおよびManaged Environment機能は継続的に更新されており、</a:t>
-            </a:r>
-          </a:p>
-          <a:p>
-            <a:pPr algn="l">
-              <a:lnSpc>
-                <a:spcPct val="115000"/>
-              </a:lnSpc>
-            </a:pPr>
-            <a:r>
-              <a:rPr sz="1150" b="0" i="0">
-                <a:solidFill>
-                  <a:srgbClr val="262626"/>
-                </a:solidFill>
-                <a:latin typeface="Yu Gothic"/>
-              </a:rPr>
-              <a:t>実施前に最新のMicrosoft Learn情報の再確認を推奨する。</a:t>
+              <a:t>Power PlatformのライセンスポリシーおよびManaged Environment機能は継続的に更新されており、実施前に最新のMicrosoft Learn情報の再確認を推奨する。</a:t>
             </a:r>
           </a:p>
         </p:txBody>
@@ -5814,7 +5686,7 @@
         </p:nvSpPr>
         <p:spPr>
           <a:xfrm>
-            <a:off x="777240" y="5925312"/>
+            <a:off x="777240" y="5870448"/>
             <a:ext cx="10698480" cy="274320"/>
           </a:xfrm>
           <a:prstGeom prst="rect">
@@ -5840,7 +5712,7 @@
                 </a:solidFill>
                 <a:latin typeface="Yu Gothic"/>
               </a:rPr>
-              <a:t>出典：[1][3] Managed environments overview／Licensing</a:t>
+              <a:t>根拠：Microsoft公式ドキュメント「Managed environments overview／Licensing（Managed Environments）」の説明があり、の記載は今後改定される可能性があるため、実施直前の再確認が必要。</a:t>
             </a:r>
           </a:p>
         </p:txBody>
@@ -6123,8 +5995,8 @@
         </p:nvSpPr>
         <p:spPr>
           <a:xfrm>
-            <a:off x="502920" y="1371600"/>
-            <a:ext cx="457200" cy="320040"/>
+            <a:off x="502920" y="1170432"/>
+            <a:ext cx="11155680" cy="274320"/>
           </a:xfrm>
           <a:prstGeom prst="rect">
             <a:avLst/>
@@ -6143,13 +6015,13 @@
               </a:lnSpc>
             </a:pPr>
             <a:r>
-              <a:rPr sz="1200" b="1" i="0">
-                <a:solidFill>
-                  <a:srgbClr val="2E5AAC"/>
-                </a:solidFill>
-                <a:latin typeface="Yu Gothic"/>
-              </a:rPr>
-              <a:t>[1]</a:t>
+              <a:rPr sz="1200" b="0" i="1">
+                <a:solidFill>
+                  <a:srgbClr val="6E6E6E"/>
+                </a:solidFill>
+                <a:latin typeface="Yu Gothic"/>
+              </a:rPr>
+              <a:t>本文中の各「根拠（Microsoft公式情報）」で引用したドキュメントの一覧</a:t>
             </a:r>
           </a:p>
         </p:txBody>
@@ -6162,8 +6034,8 @@
         </p:nvSpPr>
         <p:spPr>
           <a:xfrm>
-            <a:off x="1005840" y="1371600"/>
-            <a:ext cx="5074920" cy="731520"/>
+            <a:off x="502920" y="1600200"/>
+            <a:ext cx="365760" cy="320040"/>
           </a:xfrm>
           <a:prstGeom prst="rect">
             <a:avLst/>
@@ -6178,33 +6050,17 @@
           <a:p>
             <a:pPr algn="l">
               <a:lnSpc>
-                <a:spcPct val="115000"/>
-              </a:lnSpc>
-            </a:pPr>
-            <a:r>
-              <a:rPr sz="1100" b="0" i="0">
-                <a:solidFill>
-                  <a:srgbClr val="262626"/>
-                </a:solidFill>
-                <a:latin typeface="Yu Gothic"/>
-              </a:rPr>
-              <a:t>Managed environments overview － Microsoft Learn</a:t>
-            </a:r>
-          </a:p>
-          <a:p>
-            <a:pPr algn="l">
-              <a:lnSpc>
-                <a:spcPct val="115000"/>
-              </a:lnSpc>
-            </a:pPr>
-            <a:r>
-              <a:rPr sz="1100" b="0" i="0">
-                <a:solidFill>
-                  <a:srgbClr val="262626"/>
-                </a:solidFill>
-                <a:latin typeface="Yu Gothic"/>
-              </a:rPr>
-              <a:t>learn.microsoft.com/power-platform/admin/managed-environment-overview</a:t>
+                <a:spcPct val="100000"/>
+              </a:lnSpc>
+            </a:pPr>
+            <a:r>
+              <a:rPr sz="1200" b="1" i="0">
+                <a:solidFill>
+                  <a:srgbClr val="2E5AAC"/>
+                </a:solidFill>
+                <a:latin typeface="Yu Gothic"/>
+              </a:rPr>
+              <a:t>1.</a:t>
             </a:r>
           </a:p>
         </p:txBody>
@@ -6217,8 +6073,8 @@
         </p:nvSpPr>
         <p:spPr>
           <a:xfrm>
-            <a:off x="502920" y="2148840"/>
-            <a:ext cx="457200" cy="320040"/>
+            <a:off x="960120" y="1600200"/>
+            <a:ext cx="5120640" cy="731520"/>
           </a:xfrm>
           <a:prstGeom prst="rect">
             <a:avLst/>
@@ -6233,17 +6089,33 @@
           <a:p>
             <a:pPr algn="l">
               <a:lnSpc>
-                <a:spcPct val="100000"/>
-              </a:lnSpc>
-            </a:pPr>
-            <a:r>
-              <a:rPr sz="1200" b="1" i="0">
-                <a:solidFill>
-                  <a:srgbClr val="2E5AAC"/>
-                </a:solidFill>
-                <a:latin typeface="Yu Gothic"/>
-              </a:rPr>
-              <a:t>[2]</a:t>
+                <a:spcPct val="115000"/>
+              </a:lnSpc>
+            </a:pPr>
+            <a:r>
+              <a:rPr sz="1100" b="0" i="0">
+                <a:solidFill>
+                  <a:srgbClr val="262626"/>
+                </a:solidFill>
+                <a:latin typeface="Yu Gothic"/>
+              </a:rPr>
+              <a:t>Managed environments overview － Microsoft Learn</a:t>
+            </a:r>
+          </a:p>
+          <a:p>
+            <a:pPr algn="l">
+              <a:lnSpc>
+                <a:spcPct val="115000"/>
+              </a:lnSpc>
+            </a:pPr>
+            <a:r>
+              <a:rPr sz="1100" b="0" i="0">
+                <a:solidFill>
+                  <a:srgbClr val="262626"/>
+                </a:solidFill>
+                <a:latin typeface="Yu Gothic"/>
+              </a:rPr>
+              <a:t>learn.microsoft.com/power-platform/admin/managed-environment-overview</a:t>
             </a:r>
           </a:p>
         </p:txBody>
@@ -6256,8 +6128,8 @@
         </p:nvSpPr>
         <p:spPr>
           <a:xfrm>
-            <a:off x="1005840" y="2148840"/>
-            <a:ext cx="5074920" cy="731520"/>
+            <a:off x="502920" y="2377440"/>
+            <a:ext cx="365760" cy="320040"/>
           </a:xfrm>
           <a:prstGeom prst="rect">
             <a:avLst/>
@@ -6272,33 +6144,17 @@
           <a:p>
             <a:pPr algn="l">
               <a:lnSpc>
-                <a:spcPct val="115000"/>
-              </a:lnSpc>
-            </a:pPr>
-            <a:r>
-              <a:rPr sz="1100" b="0" i="0">
-                <a:solidFill>
-                  <a:srgbClr val="262626"/>
-                </a:solidFill>
-                <a:latin typeface="Yu Gothic"/>
-              </a:rPr>
-              <a:t>Enable managed environments － Microsoft Learn</a:t>
-            </a:r>
-          </a:p>
-          <a:p>
-            <a:pPr algn="l">
-              <a:lnSpc>
-                <a:spcPct val="115000"/>
-              </a:lnSpc>
-            </a:pPr>
-            <a:r>
-              <a:rPr sz="1100" b="0" i="0">
-                <a:solidFill>
-                  <a:srgbClr val="262626"/>
-                </a:solidFill>
-                <a:latin typeface="Yu Gothic"/>
-              </a:rPr>
-              <a:t>learn.microsoft.com/power-platform/admin/managed-environment-enable</a:t>
+                <a:spcPct val="100000"/>
+              </a:lnSpc>
+            </a:pPr>
+            <a:r>
+              <a:rPr sz="1200" b="1" i="0">
+                <a:solidFill>
+                  <a:srgbClr val="2E5AAC"/>
+                </a:solidFill>
+                <a:latin typeface="Yu Gothic"/>
+              </a:rPr>
+              <a:t>2.</a:t>
             </a:r>
           </a:p>
         </p:txBody>
@@ -6311,8 +6167,8 @@
         </p:nvSpPr>
         <p:spPr>
           <a:xfrm>
-            <a:off x="502920" y="2926080"/>
-            <a:ext cx="457200" cy="320040"/>
+            <a:off x="960120" y="2377440"/>
+            <a:ext cx="5120640" cy="731520"/>
           </a:xfrm>
           <a:prstGeom prst="rect">
             <a:avLst/>
@@ -6327,17 +6183,33 @@
           <a:p>
             <a:pPr algn="l">
               <a:lnSpc>
-                <a:spcPct val="100000"/>
-              </a:lnSpc>
-            </a:pPr>
-            <a:r>
-              <a:rPr sz="1200" b="1" i="0">
-                <a:solidFill>
-                  <a:srgbClr val="2E5AAC"/>
-                </a:solidFill>
-                <a:latin typeface="Yu Gothic"/>
-              </a:rPr>
-              <a:t>[3]</a:t>
+                <a:spcPct val="115000"/>
+              </a:lnSpc>
+            </a:pPr>
+            <a:r>
+              <a:rPr sz="1100" b="0" i="0">
+                <a:solidFill>
+                  <a:srgbClr val="262626"/>
+                </a:solidFill>
+                <a:latin typeface="Yu Gothic"/>
+              </a:rPr>
+              <a:t>Enable managed environments － Microsoft Learn</a:t>
+            </a:r>
+          </a:p>
+          <a:p>
+            <a:pPr algn="l">
+              <a:lnSpc>
+                <a:spcPct val="115000"/>
+              </a:lnSpc>
+            </a:pPr>
+            <a:r>
+              <a:rPr sz="1100" b="0" i="0">
+                <a:solidFill>
+                  <a:srgbClr val="262626"/>
+                </a:solidFill>
+                <a:latin typeface="Yu Gothic"/>
+              </a:rPr>
+              <a:t>learn.microsoft.com/power-platform/admin/managed-environment-enable</a:t>
             </a:r>
           </a:p>
         </p:txBody>
@@ -6350,8 +6222,8 @@
         </p:nvSpPr>
         <p:spPr>
           <a:xfrm>
-            <a:off x="1005840" y="2926080"/>
-            <a:ext cx="5074920" cy="731520"/>
+            <a:off x="502920" y="3154680"/>
+            <a:ext cx="365760" cy="320040"/>
           </a:xfrm>
           <a:prstGeom prst="rect">
             <a:avLst/>
@@ -6366,33 +6238,17 @@
           <a:p>
             <a:pPr algn="l">
               <a:lnSpc>
-                <a:spcPct val="115000"/>
-              </a:lnSpc>
-            </a:pPr>
-            <a:r>
-              <a:rPr sz="1100" b="0" i="0">
-                <a:solidFill>
-                  <a:srgbClr val="262626"/>
-                </a:solidFill>
-                <a:latin typeface="Yu Gothic"/>
-              </a:rPr>
-              <a:t>Licensing (Managed Environments) － Microsoft Learn</a:t>
-            </a:r>
-          </a:p>
-          <a:p>
-            <a:pPr algn="l">
-              <a:lnSpc>
-                <a:spcPct val="115000"/>
-              </a:lnSpc>
-            </a:pPr>
-            <a:r>
-              <a:rPr sz="1100" b="0" i="0">
-                <a:solidFill>
-                  <a:srgbClr val="262626"/>
-                </a:solidFill>
-                <a:latin typeface="Yu Gothic"/>
-              </a:rPr>
-              <a:t>learn.microsoft.com/power-platform/admin/managed-environment-licensing</a:t>
+                <a:spcPct val="100000"/>
+              </a:lnSpc>
+            </a:pPr>
+            <a:r>
+              <a:rPr sz="1200" b="1" i="0">
+                <a:solidFill>
+                  <a:srgbClr val="2E5AAC"/>
+                </a:solidFill>
+                <a:latin typeface="Yu Gothic"/>
+              </a:rPr>
+              <a:t>3.</a:t>
             </a:r>
           </a:p>
         </p:txBody>
@@ -6405,8 +6261,8 @@
         </p:nvSpPr>
         <p:spPr>
           <a:xfrm>
-            <a:off x="502920" y="3703320"/>
-            <a:ext cx="457200" cy="320040"/>
+            <a:off x="960120" y="3154680"/>
+            <a:ext cx="5120640" cy="731520"/>
           </a:xfrm>
           <a:prstGeom prst="rect">
             <a:avLst/>
@@ -6421,17 +6277,33 @@
           <a:p>
             <a:pPr algn="l">
               <a:lnSpc>
-                <a:spcPct val="100000"/>
-              </a:lnSpc>
-            </a:pPr>
-            <a:r>
-              <a:rPr sz="1200" b="1" i="0">
-                <a:solidFill>
-                  <a:srgbClr val="2E5AAC"/>
-                </a:solidFill>
-                <a:latin typeface="Yu Gothic"/>
-              </a:rPr>
-              <a:t>[4]</a:t>
+                <a:spcPct val="115000"/>
+              </a:lnSpc>
+            </a:pPr>
+            <a:r>
+              <a:rPr sz="1100" b="0" i="0">
+                <a:solidFill>
+                  <a:srgbClr val="262626"/>
+                </a:solidFill>
+                <a:latin typeface="Yu Gothic"/>
+              </a:rPr>
+              <a:t>Licensing (Managed Environments) － Microsoft Learn</a:t>
+            </a:r>
+          </a:p>
+          <a:p>
+            <a:pPr algn="l">
+              <a:lnSpc>
+                <a:spcPct val="115000"/>
+              </a:lnSpc>
+            </a:pPr>
+            <a:r>
+              <a:rPr sz="1100" b="0" i="0">
+                <a:solidFill>
+                  <a:srgbClr val="262626"/>
+                </a:solidFill>
+                <a:latin typeface="Yu Gothic"/>
+              </a:rPr>
+              <a:t>learn.microsoft.com/power-platform/admin/managed-environment-licensing</a:t>
             </a:r>
           </a:p>
         </p:txBody>
@@ -6444,8 +6316,8 @@
         </p:nvSpPr>
         <p:spPr>
           <a:xfrm>
-            <a:off x="1005840" y="3703320"/>
-            <a:ext cx="5074920" cy="731520"/>
+            <a:off x="502920" y="3931920"/>
+            <a:ext cx="365760" cy="320040"/>
           </a:xfrm>
           <a:prstGeom prst="rect">
             <a:avLst/>
@@ -6460,33 +6332,17 @@
           <a:p>
             <a:pPr algn="l">
               <a:lnSpc>
-                <a:spcPct val="115000"/>
-              </a:lnSpc>
-            </a:pPr>
-            <a:r>
-              <a:rPr sz="1100" b="0" i="0">
-                <a:solidFill>
-                  <a:srgbClr val="262626"/>
-                </a:solidFill>
-                <a:latin typeface="Yu Gothic"/>
-              </a:rPr>
-              <a:t>Manage data policies (DLP) － Microsoft Learn</a:t>
-            </a:r>
-          </a:p>
-          <a:p>
-            <a:pPr algn="l">
-              <a:lnSpc>
-                <a:spcPct val="115000"/>
-              </a:lnSpc>
-            </a:pPr>
-            <a:r>
-              <a:rPr sz="1100" b="0" i="0">
-                <a:solidFill>
-                  <a:srgbClr val="262626"/>
-                </a:solidFill>
-                <a:latin typeface="Yu Gothic"/>
-              </a:rPr>
-              <a:t>learn.microsoft.com/power-platform/admin/prevent-data-loss</a:t>
+                <a:spcPct val="100000"/>
+              </a:lnSpc>
+            </a:pPr>
+            <a:r>
+              <a:rPr sz="1200" b="1" i="0">
+                <a:solidFill>
+                  <a:srgbClr val="2E5AAC"/>
+                </a:solidFill>
+                <a:latin typeface="Yu Gothic"/>
+              </a:rPr>
+              <a:t>4.</a:t>
             </a:r>
           </a:p>
         </p:txBody>
@@ -6499,8 +6355,8 @@
         </p:nvSpPr>
         <p:spPr>
           <a:xfrm>
-            <a:off x="502920" y="4480560"/>
-            <a:ext cx="457200" cy="320040"/>
+            <a:off x="960120" y="3931920"/>
+            <a:ext cx="5120640" cy="731520"/>
           </a:xfrm>
           <a:prstGeom prst="rect">
             <a:avLst/>
@@ -6515,17 +6371,33 @@
           <a:p>
             <a:pPr algn="l">
               <a:lnSpc>
-                <a:spcPct val="100000"/>
-              </a:lnSpc>
-            </a:pPr>
-            <a:r>
-              <a:rPr sz="1200" b="1" i="0">
-                <a:solidFill>
-                  <a:srgbClr val="2E5AAC"/>
-                </a:solidFill>
-                <a:latin typeface="Yu Gothic"/>
-              </a:rPr>
-              <a:t>[5]</a:t>
+                <a:spcPct val="115000"/>
+              </a:lnSpc>
+            </a:pPr>
+            <a:r>
+              <a:rPr sz="1100" b="0" i="0">
+                <a:solidFill>
+                  <a:srgbClr val="262626"/>
+                </a:solidFill>
+                <a:latin typeface="Yu Gothic"/>
+              </a:rPr>
+              <a:t>Manage data policies (DLP) － Microsoft Learn</a:t>
+            </a:r>
+          </a:p>
+          <a:p>
+            <a:pPr algn="l">
+              <a:lnSpc>
+                <a:spcPct val="115000"/>
+              </a:lnSpc>
+            </a:pPr>
+            <a:r>
+              <a:rPr sz="1100" b="0" i="0">
+                <a:solidFill>
+                  <a:srgbClr val="262626"/>
+                </a:solidFill>
+                <a:latin typeface="Yu Gothic"/>
+              </a:rPr>
+              <a:t>learn.microsoft.com/power-platform/admin/prevent-data-loss</a:t>
             </a:r>
           </a:p>
         </p:txBody>
@@ -6538,8 +6410,8 @@
         </p:nvSpPr>
         <p:spPr>
           <a:xfrm>
-            <a:off x="1005840" y="4480560"/>
-            <a:ext cx="5074920" cy="731520"/>
+            <a:off x="502920" y="4709160"/>
+            <a:ext cx="365760" cy="320040"/>
           </a:xfrm>
           <a:prstGeom prst="rect">
             <a:avLst/>
@@ -6554,33 +6426,17 @@
           <a:p>
             <a:pPr algn="l">
               <a:lnSpc>
-                <a:spcPct val="115000"/>
-              </a:lnSpc>
-            </a:pPr>
-            <a:r>
-              <a:rPr sz="1100" b="0" i="0">
-                <a:solidFill>
-                  <a:srgbClr val="262626"/>
-                </a:solidFill>
-                <a:latin typeface="Yu Gothic"/>
-              </a:rPr>
-              <a:t>View policies and scope － Microsoft Learn</a:t>
-            </a:r>
-          </a:p>
-          <a:p>
-            <a:pPr algn="l">
-              <a:lnSpc>
-                <a:spcPct val="115000"/>
-              </a:lnSpc>
-            </a:pPr>
-            <a:r>
-              <a:rPr sz="1100" b="0" i="0">
-                <a:solidFill>
-                  <a:srgbClr val="262626"/>
-                </a:solidFill>
-                <a:latin typeface="Yu Gothic"/>
-              </a:rPr>
-              <a:t>learn.microsoft.com/power-platform/admin/dlp-policy-scope</a:t>
+                <a:spcPct val="100000"/>
+              </a:lnSpc>
+            </a:pPr>
+            <a:r>
+              <a:rPr sz="1200" b="1" i="0">
+                <a:solidFill>
+                  <a:srgbClr val="2E5AAC"/>
+                </a:solidFill>
+                <a:latin typeface="Yu Gothic"/>
+              </a:rPr>
+              <a:t>5.</a:t>
             </a:r>
           </a:p>
         </p:txBody>
@@ -6593,8 +6449,8 @@
         </p:nvSpPr>
         <p:spPr>
           <a:xfrm>
-            <a:off x="502920" y="5257800"/>
-            <a:ext cx="457200" cy="320040"/>
+            <a:off x="960120" y="4709160"/>
+            <a:ext cx="5120640" cy="731520"/>
           </a:xfrm>
           <a:prstGeom prst="rect">
             <a:avLst/>
@@ -6609,17 +6465,33 @@
           <a:p>
             <a:pPr algn="l">
               <a:lnSpc>
-                <a:spcPct val="100000"/>
-              </a:lnSpc>
-            </a:pPr>
-            <a:r>
-              <a:rPr sz="1200" b="1" i="0">
-                <a:solidFill>
-                  <a:srgbClr val="2E5AAC"/>
-                </a:solidFill>
-                <a:latin typeface="Yu Gothic"/>
-              </a:rPr>
-              <a:t>[6]</a:t>
+                <a:spcPct val="115000"/>
+              </a:lnSpc>
+            </a:pPr>
+            <a:r>
+              <a:rPr sz="1100" b="0" i="0">
+                <a:solidFill>
+                  <a:srgbClr val="262626"/>
+                </a:solidFill>
+                <a:latin typeface="Yu Gothic"/>
+              </a:rPr>
+              <a:t>View policies and scope － Microsoft Learn</a:t>
+            </a:r>
+          </a:p>
+          <a:p>
+            <a:pPr algn="l">
+              <a:lnSpc>
+                <a:spcPct val="115000"/>
+              </a:lnSpc>
+            </a:pPr>
+            <a:r>
+              <a:rPr sz="1100" b="0" i="0">
+                <a:solidFill>
+                  <a:srgbClr val="262626"/>
+                </a:solidFill>
+                <a:latin typeface="Yu Gothic"/>
+              </a:rPr>
+              <a:t>learn.microsoft.com/power-platform/admin/dlp-policy-scope</a:t>
             </a:r>
           </a:p>
         </p:txBody>
@@ -6632,8 +6504,8 @@
         </p:nvSpPr>
         <p:spPr>
           <a:xfrm>
-            <a:off x="1005840" y="5257800"/>
-            <a:ext cx="5074920" cy="731520"/>
+            <a:off x="502920" y="5486400"/>
+            <a:ext cx="365760" cy="320040"/>
           </a:xfrm>
           <a:prstGeom prst="rect">
             <a:avLst/>
@@ -6648,33 +6520,17 @@
           <a:p>
             <a:pPr algn="l">
               <a:lnSpc>
-                <a:spcPct val="115000"/>
-              </a:lnSpc>
-            </a:pPr>
-            <a:r>
-              <a:rPr sz="1100" b="0" i="0">
-                <a:solidFill>
-                  <a:srgbClr val="262626"/>
-                </a:solidFill>
-                <a:latin typeface="Yu Gothic"/>
-              </a:rPr>
-              <a:t>Impact of data policies on apps and flows － Microsoft Learn</a:t>
-            </a:r>
-          </a:p>
-          <a:p>
-            <a:pPr algn="l">
-              <a:lnSpc>
-                <a:spcPct val="115000"/>
-              </a:lnSpc>
-            </a:pPr>
-            <a:r>
-              <a:rPr sz="1100" b="0" i="0">
-                <a:solidFill>
-                  <a:srgbClr val="262626"/>
-                </a:solidFill>
-                <a:latin typeface="Yu Gothic"/>
-              </a:rPr>
-              <a:t>learn.microsoft.com/power-platform/admin/dlp-impact-policies-apps-flows</a:t>
+                <a:spcPct val="100000"/>
+              </a:lnSpc>
+            </a:pPr>
+            <a:r>
+              <a:rPr sz="1200" b="1" i="0">
+                <a:solidFill>
+                  <a:srgbClr val="2E5AAC"/>
+                </a:solidFill>
+                <a:latin typeface="Yu Gothic"/>
+              </a:rPr>
+              <a:t>6.</a:t>
             </a:r>
           </a:p>
         </p:txBody>
@@ -6687,8 +6543,8 @@
         </p:nvSpPr>
         <p:spPr>
           <a:xfrm>
-            <a:off x="6263640" y="1371600"/>
-            <a:ext cx="457200" cy="320040"/>
+            <a:off x="960120" y="5486400"/>
+            <a:ext cx="5120640" cy="731520"/>
           </a:xfrm>
           <a:prstGeom prst="rect">
             <a:avLst/>
@@ -6703,17 +6559,33 @@
           <a:p>
             <a:pPr algn="l">
               <a:lnSpc>
-                <a:spcPct val="100000"/>
-              </a:lnSpc>
-            </a:pPr>
-            <a:r>
-              <a:rPr sz="1200" b="1" i="0">
-                <a:solidFill>
-                  <a:srgbClr val="2E5AAC"/>
-                </a:solidFill>
-                <a:latin typeface="Yu Gothic"/>
-              </a:rPr>
-              <a:t>[7]</a:t>
+                <a:spcPct val="115000"/>
+              </a:lnSpc>
+            </a:pPr>
+            <a:r>
+              <a:rPr sz="1100" b="0" i="0">
+                <a:solidFill>
+                  <a:srgbClr val="262626"/>
+                </a:solidFill>
+                <a:latin typeface="Yu Gothic"/>
+              </a:rPr>
+              <a:t>Impact of data policies on apps and flows － Microsoft Learn</a:t>
+            </a:r>
+          </a:p>
+          <a:p>
+            <a:pPr algn="l">
+              <a:lnSpc>
+                <a:spcPct val="115000"/>
+              </a:lnSpc>
+            </a:pPr>
+            <a:r>
+              <a:rPr sz="1100" b="0" i="0">
+                <a:solidFill>
+                  <a:srgbClr val="262626"/>
+                </a:solidFill>
+                <a:latin typeface="Yu Gothic"/>
+              </a:rPr>
+              <a:t>learn.microsoft.com/power-platform/admin/dlp-impact-policies-apps-flows</a:t>
             </a:r>
           </a:p>
         </p:txBody>
@@ -6726,8 +6598,8 @@
         </p:nvSpPr>
         <p:spPr>
           <a:xfrm>
-            <a:off x="6766560" y="1371600"/>
-            <a:ext cx="5074920" cy="731520"/>
+            <a:off x="6263640" y="1600200"/>
+            <a:ext cx="365760" cy="320040"/>
           </a:xfrm>
           <a:prstGeom prst="rect">
             <a:avLst/>
@@ -6742,33 +6614,17 @@
           <a:p>
             <a:pPr algn="l">
               <a:lnSpc>
-                <a:spcPct val="115000"/>
-              </a:lnSpc>
-            </a:pPr>
-            <a:r>
-              <a:rPr sz="1100" b="0" i="0">
-                <a:solidFill>
-                  <a:srgbClr val="262626"/>
-                </a:solidFill>
-                <a:latin typeface="Yu Gothic"/>
-              </a:rPr>
-              <a:t>Secure the default environment － Microsoft Learn（Adoption Guidance）</a:t>
-            </a:r>
-          </a:p>
-          <a:p>
-            <a:pPr algn="l">
-              <a:lnSpc>
-                <a:spcPct val="115000"/>
-              </a:lnSpc>
-            </a:pPr>
-            <a:r>
-              <a:rPr sz="1100" b="0" i="0">
-                <a:solidFill>
-                  <a:srgbClr val="262626"/>
-                </a:solidFill>
-                <a:latin typeface="Yu Gothic"/>
-              </a:rPr>
-              <a:t>learn.microsoft.com/power-platform/guidance/adoption/secure-default-environment</a:t>
+                <a:spcPct val="100000"/>
+              </a:lnSpc>
+            </a:pPr>
+            <a:r>
+              <a:rPr sz="1200" b="1" i="0">
+                <a:solidFill>
+                  <a:srgbClr val="2E5AAC"/>
+                </a:solidFill>
+                <a:latin typeface="Yu Gothic"/>
+              </a:rPr>
+              <a:t>7.</a:t>
             </a:r>
           </a:p>
         </p:txBody>
@@ -6781,8 +6637,8 @@
         </p:nvSpPr>
         <p:spPr>
           <a:xfrm>
-            <a:off x="6263640" y="2148840"/>
-            <a:ext cx="457200" cy="320040"/>
+            <a:off x="6720840" y="1600200"/>
+            <a:ext cx="5120640" cy="731520"/>
           </a:xfrm>
           <a:prstGeom prst="rect">
             <a:avLst/>
@@ -6797,17 +6653,33 @@
           <a:p>
             <a:pPr algn="l">
               <a:lnSpc>
-                <a:spcPct val="100000"/>
-              </a:lnSpc>
-            </a:pPr>
-            <a:r>
-              <a:rPr sz="1200" b="1" i="0">
-                <a:solidFill>
-                  <a:srgbClr val="2E5AAC"/>
-                </a:solidFill>
-                <a:latin typeface="Yu Gothic"/>
-              </a:rPr>
-              <a:t>[8]</a:t>
+                <a:spcPct val="115000"/>
+              </a:lnSpc>
+            </a:pPr>
+            <a:r>
+              <a:rPr sz="1100" b="0" i="0">
+                <a:solidFill>
+                  <a:srgbClr val="262626"/>
+                </a:solidFill>
+                <a:latin typeface="Yu Gothic"/>
+              </a:rPr>
+              <a:t>Secure the default environment － Microsoft Learn（Adoption Guidance）</a:t>
+            </a:r>
+          </a:p>
+          <a:p>
+            <a:pPr algn="l">
+              <a:lnSpc>
+                <a:spcPct val="115000"/>
+              </a:lnSpc>
+            </a:pPr>
+            <a:r>
+              <a:rPr sz="1100" b="0" i="0">
+                <a:solidFill>
+                  <a:srgbClr val="262626"/>
+                </a:solidFill>
+                <a:latin typeface="Yu Gothic"/>
+              </a:rPr>
+              <a:t>learn.microsoft.com/power-platform/guidance/adoption/secure-default-environment</a:t>
             </a:r>
           </a:p>
         </p:txBody>
@@ -6820,8 +6692,8 @@
         </p:nvSpPr>
         <p:spPr>
           <a:xfrm>
-            <a:off x="6766560" y="2148840"/>
-            <a:ext cx="5074920" cy="731520"/>
+            <a:off x="6263640" y="2377440"/>
+            <a:ext cx="365760" cy="320040"/>
           </a:xfrm>
           <a:prstGeom prst="rect">
             <a:avLst/>
@@ -6836,33 +6708,17 @@
           <a:p>
             <a:pPr algn="l">
               <a:lnSpc>
-                <a:spcPct val="115000"/>
-              </a:lnSpc>
-            </a:pPr>
-            <a:r>
-              <a:rPr sz="1100" b="0" i="0">
-                <a:solidFill>
-                  <a:srgbClr val="262626"/>
-                </a:solidFill>
-                <a:latin typeface="Yu Gothic"/>
-              </a:rPr>
-              <a:t>Manage and govern the default environment － Microsoft Learn（Adoption Guidance）</a:t>
-            </a:r>
-          </a:p>
-          <a:p>
-            <a:pPr algn="l">
-              <a:lnSpc>
-                <a:spcPct val="115000"/>
-              </a:lnSpc>
-            </a:pPr>
-            <a:r>
-              <a:rPr sz="1100" b="0" i="0">
-                <a:solidFill>
-                  <a:srgbClr val="262626"/>
-                </a:solidFill>
-                <a:latin typeface="Yu Gothic"/>
-              </a:rPr>
-              <a:t>learn.microsoft.com/power-platform/guidance/adoption/manage-default-environment</a:t>
+                <a:spcPct val="100000"/>
+              </a:lnSpc>
+            </a:pPr>
+            <a:r>
+              <a:rPr sz="1200" b="1" i="0">
+                <a:solidFill>
+                  <a:srgbClr val="2E5AAC"/>
+                </a:solidFill>
+                <a:latin typeface="Yu Gothic"/>
+              </a:rPr>
+              <a:t>8.</a:t>
             </a:r>
           </a:p>
         </p:txBody>
@@ -6875,8 +6731,8 @@
         </p:nvSpPr>
         <p:spPr>
           <a:xfrm>
-            <a:off x="6263640" y="2926080"/>
-            <a:ext cx="457200" cy="320040"/>
+            <a:off x="6720840" y="2377440"/>
+            <a:ext cx="5120640" cy="731520"/>
           </a:xfrm>
           <a:prstGeom prst="rect">
             <a:avLst/>
@@ -6891,17 +6747,33 @@
           <a:p>
             <a:pPr algn="l">
               <a:lnSpc>
-                <a:spcPct val="100000"/>
-              </a:lnSpc>
-            </a:pPr>
-            <a:r>
-              <a:rPr sz="1200" b="1" i="0">
-                <a:solidFill>
-                  <a:srgbClr val="2E5AAC"/>
-                </a:solidFill>
-                <a:latin typeface="Yu Gothic"/>
-              </a:rPr>
-              <a:t>[9]</a:t>
+                <a:spcPct val="115000"/>
+              </a:lnSpc>
+            </a:pPr>
+            <a:r>
+              <a:rPr sz="1100" b="0" i="0">
+                <a:solidFill>
+                  <a:srgbClr val="262626"/>
+                </a:solidFill>
+                <a:latin typeface="Yu Gothic"/>
+              </a:rPr>
+              <a:t>Manage and govern the default environment － Microsoft Learn（Adoption Guidance）</a:t>
+            </a:r>
+          </a:p>
+          <a:p>
+            <a:pPr algn="l">
+              <a:lnSpc>
+                <a:spcPct val="115000"/>
+              </a:lnSpc>
+            </a:pPr>
+            <a:r>
+              <a:rPr sz="1100" b="0" i="0">
+                <a:solidFill>
+                  <a:srgbClr val="262626"/>
+                </a:solidFill>
+                <a:latin typeface="Yu Gothic"/>
+              </a:rPr>
+              <a:t>learn.microsoft.com/power-platform/guidance/adoption/manage-default-environment</a:t>
             </a:r>
           </a:p>
         </p:txBody>
@@ -6914,8 +6786,8 @@
         </p:nvSpPr>
         <p:spPr>
           <a:xfrm>
-            <a:off x="6766560" y="2926080"/>
-            <a:ext cx="5074920" cy="731520"/>
+            <a:off x="6263640" y="3154680"/>
+            <a:ext cx="365760" cy="320040"/>
           </a:xfrm>
           <a:prstGeom prst="rect">
             <a:avLst/>
@@ -6930,33 +6802,17 @@
           <a:p>
             <a:pPr algn="l">
               <a:lnSpc>
-                <a:spcPct val="115000"/>
-              </a:lnSpc>
-            </a:pPr>
-            <a:r>
-              <a:rPr sz="1100" b="0" i="0">
-                <a:solidFill>
-                  <a:srgbClr val="262626"/>
-                </a:solidFill>
-                <a:latin typeface="Yu Gothic"/>
-              </a:rPr>
-              <a:t>Environment routing － Microsoft Learn</a:t>
-            </a:r>
-          </a:p>
-          <a:p>
-            <a:pPr algn="l">
-              <a:lnSpc>
-                <a:spcPct val="115000"/>
-              </a:lnSpc>
-            </a:pPr>
-            <a:r>
-              <a:rPr sz="1100" b="0" i="0">
-                <a:solidFill>
-                  <a:srgbClr val="262626"/>
-                </a:solidFill>
-                <a:latin typeface="Yu Gothic"/>
-              </a:rPr>
-              <a:t>learn.microsoft.com/power-platform/admin/default-environment-routing</a:t>
+                <a:spcPct val="100000"/>
+              </a:lnSpc>
+            </a:pPr>
+            <a:r>
+              <a:rPr sz="1200" b="1" i="0">
+                <a:solidFill>
+                  <a:srgbClr val="2E5AAC"/>
+                </a:solidFill>
+                <a:latin typeface="Yu Gothic"/>
+              </a:rPr>
+              <a:t>9.</a:t>
             </a:r>
           </a:p>
         </p:txBody>
@@ -6969,8 +6825,8 @@
         </p:nvSpPr>
         <p:spPr>
           <a:xfrm>
-            <a:off x="6263640" y="3703320"/>
-            <a:ext cx="457200" cy="320040"/>
+            <a:off x="6720840" y="3154680"/>
+            <a:ext cx="5120640" cy="731520"/>
           </a:xfrm>
           <a:prstGeom prst="rect">
             <a:avLst/>
@@ -6985,17 +6841,33 @@
           <a:p>
             <a:pPr algn="l">
               <a:lnSpc>
-                <a:spcPct val="100000"/>
-              </a:lnSpc>
-            </a:pPr>
-            <a:r>
-              <a:rPr sz="1200" b="1" i="0">
-                <a:solidFill>
-                  <a:srgbClr val="2E5AAC"/>
-                </a:solidFill>
-                <a:latin typeface="Yu Gothic"/>
-              </a:rPr>
-              <a:t>[10]</a:t>
+                <a:spcPct val="115000"/>
+              </a:lnSpc>
+            </a:pPr>
+            <a:r>
+              <a:rPr sz="1100" b="0" i="0">
+                <a:solidFill>
+                  <a:srgbClr val="262626"/>
+                </a:solidFill>
+                <a:latin typeface="Yu Gothic"/>
+              </a:rPr>
+              <a:t>Environment routing － Microsoft Learn</a:t>
+            </a:r>
+          </a:p>
+          <a:p>
+            <a:pPr algn="l">
+              <a:lnSpc>
+                <a:spcPct val="115000"/>
+              </a:lnSpc>
+            </a:pPr>
+            <a:r>
+              <a:rPr sz="1100" b="0" i="0">
+                <a:solidFill>
+                  <a:srgbClr val="262626"/>
+                </a:solidFill>
+                <a:latin typeface="Yu Gothic"/>
+              </a:rPr>
+              <a:t>learn.microsoft.com/power-platform/admin/default-environment-routing</a:t>
             </a:r>
           </a:p>
         </p:txBody>
@@ -7008,8 +6880,8 @@
         </p:nvSpPr>
         <p:spPr>
           <a:xfrm>
-            <a:off x="6766560" y="3703320"/>
-            <a:ext cx="5074920" cy="731520"/>
+            <a:off x="6263640" y="3931920"/>
+            <a:ext cx="365760" cy="320040"/>
           </a:xfrm>
           <a:prstGeom prst="rect">
             <a:avLst/>
@@ -7024,33 +6896,17 @@
           <a:p>
             <a:pPr algn="l">
               <a:lnSpc>
-                <a:spcPct val="115000"/>
-              </a:lnSpc>
-            </a:pPr>
-            <a:r>
-              <a:rPr sz="1100" b="0" i="0">
-                <a:solidFill>
-                  <a:srgbClr val="262626"/>
-                </a:solidFill>
-                <a:latin typeface="Yu Gothic"/>
-              </a:rPr>
-              <a:t>Environment groups － Microsoft Learn</a:t>
-            </a:r>
-          </a:p>
-          <a:p>
-            <a:pPr algn="l">
-              <a:lnSpc>
-                <a:spcPct val="115000"/>
-              </a:lnSpc>
-            </a:pPr>
-            <a:r>
-              <a:rPr sz="1100" b="0" i="0">
-                <a:solidFill>
-                  <a:srgbClr val="262626"/>
-                </a:solidFill>
-                <a:latin typeface="Yu Gothic"/>
-              </a:rPr>
-              <a:t>learn.microsoft.com/power-platform/admin/environment-groups</a:t>
+                <a:spcPct val="100000"/>
+              </a:lnSpc>
+            </a:pPr>
+            <a:r>
+              <a:rPr sz="1200" b="1" i="0">
+                <a:solidFill>
+                  <a:srgbClr val="2E5AAC"/>
+                </a:solidFill>
+                <a:latin typeface="Yu Gothic"/>
+              </a:rPr>
+              <a:t>10.</a:t>
             </a:r>
           </a:p>
         </p:txBody>
@@ -7063,8 +6919,8 @@
         </p:nvSpPr>
         <p:spPr>
           <a:xfrm>
-            <a:off x="6263640" y="4480560"/>
-            <a:ext cx="457200" cy="320040"/>
+            <a:off x="6720840" y="3931920"/>
+            <a:ext cx="5120640" cy="731520"/>
           </a:xfrm>
           <a:prstGeom prst="rect">
             <a:avLst/>
@@ -7079,17 +6935,33 @@
           <a:p>
             <a:pPr algn="l">
               <a:lnSpc>
-                <a:spcPct val="100000"/>
-              </a:lnSpc>
-            </a:pPr>
-            <a:r>
-              <a:rPr sz="1200" b="1" i="0">
-                <a:solidFill>
-                  <a:srgbClr val="2E5AAC"/>
-                </a:solidFill>
-                <a:latin typeface="Yu Gothic"/>
-              </a:rPr>
-              <a:t>[11]</a:t>
+                <a:spcPct val="115000"/>
+              </a:lnSpc>
+            </a:pPr>
+            <a:r>
+              <a:rPr sz="1100" b="0" i="0">
+                <a:solidFill>
+                  <a:srgbClr val="262626"/>
+                </a:solidFill>
+                <a:latin typeface="Yu Gothic"/>
+              </a:rPr>
+              <a:t>Environment groups － Microsoft Learn</a:t>
+            </a:r>
+          </a:p>
+          <a:p>
+            <a:pPr algn="l">
+              <a:lnSpc>
+                <a:spcPct val="115000"/>
+              </a:lnSpc>
+            </a:pPr>
+            <a:r>
+              <a:rPr sz="1100" b="0" i="0">
+                <a:solidFill>
+                  <a:srgbClr val="262626"/>
+                </a:solidFill>
+                <a:latin typeface="Yu Gothic"/>
+              </a:rPr>
+              <a:t>learn.microsoft.com/power-platform/admin/environment-groups</a:t>
             </a:r>
           </a:p>
         </p:txBody>
@@ -7102,8 +6974,8 @@
         </p:nvSpPr>
         <p:spPr>
           <a:xfrm>
-            <a:off x="6766560" y="4480560"/>
-            <a:ext cx="5074920" cy="731520"/>
+            <a:off x="6263640" y="4709160"/>
+            <a:ext cx="365760" cy="320040"/>
           </a:xfrm>
           <a:prstGeom prst="rect">
             <a:avLst/>
@@ -7118,33 +6990,17 @@
           <a:p>
             <a:pPr algn="l">
               <a:lnSpc>
-                <a:spcPct val="115000"/>
-              </a:lnSpc>
-            </a:pPr>
-            <a:r>
-              <a:rPr sz="1100" b="0" i="0">
-                <a:solidFill>
-                  <a:srgbClr val="262626"/>
-                </a:solidFill>
-                <a:latin typeface="Yu Gothic"/>
-              </a:rPr>
-              <a:t>Power Automate licensing FAQ － Microsoft Learn</a:t>
-            </a:r>
-          </a:p>
-          <a:p>
-            <a:pPr algn="l">
-              <a:lnSpc>
-                <a:spcPct val="115000"/>
-              </a:lnSpc>
-            </a:pPr>
-            <a:r>
-              <a:rPr sz="1100" b="0" i="0">
-                <a:solidFill>
-                  <a:srgbClr val="262626"/>
-                </a:solidFill>
-                <a:latin typeface="Yu Gothic"/>
-              </a:rPr>
-              <a:t>learn.microsoft.com/power-platform/admin/power-automate-licensing/faqs</a:t>
+                <a:spcPct val="100000"/>
+              </a:lnSpc>
+            </a:pPr>
+            <a:r>
+              <a:rPr sz="1200" b="1" i="0">
+                <a:solidFill>
+                  <a:srgbClr val="2E5AAC"/>
+                </a:solidFill>
+                <a:latin typeface="Yu Gothic"/>
+              </a:rPr>
+              <a:t>11.</a:t>
             </a:r>
           </a:p>
         </p:txBody>
@@ -7157,8 +7013,8 @@
         </p:nvSpPr>
         <p:spPr>
           <a:xfrm>
-            <a:off x="502920" y="6263640"/>
-            <a:ext cx="11155680" cy="365760"/>
+            <a:off x="6720840" y="4709160"/>
+            <a:ext cx="5120640" cy="731520"/>
           </a:xfrm>
           <a:prstGeom prst="rect">
             <a:avLst/>
@@ -7173,17 +7029,33 @@
           <a:p>
             <a:pPr algn="l">
               <a:lnSpc>
-                <a:spcPct val="100000"/>
-              </a:lnSpc>
-            </a:pPr>
-            <a:r>
-              <a:rPr sz="1050" b="0" i="1">
-                <a:solidFill>
-                  <a:srgbClr val="6E6E6E"/>
-                </a:solidFill>
-                <a:latin typeface="Yu Gothic"/>
-              </a:rPr>
-              <a:t>※ 本資料はMicrosoft公式ドキュメントに基づき2026年7月時点の情報を整理したものです。設定前に最新情報をご確認ください。</a:t>
+                <a:spcPct val="115000"/>
+              </a:lnSpc>
+            </a:pPr>
+            <a:r>
+              <a:rPr sz="1100" b="0" i="0">
+                <a:solidFill>
+                  <a:srgbClr val="262626"/>
+                </a:solidFill>
+                <a:latin typeface="Yu Gothic"/>
+              </a:rPr>
+              <a:t>Power Automate licensing FAQ － Microsoft Learn</a:t>
+            </a:r>
+          </a:p>
+          <a:p>
+            <a:pPr algn="l">
+              <a:lnSpc>
+                <a:spcPct val="115000"/>
+              </a:lnSpc>
+            </a:pPr>
+            <a:r>
+              <a:rPr sz="1100" b="0" i="0">
+                <a:solidFill>
+                  <a:srgbClr val="262626"/>
+                </a:solidFill>
+                <a:latin typeface="Yu Gothic"/>
+              </a:rPr>
+              <a:t>learn.microsoft.com/power-platform/admin/power-automate-licensing/faqs</a:t>
             </a:r>
           </a:p>
         </p:txBody>
@@ -7196,8 +7068,8 @@
         </p:nvSpPr>
         <p:spPr>
           <a:xfrm>
-            <a:off x="502920" y="6565392"/>
-            <a:ext cx="8229600" cy="274320"/>
+            <a:off x="6263640" y="5486400"/>
+            <a:ext cx="365760" cy="320040"/>
           </a:xfrm>
           <a:prstGeom prst="rect">
             <a:avLst/>
@@ -7216,6 +7088,139 @@
               </a:lnSpc>
             </a:pPr>
             <a:r>
+              <a:rPr sz="1200" b="1" i="0">
+                <a:solidFill>
+                  <a:srgbClr val="2E5AAC"/>
+                </a:solidFill>
+                <a:latin typeface="Yu Gothic"/>
+              </a:rPr>
+              <a:t>12.</a:t>
+            </a:r>
+          </a:p>
+        </p:txBody>
+      </p:sp>
+      <p:sp>
+        <p:nvSpPr>
+          <p:cNvPr id="30" name="TextBox 29"/>
+          <p:cNvSpPr txBox="1"/>
+          <p:nvPr/>
+        </p:nvSpPr>
+        <p:spPr>
+          <a:xfrm>
+            <a:off x="6720840" y="5486400"/>
+            <a:ext cx="5120640" cy="731520"/>
+          </a:xfrm>
+          <a:prstGeom prst="rect">
+            <a:avLst/>
+          </a:prstGeom>
+          <a:noFill/>
+        </p:spPr>
+        <p:txBody>
+          <a:bodyPr wrap="square" anchor="t" lIns="0" rIns="0" tIns="0" bIns="0">
+            <a:spAutoFit/>
+          </a:bodyPr>
+          <a:lstStyle/>
+          <a:p>
+            <a:pPr algn="l">
+              <a:lnSpc>
+                <a:spcPct val="115000"/>
+              </a:lnSpc>
+            </a:pPr>
+            <a:r>
+              <a:rPr sz="1100" b="0" i="0">
+                <a:solidFill>
+                  <a:srgbClr val="262626"/>
+                </a:solidFill>
+                <a:latin typeface="Yu Gothic"/>
+              </a:rPr>
+              <a:t>Power Platform environments overview － Microsoft Learn</a:t>
+            </a:r>
+          </a:p>
+          <a:p>
+            <a:pPr algn="l">
+              <a:lnSpc>
+                <a:spcPct val="115000"/>
+              </a:lnSpc>
+            </a:pPr>
+            <a:r>
+              <a:rPr sz="1100" b="0" i="0">
+                <a:solidFill>
+                  <a:srgbClr val="262626"/>
+                </a:solidFill>
+                <a:latin typeface="Yu Gothic"/>
+              </a:rPr>
+              <a:t>learn.microsoft.com/power-platform/admin/environments-overview</a:t>
+            </a:r>
+          </a:p>
+        </p:txBody>
+      </p:sp>
+      <p:sp>
+        <p:nvSpPr>
+          <p:cNvPr id="31" name="TextBox 30"/>
+          <p:cNvSpPr txBox="1"/>
+          <p:nvPr/>
+        </p:nvSpPr>
+        <p:spPr>
+          <a:xfrm>
+            <a:off x="502920" y="6263640"/>
+            <a:ext cx="11155680" cy="365760"/>
+          </a:xfrm>
+          <a:prstGeom prst="rect">
+            <a:avLst/>
+          </a:prstGeom>
+          <a:noFill/>
+        </p:spPr>
+        <p:txBody>
+          <a:bodyPr wrap="square" anchor="t" lIns="0" rIns="0" tIns="0" bIns="0">
+            <a:spAutoFit/>
+          </a:bodyPr>
+          <a:lstStyle/>
+          <a:p>
+            <a:pPr algn="l">
+              <a:lnSpc>
+                <a:spcPct val="100000"/>
+              </a:lnSpc>
+            </a:pPr>
+            <a:r>
+              <a:rPr sz="1050" b="0" i="1">
+                <a:solidFill>
+                  <a:srgbClr val="6E6E6E"/>
+                </a:solidFill>
+                <a:latin typeface="Yu Gothic"/>
+              </a:rPr>
+              <a:t>※ 本資料はMicrosoft公式ドキュメントに基づき2026年7月時点の情報を整理したものです。設定前に最新情報をご確認ください。</a:t>
+            </a:r>
+          </a:p>
+        </p:txBody>
+      </p:sp>
+      <p:sp>
+        <p:nvSpPr>
+          <p:cNvPr id="32" name="TextBox 31"/>
+          <p:cNvSpPr txBox="1"/>
+          <p:nvPr/>
+        </p:nvSpPr>
+        <p:spPr>
+          <a:xfrm>
+            <a:off x="502920" y="6565392"/>
+            <a:ext cx="8229600" cy="274320"/>
+          </a:xfrm>
+          <a:prstGeom prst="rect">
+            <a:avLst/>
+          </a:prstGeom>
+          <a:noFill/>
+        </p:spPr>
+        <p:txBody>
+          <a:bodyPr wrap="square" anchor="t" lIns="0" rIns="0" tIns="0" bIns="0">
+            <a:spAutoFit/>
+          </a:bodyPr>
+          <a:lstStyle/>
+          <a:p>
+            <a:pPr algn="l">
+              <a:lnSpc>
+                <a:spcPct val="100000"/>
+              </a:lnSpc>
+            </a:pPr>
+            <a:r>
               <a:rPr sz="900" b="0" i="0">
                 <a:solidFill>
                   <a:srgbClr val="6E6E6E"/>
@@ -7229,7 +7234,7 @@
       </p:sp>
       <p:sp>
         <p:nvSpPr>
-          <p:cNvPr id="30" name="TextBox 29"/>
+          <p:cNvPr id="33" name="TextBox 32"/>
           <p:cNvSpPr txBox="1"/>
           <p:nvPr/>
         </p:nvSpPr>
@@ -7460,13 +7465,52 @@
       </p:sp>
       <p:sp>
         <p:nvSpPr>
-          <p:cNvPr id="6" name="Rectangle 5"/>
+          <p:cNvPr id="6" name="TextBox 5"/>
+          <p:cNvSpPr txBox="1"/>
+          <p:nvPr/>
+        </p:nvSpPr>
+        <p:spPr>
+          <a:xfrm>
+            <a:off x="502920" y="1170432"/>
+            <a:ext cx="11155680" cy="274320"/>
+          </a:xfrm>
+          <a:prstGeom prst="rect">
+            <a:avLst/>
+          </a:prstGeom>
+          <a:noFill/>
+        </p:spPr>
+        <p:txBody>
+          <a:bodyPr wrap="square" anchor="t" lIns="0" rIns="0" tIns="0" bIns="0">
+            <a:spAutoFit/>
+          </a:bodyPr>
+          <a:lstStyle/>
+          <a:p>
+            <a:pPr algn="l">
+              <a:lnSpc>
+                <a:spcPct val="100000"/>
+              </a:lnSpc>
+            </a:pPr>
+            <a:r>
+              <a:rPr sz="1250" b="0" i="1">
+                <a:solidFill>
+                  <a:srgbClr val="6E6E6E"/>
+                </a:solidFill>
+                <a:latin typeface="Yu Gothic"/>
+              </a:rPr>
+              <a:t>対象：Power Platform の「Default環境」</a:t>
+            </a:r>
+          </a:p>
+        </p:txBody>
+      </p:sp>
+      <p:sp>
+        <p:nvSpPr>
+          <p:cNvPr id="7" name="Rectangle 6"/>
           <p:cNvSpPr/>
           <p:nvPr/>
         </p:nvSpPr>
         <p:spPr>
           <a:xfrm>
-            <a:off x="502920" y="1371600"/>
+            <a:off x="502920" y="1508760"/>
             <a:ext cx="5394960" cy="457200"/>
           </a:xfrm>
           <a:prstGeom prst="rect">
@@ -7504,13 +7548,13 @@
       </p:sp>
       <p:sp>
         <p:nvSpPr>
-          <p:cNvPr id="7" name="TextBox 6"/>
+          <p:cNvPr id="8" name="TextBox 7"/>
           <p:cNvSpPr txBox="1"/>
           <p:nvPr/>
         </p:nvSpPr>
         <p:spPr>
           <a:xfrm>
-            <a:off x="685800" y="1444752"/>
+            <a:off x="685800" y="1581912"/>
             <a:ext cx="5029200" cy="365760"/>
           </a:xfrm>
           <a:prstGeom prst="rect">
@@ -7543,14 +7587,14 @@
       </p:sp>
       <p:sp>
         <p:nvSpPr>
-          <p:cNvPr id="8" name="TextBox 7"/>
+          <p:cNvPr id="9" name="TextBox 8"/>
           <p:cNvSpPr txBox="1"/>
           <p:nvPr/>
         </p:nvSpPr>
         <p:spPr>
           <a:xfrm>
-            <a:off x="548640" y="1965960"/>
-            <a:ext cx="5349240" cy="3657600"/>
+            <a:off x="548640" y="2103120"/>
+            <a:ext cx="5349240" cy="2468880"/>
           </a:xfrm>
           <a:prstGeom prst="rect">
             <a:avLst/>
@@ -7568,18 +7612,19 @@
                 <a:spcPct val="120000"/>
               </a:lnSpc>
               <a:spcAft>
-                <a:spcPts val="1200"/>
+                <a:spcPts val="1000"/>
               </a:spcAft>
             </a:pPr>
             <a:r>
-              <a:rPr sz="1350" b="0">
+              <a:rPr sz="1300" b="0">
                 <a:solidFill>
                   <a:srgbClr val="262626"/>
                 </a:solidFill>
                 <a:latin typeface="Yu Gothic"/>
               </a:rPr>
-              <a:t>● Default環境は全ライセンスユーザーが自動的に「環境メーカー」権限で
-アクセス可能な共有環境である</a:t>
+              <a:t>● Power PlatformのDefault環境は、Power Apps／Power Automate等に
+サインアップした全ライセンスユーザーに自動的に「環境メーカー」
+ロールが付与される共有環境である</a:t>
             </a:r>
           </a:p>
           <a:p>
@@ -7588,83 +7633,20 @@
                 <a:spcPct val="120000"/>
               </a:lnSpc>
               <a:spcAft>
-                <a:spcPts val="1200"/>
+                <a:spcPts val="1000"/>
               </a:spcAft>
             </a:pPr>
             <a:r>
-              <a:rPr sz="1350" b="0">
+              <a:rPr sz="1300" b="0">
                 <a:solidFill>
                   <a:srgbClr val="262626"/>
                 </a:solidFill>
                 <a:latin typeface="Yu Gothic"/>
               </a:rPr>
-              <a:t>● ユーザーが意図せずアプリ・フロー・Copilot Studio エージェント等を
-作成・利用してしまうリスクが存在</a:t>
-            </a:r>
-          </a:p>
-          <a:p>
-            <a:pPr>
-              <a:lnSpc>
-                <a:spcPct val="120000"/>
-              </a:lnSpc>
-              <a:spcAft>
-                <a:spcPts val="1200"/>
-              </a:spcAft>
-            </a:pPr>
-            <a:r>
-              <a:rPr sz="1350" b="0">
-                <a:solidFill>
-                  <a:srgbClr val="262626"/>
-                </a:solidFill>
-                <a:latin typeface="Yu Gothic"/>
-              </a:rPr>
-              <a:t>● 無秩序な利用（シャドーIT化）は情報漏えい・コンプライアンス・
-コスト管理上のリスクとなる</a:t>
-            </a:r>
-          </a:p>
-        </p:txBody>
-      </p:sp>
-      <p:sp>
-        <p:nvSpPr>
-          <p:cNvPr id="9" name="Rectangle 8"/>
-          <p:cNvSpPr/>
-          <p:nvPr/>
-        </p:nvSpPr>
-        <p:spPr>
-          <a:xfrm>
-            <a:off x="6263640" y="1371600"/>
-            <a:ext cx="5394960" cy="457200"/>
-          </a:xfrm>
-          <a:prstGeom prst="rect">
-            <a:avLst/>
-          </a:prstGeom>
-          <a:solidFill>
-            <a:srgbClr val="E3F3EE"/>
-          </a:solidFill>
-          <a:ln>
-            <a:noFill/>
-          </a:ln>
-          <a:effectLst/>
-        </p:spPr>
-        <p:style>
-          <a:lnRef idx="1">
-            <a:schemeClr val="accent1"/>
-          </a:lnRef>
-          <a:fillRef idx="3">
-            <a:schemeClr val="accent1"/>
-          </a:fillRef>
-          <a:effectRef idx="2">
-            <a:schemeClr val="accent1"/>
-          </a:effectRef>
-          <a:fontRef idx="minor">
-            <a:schemeClr val="lt1"/>
-          </a:fontRef>
-        </p:style>
-        <p:txBody>
-          <a:bodyPr rtlCol="0" anchor="ctr"/>
-          <a:lstStyle/>
-          <a:p>
-            <a:pPr algn="ctr"/>
+              <a:t>● そのため、Power PlatformのDefault環境において、ユーザーが意図せず
+アプリ・フロー・Copilot Studioエージェント等を作成・利用してしまう
+可能性がある（依頼内容に記載の課題認識）</a:t>
+            </a:r>
           </a:p>
         </p:txBody>
       </p:sp>
@@ -7676,8 +7658,8 @@
         </p:nvSpPr>
         <p:spPr>
           <a:xfrm>
-            <a:off x="6446520" y="1444752"/>
-            <a:ext cx="5029200" cy="365760"/>
+            <a:off x="548640" y="3154680"/>
+            <a:ext cx="5349240" cy="365760"/>
           </a:xfrm>
           <a:prstGeom prst="rect">
             <a:avLst/>
@@ -7696,108 +7678,27 @@
               </a:lnSpc>
             </a:pPr>
             <a:r>
-              <a:rPr sz="1500" b="1" i="0">
-                <a:solidFill>
-                  <a:srgbClr val="1D8A70"/>
-                </a:solidFill>
-                <a:latin typeface="Yu Gothic"/>
-              </a:rPr>
-              <a:t>目的</a:t>
-            </a:r>
-          </a:p>
-        </p:txBody>
-      </p:sp>
-      <p:sp>
-        <p:nvSpPr>
-          <p:cNvPr id="11" name="TextBox 10"/>
-          <p:cNvSpPr txBox="1"/>
-          <p:nvPr/>
-        </p:nvSpPr>
-        <p:spPr>
-          <a:xfrm>
-            <a:off x="6309360" y="1965960"/>
-            <a:ext cx="5349240" cy="3657600"/>
-          </a:xfrm>
-          <a:prstGeom prst="rect">
-            <a:avLst/>
-          </a:prstGeom>
-          <a:noFill/>
-        </p:spPr>
-        <p:txBody>
-          <a:bodyPr wrap="square">
-            <a:spAutoFit/>
-          </a:bodyPr>
-          <a:lstStyle/>
-          <a:p>
-            <a:pPr>
-              <a:lnSpc>
-                <a:spcPct val="120000"/>
-              </a:lnSpc>
-              <a:spcAft>
-                <a:spcPts val="1200"/>
-              </a:spcAft>
-            </a:pPr>
-            <a:r>
-              <a:rPr sz="1350" b="0">
-                <a:solidFill>
-                  <a:srgbClr val="262626"/>
-                </a:solidFill>
-                <a:latin typeface="Yu Gothic"/>
-              </a:rPr>
-              <a:t>● Default環境を統制対象として管理できるか（マネージド環境化）を確認する</a:t>
-            </a:r>
-          </a:p>
-          <a:p>
-            <a:pPr>
-              <a:lnSpc>
-                <a:spcPct val="120000"/>
-              </a:lnSpc>
-              <a:spcAft>
-                <a:spcPts val="1200"/>
-              </a:spcAft>
-            </a:pPr>
-            <a:r>
-              <a:rPr sz="1350" b="0">
-                <a:solidFill>
-                  <a:srgbClr val="262626"/>
-                </a:solidFill>
-                <a:latin typeface="Yu Gothic"/>
-              </a:rPr>
-              <a:t>● DLPポリシーによるコネクタ利用・データ接続制限の適用可否を確認する</a:t>
-            </a:r>
-          </a:p>
-          <a:p>
-            <a:pPr>
-              <a:lnSpc>
-                <a:spcPct val="120000"/>
-              </a:lnSpc>
-              <a:spcAft>
-                <a:spcPts val="1200"/>
-              </a:spcAft>
-            </a:pPr>
-            <a:r>
-              <a:rPr sz="1350" b="0">
-                <a:solidFill>
-                  <a:srgbClr val="262626"/>
-                </a:solidFill>
-                <a:latin typeface="Yu Gothic"/>
-              </a:rPr>
-              <a:t>● 統制導入に伴うPremiumライセンスの要否・対象範囲を明確化し、
-利用制御方針の意思決定に必要な材料を整理する</a:t>
-            </a:r>
-          </a:p>
-        </p:txBody>
-      </p:sp>
-      <p:sp>
-        <p:nvSpPr>
-          <p:cNvPr id="12" name="Rectangle 11"/>
+              <a:rPr sz="1050" b="0" i="1">
+                <a:solidFill>
+                  <a:srgbClr val="6E6E6E"/>
+                </a:solidFill>
+                <a:latin typeface="Yu Gothic"/>
+              </a:rPr>
+              <a:t>出典：Microsoft公式ドキュメント「Power Platform environments overview」</a:t>
+            </a:r>
+          </a:p>
+        </p:txBody>
+      </p:sp>
+      <p:sp>
+        <p:nvSpPr>
+          <p:cNvPr id="11" name="Rectangle 10"/>
           <p:cNvSpPr/>
           <p:nvPr/>
         </p:nvSpPr>
         <p:spPr>
           <a:xfrm>
-            <a:off x="502920" y="5532120"/>
-            <a:ext cx="11155680" cy="777240"/>
+            <a:off x="548640" y="3611880"/>
+            <a:ext cx="5349240" cy="1234440"/>
           </a:xfrm>
           <a:prstGeom prst="rect">
             <a:avLst/>
@@ -7834,7 +7735,310 @@
       </p:sp>
       <p:sp>
         <p:nvSpPr>
+          <p:cNvPr id="12" name="TextBox 11"/>
+          <p:cNvSpPr txBox="1"/>
+          <p:nvPr/>
+        </p:nvSpPr>
+        <p:spPr>
+          <a:xfrm>
+            <a:off x="713232" y="3703320"/>
+            <a:ext cx="5029200" cy="274320"/>
+          </a:xfrm>
+          <a:prstGeom prst="rect">
+            <a:avLst/>
+          </a:prstGeom>
+          <a:noFill/>
+        </p:spPr>
+        <p:txBody>
+          <a:bodyPr wrap="square" anchor="t" lIns="0" rIns="0" tIns="0" bIns="0">
+            <a:spAutoFit/>
+          </a:bodyPr>
+          <a:lstStyle/>
+          <a:p>
+            <a:pPr algn="l">
+              <a:lnSpc>
+                <a:spcPct val="100000"/>
+              </a:lnSpc>
+            </a:pPr>
+            <a:r>
+              <a:rPr sz="1050" b="1" i="0">
+                <a:solidFill>
+                  <a:srgbClr val="6E6E6E"/>
+                </a:solidFill>
+                <a:latin typeface="Yu Gothic"/>
+              </a:rPr>
+              <a:t>【補足／一般的な背景（依頼内容には含まれない参考情報）】</a:t>
+            </a:r>
+          </a:p>
+        </p:txBody>
+      </p:sp>
+      <p:sp>
+        <p:nvSpPr>
           <p:cNvPr id="13" name="TextBox 12"/>
+          <p:cNvSpPr txBox="1"/>
+          <p:nvPr/>
+        </p:nvSpPr>
+        <p:spPr>
+          <a:xfrm>
+            <a:off x="713232" y="3977639"/>
+            <a:ext cx="5029200" cy="822960"/>
+          </a:xfrm>
+          <a:prstGeom prst="rect">
+            <a:avLst/>
+          </a:prstGeom>
+          <a:noFill/>
+        </p:spPr>
+        <p:txBody>
+          <a:bodyPr wrap="square" anchor="t" lIns="0" rIns="0" tIns="0" bIns="0">
+            <a:spAutoFit/>
+          </a:bodyPr>
+          <a:lstStyle/>
+          <a:p>
+            <a:pPr algn="l">
+              <a:lnSpc>
+                <a:spcPct val="120000"/>
+              </a:lnSpc>
+            </a:pPr>
+            <a:r>
+              <a:rPr sz="1100" b="0" i="0">
+                <a:solidFill>
+                  <a:srgbClr val="262626"/>
+                </a:solidFill>
+                <a:latin typeface="Yu Gothic"/>
+              </a:rPr>
+              <a:t>無秩序な利用（シャドーIT化）は、一般的に情報漏えい・コンプライアンス・</a:t>
+            </a:r>
+          </a:p>
+          <a:p>
+            <a:pPr algn="l">
+              <a:lnSpc>
+                <a:spcPct val="120000"/>
+              </a:lnSpc>
+            </a:pPr>
+            <a:r>
+              <a:rPr sz="1100" b="0" i="0">
+                <a:solidFill>
+                  <a:srgbClr val="262626"/>
+                </a:solidFill>
+                <a:latin typeface="Yu Gothic"/>
+              </a:rPr>
+              <a:t>コスト管理上のリスク要因として指摘されることが多い。</a:t>
+            </a:r>
+          </a:p>
+        </p:txBody>
+      </p:sp>
+      <p:sp>
+        <p:nvSpPr>
+          <p:cNvPr id="14" name="Rectangle 13"/>
+          <p:cNvSpPr/>
+          <p:nvPr/>
+        </p:nvSpPr>
+        <p:spPr>
+          <a:xfrm>
+            <a:off x="6263640" y="1508760"/>
+            <a:ext cx="5394960" cy="457200"/>
+          </a:xfrm>
+          <a:prstGeom prst="rect">
+            <a:avLst/>
+          </a:prstGeom>
+          <a:solidFill>
+            <a:srgbClr val="E1F4E6"/>
+          </a:solidFill>
+          <a:ln>
+            <a:noFill/>
+          </a:ln>
+          <a:effectLst/>
+        </p:spPr>
+        <p:style>
+          <a:lnRef idx="1">
+            <a:schemeClr val="accent1"/>
+          </a:lnRef>
+          <a:fillRef idx="3">
+            <a:schemeClr val="accent1"/>
+          </a:fillRef>
+          <a:effectRef idx="2">
+            <a:schemeClr val="accent1"/>
+          </a:effectRef>
+          <a:fontRef idx="minor">
+            <a:schemeClr val="lt1"/>
+          </a:fontRef>
+        </p:style>
+        <p:txBody>
+          <a:bodyPr rtlCol="0" anchor="ctr"/>
+          <a:lstStyle/>
+          <a:p>
+            <a:pPr algn="ctr"/>
+          </a:p>
+        </p:txBody>
+      </p:sp>
+      <p:sp>
+        <p:nvSpPr>
+          <p:cNvPr id="15" name="TextBox 14"/>
+          <p:cNvSpPr txBox="1"/>
+          <p:nvPr/>
+        </p:nvSpPr>
+        <p:spPr>
+          <a:xfrm>
+            <a:off x="6446520" y="1581912"/>
+            <a:ext cx="5029200" cy="365760"/>
+          </a:xfrm>
+          <a:prstGeom prst="rect">
+            <a:avLst/>
+          </a:prstGeom>
+          <a:noFill/>
+        </p:spPr>
+        <p:txBody>
+          <a:bodyPr wrap="square" anchor="t" lIns="0" rIns="0" tIns="0" bIns="0">
+            <a:spAutoFit/>
+          </a:bodyPr>
+          <a:lstStyle/>
+          <a:p>
+            <a:pPr algn="l">
+              <a:lnSpc>
+                <a:spcPct val="100000"/>
+              </a:lnSpc>
+            </a:pPr>
+            <a:r>
+              <a:rPr sz="1500" b="1" i="0">
+                <a:solidFill>
+                  <a:srgbClr val="1E8A4A"/>
+                </a:solidFill>
+                <a:latin typeface="Yu Gothic"/>
+              </a:rPr>
+              <a:t>目的</a:t>
+            </a:r>
+          </a:p>
+        </p:txBody>
+      </p:sp>
+      <p:sp>
+        <p:nvSpPr>
+          <p:cNvPr id="16" name="TextBox 15"/>
+          <p:cNvSpPr txBox="1"/>
+          <p:nvPr/>
+        </p:nvSpPr>
+        <p:spPr>
+          <a:xfrm>
+            <a:off x="6309360" y="2103120"/>
+            <a:ext cx="5349240" cy="2743200"/>
+          </a:xfrm>
+          <a:prstGeom prst="rect">
+            <a:avLst/>
+          </a:prstGeom>
+          <a:noFill/>
+        </p:spPr>
+        <p:txBody>
+          <a:bodyPr wrap="square">
+            <a:spAutoFit/>
+          </a:bodyPr>
+          <a:lstStyle/>
+          <a:p>
+            <a:pPr>
+              <a:lnSpc>
+                <a:spcPct val="120000"/>
+              </a:lnSpc>
+              <a:spcAft>
+                <a:spcPts val="1200"/>
+              </a:spcAft>
+            </a:pPr>
+            <a:r>
+              <a:rPr sz="1300" b="0">
+                <a:solidFill>
+                  <a:srgbClr val="262626"/>
+                </a:solidFill>
+                <a:latin typeface="Yu Gothic"/>
+              </a:rPr>
+              <a:t>● Default環境を管理可能な状態にするため、マネージド環境化により
+共有制限・利用状況の可視化・アクセス制限などを行えるかを確認する</a:t>
+            </a:r>
+          </a:p>
+          <a:p>
+            <a:pPr>
+              <a:lnSpc>
+                <a:spcPct val="120000"/>
+              </a:lnSpc>
+              <a:spcAft>
+                <a:spcPts val="1200"/>
+              </a:spcAft>
+            </a:pPr>
+            <a:r>
+              <a:rPr sz="1300" b="0">
+                <a:solidFill>
+                  <a:srgbClr val="262626"/>
+                </a:solidFill>
+                <a:latin typeface="Yu Gothic"/>
+              </a:rPr>
+              <a:t>● DLPポリシーによるコネクタ利用・データ接続制限の適用可否を確認する</a:t>
+            </a:r>
+          </a:p>
+          <a:p>
+            <a:pPr>
+              <a:lnSpc>
+                <a:spcPct val="120000"/>
+              </a:lnSpc>
+              <a:spcAft>
+                <a:spcPts val="1200"/>
+              </a:spcAft>
+            </a:pPr>
+            <a:r>
+              <a:rPr sz="1300" b="0">
+                <a:solidFill>
+                  <a:srgbClr val="262626"/>
+                </a:solidFill>
+                <a:latin typeface="Yu Gothic"/>
+              </a:rPr>
+              <a:t>● マネージド環境化に伴うPremiumライセンスの要否・対象範囲を明確化し、
+利用制御方針の意思決定に必要な材料を整理する</a:t>
+            </a:r>
+          </a:p>
+        </p:txBody>
+      </p:sp>
+      <p:sp>
+        <p:nvSpPr>
+          <p:cNvPr id="17" name="Rectangle 16"/>
+          <p:cNvSpPr/>
+          <p:nvPr/>
+        </p:nvSpPr>
+        <p:spPr>
+          <a:xfrm>
+            <a:off x="502920" y="5532120"/>
+            <a:ext cx="11155680" cy="777240"/>
+          </a:xfrm>
+          <a:prstGeom prst="rect">
+            <a:avLst/>
+          </a:prstGeom>
+          <a:solidFill>
+            <a:srgbClr val="1B2A4A"/>
+          </a:solidFill>
+          <a:ln>
+            <a:noFill/>
+          </a:ln>
+          <a:effectLst/>
+        </p:spPr>
+        <p:style>
+          <a:lnRef idx="1">
+            <a:schemeClr val="accent1"/>
+          </a:lnRef>
+          <a:fillRef idx="3">
+            <a:schemeClr val="accent1"/>
+          </a:fillRef>
+          <a:effectRef idx="2">
+            <a:schemeClr val="accent1"/>
+          </a:effectRef>
+          <a:fontRef idx="minor">
+            <a:schemeClr val="lt1"/>
+          </a:fontRef>
+        </p:style>
+        <p:txBody>
+          <a:bodyPr rtlCol="0" anchor="ctr"/>
+          <a:lstStyle/>
+          <a:p>
+            <a:pPr algn="ctr"/>
+          </a:p>
+        </p:txBody>
+      </p:sp>
+      <p:sp>
+        <p:nvSpPr>
+          <p:cNvPr id="18" name="TextBox 17"/>
           <p:cNvSpPr txBox="1"/>
           <p:nvPr/>
         </p:nvSpPr>
@@ -7862,18 +8066,18 @@
             <a:r>
               <a:rPr sz="1300" b="1" i="0">
                 <a:solidFill>
-                  <a:srgbClr val="1B2A4A"/>
-                </a:solidFill>
-                <a:latin typeface="Yu Gothic"/>
-              </a:rPr>
-              <a:t>本資料は依頼内容の各確認項目に対し、Microsoft公式情報を出典として明記した結論を提示するものである。</a:t>
-            </a:r>
-          </a:p>
-        </p:txBody>
-      </p:sp>
-      <p:sp>
-        <p:nvSpPr>
-          <p:cNvPr id="14" name="TextBox 13"/>
+                  <a:srgbClr val="FFFFFF"/>
+                </a:solidFill>
+                <a:latin typeface="Yu Gothic"/>
+              </a:rPr>
+              <a:t>本資料は依頼内容の各確認項目に対し、Microsoft公式情報を根拠として明記した結論を提示するものである。</a:t>
+            </a:r>
+          </a:p>
+        </p:txBody>
+      </p:sp>
+      <p:sp>
+        <p:nvSpPr>
+          <p:cNvPr id="19" name="TextBox 18"/>
           <p:cNvSpPr txBox="1"/>
           <p:nvPr/>
         </p:nvSpPr>
@@ -7912,7 +8116,7 @@
       </p:sp>
       <p:sp>
         <p:nvSpPr>
-          <p:cNvPr id="15" name="TextBox 14"/>
+          <p:cNvPr id="20" name="TextBox 19"/>
           <p:cNvSpPr txBox="1"/>
           <p:nvPr/>
         </p:nvSpPr>
@@ -8162,9 +8366,8 @@
               <a:tblGrid>
                 <a:gridCol w="457200"/>
                 <a:gridCol w="2468880"/>
-                <a:gridCol w="1280160"/>
-                <a:gridCol w="5760720"/>
-                <a:gridCol w="1463040"/>
+                <a:gridCol w="1737360"/>
+                <a:gridCol w="6766560"/>
               </a:tblGrid>
               <a:tr h="1014984">
                 <a:tc>
@@ -8259,29 +8462,6 @@
                     </a:solidFill>
                   </a:tcPr>
                 </a:tc>
-                <a:tc>
-                  <a:txBody>
-                    <a:bodyPr wrap="square"/>
-                    <a:lstStyle/>
-                    <a:p>
-                      <a:pPr algn="ctr"/>
-                      <a:r>
-                        <a:rPr sz="1250" b="1">
-                          <a:solidFill>
-                            <a:srgbClr val="FFFFFF"/>
-                          </a:solidFill>
-                          <a:latin typeface="Yu Gothic"/>
-                        </a:rPr>
-                        <a:t>出典</a:t>
-                      </a:r>
-                    </a:p>
-                  </a:txBody>
-                  <a:tcPr anchor="ctr" marL="101600" marR="101600" marT="50800" marB="50800">
-                    <a:solidFill>
-                      <a:srgbClr val="1B2A4A"/>
-                    </a:solidFill>
-                  </a:tcPr>
-                </a:tc>
               </a:tr>
               <a:tr h="1014984">
                 <a:tc>
@@ -8351,29 +8531,17 @@
                       <a:r>
                         <a:rPr sz="1200" b="1">
                           <a:solidFill>
-                            <a:srgbClr val="1D8A70"/>
+                            <a:srgbClr val="B86E00"/>
                           </a:solidFill>
                           <a:latin typeface="Yu Gothic"/>
                         </a:rPr>
-                        <a:t>YES</a:t>
-                      </a:r>
-                    </a:p>
-                    <a:p>
-                      <a:pPr algn="ctr"/>
-                      <a:r>
-                        <a:rPr sz="1200" b="1">
-                          <a:solidFill>
-                            <a:srgbClr val="1D8A70"/>
-                          </a:solidFill>
-                          <a:latin typeface="Yu Gothic"/>
-                        </a:rPr>
-                        <a:t>（条件付き）</a:t>
+                        <a:t>YES（条件付き）</a:t>
                       </a:r>
                     </a:p>
                   </a:txBody>
                   <a:tcPr anchor="ctr" marL="101600" marR="101600" marT="50800" marB="50800">
                     <a:solidFill>
-                      <a:srgbClr val="E3F3EE"/>
+                      <a:srgbClr val="FCEED9"/>
                     </a:solidFill>
                   </a:tcPr>
                 </a:tc>
@@ -8384,7 +8552,7 @@
                     <a:p>
                       <a:pPr algn="l"/>
                       <a:r>
-                        <a:rPr sz="1080" b="0">
+                        <a:rPr sz="1100" b="0">
                           <a:solidFill>
                             <a:srgbClr val="262626"/>
                           </a:solidFill>
@@ -8396,7 +8564,7 @@
                     <a:p>
                       <a:pPr algn="l"/>
                       <a:r>
-                        <a:rPr sz="1080" b="0">
+                        <a:rPr sz="1100" b="0">
                           <a:solidFill>
                             <a:srgbClr val="262626"/>
                           </a:solidFill>
@@ -8408,36 +8576,13 @@
                     <a:p>
                       <a:pPr algn="l"/>
                       <a:r>
-                        <a:rPr sz="1080" b="0">
+                        <a:rPr sz="1100" b="0">
                           <a:solidFill>
                             <a:srgbClr val="262626"/>
                           </a:solidFill>
                           <a:latin typeface="Yu Gothic"/>
                         </a:rPr>
                         <a:t>事実上「全社Premium化」が前提となる</a:t>
-                      </a:r>
-                    </a:p>
-                  </a:txBody>
-                  <a:tcPr anchor="ctr" marL="101600" marR="101600" marT="50800" marB="50800">
-                    <a:solidFill>
-                      <a:srgbClr val="F5F6F8"/>
-                    </a:solidFill>
-                  </a:tcPr>
-                </a:tc>
-                <a:tc>
-                  <a:txBody>
-                    <a:bodyPr wrap="square"/>
-                    <a:lstStyle/>
-                    <a:p>
-                      <a:pPr algn="ctr"/>
-                      <a:r>
-                        <a:rPr sz="1150" b="1">
-                          <a:solidFill>
-                            <a:srgbClr val="2E5AAC"/>
-                          </a:solidFill>
-                          <a:latin typeface="Yu Gothic"/>
-                        </a:rPr>
-                        <a:t>[1][7]</a:t>
                       </a:r>
                     </a:p>
                   </a:txBody>
@@ -8516,7 +8661,7 @@
                       <a:r>
                         <a:rPr sz="1200" b="1">
                           <a:solidFill>
-                            <a:srgbClr val="1D8A70"/>
+                            <a:srgbClr val="1E8A4A"/>
                           </a:solidFill>
                           <a:latin typeface="Yu Gothic"/>
                         </a:rPr>
@@ -8526,7 +8671,7 @@
                   </a:txBody>
                   <a:tcPr anchor="ctr" marL="101600" marR="101600" marT="50800" marB="50800">
                     <a:solidFill>
-                      <a:srgbClr val="E3F3EE"/>
+                      <a:srgbClr val="E1F4E6"/>
                     </a:solidFill>
                   </a:tcPr>
                 </a:tc>
@@ -8537,7 +8682,7 @@
                     <a:p>
                       <a:pPr algn="l"/>
                       <a:r>
-                        <a:rPr sz="1080" b="0">
+                        <a:rPr sz="1100" b="0">
                           <a:solidFill>
                             <a:srgbClr val="262626"/>
                           </a:solidFill>
@@ -8549,36 +8694,13 @@
                     <a:p>
                       <a:pPr algn="l"/>
                       <a:r>
-                        <a:rPr sz="1080" b="0">
+                        <a:rPr sz="1100" b="0">
                           <a:solidFill>
                             <a:srgbClr val="262626"/>
                           </a:solidFill>
                           <a:latin typeface="Yu Gothic"/>
                         </a:rPr>
                         <a:t>適用可能。Microsoft公式もDefault環境への適用を強く推奨している</a:t>
-                      </a:r>
-                    </a:p>
-                  </a:txBody>
-                  <a:tcPr anchor="ctr" marL="101600" marR="101600" marT="50800" marB="50800">
-                    <a:solidFill>
-                      <a:srgbClr val="FFFFFF"/>
-                    </a:solidFill>
-                  </a:tcPr>
-                </a:tc>
-                <a:tc>
-                  <a:txBody>
-                    <a:bodyPr wrap="square"/>
-                    <a:lstStyle/>
-                    <a:p>
-                      <a:pPr algn="ctr"/>
-                      <a:r>
-                        <a:rPr sz="1150" b="1">
-                          <a:solidFill>
-                            <a:srgbClr val="2E5AAC"/>
-                          </a:solidFill>
-                          <a:latin typeface="Yu Gothic"/>
-                        </a:rPr>
-                        <a:t>[4][7]</a:t>
                       </a:r>
                     </a:p>
                   </a:txBody>
@@ -8669,7 +8791,7 @@
                       <a:r>
                         <a:rPr sz="1200" b="1">
                           <a:solidFill>
-                            <a:srgbClr val="B02A2A"/>
+                            <a:srgbClr val="1E8A4A"/>
                           </a:solidFill>
                           <a:latin typeface="Yu Gothic"/>
                         </a:rPr>
@@ -8679,7 +8801,7 @@
                   </a:txBody>
                   <a:tcPr anchor="ctr" marL="101600" marR="101600" marT="50800" marB="50800">
                     <a:solidFill>
-                      <a:srgbClr val="F8E3E3"/>
+                      <a:srgbClr val="E1F4E6"/>
                     </a:solidFill>
                   </a:tcPr>
                 </a:tc>
@@ -8690,7 +8812,7 @@
                     <a:p>
                       <a:pPr algn="l"/>
                       <a:r>
-                        <a:rPr sz="1080" b="0">
+                        <a:rPr sz="1100" b="0">
                           <a:solidFill>
                             <a:srgbClr val="262626"/>
                           </a:solidFill>
@@ -8702,7 +8824,7 @@
                     <a:p>
                       <a:pPr algn="l"/>
                       <a:r>
-                        <a:rPr sz="1080" b="0">
+                        <a:rPr sz="1100" b="0">
                           <a:solidFill>
                             <a:srgbClr val="262626"/>
                           </a:solidFill>
@@ -8714,36 +8836,13 @@
                     <a:p>
                       <a:pPr algn="l"/>
                       <a:r>
-                        <a:rPr sz="1080" b="0">
+                        <a:rPr sz="1100" b="0">
                           <a:solidFill>
                             <a:srgbClr val="262626"/>
                           </a:solidFill>
                           <a:latin typeface="Yu Gothic"/>
                         </a:rPr>
                         <a:t>Enterpriseのいずれかのライセンスが必須</a:t>
-                      </a:r>
-                    </a:p>
-                  </a:txBody>
-                  <a:tcPr anchor="ctr" marL="101600" marR="101600" marT="50800" marB="50800">
-                    <a:solidFill>
-                      <a:srgbClr val="F5F6F8"/>
-                    </a:solidFill>
-                  </a:tcPr>
-                </a:tc>
-                <a:tc>
-                  <a:txBody>
-                    <a:bodyPr wrap="square"/>
-                    <a:lstStyle/>
-                    <a:p>
-                      <a:pPr algn="ctr"/>
-                      <a:r>
-                        <a:rPr sz="1150" b="1">
-                          <a:solidFill>
-                            <a:srgbClr val="2E5AAC"/>
-                          </a:solidFill>
-                          <a:latin typeface="Yu Gothic"/>
-                        </a:rPr>
-                        <a:t>[3]</a:t>
                       </a:r>
                     </a:p>
                   </a:txBody>
@@ -8834,7 +8933,7 @@
                       <a:r>
                         <a:rPr sz="1200" b="1">
                           <a:solidFill>
-                            <a:srgbClr val="B02A2A"/>
+                            <a:srgbClr val="2E5AAC"/>
                           </a:solidFill>
                           <a:latin typeface="Yu Gothic"/>
                         </a:rPr>
@@ -8844,7 +8943,7 @@
                   </a:txBody>
                   <a:tcPr anchor="ctr" marL="101600" marR="101600" marT="50800" marB="50800">
                     <a:solidFill>
-                      <a:srgbClr val="F8E3E3"/>
+                      <a:srgbClr val="E9EFF9"/>
                     </a:solidFill>
                   </a:tcPr>
                 </a:tc>
@@ -8855,7 +8954,7 @@
                     <a:p>
                       <a:pPr algn="l"/>
                       <a:r>
-                        <a:rPr sz="1080" b="0">
+                        <a:rPr sz="1100" b="0">
                           <a:solidFill>
                             <a:srgbClr val="262626"/>
                           </a:solidFill>
@@ -8867,36 +8966,13 @@
                     <a:p>
                       <a:pPr algn="l"/>
                       <a:r>
-                        <a:rPr sz="1080" b="0">
+                        <a:rPr sz="1100" b="0">
                           <a:solidFill>
                             <a:srgbClr val="262626"/>
                           </a:solidFill>
                           <a:latin typeface="Yu Gothic"/>
                         </a:rPr>
                         <a:t>フローを実行する利用者全員が対象となる</a:t>
-                      </a:r>
-                    </a:p>
-                  </a:txBody>
-                  <a:tcPr anchor="ctr" marL="101600" marR="101600" marT="50800" marB="50800">
-                    <a:solidFill>
-                      <a:srgbClr val="FFFFFF"/>
-                    </a:solidFill>
-                  </a:tcPr>
-                </a:tc>
-                <a:tc>
-                  <a:txBody>
-                    <a:bodyPr wrap="square"/>
-                    <a:lstStyle/>
-                    <a:p>
-                      <a:pPr algn="ctr"/>
-                      <a:r>
-                        <a:rPr sz="1150" b="1">
-                          <a:solidFill>
-                            <a:srgbClr val="2E5AAC"/>
-                          </a:solidFill>
-                          <a:latin typeface="Yu Gothic"/>
-                        </a:rPr>
-                        <a:t>[3]</a:t>
                       </a:r>
                     </a:p>
                   </a:txBody>
@@ -9202,9 +9278,8 @@
               <a:tblGrid>
                 <a:gridCol w="457200"/>
                 <a:gridCol w="2468880"/>
-                <a:gridCol w="1280160"/>
-                <a:gridCol w="5760720"/>
-                <a:gridCol w="1463040"/>
+                <a:gridCol w="1737360"/>
+                <a:gridCol w="6766560"/>
               </a:tblGrid>
               <a:tr h="982980">
                 <a:tc>
@@ -9299,29 +9374,6 @@
                     </a:solidFill>
                   </a:tcPr>
                 </a:tc>
-                <a:tc>
-                  <a:txBody>
-                    <a:bodyPr wrap="square"/>
-                    <a:lstStyle/>
-                    <a:p>
-                      <a:pPr algn="ctr"/>
-                      <a:r>
-                        <a:rPr sz="1250" b="1">
-                          <a:solidFill>
-                            <a:srgbClr val="FFFFFF"/>
-                          </a:solidFill>
-                          <a:latin typeface="Yu Gothic"/>
-                        </a:rPr>
-                        <a:t>出典</a:t>
-                      </a:r>
-                    </a:p>
-                  </a:txBody>
-                  <a:tcPr anchor="ctr" marL="101600" marR="101600" marT="50800" marB="50800">
-                    <a:solidFill>
-                      <a:srgbClr val="1B2A4A"/>
-                    </a:solidFill>
-                  </a:tcPr>
-                </a:tc>
               </a:tr>
               <a:tr h="982980">
                 <a:tc>
@@ -9403,7 +9455,7 @@
                       <a:r>
                         <a:rPr sz="1200" b="1">
                           <a:solidFill>
-                            <a:srgbClr val="1D8A70"/>
+                            <a:srgbClr val="B02A2A"/>
                           </a:solidFill>
                           <a:latin typeface="Yu Gothic"/>
                         </a:rPr>
@@ -9413,7 +9465,7 @@
                   </a:txBody>
                   <a:tcPr anchor="ctr" marL="101600" marR="101600" marT="50800" marB="50800">
                     <a:solidFill>
-                      <a:srgbClr val="E3F3EE"/>
+                      <a:srgbClr val="F8E3E3"/>
                     </a:solidFill>
                   </a:tcPr>
                 </a:tc>
@@ -9424,7 +9476,7 @@
                     <a:p>
                       <a:pPr algn="l"/>
                       <a:r>
-                        <a:rPr sz="1080" b="0">
+                        <a:rPr sz="1100" b="0">
                           <a:solidFill>
                             <a:srgbClr val="262626"/>
                           </a:solidFill>
@@ -9436,7 +9488,7 @@
                     <a:p>
                       <a:pPr algn="l"/>
                       <a:r>
-                        <a:rPr sz="1080" b="0">
+                        <a:rPr sz="1100" b="0">
                           <a:solidFill>
                             <a:srgbClr val="262626"/>
                           </a:solidFill>
@@ -9448,36 +9500,13 @@
                     <a:p>
                       <a:pPr algn="l"/>
                       <a:r>
-                        <a:rPr sz="1080" b="0">
+                        <a:rPr sz="1100" b="0">
                           <a:solidFill>
                             <a:srgbClr val="262626"/>
                           </a:solidFill>
                           <a:latin typeface="Yu Gothic"/>
                         </a:rPr>
                         <a:t>「権限（ロール）」が必要なだけで、ライセンスは不要</a:t>
-                      </a:r>
-                    </a:p>
-                  </a:txBody>
-                  <a:tcPr anchor="ctr" marL="101600" marR="101600" marT="50800" marB="50800">
-                    <a:solidFill>
-                      <a:srgbClr val="F5F6F8"/>
-                    </a:solidFill>
-                  </a:tcPr>
-                </a:tc>
-                <a:tc>
-                  <a:txBody>
-                    <a:bodyPr wrap="square"/>
-                    <a:lstStyle/>
-                    <a:p>
-                      <a:pPr algn="ctr"/>
-                      <a:r>
-                        <a:rPr sz="1150" b="1">
-                          <a:solidFill>
-                            <a:srgbClr val="2E5AAC"/>
-                          </a:solidFill>
-                          <a:latin typeface="Yu Gothic"/>
-                        </a:rPr>
-                        <a:t>[4][6]</a:t>
                       </a:r>
                     </a:p>
                   </a:txBody>
@@ -9577,7 +9606,7 @@
                     <a:p>
                       <a:pPr algn="l"/>
                       <a:r>
-                        <a:rPr sz="1080" b="0">
+                        <a:rPr sz="1100" b="0">
                           <a:solidFill>
                             <a:srgbClr val="262626"/>
                           </a:solidFill>
@@ -9589,7 +9618,7 @@
                     <a:p>
                       <a:pPr algn="l"/>
                       <a:r>
-                        <a:rPr sz="1080" b="0">
+                        <a:rPr sz="1100" b="0">
                           <a:solidFill>
                             <a:srgbClr val="262626"/>
                           </a:solidFill>
@@ -9601,36 +9630,13 @@
                     <a:p>
                       <a:pPr algn="l"/>
                       <a:r>
-                        <a:rPr sz="1080" b="0">
+                        <a:rPr sz="1100" b="0">
                           <a:solidFill>
                             <a:srgbClr val="262626"/>
                           </a:solidFill>
                           <a:latin typeface="Yu Gothic"/>
                         </a:rPr>
                         <a:t>うえで公開する（詳細はP.9）</a:t>
-                      </a:r>
-                    </a:p>
-                  </a:txBody>
-                  <a:tcPr anchor="ctr" marL="101600" marR="101600" marT="50800" marB="50800">
-                    <a:solidFill>
-                      <a:srgbClr val="FFFFFF"/>
-                    </a:solidFill>
-                  </a:tcPr>
-                </a:tc>
-                <a:tc>
-                  <a:txBody>
-                    <a:bodyPr wrap="square"/>
-                    <a:lstStyle/>
-                    <a:p>
-                      <a:pPr algn="ctr"/>
-                      <a:r>
-                        <a:rPr sz="1150" b="1">
-                          <a:solidFill>
-                            <a:srgbClr val="2E5AAC"/>
-                          </a:solidFill>
-                          <a:latin typeface="Yu Gothic"/>
-                        </a:rPr>
-                        <a:t>[4][5]</a:t>
                       </a:r>
                     </a:p>
                   </a:txBody>
@@ -9709,7 +9715,7 @@
                       <a:r>
                         <a:rPr sz="1200" b="1">
                           <a:solidFill>
-                            <a:srgbClr val="C45911"/>
+                            <a:srgbClr val="B86E00"/>
                           </a:solidFill>
                           <a:latin typeface="Yu Gothic"/>
                         </a:rPr>
@@ -9719,7 +9725,7 @@
                   </a:txBody>
                   <a:tcPr anchor="ctr" marL="101600" marR="101600" marT="50800" marB="50800">
                     <a:solidFill>
-                      <a:srgbClr val="FBEADA"/>
+                      <a:srgbClr val="FCEED9"/>
                     </a:solidFill>
                   </a:tcPr>
                 </a:tc>
@@ -9730,7 +9736,7 @@
                     <a:p>
                       <a:pPr algn="l"/>
                       <a:r>
-                        <a:rPr sz="1080" b="0">
+                        <a:rPr sz="1100" b="0">
                           <a:solidFill>
                             <a:srgbClr val="262626"/>
                           </a:solidFill>
@@ -9742,7 +9748,7 @@
                     <a:p>
                       <a:pPr algn="l"/>
                       <a:r>
-                        <a:rPr sz="1080" b="0">
+                        <a:rPr sz="1100" b="0">
                           <a:solidFill>
                             <a:srgbClr val="262626"/>
                           </a:solidFill>
@@ -9754,7 +9760,7 @@
                     <a:p>
                       <a:pPr algn="l"/>
                       <a:r>
-                        <a:rPr sz="1080" b="0">
+                        <a:rPr sz="1100" b="0">
                           <a:solidFill>
                             <a:srgbClr val="262626"/>
                           </a:solidFill>
@@ -9770,29 +9776,6 @@
                     </a:solidFill>
                   </a:tcPr>
                 </a:tc>
-                <a:tc>
-                  <a:txBody>
-                    <a:bodyPr wrap="square"/>
-                    <a:lstStyle/>
-                    <a:p>
-                      <a:pPr algn="ctr"/>
-                      <a:r>
-                        <a:rPr sz="1150" b="1">
-                          <a:solidFill>
-                            <a:srgbClr val="2E5AAC"/>
-                          </a:solidFill>
-                          <a:latin typeface="Yu Gothic"/>
-                        </a:rPr>
-                        <a:t>[3][9][10]</a:t>
-                      </a:r>
-                    </a:p>
-                  </a:txBody>
-                  <a:tcPr anchor="ctr" marL="101600" marR="101600" marT="50800" marB="50800">
-                    <a:solidFill>
-                      <a:srgbClr val="F5F6F8"/>
-                    </a:solidFill>
-                  </a:tcPr>
-                </a:tc>
               </a:tr>
             </a:tbl>
           </a:graphicData>
@@ -9806,8 +9789,8 @@
         </p:nvSpPr>
         <p:spPr>
           <a:xfrm>
-            <a:off x="365760" y="5532120"/>
-            <a:ext cx="11430000" cy="868680"/>
+            <a:off x="365760" y="5486400"/>
+            <a:ext cx="11430000" cy="914400"/>
           </a:xfrm>
           <a:prstGeom prst="rect">
             <a:avLst/>
@@ -9850,8 +9833,8 @@
         </p:nvSpPr>
         <p:spPr>
           <a:xfrm>
-            <a:off x="594360" y="5623560"/>
-            <a:ext cx="10972800" cy="685800"/>
+            <a:off x="594360" y="5577840"/>
+            <a:ext cx="10972800" cy="731520"/>
           </a:xfrm>
           <a:prstGeom prst="rect">
             <a:avLst/>
@@ -9876,7 +9859,7 @@
                 </a:solidFill>
                 <a:latin typeface="Yu Gothic"/>
               </a:rPr>
-              <a:t>補足論点（Default環境は通常環境同様にManaged化可能か／DLPは無償ユーザーにも適用されるか／Premiumライセンスは管理者・作成者・実行者のどこまで必要か／</a:t>
+              <a:t>補足論点（Default環境は通常環境同様にManaged化可能か／DLPは無償ユーザーにも適用されるか／Premiumライセンスは管理者・作成者・実行者の</a:t>
             </a:r>
           </a:p>
           <a:p>
@@ -9892,7 +9875,7 @@
                 </a:solidFill>
                 <a:latin typeface="Yu Gothic"/>
               </a:rPr>
-              <a:t>Copilot Studio等の現実的な利用制御方法）は、P.6〜P.11の詳細説明の中で対応する確認項目とあわせて回答する。</a:t>
+              <a:t>どこまで必要か／Copilot Studio等の現実的な利用制御方法）は、P.5〜P.10の詳細説明の中で対応する確認項目とあわせて回答する。</a:t>
             </a:r>
           </a:p>
         </p:txBody>
@@ -10176,7 +10159,7 @@
         <p:spPr>
           <a:xfrm>
             <a:off x="502920" y="1325880"/>
-            <a:ext cx="2103120" cy="457200"/>
+            <a:ext cx="2377440" cy="457200"/>
           </a:xfrm>
           <a:prstGeom prst="roundRect">
             <a:avLst>
@@ -10184,7 +10167,7 @@
             </a:avLst>
           </a:prstGeom>
           <a:solidFill>
-            <a:srgbClr val="E3F3EE"/>
+            <a:srgbClr val="FCEED9"/>
           </a:solidFill>
           <a:ln>
             <a:noFill/>
@@ -10213,7 +10196,7 @@
             <a:r>
               <a:rPr sz="1200" b="1">
                 <a:solidFill>
-                  <a:srgbClr val="1D8A70"/>
+                  <a:srgbClr val="B86E00"/>
                 </a:solidFill>
                 <a:latin typeface="Yu Gothic"/>
               </a:rPr>
@@ -10231,7 +10214,7 @@
         <p:spPr>
           <a:xfrm>
             <a:off x="502920" y="1965960"/>
-            <a:ext cx="6949440" cy="3931920"/>
+            <a:ext cx="6949440" cy="3246120"/>
           </a:xfrm>
           <a:prstGeom prst="rect">
             <a:avLst/>
@@ -10246,14 +10229,14 @@
           <a:p>
             <a:pPr>
               <a:lnSpc>
-                <a:spcPct val="115000"/>
+                <a:spcPct val="113000"/>
               </a:lnSpc>
               <a:spcAft>
-                <a:spcPts val="900"/>
+                <a:spcPts val="800"/>
               </a:spcAft>
             </a:pPr>
             <a:r>
-              <a:rPr sz="1300" b="1">
+              <a:rPr sz="1250" b="1">
                 <a:solidFill>
                   <a:srgbClr val="262626"/>
                 </a:solidFill>
@@ -10265,14 +10248,14 @@
           <a:p>
             <a:pPr marL="228600">
               <a:lnSpc>
-                <a:spcPct val="115000"/>
+                <a:spcPct val="113000"/>
               </a:lnSpc>
               <a:spcAft>
-                <a:spcPts val="900"/>
+                <a:spcPts val="800"/>
               </a:spcAft>
             </a:pPr>
             <a:r>
-              <a:rPr sz="1200" b="0">
+              <a:rPr sz="1150" b="0">
                 <a:solidFill>
                   <a:srgbClr val="262626"/>
                 </a:solidFill>
@@ -10285,14 +10268,14 @@
           <a:p>
             <a:pPr marL="228600">
               <a:lnSpc>
-                <a:spcPct val="115000"/>
+                <a:spcPct val="113000"/>
               </a:lnSpc>
               <a:spcAft>
-                <a:spcPts val="900"/>
+                <a:spcPts val="800"/>
               </a:spcAft>
             </a:pPr>
             <a:r>
-              <a:rPr sz="1200" b="0">
+              <a:rPr sz="1150" b="0">
                 <a:solidFill>
                   <a:srgbClr val="262626"/>
                 </a:solidFill>
@@ -10305,14 +10288,14 @@
           <a:p>
             <a:pPr>
               <a:lnSpc>
-                <a:spcPct val="115000"/>
+                <a:spcPct val="113000"/>
               </a:lnSpc>
               <a:spcAft>
-                <a:spcPts val="900"/>
+                <a:spcPts val="800"/>
               </a:spcAft>
             </a:pPr>
             <a:r>
-              <a:rPr sz="1300" b="1">
+              <a:rPr sz="1250" b="1">
                 <a:solidFill>
                   <a:srgbClr val="262626"/>
                 </a:solidFill>
@@ -10324,14 +10307,14 @@
           <a:p>
             <a:pPr marL="228600">
               <a:lnSpc>
-                <a:spcPct val="115000"/>
+                <a:spcPct val="113000"/>
               </a:lnSpc>
               <a:spcAft>
-                <a:spcPts val="900"/>
+                <a:spcPts val="800"/>
               </a:spcAft>
             </a:pPr>
             <a:r>
-              <a:rPr sz="1200" b="0">
+              <a:rPr sz="1150" b="0">
                 <a:solidFill>
                   <a:srgbClr val="262626"/>
                 </a:solidFill>
@@ -10345,14 +10328,14 @@
           <a:p>
             <a:pPr>
               <a:lnSpc>
-                <a:spcPct val="115000"/>
+                <a:spcPct val="113000"/>
               </a:lnSpc>
               <a:spcAft>
-                <a:spcPts val="900"/>
+                <a:spcPts val="800"/>
               </a:spcAft>
             </a:pPr>
             <a:r>
-              <a:rPr sz="1300" b="1">
+              <a:rPr sz="1250" b="1">
                 <a:solidFill>
                   <a:srgbClr val="262626"/>
                 </a:solidFill>
@@ -10364,14 +10347,14 @@
           <a:p>
             <a:pPr marL="228600">
               <a:lnSpc>
-                <a:spcPct val="115000"/>
+                <a:spcPct val="113000"/>
               </a:lnSpc>
               <a:spcAft>
-                <a:spcPts val="900"/>
+                <a:spcPts val="800"/>
               </a:spcAft>
             </a:pPr>
             <a:r>
-              <a:rPr sz="1200" b="0">
+              <a:rPr sz="1150" b="0">
                 <a:solidFill>
                   <a:srgbClr val="262626"/>
                 </a:solidFill>
@@ -10392,7 +10375,7 @@
         <p:spPr>
           <a:xfrm>
             <a:off x="7818120" y="1325880"/>
-            <a:ext cx="3886200" cy="3977639"/>
+            <a:ext cx="3886200" cy="3337560"/>
           </a:xfrm>
           <a:prstGeom prst="rect">
             <a:avLst/>
@@ -10475,7 +10458,7 @@
         <p:spPr>
           <a:xfrm>
             <a:off x="8046720" y="1965960"/>
-            <a:ext cx="3474720" cy="3200400"/>
+            <a:ext cx="3474720" cy="2651760"/>
           </a:xfrm>
           <a:prstGeom prst="rect">
             <a:avLst/>
@@ -10586,14 +10569,104 @@
       </p:sp>
       <p:sp>
         <p:nvSpPr>
-          <p:cNvPr id="11" name="TextBox 10"/>
+          <p:cNvPr id="11" name="Rectangle 10"/>
+          <p:cNvSpPr/>
+          <p:nvPr/>
+        </p:nvSpPr>
+        <p:spPr>
+          <a:xfrm>
+            <a:off x="502920" y="5349240"/>
+            <a:ext cx="11201400" cy="1051560"/>
+          </a:xfrm>
+          <a:prstGeom prst="rect">
+            <a:avLst/>
+          </a:prstGeom>
+          <a:solidFill>
+            <a:srgbClr val="EFF2F7"/>
+          </a:solidFill>
+          <a:ln w="9525">
+            <a:solidFill>
+              <a:srgbClr val="D9DCE1"/>
+            </a:solidFill>
+          </a:ln>
+          <a:effectLst/>
+        </p:spPr>
+        <p:style>
+          <a:lnRef idx="1">
+            <a:schemeClr val="accent1"/>
+          </a:lnRef>
+          <a:fillRef idx="3">
+            <a:schemeClr val="accent1"/>
+          </a:fillRef>
+          <a:effectRef idx="2">
+            <a:schemeClr val="accent1"/>
+          </a:effectRef>
+          <a:fontRef idx="minor">
+            <a:schemeClr val="lt1"/>
+          </a:fontRef>
+        </p:style>
+        <p:txBody>
+          <a:bodyPr rtlCol="0" anchor="ctr"/>
+          <a:lstStyle/>
+          <a:p>
+            <a:pPr algn="ctr"/>
+          </a:p>
+        </p:txBody>
+      </p:sp>
+      <p:sp>
+        <p:nvSpPr>
+          <p:cNvPr id="12" name="Rectangle 11"/>
+          <p:cNvSpPr/>
+          <p:nvPr/>
+        </p:nvSpPr>
+        <p:spPr>
+          <a:xfrm>
+            <a:off x="502920" y="5349240"/>
+            <a:ext cx="73152" cy="1051560"/>
+          </a:xfrm>
+          <a:prstGeom prst="rect">
+            <a:avLst/>
+          </a:prstGeom>
+          <a:solidFill>
+            <a:srgbClr val="2E5AAC"/>
+          </a:solidFill>
+          <a:ln>
+            <a:noFill/>
+          </a:ln>
+          <a:effectLst/>
+        </p:spPr>
+        <p:style>
+          <a:lnRef idx="1">
+            <a:schemeClr val="accent1"/>
+          </a:lnRef>
+          <a:fillRef idx="3">
+            <a:schemeClr val="accent1"/>
+          </a:fillRef>
+          <a:effectRef idx="2">
+            <a:schemeClr val="accent1"/>
+          </a:effectRef>
+          <a:fontRef idx="minor">
+            <a:schemeClr val="lt1"/>
+          </a:fontRef>
+        </p:style>
+        <p:txBody>
+          <a:bodyPr rtlCol="0" anchor="ctr"/>
+          <a:lstStyle/>
+          <a:p>
+            <a:pPr algn="ctr"/>
+          </a:p>
+        </p:txBody>
+      </p:sp>
+      <p:sp>
+        <p:nvSpPr>
+          <p:cNvPr id="13" name="TextBox 12"/>
           <p:cNvSpPr txBox="1"/>
           <p:nvPr/>
         </p:nvSpPr>
         <p:spPr>
           <a:xfrm>
-            <a:off x="502920" y="6080760"/>
-            <a:ext cx="11155680" cy="320040"/>
+            <a:off x="704088" y="5440680"/>
+            <a:ext cx="10835640" cy="292608"/>
           </a:xfrm>
           <a:prstGeom prst="rect">
             <a:avLst/>
@@ -10612,27 +10685,27 @@
               </a:lnSpc>
             </a:pPr>
             <a:r>
-              <a:rPr sz="1050" b="0" i="1">
-                <a:solidFill>
-                  <a:srgbClr val="6E6E6E"/>
-                </a:solidFill>
-                <a:latin typeface="Yu Gothic"/>
-              </a:rPr>
-              <a:t>出典：[1] Managed environments overview／[2] Enable managed environments／[7] Secure the default environment（いずれもMicrosoft Learn）</a:t>
-            </a:r>
-          </a:p>
-        </p:txBody>
-      </p:sp>
-      <p:sp>
-        <p:nvSpPr>
-          <p:cNvPr id="12" name="TextBox 11"/>
+              <a:rPr sz="1200" b="1" i="0">
+                <a:solidFill>
+                  <a:srgbClr val="1B2A4A"/>
+                </a:solidFill>
+                <a:latin typeface="Yu Gothic"/>
+              </a:rPr>
+              <a:t>根拠（Microsoft公式情報）： 「Managed environments overview／Enable managed environments／Manage and govern the default environment」</a:t>
+            </a:r>
+          </a:p>
+        </p:txBody>
+      </p:sp>
+      <p:sp>
+        <p:nvSpPr>
+          <p:cNvPr id="14" name="TextBox 13"/>
           <p:cNvSpPr txBox="1"/>
           <p:nvPr/>
         </p:nvSpPr>
         <p:spPr>
           <a:xfrm>
-            <a:off x="502920" y="6565392"/>
-            <a:ext cx="8229600" cy="274320"/>
+            <a:off x="704088" y="5769864"/>
+            <a:ext cx="10835640" cy="539496"/>
           </a:xfrm>
           <a:prstGeom prst="rect">
             <a:avLst/>
@@ -10647,6 +10720,45 @@
           <a:p>
             <a:pPr algn="l">
               <a:lnSpc>
+                <a:spcPct val="120000"/>
+              </a:lnSpc>
+            </a:pPr>
+            <a:r>
+              <a:rPr sz="1130" b="0" i="0">
+                <a:solidFill>
+                  <a:srgbClr val="262626"/>
+                </a:solidFill>
+                <a:latin typeface="Yu Gothic"/>
+              </a:rPr>
+              <a:t>「Admins can use managed environments with any type of environment」（環境の種類を問わず利用可能）と明記されており、Default環境も対象に含まれる。また、Default環境における統治強化のためマネージド環境機能の活用を推奨する記載があり、これらが本判定の根拠となっている。</a:t>
+            </a:r>
+          </a:p>
+        </p:txBody>
+      </p:sp>
+      <p:sp>
+        <p:nvSpPr>
+          <p:cNvPr id="15" name="TextBox 14"/>
+          <p:cNvSpPr txBox="1"/>
+          <p:nvPr/>
+        </p:nvSpPr>
+        <p:spPr>
+          <a:xfrm>
+            <a:off x="502920" y="6565392"/>
+            <a:ext cx="8229600" cy="274320"/>
+          </a:xfrm>
+          <a:prstGeom prst="rect">
+            <a:avLst/>
+          </a:prstGeom>
+          <a:noFill/>
+        </p:spPr>
+        <p:txBody>
+          <a:bodyPr wrap="square" anchor="t" lIns="0" rIns="0" tIns="0" bIns="0">
+            <a:spAutoFit/>
+          </a:bodyPr>
+          <a:lstStyle/>
+          <a:p>
+            <a:pPr algn="l">
+              <a:lnSpc>
                 <a:spcPct val="100000"/>
               </a:lnSpc>
             </a:pPr>
@@ -10664,7 +10776,7 @@
       </p:sp>
       <p:sp>
         <p:nvSpPr>
-          <p:cNvPr id="13" name="TextBox 12"/>
+          <p:cNvPr id="16" name="TextBox 15"/>
           <p:cNvSpPr txBox="1"/>
           <p:nvPr/>
         </p:nvSpPr>
@@ -10910,7 +11022,7 @@
             </a:avLst>
           </a:prstGeom>
           <a:solidFill>
-            <a:srgbClr val="E3F3EE"/>
+            <a:srgbClr val="E1F4E6"/>
           </a:solidFill>
           <a:ln>
             <a:noFill/>
@@ -10939,7 +11051,7 @@
             <a:r>
               <a:rPr sz="1200" b="1">
                 <a:solidFill>
-                  <a:srgbClr val="1D8A70"/>
+                  <a:srgbClr val="1E8A4A"/>
                 </a:solidFill>
                 <a:latin typeface="Yu Gothic"/>
               </a:rPr>
@@ -10957,7 +11069,7 @@
         <p:spPr>
           <a:xfrm>
             <a:off x="502920" y="1965960"/>
-            <a:ext cx="6949440" cy="3931920"/>
+            <a:ext cx="6949440" cy="3246120"/>
           </a:xfrm>
           <a:prstGeom prst="rect">
             <a:avLst/>
@@ -10972,14 +11084,14 @@
           <a:p>
             <a:pPr>
               <a:lnSpc>
-                <a:spcPct val="115000"/>
+                <a:spcPct val="113000"/>
               </a:lnSpc>
               <a:spcAft>
-                <a:spcPts val="900"/>
+                <a:spcPts val="800"/>
               </a:spcAft>
             </a:pPr>
             <a:r>
-              <a:rPr sz="1300" b="1">
+              <a:rPr sz="1250" b="1">
                 <a:solidFill>
                   <a:srgbClr val="262626"/>
                 </a:solidFill>
@@ -10991,14 +11103,14 @@
           <a:p>
             <a:pPr marL="228600">
               <a:lnSpc>
-                <a:spcPct val="115000"/>
+                <a:spcPct val="113000"/>
               </a:lnSpc>
               <a:spcAft>
-                <a:spcPts val="900"/>
+                <a:spcPts val="800"/>
               </a:spcAft>
             </a:pPr>
             <a:r>
-              <a:rPr sz="1200" b="0">
+              <a:rPr sz="1150" b="0">
                 <a:solidFill>
                   <a:srgbClr val="262626"/>
                 </a:solidFill>
@@ -11011,14 +11123,14 @@
           <a:p>
             <a:pPr>
               <a:lnSpc>
-                <a:spcPct val="115000"/>
+                <a:spcPct val="113000"/>
               </a:lnSpc>
               <a:spcAft>
-                <a:spcPts val="900"/>
+                <a:spcPts val="800"/>
               </a:spcAft>
             </a:pPr>
             <a:r>
-              <a:rPr sz="1300" b="1">
+              <a:rPr sz="1250" b="1">
                 <a:solidFill>
                   <a:srgbClr val="262626"/>
                 </a:solidFill>
@@ -11030,14 +11142,14 @@
           <a:p>
             <a:pPr marL="228600">
               <a:lnSpc>
-                <a:spcPct val="115000"/>
+                <a:spcPct val="113000"/>
               </a:lnSpc>
               <a:spcAft>
-                <a:spcPts val="900"/>
+                <a:spcPts val="800"/>
               </a:spcAft>
             </a:pPr>
             <a:r>
-              <a:rPr sz="1200" b="0">
+              <a:rPr sz="1150" b="0">
                 <a:solidFill>
                   <a:srgbClr val="262626"/>
                 </a:solidFill>
@@ -11049,14 +11161,14 @@
           <a:p>
             <a:pPr marL="228600">
               <a:lnSpc>
-                <a:spcPct val="115000"/>
+                <a:spcPct val="113000"/>
               </a:lnSpc>
               <a:spcAft>
-                <a:spcPts val="900"/>
+                <a:spcPts val="800"/>
               </a:spcAft>
             </a:pPr>
             <a:r>
-              <a:rPr sz="1200" b="0">
+              <a:rPr sz="1150" b="0">
                 <a:solidFill>
                   <a:srgbClr val="262626"/>
                 </a:solidFill>
@@ -11069,14 +11181,14 @@
           <a:p>
             <a:pPr>
               <a:lnSpc>
-                <a:spcPct val="115000"/>
+                <a:spcPct val="113000"/>
               </a:lnSpc>
               <a:spcAft>
-                <a:spcPts val="900"/>
+                <a:spcPts val="800"/>
               </a:spcAft>
             </a:pPr>
             <a:r>
-              <a:rPr sz="1300" b="1">
+              <a:rPr sz="1250" b="1">
                 <a:solidFill>
                   <a:srgbClr val="262626"/>
                 </a:solidFill>
@@ -11088,34 +11200,14 @@
           <a:p>
             <a:pPr marL="228600">
               <a:lnSpc>
-                <a:spcPct val="115000"/>
+                <a:spcPct val="113000"/>
               </a:lnSpc>
               <a:spcAft>
-                <a:spcPts val="900"/>
+                <a:spcPts val="800"/>
               </a:spcAft>
             </a:pPr>
             <a:r>
-              <a:rPr sz="1200" b="0">
-                <a:solidFill>
-                  <a:srgbClr val="262626"/>
-                </a:solidFill>
-                <a:latin typeface="Yu Gothic"/>
-              </a:rPr>
-              <a:t>- 「Having a data policy in place is especially critical for the
-default environment」— Default環境への適用を明確に推奨</a:t>
-            </a:r>
-          </a:p>
-          <a:p>
-            <a:pPr marL="228600">
-              <a:lnSpc>
-                <a:spcPct val="115000"/>
-              </a:lnSpc>
-              <a:spcAft>
-                <a:spcPts val="900"/>
-              </a:spcAft>
-            </a:pPr>
-            <a:r>
-              <a:rPr sz="1200" b="0">
+              <a:rPr sz="1150" b="0">
                 <a:solidFill>
                   <a:srgbClr val="262626"/>
                 </a:solidFill>
@@ -11136,7 +11228,7 @@
         <p:spPr>
           <a:xfrm>
             <a:off x="7818120" y="1325880"/>
-            <a:ext cx="3886200" cy="3977639"/>
+            <a:ext cx="3886200" cy="3337560"/>
           </a:xfrm>
           <a:prstGeom prst="rect">
             <a:avLst/>
@@ -11219,7 +11311,7 @@
         <p:spPr>
           <a:xfrm>
             <a:off x="8046720" y="1965960"/>
-            <a:ext cx="3474720" cy="3291840"/>
+            <a:ext cx="3474720" cy="2743200"/>
           </a:xfrm>
           <a:prstGeom prst="rect">
             <a:avLst/>
@@ -11311,14 +11403,104 @@
       </p:sp>
       <p:sp>
         <p:nvSpPr>
-          <p:cNvPr id="11" name="TextBox 10"/>
+          <p:cNvPr id="11" name="Rectangle 10"/>
+          <p:cNvSpPr/>
+          <p:nvPr/>
+        </p:nvSpPr>
+        <p:spPr>
+          <a:xfrm>
+            <a:off x="502920" y="5349240"/>
+            <a:ext cx="11201400" cy="1051560"/>
+          </a:xfrm>
+          <a:prstGeom prst="rect">
+            <a:avLst/>
+          </a:prstGeom>
+          <a:solidFill>
+            <a:srgbClr val="EFF2F7"/>
+          </a:solidFill>
+          <a:ln w="9525">
+            <a:solidFill>
+              <a:srgbClr val="D9DCE1"/>
+            </a:solidFill>
+          </a:ln>
+          <a:effectLst/>
+        </p:spPr>
+        <p:style>
+          <a:lnRef idx="1">
+            <a:schemeClr val="accent1"/>
+          </a:lnRef>
+          <a:fillRef idx="3">
+            <a:schemeClr val="accent1"/>
+          </a:fillRef>
+          <a:effectRef idx="2">
+            <a:schemeClr val="accent1"/>
+          </a:effectRef>
+          <a:fontRef idx="minor">
+            <a:schemeClr val="lt1"/>
+          </a:fontRef>
+        </p:style>
+        <p:txBody>
+          <a:bodyPr rtlCol="0" anchor="ctr"/>
+          <a:lstStyle/>
+          <a:p>
+            <a:pPr algn="ctr"/>
+          </a:p>
+        </p:txBody>
+      </p:sp>
+      <p:sp>
+        <p:nvSpPr>
+          <p:cNvPr id="12" name="Rectangle 11"/>
+          <p:cNvSpPr/>
+          <p:nvPr/>
+        </p:nvSpPr>
+        <p:spPr>
+          <a:xfrm>
+            <a:off x="502920" y="5349240"/>
+            <a:ext cx="73152" cy="1051560"/>
+          </a:xfrm>
+          <a:prstGeom prst="rect">
+            <a:avLst/>
+          </a:prstGeom>
+          <a:solidFill>
+            <a:srgbClr val="2E5AAC"/>
+          </a:solidFill>
+          <a:ln>
+            <a:noFill/>
+          </a:ln>
+          <a:effectLst/>
+        </p:spPr>
+        <p:style>
+          <a:lnRef idx="1">
+            <a:schemeClr val="accent1"/>
+          </a:lnRef>
+          <a:fillRef idx="3">
+            <a:schemeClr val="accent1"/>
+          </a:fillRef>
+          <a:effectRef idx="2">
+            <a:schemeClr val="accent1"/>
+          </a:effectRef>
+          <a:fontRef idx="minor">
+            <a:schemeClr val="lt1"/>
+          </a:fontRef>
+        </p:style>
+        <p:txBody>
+          <a:bodyPr rtlCol="0" anchor="ctr"/>
+          <a:lstStyle/>
+          <a:p>
+            <a:pPr algn="ctr"/>
+          </a:p>
+        </p:txBody>
+      </p:sp>
+      <p:sp>
+        <p:nvSpPr>
+          <p:cNvPr id="13" name="TextBox 12"/>
           <p:cNvSpPr txBox="1"/>
           <p:nvPr/>
         </p:nvSpPr>
         <p:spPr>
           <a:xfrm>
-            <a:off x="502920" y="6080760"/>
-            <a:ext cx="11155680" cy="320040"/>
+            <a:off x="704088" y="5440680"/>
+            <a:ext cx="10835640" cy="292608"/>
           </a:xfrm>
           <a:prstGeom prst="rect">
             <a:avLst/>
@@ -11337,27 +11519,27 @@
               </a:lnSpc>
             </a:pPr>
             <a:r>
-              <a:rPr sz="1050" b="0" i="1">
-                <a:solidFill>
-                  <a:srgbClr val="6E6E6E"/>
-                </a:solidFill>
-                <a:latin typeface="Yu Gothic"/>
-              </a:rPr>
-              <a:t>出典：[4] Manage data policies／[5] View policies and scope／[7] Secure the default environment（いずれもMicrosoft Learn）</a:t>
-            </a:r>
-          </a:p>
-        </p:txBody>
-      </p:sp>
-      <p:sp>
-        <p:nvSpPr>
-          <p:cNvPr id="12" name="TextBox 11"/>
+              <a:rPr sz="1200" b="1" i="0">
+                <a:solidFill>
+                  <a:srgbClr val="1B2A4A"/>
+                </a:solidFill>
+                <a:latin typeface="Yu Gothic"/>
+              </a:rPr>
+              <a:t>根拠（Microsoft公式情報）： 「Secure the default environment／View policies and scope」</a:t>
+            </a:r>
+          </a:p>
+        </p:txBody>
+      </p:sp>
+      <p:sp>
+        <p:nvSpPr>
+          <p:cNvPr id="14" name="TextBox 13"/>
           <p:cNvSpPr txBox="1"/>
           <p:nvPr/>
         </p:nvSpPr>
         <p:spPr>
           <a:xfrm>
-            <a:off x="502920" y="6565392"/>
-            <a:ext cx="8229600" cy="274320"/>
+            <a:off x="704088" y="5769864"/>
+            <a:ext cx="10835640" cy="539496"/>
           </a:xfrm>
           <a:prstGeom prst="rect">
             <a:avLst/>
@@ -11372,6 +11554,45 @@
           <a:p>
             <a:pPr algn="l">
               <a:lnSpc>
+                <a:spcPct val="120000"/>
+              </a:lnSpc>
+            </a:pPr>
+            <a:r>
+              <a:rPr sz="1130" b="0" i="0">
+                <a:solidFill>
+                  <a:srgbClr val="262626"/>
+                </a:solidFill>
+                <a:latin typeface="Yu Gothic"/>
+              </a:rPr>
+              <a:t>「Having a data policy in place is especially critical for the default environment」（Default環境へのデータポリシー整備は特に重要）と明記され、Default環境への適用が公式に推奨されている。環境レベル／テナントレベルのスコープ選択肢についても同ガイダンスに基づく。</a:t>
+            </a:r>
+          </a:p>
+        </p:txBody>
+      </p:sp>
+      <p:sp>
+        <p:nvSpPr>
+          <p:cNvPr id="15" name="TextBox 14"/>
+          <p:cNvSpPr txBox="1"/>
+          <p:nvPr/>
+        </p:nvSpPr>
+        <p:spPr>
+          <a:xfrm>
+            <a:off x="502920" y="6565392"/>
+            <a:ext cx="8229600" cy="274320"/>
+          </a:xfrm>
+          <a:prstGeom prst="rect">
+            <a:avLst/>
+          </a:prstGeom>
+          <a:noFill/>
+        </p:spPr>
+        <p:txBody>
+          <a:bodyPr wrap="square" anchor="t" lIns="0" rIns="0" tIns="0" bIns="0">
+            <a:spAutoFit/>
+          </a:bodyPr>
+          <a:lstStyle/>
+          <a:p>
+            <a:pPr algn="l">
+              <a:lnSpc>
                 <a:spcPct val="100000"/>
               </a:lnSpc>
             </a:pPr>
@@ -11389,7 +11610,7 @@
       </p:sp>
       <p:sp>
         <p:nvSpPr>
-          <p:cNvPr id="13" name="TextBox 12"/>
+          <p:cNvPr id="16" name="TextBox 15"/>
           <p:cNvSpPr txBox="1"/>
           <p:nvPr/>
         </p:nvSpPr>
@@ -11627,7 +11848,7 @@
         <p:spPr>
           <a:xfrm>
             <a:off x="502920" y="1298448"/>
-            <a:ext cx="4206240" cy="457200"/>
+            <a:ext cx="1188720" cy="457200"/>
           </a:xfrm>
           <a:prstGeom prst="roundRect">
             <a:avLst>
@@ -11635,7 +11856,7 @@
             </a:avLst>
           </a:prstGeom>
           <a:solidFill>
-            <a:srgbClr val="F8E3E3"/>
+            <a:srgbClr val="E1F4E6"/>
           </a:solidFill>
           <a:ln>
             <a:noFill/>
@@ -11662,20 +11883,75 @@
           <a:p>
             <a:pPr algn="ctr"/>
             <a:r>
-              <a:rPr sz="1300" b="1">
-                <a:solidFill>
-                  <a:srgbClr val="B02A2A"/>
-                </a:solidFill>
-                <a:latin typeface="Yu Gothic"/>
-              </a:rPr>
-              <a:t>判定：必要／対象は全ユーザー（管理者限定ではない）</a:t>
+              <a:rPr sz="1200" b="1">
+                <a:solidFill>
+                  <a:srgbClr val="1E8A4A"/>
+                </a:solidFill>
+                <a:latin typeface="Yu Gothic"/>
+              </a:rPr>
+              <a:t>判定：YES</a:t>
+            </a:r>
+          </a:p>
+        </p:txBody>
+      </p:sp>
+      <p:sp>
+        <p:nvSpPr>
+          <p:cNvPr id="7" name="Rounded Rectangle 6"/>
+          <p:cNvSpPr/>
+          <p:nvPr/>
+        </p:nvSpPr>
+        <p:spPr>
+          <a:xfrm>
+            <a:off x="1828800" y="1298448"/>
+            <a:ext cx="2011680" cy="457200"/>
+          </a:xfrm>
+          <a:prstGeom prst="roundRect">
+            <a:avLst>
+              <a:gd name="adj" fmla="val 50000"/>
+            </a:avLst>
+          </a:prstGeom>
+          <a:solidFill>
+            <a:srgbClr val="E9EFF9"/>
+          </a:solidFill>
+          <a:ln>
+            <a:noFill/>
+          </a:ln>
+          <a:effectLst/>
+        </p:spPr>
+        <p:style>
+          <a:lnRef idx="1">
+            <a:schemeClr val="accent1"/>
+          </a:lnRef>
+          <a:fillRef idx="3">
+            <a:schemeClr val="accent1"/>
+          </a:fillRef>
+          <a:effectRef idx="2">
+            <a:schemeClr val="accent1"/>
+          </a:effectRef>
+          <a:fontRef idx="minor">
+            <a:schemeClr val="lt1"/>
+          </a:fontRef>
+        </p:style>
+        <p:txBody>
+          <a:bodyPr rtlCol="0" anchor="ctr" wrap="none" lIns="25400" rIns="25400" tIns="12700" bIns="12700"/>
+          <a:lstStyle/>
+          <a:p>
+            <a:pPr algn="ctr"/>
+            <a:r>
+              <a:rPr sz="1200" b="1">
+                <a:solidFill>
+                  <a:srgbClr val="2E5AAC"/>
+                </a:solidFill>
+                <a:latin typeface="Yu Gothic"/>
+              </a:rPr>
+              <a:t>対象：全ユーザー</a:t>
             </a:r>
           </a:p>
         </p:txBody>
       </p:sp>
       <p:graphicFrame>
         <p:nvGraphicFramePr>
-          <p:cNvPr id="7" name="Table 6"/>
+          <p:cNvPr id="8" name="Table 7"/>
           <p:cNvGraphicFramePr>
             <a:graphicFrameLocks noGrp="1"/>
           </p:cNvGraphicFramePr>
@@ -11683,7 +11959,7 @@
         </p:nvGraphicFramePr>
         <p:xfrm>
           <a:off x="502920" y="1920240"/>
-          <a:ext cx="11201400" cy="3246120"/>
+          <a:ext cx="11201400" cy="2880360"/>
         </p:xfrm>
         <a:graphic>
           <a:graphicData uri="http://schemas.openxmlformats.org/drawingml/2006/table">
@@ -11697,7 +11973,7 @@
                 <a:gridCol w="2834640"/>
                 <a:gridCol w="2743200"/>
               </a:tblGrid>
-              <a:tr h="811530">
+              <a:tr h="720090">
                 <a:tc>
                   <a:txBody>
                     <a:bodyPr wrap="square"/>
@@ -11827,7 +12103,7 @@
                   </a:tcPr>
                 </a:tc>
               </a:tr>
-              <a:tr h="811530">
+              <a:tr h="720090">
                 <a:tc>
                   <a:txBody>
                     <a:bodyPr wrap="square"/>
@@ -11957,7 +12233,7 @@
                   </a:tcPr>
                 </a:tc>
               </a:tr>
-              <a:tr h="811530">
+              <a:tr h="720090">
                 <a:tc>
                   <a:txBody>
                     <a:bodyPr wrap="square"/>
@@ -12087,7 +12363,7 @@
                   </a:tcPr>
                 </a:tc>
               </a:tr>
-              <a:tr h="811530">
+              <a:tr h="720090">
                 <a:tc>
                   <a:txBody>
                     <a:bodyPr wrap="square"/>
@@ -12223,14 +12499,14 @@
       </p:graphicFrame>
       <p:sp>
         <p:nvSpPr>
-          <p:cNvPr id="8" name="TextBox 7"/>
+          <p:cNvPr id="9" name="TextBox 8"/>
           <p:cNvSpPr txBox="1"/>
           <p:nvPr/>
         </p:nvSpPr>
         <p:spPr>
           <a:xfrm>
-            <a:off x="502920" y="5349240"/>
-            <a:ext cx="11155680" cy="640080"/>
+            <a:off x="502920" y="4937760"/>
+            <a:ext cx="11155680" cy="457200"/>
           </a:xfrm>
           <a:prstGeom prst="rect">
             <a:avLst/>
@@ -12262,14 +12538,104 @@
       </p:sp>
       <p:sp>
         <p:nvSpPr>
-          <p:cNvPr id="9" name="TextBox 8"/>
+          <p:cNvPr id="10" name="Rectangle 9"/>
+          <p:cNvSpPr/>
+          <p:nvPr/>
+        </p:nvSpPr>
+        <p:spPr>
+          <a:xfrm>
+            <a:off x="502920" y="5486400"/>
+            <a:ext cx="11201400" cy="914400"/>
+          </a:xfrm>
+          <a:prstGeom prst="rect">
+            <a:avLst/>
+          </a:prstGeom>
+          <a:solidFill>
+            <a:srgbClr val="EFF2F7"/>
+          </a:solidFill>
+          <a:ln w="9525">
+            <a:solidFill>
+              <a:srgbClr val="D9DCE1"/>
+            </a:solidFill>
+          </a:ln>
+          <a:effectLst/>
+        </p:spPr>
+        <p:style>
+          <a:lnRef idx="1">
+            <a:schemeClr val="accent1"/>
+          </a:lnRef>
+          <a:fillRef idx="3">
+            <a:schemeClr val="accent1"/>
+          </a:fillRef>
+          <a:effectRef idx="2">
+            <a:schemeClr val="accent1"/>
+          </a:effectRef>
+          <a:fontRef idx="minor">
+            <a:schemeClr val="lt1"/>
+          </a:fontRef>
+        </p:style>
+        <p:txBody>
+          <a:bodyPr rtlCol="0" anchor="ctr"/>
+          <a:lstStyle/>
+          <a:p>
+            <a:pPr algn="ctr"/>
+          </a:p>
+        </p:txBody>
+      </p:sp>
+      <p:sp>
+        <p:nvSpPr>
+          <p:cNvPr id="11" name="Rectangle 10"/>
+          <p:cNvSpPr/>
+          <p:nvPr/>
+        </p:nvSpPr>
+        <p:spPr>
+          <a:xfrm>
+            <a:off x="502920" y="5486400"/>
+            <a:ext cx="73152" cy="914400"/>
+          </a:xfrm>
+          <a:prstGeom prst="rect">
+            <a:avLst/>
+          </a:prstGeom>
+          <a:solidFill>
+            <a:srgbClr val="2E5AAC"/>
+          </a:solidFill>
+          <a:ln>
+            <a:noFill/>
+          </a:ln>
+          <a:effectLst/>
+        </p:spPr>
+        <p:style>
+          <a:lnRef idx="1">
+            <a:schemeClr val="accent1"/>
+          </a:lnRef>
+          <a:fillRef idx="3">
+            <a:schemeClr val="accent1"/>
+          </a:fillRef>
+          <a:effectRef idx="2">
+            <a:schemeClr val="accent1"/>
+          </a:effectRef>
+          <a:fontRef idx="minor">
+            <a:schemeClr val="lt1"/>
+          </a:fontRef>
+        </p:style>
+        <p:txBody>
+          <a:bodyPr rtlCol="0" anchor="ctr"/>
+          <a:lstStyle/>
+          <a:p>
+            <a:pPr algn="ctr"/>
+          </a:p>
+        </p:txBody>
+      </p:sp>
+      <p:sp>
+        <p:nvSpPr>
+          <p:cNvPr id="12" name="TextBox 11"/>
           <p:cNvSpPr txBox="1"/>
           <p:nvPr/>
         </p:nvSpPr>
         <p:spPr>
           <a:xfrm>
-            <a:off x="502920" y="5989320"/>
-            <a:ext cx="11155680" cy="320040"/>
+            <a:off x="704088" y="5577840"/>
+            <a:ext cx="10835640" cy="292608"/>
           </a:xfrm>
           <a:prstGeom prst="rect">
             <a:avLst/>
@@ -12288,27 +12654,27 @@
               </a:lnSpc>
             </a:pPr>
             <a:r>
-              <a:rPr sz="1050" b="0" i="1">
-                <a:solidFill>
-                  <a:srgbClr val="6E6E6E"/>
-                </a:solidFill>
-                <a:latin typeface="Yu Gothic"/>
-              </a:rPr>
-              <a:t>出典：[3] Licensing（Managed Environments）／[11] Power Automate licensing FAQ（いずれもMicrosoft Learn）</a:t>
-            </a:r>
-          </a:p>
-        </p:txBody>
-      </p:sp>
-      <p:sp>
-        <p:nvSpPr>
-          <p:cNvPr id="10" name="TextBox 9"/>
+              <a:rPr sz="1200" b="1" i="0">
+                <a:solidFill>
+                  <a:srgbClr val="1B2A4A"/>
+                </a:solidFill>
+                <a:latin typeface="Yu Gothic"/>
+              </a:rPr>
+              <a:t>根拠（Microsoft公式情報）： 「Licensing（Managed Environments）／Power Automate licensing FAQ」</a:t>
+            </a:r>
+          </a:p>
+        </p:txBody>
+      </p:sp>
+      <p:sp>
+        <p:nvSpPr>
+          <p:cNvPr id="13" name="TextBox 12"/>
           <p:cNvSpPr txBox="1"/>
           <p:nvPr/>
         </p:nvSpPr>
         <p:spPr>
           <a:xfrm>
-            <a:off x="502920" y="6565392"/>
-            <a:ext cx="8229600" cy="274320"/>
+            <a:off x="704088" y="5907024"/>
+            <a:ext cx="10835640" cy="402336"/>
           </a:xfrm>
           <a:prstGeom prst="rect">
             <a:avLst/>
@@ -12323,6 +12689,45 @@
           <a:p>
             <a:pPr algn="l">
               <a:lnSpc>
+                <a:spcPct val="120000"/>
+              </a:lnSpc>
+            </a:pPr>
+            <a:r>
+              <a:rPr sz="1130" b="0" i="0">
+                <a:solidFill>
+                  <a:srgbClr val="262626"/>
+                </a:solidFill>
+                <a:latin typeface="Yu Gothic"/>
+              </a:rPr>
+              <a:t>マネージド環境下でアプリ・クラウドフローを実行するすべてのユーザーは、Power Apps Premium・Power Automate Premium・Dynamics 365 Enterprise のいずれかのライセンスが必須と明記されており、管理者専用の例外は記載されていない。</a:t>
+            </a:r>
+          </a:p>
+        </p:txBody>
+      </p:sp>
+      <p:sp>
+        <p:nvSpPr>
+          <p:cNvPr id="14" name="TextBox 13"/>
+          <p:cNvSpPr txBox="1"/>
+          <p:nvPr/>
+        </p:nvSpPr>
+        <p:spPr>
+          <a:xfrm>
+            <a:off x="502920" y="6565392"/>
+            <a:ext cx="8229600" cy="274320"/>
+          </a:xfrm>
+          <a:prstGeom prst="rect">
+            <a:avLst/>
+          </a:prstGeom>
+          <a:noFill/>
+        </p:spPr>
+        <p:txBody>
+          <a:bodyPr wrap="square" anchor="t" lIns="0" rIns="0" tIns="0" bIns="0">
+            <a:spAutoFit/>
+          </a:bodyPr>
+          <a:lstStyle/>
+          <a:p>
+            <a:pPr algn="l">
+              <a:lnSpc>
                 <a:spcPct val="100000"/>
               </a:lnSpc>
             </a:pPr>
@@ -12340,7 +12745,7 @@
       </p:sp>
       <p:sp>
         <p:nvSpPr>
-          <p:cNvPr id="11" name="TextBox 10"/>
+          <p:cNvPr id="15" name="TextBox 14"/>
           <p:cNvSpPr txBox="1"/>
           <p:nvPr/>
         </p:nvSpPr>
@@ -12586,7 +12991,7 @@
             </a:avLst>
           </a:prstGeom>
           <a:solidFill>
-            <a:srgbClr val="E3F3EE"/>
+            <a:srgbClr val="F8E3E3"/>
           </a:solidFill>
           <a:ln>
             <a:noFill/>
@@ -12615,7 +13020,7 @@
             <a:r>
               <a:rPr sz="1200" b="1">
                 <a:solidFill>
-                  <a:srgbClr val="1D8A70"/>
+                  <a:srgbClr val="B02A2A"/>
                 </a:solidFill>
                 <a:latin typeface="Yu Gothic"/>
               </a:rPr>
@@ -12633,7 +13038,7 @@
         <p:spPr>
           <a:xfrm>
             <a:off x="502920" y="1965960"/>
-            <a:ext cx="6949440" cy="3931920"/>
+            <a:ext cx="6949440" cy="3246120"/>
           </a:xfrm>
           <a:prstGeom prst="rect">
             <a:avLst/>
@@ -12648,14 +13053,14 @@
           <a:p>
             <a:pPr>
               <a:lnSpc>
-                <a:spcPct val="115000"/>
+                <a:spcPct val="112000"/>
               </a:lnSpc>
               <a:spcAft>
-                <a:spcPts val="900"/>
+                <a:spcPts val="800"/>
               </a:spcAft>
             </a:pPr>
             <a:r>
-              <a:rPr sz="1300" b="1">
+              <a:rPr sz="1250" b="1">
                 <a:solidFill>
                   <a:srgbClr val="262626"/>
                 </a:solidFill>
@@ -12668,14 +13073,14 @@
           <a:p>
             <a:pPr marL="228600">
               <a:lnSpc>
-                <a:spcPct val="115000"/>
+                <a:spcPct val="112000"/>
               </a:lnSpc>
               <a:spcAft>
-                <a:spcPts val="900"/>
+                <a:spcPts val="800"/>
               </a:spcAft>
             </a:pPr>
             <a:r>
-              <a:rPr sz="1200" b="0">
+              <a:rPr sz="1150" b="0">
                 <a:solidFill>
                   <a:srgbClr val="262626"/>
                 </a:solidFill>
@@ -12687,14 +13092,14 @@
           <a:p>
             <a:pPr marL="228600">
               <a:lnSpc>
-                <a:spcPct val="115000"/>
+                <a:spcPct val="112000"/>
               </a:lnSpc>
               <a:spcAft>
-                <a:spcPts val="900"/>
+                <a:spcPts val="800"/>
               </a:spcAft>
             </a:pPr>
             <a:r>
-              <a:rPr sz="1200" b="0">
+              <a:rPr sz="1150" b="0">
                 <a:solidFill>
                   <a:srgbClr val="262626"/>
                 </a:solidFill>
@@ -12707,14 +13112,14 @@
           <a:p>
             <a:pPr>
               <a:lnSpc>
-                <a:spcPct val="115000"/>
+                <a:spcPct val="112000"/>
               </a:lnSpc>
               <a:spcAft>
-                <a:spcPts val="900"/>
+                <a:spcPts val="800"/>
               </a:spcAft>
             </a:pPr>
             <a:r>
-              <a:rPr sz="1300" b="1">
+              <a:rPr sz="1250" b="1">
                 <a:solidFill>
                   <a:srgbClr val="262626"/>
                 </a:solidFill>
@@ -12726,14 +13131,14 @@
           <a:p>
             <a:pPr marL="228600">
               <a:lnSpc>
-                <a:spcPct val="115000"/>
+                <a:spcPct val="112000"/>
               </a:lnSpc>
               <a:spcAft>
-                <a:spcPts val="900"/>
+                <a:spcPts val="800"/>
               </a:spcAft>
             </a:pPr>
             <a:r>
-              <a:rPr sz="1200" b="0">
+              <a:rPr sz="1150" b="0">
                 <a:solidFill>
                   <a:srgbClr val="262626"/>
                 </a:solidFill>
@@ -12746,14 +13151,14 @@
           <a:p>
             <a:pPr>
               <a:lnSpc>
-                <a:spcPct val="115000"/>
+                <a:spcPct val="112000"/>
               </a:lnSpc>
               <a:spcAft>
-                <a:spcPts val="900"/>
+                <a:spcPts val="800"/>
               </a:spcAft>
             </a:pPr>
             <a:r>
-              <a:rPr sz="1300" b="1">
+              <a:rPr sz="1250" b="1">
                 <a:solidFill>
                   <a:srgbClr val="262626"/>
                 </a:solidFill>
@@ -12765,14 +13170,14 @@
           <a:p>
             <a:pPr marL="228600">
               <a:lnSpc>
-                <a:spcPct val="115000"/>
+                <a:spcPct val="112000"/>
               </a:lnSpc>
               <a:spcAft>
-                <a:spcPts val="900"/>
+                <a:spcPts val="800"/>
               </a:spcAft>
             </a:pPr>
             <a:r>
-              <a:rPr sz="1200" b="0">
+              <a:rPr sz="1150" b="0">
                 <a:solidFill>
                   <a:srgbClr val="262626"/>
                 </a:solidFill>
@@ -12794,13 +13199,13 @@
         <p:spPr>
           <a:xfrm>
             <a:off x="7726679" y="1325880"/>
-            <a:ext cx="3977639" cy="3977639"/>
+            <a:ext cx="3977639" cy="3337560"/>
           </a:xfrm>
           <a:prstGeom prst="rect">
             <a:avLst/>
           </a:prstGeom>
           <a:solidFill>
-            <a:srgbClr val="E3F3EE"/>
+            <a:srgbClr val="E1F4E6"/>
           </a:solidFill>
           <a:ln>
             <a:noFill/>
@@ -12859,7 +13264,7 @@
             <a:r>
               <a:rPr sz="1400" b="1" i="0">
                 <a:solidFill>
-                  <a:srgbClr val="1D8A70"/>
+                  <a:srgbClr val="1E8A4A"/>
                 </a:solidFill>
                 <a:latin typeface="Yu Gothic"/>
               </a:rPr>
@@ -12877,7 +13282,7 @@
         <p:spPr>
           <a:xfrm>
             <a:off x="7955279" y="2103120"/>
-            <a:ext cx="3566160" cy="3108960"/>
+            <a:ext cx="3566160" cy="2468880"/>
           </a:xfrm>
           <a:prstGeom prst="rect">
             <a:avLst/>
@@ -12892,10 +13297,10 @@
           <a:p>
             <a:pPr>
               <a:lnSpc>
-                <a:spcPct val="130000"/>
+                <a:spcPct val="125000"/>
               </a:lnSpc>
               <a:spcAft>
-                <a:spcPts val="1200"/>
+                <a:spcPts val="1000"/>
               </a:spcAft>
             </a:pPr>
             <a:r>
@@ -12912,10 +13317,10 @@
           <a:p>
             <a:pPr>
               <a:lnSpc>
-                <a:spcPct val="130000"/>
+                <a:spcPct val="125000"/>
               </a:lnSpc>
               <a:spcAft>
-                <a:spcPts val="1200"/>
+                <a:spcPts val="1000"/>
               </a:spcAft>
             </a:pPr>
             <a:r>
@@ -12933,10 +13338,10 @@
           <a:p>
             <a:pPr>
               <a:lnSpc>
-                <a:spcPct val="130000"/>
+                <a:spcPct val="125000"/>
               </a:lnSpc>
               <a:spcAft>
-                <a:spcPts val="1200"/>
+                <a:spcPts val="1000"/>
               </a:spcAft>
             </a:pPr>
             <a:r>
@@ -12954,14 +13359,104 @@
       </p:sp>
       <p:sp>
         <p:nvSpPr>
-          <p:cNvPr id="11" name="TextBox 10"/>
+          <p:cNvPr id="11" name="Rectangle 10"/>
+          <p:cNvSpPr/>
+          <p:nvPr/>
+        </p:nvSpPr>
+        <p:spPr>
+          <a:xfrm>
+            <a:off x="502920" y="5349240"/>
+            <a:ext cx="11201400" cy="1051560"/>
+          </a:xfrm>
+          <a:prstGeom prst="rect">
+            <a:avLst/>
+          </a:prstGeom>
+          <a:solidFill>
+            <a:srgbClr val="EFF2F7"/>
+          </a:solidFill>
+          <a:ln w="9525">
+            <a:solidFill>
+              <a:srgbClr val="D9DCE1"/>
+            </a:solidFill>
+          </a:ln>
+          <a:effectLst/>
+        </p:spPr>
+        <p:style>
+          <a:lnRef idx="1">
+            <a:schemeClr val="accent1"/>
+          </a:lnRef>
+          <a:fillRef idx="3">
+            <a:schemeClr val="accent1"/>
+          </a:fillRef>
+          <a:effectRef idx="2">
+            <a:schemeClr val="accent1"/>
+          </a:effectRef>
+          <a:fontRef idx="minor">
+            <a:schemeClr val="lt1"/>
+          </a:fontRef>
+        </p:style>
+        <p:txBody>
+          <a:bodyPr rtlCol="0" anchor="ctr"/>
+          <a:lstStyle/>
+          <a:p>
+            <a:pPr algn="ctr"/>
+          </a:p>
+        </p:txBody>
+      </p:sp>
+      <p:sp>
+        <p:nvSpPr>
+          <p:cNvPr id="12" name="Rectangle 11"/>
+          <p:cNvSpPr/>
+          <p:nvPr/>
+        </p:nvSpPr>
+        <p:spPr>
+          <a:xfrm>
+            <a:off x="502920" y="5349240"/>
+            <a:ext cx="73152" cy="1051560"/>
+          </a:xfrm>
+          <a:prstGeom prst="rect">
+            <a:avLst/>
+          </a:prstGeom>
+          <a:solidFill>
+            <a:srgbClr val="2E5AAC"/>
+          </a:solidFill>
+          <a:ln>
+            <a:noFill/>
+          </a:ln>
+          <a:effectLst/>
+        </p:spPr>
+        <p:style>
+          <a:lnRef idx="1">
+            <a:schemeClr val="accent1"/>
+          </a:lnRef>
+          <a:fillRef idx="3">
+            <a:schemeClr val="accent1"/>
+          </a:fillRef>
+          <a:effectRef idx="2">
+            <a:schemeClr val="accent1"/>
+          </a:effectRef>
+          <a:fontRef idx="minor">
+            <a:schemeClr val="lt1"/>
+          </a:fontRef>
+        </p:style>
+        <p:txBody>
+          <a:bodyPr rtlCol="0" anchor="ctr"/>
+          <a:lstStyle/>
+          <a:p>
+            <a:pPr algn="ctr"/>
+          </a:p>
+        </p:txBody>
+      </p:sp>
+      <p:sp>
+        <p:nvSpPr>
+          <p:cNvPr id="13" name="TextBox 12"/>
           <p:cNvSpPr txBox="1"/>
           <p:nvPr/>
         </p:nvSpPr>
         <p:spPr>
           <a:xfrm>
-            <a:off x="502920" y="6080760"/>
-            <a:ext cx="11155680" cy="320040"/>
+            <a:off x="704088" y="5440680"/>
+            <a:ext cx="10835640" cy="292608"/>
           </a:xfrm>
           <a:prstGeom prst="rect">
             <a:avLst/>
@@ -12980,27 +13475,27 @@
               </a:lnSpc>
             </a:pPr>
             <a:r>
-              <a:rPr sz="1050" b="0" i="1">
-                <a:solidFill>
-                  <a:srgbClr val="6E6E6E"/>
-                </a:solidFill>
-                <a:latin typeface="Yu Gothic"/>
-              </a:rPr>
-              <a:t>出典：[4] Manage data policies／[6] Impact of data policies on apps and flows（いずれもMicrosoft Learn）</a:t>
-            </a:r>
-          </a:p>
-        </p:txBody>
-      </p:sp>
-      <p:sp>
-        <p:nvSpPr>
-          <p:cNvPr id="12" name="TextBox 11"/>
+              <a:rPr sz="1200" b="1" i="0">
+                <a:solidFill>
+                  <a:srgbClr val="1B2A4A"/>
+                </a:solidFill>
+                <a:latin typeface="Yu Gothic"/>
+              </a:rPr>
+              <a:t>根拠（Microsoft公式情報）： 「Manage data policies／Impact of data policies on apps and flows」</a:t>
+            </a:r>
+          </a:p>
+        </p:txBody>
+      </p:sp>
+      <p:sp>
+        <p:nvSpPr>
+          <p:cNvPr id="14" name="TextBox 13"/>
           <p:cNvSpPr txBox="1"/>
           <p:nvPr/>
         </p:nvSpPr>
         <p:spPr>
           <a:xfrm>
-            <a:off x="502920" y="6565392"/>
-            <a:ext cx="8229600" cy="274320"/>
+            <a:off x="704088" y="5769864"/>
+            <a:ext cx="10835640" cy="539496"/>
           </a:xfrm>
           <a:prstGeom prst="rect">
             <a:avLst/>
@@ -13015,6 +13510,45 @@
           <a:p>
             <a:pPr algn="l">
               <a:lnSpc>
+                <a:spcPct val="120000"/>
+              </a:lnSpc>
+            </a:pPr>
+            <a:r>
+              <a:rPr sz="1130" b="0" i="0">
+                <a:solidFill>
+                  <a:srgbClr val="262626"/>
+                </a:solidFill>
+                <a:latin typeface="Yu Gothic"/>
+              </a:rPr>
+              <a:t>DLPポリシーはライセンス種別を問わず全利用者に適用され、違反時は実行時・設計時にエラーとしてブロックされると説明されている。ポリシー適用の条件としてPremiumライセンスの保有は記載されておらず、これが本判定の根拠となっている。</a:t>
+            </a:r>
+          </a:p>
+        </p:txBody>
+      </p:sp>
+      <p:sp>
+        <p:nvSpPr>
+          <p:cNvPr id="15" name="TextBox 14"/>
+          <p:cNvSpPr txBox="1"/>
+          <p:nvPr/>
+        </p:nvSpPr>
+        <p:spPr>
+          <a:xfrm>
+            <a:off x="502920" y="6565392"/>
+            <a:ext cx="8229600" cy="274320"/>
+          </a:xfrm>
+          <a:prstGeom prst="rect">
+            <a:avLst/>
+          </a:prstGeom>
+          <a:noFill/>
+        </p:spPr>
+        <p:txBody>
+          <a:bodyPr wrap="square" anchor="t" lIns="0" rIns="0" tIns="0" bIns="0">
+            <a:spAutoFit/>
+          </a:bodyPr>
+          <a:lstStyle/>
+          <a:p>
+            <a:pPr algn="l">
+              <a:lnSpc>
                 <a:spcPct val="100000"/>
               </a:lnSpc>
             </a:pPr>
@@ -13032,7 +13566,7 @@
       </p:sp>
       <p:sp>
         <p:nvSpPr>
-          <p:cNvPr id="13" name="TextBox 12"/>
+          <p:cNvPr id="16" name="TextBox 15"/>
           <p:cNvSpPr txBox="1"/>
           <p:nvPr/>
         </p:nvSpPr>
@@ -13263,14 +13797,69 @@
       </p:sp>
       <p:sp>
         <p:nvSpPr>
-          <p:cNvPr id="6" name="Oval 5"/>
+          <p:cNvPr id="6" name="Rounded Rectangle 5"/>
           <p:cNvSpPr/>
           <p:nvPr/>
         </p:nvSpPr>
         <p:spPr>
           <a:xfrm>
-            <a:off x="502920" y="1371600"/>
-            <a:ext cx="457200" cy="457200"/>
+            <a:off x="502920" y="1298448"/>
+            <a:ext cx="1737360" cy="457200"/>
+          </a:xfrm>
+          <a:prstGeom prst="roundRect">
+            <a:avLst>
+              <a:gd name="adj" fmla="val 50000"/>
+            </a:avLst>
+          </a:prstGeom>
+          <a:solidFill>
+            <a:srgbClr val="E9EFF9"/>
+          </a:solidFill>
+          <a:ln>
+            <a:noFill/>
+          </a:ln>
+          <a:effectLst/>
+        </p:spPr>
+        <p:style>
+          <a:lnRef idx="1">
+            <a:schemeClr val="accent1"/>
+          </a:lnRef>
+          <a:fillRef idx="3">
+            <a:schemeClr val="accent1"/>
+          </a:fillRef>
+          <a:effectRef idx="2">
+            <a:schemeClr val="accent1"/>
+          </a:effectRef>
+          <a:fontRef idx="minor">
+            <a:schemeClr val="lt1"/>
+          </a:fontRef>
+        </p:style>
+        <p:txBody>
+          <a:bodyPr rtlCol="0" anchor="ctr" wrap="none" lIns="25400" rIns="25400" tIns="12700" bIns="12700"/>
+          <a:lstStyle/>
+          <a:p>
+            <a:pPr algn="ctr"/>
+            <a:r>
+              <a:rPr sz="1200" b="1">
+                <a:solidFill>
+                  <a:srgbClr val="2E5AAC"/>
+                </a:solidFill>
+                <a:latin typeface="Yu Gothic"/>
+              </a:rPr>
+              <a:t>判定：手順あり</a:t>
+            </a:r>
+          </a:p>
+        </p:txBody>
+      </p:sp>
+      <p:sp>
+        <p:nvSpPr>
+          <p:cNvPr id="7" name="Oval 6"/>
+          <p:cNvSpPr/>
+          <p:nvPr/>
+        </p:nvSpPr>
+        <p:spPr>
+          <a:xfrm>
+            <a:off x="502920" y="1920240"/>
+            <a:ext cx="384048" cy="384048"/>
           </a:xfrm>
           <a:prstGeom prst="ellipse">
             <a:avLst/>
@@ -13307,14 +13896,14 @@
       </p:sp>
       <p:sp>
         <p:nvSpPr>
-          <p:cNvPr id="7" name="TextBox 6"/>
+          <p:cNvPr id="8" name="TextBox 7"/>
           <p:cNvSpPr txBox="1"/>
           <p:nvPr/>
         </p:nvSpPr>
         <p:spPr>
           <a:xfrm>
-            <a:off x="502920" y="1426464"/>
-            <a:ext cx="457200" cy="365760"/>
+            <a:off x="502920" y="1965960"/>
+            <a:ext cx="384048" cy="292608"/>
           </a:xfrm>
           <a:prstGeom prst="rect">
             <a:avLst/>
@@ -13333,7 +13922,7 @@
               </a:lnSpc>
             </a:pPr>
             <a:r>
-              <a:rPr sz="1600" b="1" i="0">
+              <a:rPr sz="1400" b="1" i="0">
                 <a:solidFill>
                   <a:srgbClr val="FFFFFF"/>
                 </a:solidFill>
@@ -13346,14 +13935,14 @@
       </p:sp>
       <p:sp>
         <p:nvSpPr>
-          <p:cNvPr id="8" name="TextBox 7"/>
+          <p:cNvPr id="9" name="TextBox 8"/>
           <p:cNvSpPr txBox="1"/>
           <p:nvPr/>
         </p:nvSpPr>
         <p:spPr>
           <a:xfrm>
-            <a:off x="1143000" y="1353312"/>
-            <a:ext cx="4480560" cy="548640"/>
+            <a:off x="1051560" y="1901952"/>
+            <a:ext cx="4480560" cy="457200"/>
           </a:xfrm>
           <a:prstGeom prst="rect">
             <a:avLst/>
@@ -13368,11 +13957,11 @@
           <a:p>
             <a:pPr algn="l">
               <a:lnSpc>
-                <a:spcPct val="105000"/>
-              </a:lnSpc>
-            </a:pPr>
-            <a:r>
-              <a:rPr sz="1300" b="1" i="0">
+                <a:spcPct val="100000"/>
+              </a:lnSpc>
+            </a:pPr>
+            <a:r>
+              <a:rPr sz="1250" b="1" i="0">
                 <a:solidFill>
                   <a:srgbClr val="1B2A4A"/>
                 </a:solidFill>
@@ -13385,14 +13974,14 @@
       </p:sp>
       <p:sp>
         <p:nvSpPr>
-          <p:cNvPr id="9" name="TextBox 8"/>
+          <p:cNvPr id="10" name="TextBox 9"/>
           <p:cNvSpPr txBox="1"/>
           <p:nvPr/>
         </p:nvSpPr>
         <p:spPr>
           <a:xfrm>
-            <a:off x="5760720" y="1353312"/>
-            <a:ext cx="5943600" cy="594360"/>
+            <a:off x="5669280" y="1901952"/>
+            <a:ext cx="6035040" cy="502920"/>
           </a:xfrm>
           <a:prstGeom prst="rect">
             <a:avLst/>
@@ -13407,11 +13996,11 @@
           <a:p>
             <a:pPr algn="l">
               <a:lnSpc>
-                <a:spcPct val="110000"/>
-              </a:lnSpc>
-            </a:pPr>
-            <a:r>
-              <a:rPr sz="1150" b="0" i="0">
+                <a:spcPct val="105000"/>
+              </a:lnSpc>
+            </a:pPr>
+            <a:r>
+              <a:rPr sz="1100" b="0" i="0">
                 <a:solidFill>
                   <a:srgbClr val="262626"/>
                 </a:solidFill>
@@ -13423,11 +14012,11 @@
           <a:p>
             <a:pPr algn="l">
               <a:lnSpc>
-                <a:spcPct val="110000"/>
-              </a:lnSpc>
-            </a:pPr>
-            <a:r>
-              <a:rPr sz="1150" b="0" i="0">
+                <a:spcPct val="105000"/>
+              </a:lnSpc>
+            </a:pPr>
+            <a:r>
+              <a:rPr sz="1100" b="0" i="0">
                 <a:solidFill>
                   <a:srgbClr val="262626"/>
                 </a:solidFill>
@@ -13440,14 +14029,14 @@
       </p:sp>
       <p:sp>
         <p:nvSpPr>
-          <p:cNvPr id="10" name="Rectangle 9"/>
+          <p:cNvPr id="11" name="Rectangle 10"/>
           <p:cNvSpPr/>
           <p:nvPr/>
         </p:nvSpPr>
         <p:spPr>
           <a:xfrm>
-            <a:off x="722376" y="1828800"/>
-            <a:ext cx="19050" cy="256032"/>
+            <a:off x="685800" y="2304288"/>
+            <a:ext cx="19050" cy="173736"/>
           </a:xfrm>
           <a:prstGeom prst="rect">
             <a:avLst/>
@@ -13484,14 +14073,14 @@
       </p:sp>
       <p:sp>
         <p:nvSpPr>
-          <p:cNvPr id="11" name="Oval 10"/>
+          <p:cNvPr id="12" name="Oval 11"/>
           <p:cNvSpPr/>
           <p:nvPr/>
         </p:nvSpPr>
         <p:spPr>
           <a:xfrm>
-            <a:off x="502920" y="2084832"/>
-            <a:ext cx="457200" cy="457200"/>
+            <a:off x="502920" y="2496312"/>
+            <a:ext cx="384048" cy="384048"/>
           </a:xfrm>
           <a:prstGeom prst="ellipse">
             <a:avLst/>
@@ -13528,14 +14117,14 @@
       </p:sp>
       <p:sp>
         <p:nvSpPr>
-          <p:cNvPr id="12" name="TextBox 11"/>
+          <p:cNvPr id="13" name="TextBox 12"/>
           <p:cNvSpPr txBox="1"/>
           <p:nvPr/>
         </p:nvSpPr>
         <p:spPr>
           <a:xfrm>
-            <a:off x="502920" y="2139696"/>
-            <a:ext cx="457200" cy="365760"/>
+            <a:off x="502920" y="2542032"/>
+            <a:ext cx="384048" cy="292608"/>
           </a:xfrm>
           <a:prstGeom prst="rect">
             <a:avLst/>
@@ -13554,7 +14143,7 @@
               </a:lnSpc>
             </a:pPr>
             <a:r>
-              <a:rPr sz="1600" b="1" i="0">
+              <a:rPr sz="1400" b="1" i="0">
                 <a:solidFill>
                   <a:srgbClr val="FFFFFF"/>
                 </a:solidFill>
@@ -13567,14 +14156,14 @@
       </p:sp>
       <p:sp>
         <p:nvSpPr>
-          <p:cNvPr id="13" name="TextBox 12"/>
+          <p:cNvPr id="14" name="TextBox 13"/>
           <p:cNvSpPr txBox="1"/>
           <p:nvPr/>
         </p:nvSpPr>
         <p:spPr>
           <a:xfrm>
-            <a:off x="1143000" y="2066544"/>
-            <a:ext cx="4480560" cy="548640"/>
+            <a:off x="1051560" y="2478024"/>
+            <a:ext cx="4480560" cy="457200"/>
           </a:xfrm>
           <a:prstGeom prst="rect">
             <a:avLst/>
@@ -13589,11 +14178,11 @@
           <a:p>
             <a:pPr algn="l">
               <a:lnSpc>
-                <a:spcPct val="105000"/>
-              </a:lnSpc>
-            </a:pPr>
-            <a:r>
-              <a:rPr sz="1300" b="1" i="0">
+                <a:spcPct val="100000"/>
+              </a:lnSpc>
+            </a:pPr>
+            <a:r>
+              <a:rPr sz="1250" b="1" i="0">
                 <a:solidFill>
                   <a:srgbClr val="1B2A4A"/>
                 </a:solidFill>
@@ -13606,14 +14195,14 @@
       </p:sp>
       <p:sp>
         <p:nvSpPr>
-          <p:cNvPr id="14" name="TextBox 13"/>
+          <p:cNvPr id="15" name="TextBox 14"/>
           <p:cNvSpPr txBox="1"/>
           <p:nvPr/>
         </p:nvSpPr>
         <p:spPr>
           <a:xfrm>
-            <a:off x="5760720" y="2066544"/>
-            <a:ext cx="5943600" cy="594360"/>
+            <a:off x="5669280" y="2478024"/>
+            <a:ext cx="6035040" cy="502920"/>
           </a:xfrm>
           <a:prstGeom prst="rect">
             <a:avLst/>
@@ -13628,11 +14217,11 @@
           <a:p>
             <a:pPr algn="l">
               <a:lnSpc>
-                <a:spcPct val="110000"/>
-              </a:lnSpc>
-            </a:pPr>
-            <a:r>
-              <a:rPr sz="1150" b="0" i="0">
+                <a:spcPct val="105000"/>
+              </a:lnSpc>
+            </a:pPr>
+            <a:r>
+              <a:rPr sz="1100" b="0" i="0">
                 <a:solidFill>
                   <a:srgbClr val="262626"/>
                 </a:solidFill>
@@ -13645,14 +14234,14 @@
       </p:sp>
       <p:sp>
         <p:nvSpPr>
-          <p:cNvPr id="15" name="Rectangle 14"/>
+          <p:cNvPr id="16" name="Rectangle 15"/>
           <p:cNvSpPr/>
           <p:nvPr/>
         </p:nvSpPr>
         <p:spPr>
           <a:xfrm>
-            <a:off x="722376" y="2542032"/>
-            <a:ext cx="19050" cy="256032"/>
+            <a:off x="685800" y="2880360"/>
+            <a:ext cx="19050" cy="173736"/>
           </a:xfrm>
           <a:prstGeom prst="rect">
             <a:avLst/>
@@ -13689,14 +14278,14 @@
       </p:sp>
       <p:sp>
         <p:nvSpPr>
-          <p:cNvPr id="16" name="Oval 15"/>
+          <p:cNvPr id="17" name="Oval 16"/>
           <p:cNvSpPr/>
           <p:nvPr/>
         </p:nvSpPr>
         <p:spPr>
           <a:xfrm>
-            <a:off x="502920" y="2798064"/>
-            <a:ext cx="457200" cy="457200"/>
+            <a:off x="502920" y="3072384"/>
+            <a:ext cx="384048" cy="384048"/>
           </a:xfrm>
           <a:prstGeom prst="ellipse">
             <a:avLst/>
@@ -13733,14 +14322,14 @@
       </p:sp>
       <p:sp>
         <p:nvSpPr>
-          <p:cNvPr id="17" name="TextBox 16"/>
+          <p:cNvPr id="18" name="TextBox 17"/>
           <p:cNvSpPr txBox="1"/>
           <p:nvPr/>
         </p:nvSpPr>
         <p:spPr>
           <a:xfrm>
-            <a:off x="502920" y="2852928"/>
-            <a:ext cx="457200" cy="365760"/>
+            <a:off x="502920" y="3118104"/>
+            <a:ext cx="384048" cy="292608"/>
           </a:xfrm>
           <a:prstGeom prst="rect">
             <a:avLst/>
@@ -13759,7 +14348,7 @@
               </a:lnSpc>
             </a:pPr>
             <a:r>
-              <a:rPr sz="1600" b="1" i="0">
+              <a:rPr sz="1400" b="1" i="0">
                 <a:solidFill>
                   <a:srgbClr val="FFFFFF"/>
                 </a:solidFill>
@@ -13772,14 +14361,14 @@
       </p:sp>
       <p:sp>
         <p:nvSpPr>
-          <p:cNvPr id="18" name="TextBox 17"/>
+          <p:cNvPr id="19" name="TextBox 18"/>
           <p:cNvSpPr txBox="1"/>
           <p:nvPr/>
         </p:nvSpPr>
         <p:spPr>
           <a:xfrm>
-            <a:off x="1143000" y="2779776"/>
-            <a:ext cx="4480560" cy="548640"/>
+            <a:off x="1051560" y="3054096"/>
+            <a:ext cx="4480560" cy="457200"/>
           </a:xfrm>
           <a:prstGeom prst="rect">
             <a:avLst/>
@@ -13794,11 +14383,11 @@
           <a:p>
             <a:pPr algn="l">
               <a:lnSpc>
-                <a:spcPct val="105000"/>
-              </a:lnSpc>
-            </a:pPr>
-            <a:r>
-              <a:rPr sz="1300" b="1" i="0">
+                <a:spcPct val="100000"/>
+              </a:lnSpc>
+            </a:pPr>
+            <a:r>
+              <a:rPr sz="1250" b="1" i="0">
                 <a:solidFill>
                   <a:srgbClr val="1B2A4A"/>
                 </a:solidFill>
@@ -13811,14 +14400,14 @@
       </p:sp>
       <p:sp>
         <p:nvSpPr>
-          <p:cNvPr id="19" name="TextBox 18"/>
+          <p:cNvPr id="20" name="TextBox 19"/>
           <p:cNvSpPr txBox="1"/>
           <p:nvPr/>
         </p:nvSpPr>
         <p:spPr>
           <a:xfrm>
-            <a:off x="5760720" y="2779776"/>
-            <a:ext cx="5943600" cy="594360"/>
+            <a:off x="5669280" y="3054096"/>
+            <a:ext cx="6035040" cy="502920"/>
           </a:xfrm>
           <a:prstGeom prst="rect">
             <a:avLst/>
@@ -13833,11 +14422,11 @@
           <a:p>
             <a:pPr algn="l">
               <a:lnSpc>
-                <a:spcPct val="110000"/>
-              </a:lnSpc>
-            </a:pPr>
-            <a:r>
-              <a:rPr sz="1150" b="0" i="0">
+                <a:spcPct val="105000"/>
+              </a:lnSpc>
+            </a:pPr>
+            <a:r>
+              <a:rPr sz="1100" b="0" i="0">
                 <a:solidFill>
                   <a:srgbClr val="262626"/>
                 </a:solidFill>
@@ -13849,11 +14438,11 @@
           <a:p>
             <a:pPr algn="l">
               <a:lnSpc>
-                <a:spcPct val="110000"/>
-              </a:lnSpc>
-            </a:pPr>
-            <a:r>
-              <a:rPr sz="1150" b="0" i="0">
+                <a:spcPct val="105000"/>
+              </a:lnSpc>
+            </a:pPr>
+            <a:r>
+              <a:rPr sz="1100" b="0" i="0">
                 <a:solidFill>
                   <a:srgbClr val="262626"/>
                 </a:solidFill>
@@ -13866,14 +14455,14 @@
       </p:sp>
       <p:sp>
         <p:nvSpPr>
-          <p:cNvPr id="20" name="Rectangle 19"/>
+          <p:cNvPr id="21" name="Rectangle 20"/>
           <p:cNvSpPr/>
           <p:nvPr/>
         </p:nvSpPr>
         <p:spPr>
           <a:xfrm>
-            <a:off x="722376" y="3255264"/>
-            <a:ext cx="19050" cy="256032"/>
+            <a:off x="685800" y="3456432"/>
+            <a:ext cx="19050" cy="173736"/>
           </a:xfrm>
           <a:prstGeom prst="rect">
             <a:avLst/>
@@ -13910,14 +14499,14 @@
       </p:sp>
       <p:sp>
         <p:nvSpPr>
-          <p:cNvPr id="21" name="Oval 20"/>
+          <p:cNvPr id="22" name="Oval 21"/>
           <p:cNvSpPr/>
           <p:nvPr/>
         </p:nvSpPr>
         <p:spPr>
           <a:xfrm>
-            <a:off x="502920" y="3511296"/>
-            <a:ext cx="457200" cy="457200"/>
+            <a:off x="502920" y="3648456"/>
+            <a:ext cx="384048" cy="384048"/>
           </a:xfrm>
           <a:prstGeom prst="ellipse">
             <a:avLst/>
@@ -13954,14 +14543,14 @@
       </p:sp>
       <p:sp>
         <p:nvSpPr>
-          <p:cNvPr id="22" name="TextBox 21"/>
+          <p:cNvPr id="23" name="TextBox 22"/>
           <p:cNvSpPr txBox="1"/>
           <p:nvPr/>
         </p:nvSpPr>
         <p:spPr>
           <a:xfrm>
-            <a:off x="502920" y="3566160"/>
-            <a:ext cx="457200" cy="365760"/>
+            <a:off x="502920" y="3694176"/>
+            <a:ext cx="384048" cy="292608"/>
           </a:xfrm>
           <a:prstGeom prst="rect">
             <a:avLst/>
@@ -13980,7 +14569,7 @@
               </a:lnSpc>
             </a:pPr>
             <a:r>
-              <a:rPr sz="1600" b="1" i="0">
+              <a:rPr sz="1400" b="1" i="0">
                 <a:solidFill>
                   <a:srgbClr val="FFFFFF"/>
                 </a:solidFill>
@@ -13993,14 +14582,14 @@
       </p:sp>
       <p:sp>
         <p:nvSpPr>
-          <p:cNvPr id="23" name="TextBox 22"/>
+          <p:cNvPr id="24" name="TextBox 23"/>
           <p:cNvSpPr txBox="1"/>
           <p:nvPr/>
         </p:nvSpPr>
         <p:spPr>
           <a:xfrm>
-            <a:off x="1143000" y="3493008"/>
-            <a:ext cx="4480560" cy="548640"/>
+            <a:off x="1051560" y="3630168"/>
+            <a:ext cx="4480560" cy="457200"/>
           </a:xfrm>
           <a:prstGeom prst="rect">
             <a:avLst/>
@@ -14015,11 +14604,11 @@
           <a:p>
             <a:pPr algn="l">
               <a:lnSpc>
-                <a:spcPct val="105000"/>
-              </a:lnSpc>
-            </a:pPr>
-            <a:r>
-              <a:rPr sz="1300" b="1" i="0">
+                <a:spcPct val="100000"/>
+              </a:lnSpc>
+            </a:pPr>
+            <a:r>
+              <a:rPr sz="1250" b="1" i="0">
                 <a:solidFill>
                   <a:srgbClr val="1B2A4A"/>
                 </a:solidFill>
@@ -14032,14 +14621,14 @@
       </p:sp>
       <p:sp>
         <p:nvSpPr>
-          <p:cNvPr id="24" name="TextBox 23"/>
+          <p:cNvPr id="25" name="TextBox 24"/>
           <p:cNvSpPr txBox="1"/>
           <p:nvPr/>
         </p:nvSpPr>
         <p:spPr>
           <a:xfrm>
-            <a:off x="5760720" y="3493008"/>
-            <a:ext cx="5943600" cy="594360"/>
+            <a:off x="5669280" y="3630168"/>
+            <a:ext cx="6035040" cy="502920"/>
           </a:xfrm>
           <a:prstGeom prst="rect">
             <a:avLst/>
@@ -14054,11 +14643,11 @@
           <a:p>
             <a:pPr algn="l">
               <a:lnSpc>
-                <a:spcPct val="110000"/>
-              </a:lnSpc>
-            </a:pPr>
-            <a:r>
-              <a:rPr sz="1150" b="0" i="0">
+                <a:spcPct val="105000"/>
+              </a:lnSpc>
+            </a:pPr>
+            <a:r>
+              <a:rPr sz="1100" b="0" i="0">
                 <a:solidFill>
                   <a:srgbClr val="262626"/>
                 </a:solidFill>
@@ -14070,11 +14659,11 @@
           <a:p>
             <a:pPr algn="l">
               <a:lnSpc>
-                <a:spcPct val="110000"/>
-              </a:lnSpc>
-            </a:pPr>
-            <a:r>
-              <a:rPr sz="1150" b="0" i="0">
+                <a:spcPct val="105000"/>
+              </a:lnSpc>
+            </a:pPr>
+            <a:r>
+              <a:rPr sz="1100" b="0" i="0">
                 <a:solidFill>
                   <a:srgbClr val="262626"/>
                 </a:solidFill>
@@ -14087,14 +14676,14 @@
       </p:sp>
       <p:sp>
         <p:nvSpPr>
-          <p:cNvPr id="25" name="Rectangle 24"/>
+          <p:cNvPr id="26" name="Rectangle 25"/>
           <p:cNvSpPr/>
           <p:nvPr/>
         </p:nvSpPr>
         <p:spPr>
           <a:xfrm>
-            <a:off x="722376" y="3968496"/>
-            <a:ext cx="19050" cy="256032"/>
+            <a:off x="685800" y="4032504"/>
+            <a:ext cx="19050" cy="173736"/>
           </a:xfrm>
           <a:prstGeom prst="rect">
             <a:avLst/>
@@ -14131,14 +14720,14 @@
       </p:sp>
       <p:sp>
         <p:nvSpPr>
-          <p:cNvPr id="26" name="Oval 25"/>
+          <p:cNvPr id="27" name="Oval 26"/>
           <p:cNvSpPr/>
           <p:nvPr/>
         </p:nvSpPr>
         <p:spPr>
           <a:xfrm>
             <a:off x="502920" y="4224528"/>
-            <a:ext cx="457200" cy="457200"/>
+            <a:ext cx="384048" cy="384048"/>
           </a:xfrm>
           <a:prstGeom prst="ellipse">
             <a:avLst/>
@@ -14175,14 +14764,14 @@
       </p:sp>
       <p:sp>
         <p:nvSpPr>
-          <p:cNvPr id="27" name="TextBox 26"/>
+          <p:cNvPr id="28" name="TextBox 27"/>
           <p:cNvSpPr txBox="1"/>
           <p:nvPr/>
         </p:nvSpPr>
         <p:spPr>
           <a:xfrm>
-            <a:off x="502920" y="4279392"/>
-            <a:ext cx="457200" cy="365760"/>
+            <a:off x="502920" y="4270248"/>
+            <a:ext cx="384048" cy="292608"/>
           </a:xfrm>
           <a:prstGeom prst="rect">
             <a:avLst/>
@@ -14201,7 +14790,7 @@
               </a:lnSpc>
             </a:pPr>
             <a:r>
-              <a:rPr sz="1600" b="1" i="0">
+              <a:rPr sz="1400" b="1" i="0">
                 <a:solidFill>
                   <a:srgbClr val="FFFFFF"/>
                 </a:solidFill>
@@ -14214,14 +14803,14 @@
       </p:sp>
       <p:sp>
         <p:nvSpPr>
-          <p:cNvPr id="28" name="TextBox 27"/>
+          <p:cNvPr id="29" name="TextBox 28"/>
           <p:cNvSpPr txBox="1"/>
           <p:nvPr/>
         </p:nvSpPr>
         <p:spPr>
           <a:xfrm>
-            <a:off x="1143000" y="4206240"/>
-            <a:ext cx="4480560" cy="548640"/>
+            <a:off x="1051560" y="4206240"/>
+            <a:ext cx="4480560" cy="457200"/>
           </a:xfrm>
           <a:prstGeom prst="rect">
             <a:avLst/>
@@ -14236,11 +14825,11 @@
           <a:p>
             <a:pPr algn="l">
               <a:lnSpc>
-                <a:spcPct val="105000"/>
-              </a:lnSpc>
-            </a:pPr>
-            <a:r>
-              <a:rPr sz="1300" b="1" i="0">
+                <a:spcPct val="100000"/>
+              </a:lnSpc>
+            </a:pPr>
+            <a:r>
+              <a:rPr sz="1250" b="1" i="0">
                 <a:solidFill>
                   <a:srgbClr val="1B2A4A"/>
                 </a:solidFill>
@@ -14253,14 +14842,14 @@
       </p:sp>
       <p:sp>
         <p:nvSpPr>
-          <p:cNvPr id="29" name="TextBox 28"/>
+          <p:cNvPr id="30" name="TextBox 29"/>
           <p:cNvSpPr txBox="1"/>
           <p:nvPr/>
         </p:nvSpPr>
         <p:spPr>
           <a:xfrm>
-            <a:off x="5760720" y="4206240"/>
-            <a:ext cx="5943600" cy="594360"/>
+            <a:off x="5669280" y="4206240"/>
+            <a:ext cx="6035040" cy="502920"/>
           </a:xfrm>
           <a:prstGeom prst="rect">
             <a:avLst/>
@@ -14275,11 +14864,11 @@
           <a:p>
             <a:pPr algn="l">
               <a:lnSpc>
-                <a:spcPct val="110000"/>
-              </a:lnSpc>
-            </a:pPr>
-            <a:r>
-              <a:rPr sz="1150" b="0" i="0">
+                <a:spcPct val="105000"/>
+              </a:lnSpc>
+            </a:pPr>
+            <a:r>
+              <a:rPr sz="1100" b="0" i="0">
                 <a:solidFill>
                   <a:srgbClr val="262626"/>
                 </a:solidFill>
@@ -14292,14 +14881,14 @@
       </p:sp>
       <p:sp>
         <p:nvSpPr>
-          <p:cNvPr id="30" name="Rectangle 29"/>
+          <p:cNvPr id="31" name="Rectangle 30"/>
           <p:cNvSpPr/>
           <p:nvPr/>
         </p:nvSpPr>
         <p:spPr>
           <a:xfrm>
-            <a:off x="722376" y="4681728"/>
-            <a:ext cx="19050" cy="256032"/>
+            <a:off x="685800" y="4608576"/>
+            <a:ext cx="19050" cy="173736"/>
           </a:xfrm>
           <a:prstGeom prst="rect">
             <a:avLst/>
@@ -14336,14 +14925,14 @@
       </p:sp>
       <p:sp>
         <p:nvSpPr>
-          <p:cNvPr id="31" name="Oval 30"/>
+          <p:cNvPr id="32" name="Oval 31"/>
           <p:cNvSpPr/>
           <p:nvPr/>
         </p:nvSpPr>
         <p:spPr>
           <a:xfrm>
-            <a:off x="502920" y="4937760"/>
-            <a:ext cx="457200" cy="457200"/>
+            <a:off x="502920" y="4800600"/>
+            <a:ext cx="384048" cy="384048"/>
           </a:xfrm>
           <a:prstGeom prst="ellipse">
             <a:avLst/>
@@ -14380,14 +14969,14 @@
       </p:sp>
       <p:sp>
         <p:nvSpPr>
-          <p:cNvPr id="32" name="TextBox 31"/>
+          <p:cNvPr id="33" name="TextBox 32"/>
           <p:cNvSpPr txBox="1"/>
           <p:nvPr/>
         </p:nvSpPr>
         <p:spPr>
           <a:xfrm>
-            <a:off x="502920" y="4992624"/>
-            <a:ext cx="457200" cy="365760"/>
+            <a:off x="502920" y="4846320"/>
+            <a:ext cx="384048" cy="292608"/>
           </a:xfrm>
           <a:prstGeom prst="rect">
             <a:avLst/>
@@ -14406,7 +14995,7 @@
               </a:lnSpc>
             </a:pPr>
             <a:r>
-              <a:rPr sz="1600" b="1" i="0">
+              <a:rPr sz="1400" b="1" i="0">
                 <a:solidFill>
                   <a:srgbClr val="FFFFFF"/>
                 </a:solidFill>
@@ -14419,14 +15008,14 @@
       </p:sp>
       <p:sp>
         <p:nvSpPr>
-          <p:cNvPr id="33" name="TextBox 32"/>
+          <p:cNvPr id="34" name="TextBox 33"/>
           <p:cNvSpPr txBox="1"/>
           <p:nvPr/>
         </p:nvSpPr>
         <p:spPr>
           <a:xfrm>
-            <a:off x="1143000" y="4919472"/>
-            <a:ext cx="4480560" cy="548640"/>
+            <a:off x="1051560" y="4782312"/>
+            <a:ext cx="4480560" cy="457200"/>
           </a:xfrm>
           <a:prstGeom prst="rect">
             <a:avLst/>
@@ -14441,11 +15030,11 @@
           <a:p>
             <a:pPr algn="l">
               <a:lnSpc>
-                <a:spcPct val="105000"/>
-              </a:lnSpc>
-            </a:pPr>
-            <a:r>
-              <a:rPr sz="1300" b="1" i="0">
+                <a:spcPct val="100000"/>
+              </a:lnSpc>
+            </a:pPr>
+            <a:r>
+              <a:rPr sz="1250" b="1" i="0">
                 <a:solidFill>
                   <a:srgbClr val="1B2A4A"/>
                 </a:solidFill>
@@ -14458,14 +15047,14 @@
       </p:sp>
       <p:sp>
         <p:nvSpPr>
-          <p:cNvPr id="34" name="TextBox 33"/>
+          <p:cNvPr id="35" name="TextBox 34"/>
           <p:cNvSpPr txBox="1"/>
           <p:nvPr/>
         </p:nvSpPr>
         <p:spPr>
           <a:xfrm>
-            <a:off x="5760720" y="4919472"/>
-            <a:ext cx="5943600" cy="594360"/>
+            <a:off x="5669280" y="4782312"/>
+            <a:ext cx="6035040" cy="502920"/>
           </a:xfrm>
           <a:prstGeom prst="rect">
             <a:avLst/>
@@ -14480,11 +15069,11 @@
           <a:p>
             <a:pPr algn="l">
               <a:lnSpc>
-                <a:spcPct val="110000"/>
-              </a:lnSpc>
-            </a:pPr>
-            <a:r>
-              <a:rPr sz="1150" b="0" i="0">
+                <a:spcPct val="105000"/>
+              </a:lnSpc>
+            </a:pPr>
+            <a:r>
+              <a:rPr sz="1100" b="0" i="0">
                 <a:solidFill>
                   <a:srgbClr val="262626"/>
                 </a:solidFill>
@@ -14497,14 +15086,104 @@
       </p:sp>
       <p:sp>
         <p:nvSpPr>
-          <p:cNvPr id="35" name="TextBox 34"/>
+          <p:cNvPr id="36" name="Rectangle 35"/>
+          <p:cNvSpPr/>
+          <p:nvPr/>
+        </p:nvSpPr>
+        <p:spPr>
+          <a:xfrm>
+            <a:off x="502920" y="5532120"/>
+            <a:ext cx="11201400" cy="914400"/>
+          </a:xfrm>
+          <a:prstGeom prst="rect">
+            <a:avLst/>
+          </a:prstGeom>
+          <a:solidFill>
+            <a:srgbClr val="EFF2F7"/>
+          </a:solidFill>
+          <a:ln w="9525">
+            <a:solidFill>
+              <a:srgbClr val="D9DCE1"/>
+            </a:solidFill>
+          </a:ln>
+          <a:effectLst/>
+        </p:spPr>
+        <p:style>
+          <a:lnRef idx="1">
+            <a:schemeClr val="accent1"/>
+          </a:lnRef>
+          <a:fillRef idx="3">
+            <a:schemeClr val="accent1"/>
+          </a:fillRef>
+          <a:effectRef idx="2">
+            <a:schemeClr val="accent1"/>
+          </a:effectRef>
+          <a:fontRef idx="minor">
+            <a:schemeClr val="lt1"/>
+          </a:fontRef>
+        </p:style>
+        <p:txBody>
+          <a:bodyPr rtlCol="0" anchor="ctr"/>
+          <a:lstStyle/>
+          <a:p>
+            <a:pPr algn="ctr"/>
+          </a:p>
+        </p:txBody>
+      </p:sp>
+      <p:sp>
+        <p:nvSpPr>
+          <p:cNvPr id="37" name="Rectangle 36"/>
+          <p:cNvSpPr/>
+          <p:nvPr/>
+        </p:nvSpPr>
+        <p:spPr>
+          <a:xfrm>
+            <a:off x="502920" y="5532120"/>
+            <a:ext cx="73152" cy="914400"/>
+          </a:xfrm>
+          <a:prstGeom prst="rect">
+            <a:avLst/>
+          </a:prstGeom>
+          <a:solidFill>
+            <a:srgbClr val="2E5AAC"/>
+          </a:solidFill>
+          <a:ln>
+            <a:noFill/>
+          </a:ln>
+          <a:effectLst/>
+        </p:spPr>
+        <p:style>
+          <a:lnRef idx="1">
+            <a:schemeClr val="accent1"/>
+          </a:lnRef>
+          <a:fillRef idx="3">
+            <a:schemeClr val="accent1"/>
+          </a:fillRef>
+          <a:effectRef idx="2">
+            <a:schemeClr val="accent1"/>
+          </a:effectRef>
+          <a:fontRef idx="minor">
+            <a:schemeClr val="lt1"/>
+          </a:fontRef>
+        </p:style>
+        <p:txBody>
+          <a:bodyPr rtlCol="0" anchor="ctr"/>
+          <a:lstStyle/>
+          <a:p>
+            <a:pPr algn="ctr"/>
+          </a:p>
+        </p:txBody>
+      </p:sp>
+      <p:sp>
+        <p:nvSpPr>
+          <p:cNvPr id="38" name="TextBox 37"/>
           <p:cNvSpPr txBox="1"/>
           <p:nvPr/>
         </p:nvSpPr>
         <p:spPr>
           <a:xfrm>
-            <a:off x="502920" y="6309360"/>
-            <a:ext cx="11155680" cy="320040"/>
+            <a:off x="704088" y="5623560"/>
+            <a:ext cx="10835640" cy="292608"/>
           </a:xfrm>
           <a:prstGeom prst="rect">
             <a:avLst/>
@@ -14523,27 +15202,27 @@
               </a:lnSpc>
             </a:pPr>
             <a:r>
-              <a:rPr sz="1050" b="0" i="1">
-                <a:solidFill>
-                  <a:srgbClr val="6E6E6E"/>
-                </a:solidFill>
-                <a:latin typeface="Yu Gothic"/>
-              </a:rPr>
-              <a:t>出典：[4] Manage data policies／[5] View policies and scope（いずれもMicrosoft Learn）</a:t>
-            </a:r>
-          </a:p>
-        </p:txBody>
-      </p:sp>
-      <p:sp>
-        <p:nvSpPr>
-          <p:cNvPr id="36" name="TextBox 35"/>
+              <a:rPr sz="1200" b="1" i="0">
+                <a:solidFill>
+                  <a:srgbClr val="1B2A4A"/>
+                </a:solidFill>
+                <a:latin typeface="Yu Gothic"/>
+              </a:rPr>
+              <a:t>根拠（Microsoft公式情報）： 「Manage data policies／View policies and scope」</a:t>
+            </a:r>
+          </a:p>
+        </p:txBody>
+      </p:sp>
+      <p:sp>
+        <p:nvSpPr>
+          <p:cNvPr id="39" name="TextBox 38"/>
           <p:cNvSpPr txBox="1"/>
           <p:nvPr/>
         </p:nvSpPr>
         <p:spPr>
           <a:xfrm>
-            <a:off x="502920" y="6565392"/>
-            <a:ext cx="8229600" cy="274320"/>
+            <a:off x="704088" y="5952744"/>
+            <a:ext cx="10835640" cy="402336"/>
           </a:xfrm>
           <a:prstGeom prst="rect">
             <a:avLst/>
@@ -14558,6 +15237,45 @@
           <a:p>
             <a:pPr algn="l">
               <a:lnSpc>
+                <a:spcPct val="120000"/>
+              </a:lnSpc>
+            </a:pPr>
+            <a:r>
+              <a:rPr sz="1130" b="0" i="0">
+                <a:solidFill>
+                  <a:srgbClr val="262626"/>
+                </a:solidFill>
+                <a:latin typeface="Yu Gothic"/>
+              </a:rPr>
+              <a:t>Power Platform管理センターにおけるデータポリシーの作成・スコープ設定・コネクタ分類の操作手順として明記されている内容に基づく。</a:t>
+            </a:r>
+          </a:p>
+        </p:txBody>
+      </p:sp>
+      <p:sp>
+        <p:nvSpPr>
+          <p:cNvPr id="40" name="TextBox 39"/>
+          <p:cNvSpPr txBox="1"/>
+          <p:nvPr/>
+        </p:nvSpPr>
+        <p:spPr>
+          <a:xfrm>
+            <a:off x="502920" y="6565392"/>
+            <a:ext cx="8229600" cy="274320"/>
+          </a:xfrm>
+          <a:prstGeom prst="rect">
+            <a:avLst/>
+          </a:prstGeom>
+          <a:noFill/>
+        </p:spPr>
+        <p:txBody>
+          <a:bodyPr wrap="square" anchor="t" lIns="0" rIns="0" tIns="0" bIns="0">
+            <a:spAutoFit/>
+          </a:bodyPr>
+          <a:lstStyle/>
+          <a:p>
+            <a:pPr algn="l">
+              <a:lnSpc>
                 <a:spcPct val="100000"/>
               </a:lnSpc>
             </a:pPr>
@@ -14575,7 +15293,7 @@
       </p:sp>
       <p:sp>
         <p:nvSpPr>
-          <p:cNvPr id="37" name="TextBox 36"/>
+          <p:cNvPr id="41" name="TextBox 40"/>
           <p:cNvSpPr txBox="1"/>
           <p:nvPr/>
         </p:nvSpPr>

--- a/docs/PowerPlatform_DefaultEnv_Governance_Report.pptx
+++ b/docs/PowerPlatform_DefaultEnv_Governance_Report.pptx
@@ -7623,7 +7623,7 @@
                 <a:latin typeface="Yu Gothic"/>
               </a:rPr>
               <a:t>● Power PlatformのDefault環境は、Power Apps／Power Automate等に
-サインアップした全ライセンスユーザーに自動的に「環境メーカー」
+サインアップした全ライセンスユーザーに自動的に「環境作成者」
 ロールが付与される共有環境である</a:t>
             </a:r>
           </a:p>

--- a/docs/PowerPlatform_DefaultEnv_Governance_Report.pptx
+++ b/docs/PowerPlatform_DefaultEnv_Governance_Report.pptx
@@ -5097,7 +5097,7 @@
                 </a:solidFill>
                 <a:latin typeface="Yu Gothic"/>
               </a:rPr>
-              <a:t>根拠：Microsoft公式ドキュメント「Licensing（Managed Environments）」の説明があり、において、通知の段階的導入スケジュールが明記されている。</a:t>
+              <a:t>根拠：Microsoft公式ドキュメント「Licensing（Managed Environments）」において、通知の段階的導入スケジュールが明記されている。</a:t>
             </a:r>
           </a:p>
         </p:txBody>
@@ -5302,7 +5302,7 @@
                 </a:solidFill>
                 <a:latin typeface="Yu Gothic"/>
               </a:rPr>
-              <a:t>根拠：Microsoft公式ドキュメント「Manage and govern the default environment」の説明があり、において、一部コネクタがブロック不可である旨が明記されている。</a:t>
+              <a:t>根拠：Microsoft公式ドキュメント「Manage and govern the default environment」において、一部コネクタがブロック不可である旨が明記されている。</a:t>
             </a:r>
           </a:p>
         </p:txBody>
@@ -5507,7 +5507,7 @@
                 </a:solidFill>
                 <a:latin typeface="Yu Gothic"/>
               </a:rPr>
-              <a:t>根拠：Microsoft公式ドキュメント「Secure the default environment」の説明があり、において、エラーメッセージのカスタマイズ手段（PowerShellコマンドレット）が案内されている。</a:t>
+              <a:t>根拠：Microsoft公式ドキュメント「Secure the default environment」において、エラーメッセージのカスタマイズ手段（PowerShellコマンドレット）が案内されている。</a:t>
             </a:r>
           </a:p>
         </p:txBody>
@@ -5712,7 +5712,7 @@
                 </a:solidFill>
                 <a:latin typeface="Yu Gothic"/>
               </a:rPr>
-              <a:t>根拠：Microsoft公式ドキュメント「Managed environments overview／Licensing（Managed Environments）」の説明があり、の記載は今後改定される可能性があるため、実施直前の再確認が必要。</a:t>
+              <a:t>根拠：Microsoft公式ドキュメント「Managed environments overview／Licensing（Managed Environments）」において、機能・ライセンス要件は継続的に更新される旨が案内されているため、実施直前の再確認が必要。</a:t>
             </a:r>
           </a:p>
         </p:txBody>
@@ -7594,7 +7594,7 @@
         <p:spPr>
           <a:xfrm>
             <a:off x="548640" y="2103120"/>
-            <a:ext cx="5349240" cy="2468880"/>
+            <a:ext cx="5349240" cy="1828800"/>
           </a:xfrm>
           <a:prstGeom prst="rect">
             <a:avLst/>
@@ -7616,15 +7616,33 @@
               </a:spcAft>
             </a:pPr>
             <a:r>
-              <a:rPr sz="1300" b="0">
+              <a:rPr sz="1250" b="0">
                 <a:solidFill>
                   <a:srgbClr val="262626"/>
                 </a:solidFill>
                 <a:latin typeface="Yu Gothic"/>
               </a:rPr>
-              <a:t>● Power PlatformのDefault環境は、Power Apps／Power Automate等に
-サインアップした全ライセンスユーザーに自動的に「環境作成者」
-ロールが付与される共有環境である</a:t>
+              <a:t>● Power PlatformのDefault環境は、Power Apps／Power Automate等に</a:t>
+            </a:r>
+            <a:br/>
+            <a:r>
+              <a:rPr sz="1250" b="0">
+                <a:solidFill>
+                  <a:srgbClr val="262626"/>
+                </a:solidFill>
+                <a:latin typeface="Yu Gothic"/>
+              </a:rPr>
+              <a:t>サインアップした全ライセンスユーザーに自動的に「環境作成者」</a:t>
+            </a:r>
+            <a:br/>
+            <a:r>
+              <a:rPr sz="1250" b="0">
+                <a:solidFill>
+                  <a:srgbClr val="262626"/>
+                </a:solidFill>
+                <a:latin typeface="Yu Gothic"/>
+              </a:rPr>
+              <a:t>ロールが付与される共有環境である</a:t>
             </a:r>
           </a:p>
           <a:p>
@@ -7637,15 +7655,33 @@
               </a:spcAft>
             </a:pPr>
             <a:r>
-              <a:rPr sz="1300" b="0">
+              <a:rPr sz="1250" b="0">
                 <a:solidFill>
                   <a:srgbClr val="262626"/>
                 </a:solidFill>
                 <a:latin typeface="Yu Gothic"/>
               </a:rPr>
-              <a:t>● そのため、Power PlatformのDefault環境において、ユーザーが意図せず
-アプリ・フロー・Copilot Studioエージェント等を作成・利用してしまう
-可能性がある（依頼内容に記載の課題認識）</a:t>
+              <a:t>● そのため、Power PlatformのDefault環境において、ユーザーが意図せず</a:t>
+            </a:r>
+            <a:br/>
+            <a:r>
+              <a:rPr sz="1250" b="0">
+                <a:solidFill>
+                  <a:srgbClr val="262626"/>
+                </a:solidFill>
+                <a:latin typeface="Yu Gothic"/>
+              </a:rPr>
+              <a:t>アプリ・フロー・Copilot Studioエージェント等を作成・利用してしまう</a:t>
+            </a:r>
+            <a:br/>
+            <a:r>
+              <a:rPr sz="1250" b="0">
+                <a:solidFill>
+                  <a:srgbClr val="262626"/>
+                </a:solidFill>
+                <a:latin typeface="Yu Gothic"/>
+              </a:rPr>
+              <a:t>可能性がある（依頼内容に記載の課題認識）</a:t>
             </a:r>
           </a:p>
         </p:txBody>
@@ -7658,8 +7694,8 @@
         </p:nvSpPr>
         <p:spPr>
           <a:xfrm>
-            <a:off x="548640" y="3154680"/>
-            <a:ext cx="5349240" cy="365760"/>
+            <a:off x="548640" y="3977639"/>
+            <a:ext cx="5349240" cy="274320"/>
           </a:xfrm>
           <a:prstGeom prst="rect">
             <a:avLst/>
@@ -7697,8 +7733,8 @@
         </p:nvSpPr>
         <p:spPr>
           <a:xfrm>
-            <a:off x="548640" y="3611880"/>
-            <a:ext cx="5349240" cy="1234440"/>
+            <a:off x="548640" y="4343400"/>
+            <a:ext cx="5349240" cy="1051560"/>
           </a:xfrm>
           <a:prstGeom prst="rect">
             <a:avLst/>
@@ -7741,7 +7777,7 @@
         </p:nvSpPr>
         <p:spPr>
           <a:xfrm>
-            <a:off x="713232" y="3703320"/>
+            <a:off x="713232" y="4434840"/>
             <a:ext cx="5029200" cy="274320"/>
           </a:xfrm>
           <a:prstGeom prst="rect">
@@ -7780,8 +7816,8 @@
         </p:nvSpPr>
         <p:spPr>
           <a:xfrm>
-            <a:off x="713232" y="3977639"/>
-            <a:ext cx="5029200" cy="822960"/>
+            <a:off x="713232" y="4718304"/>
+            <a:ext cx="5029200" cy="640080"/>
           </a:xfrm>
           <a:prstGeom prst="rect">
             <a:avLst/>
@@ -7919,7 +7955,7 @@
         <p:spPr>
           <a:xfrm>
             <a:off x="6309360" y="2103120"/>
-            <a:ext cx="5349240" cy="2743200"/>
+            <a:ext cx="5349240" cy="3108960"/>
           </a:xfrm>
           <a:prstGeom prst="rect">
             <a:avLst/>
@@ -7941,14 +7977,23 @@
               </a:spcAft>
             </a:pPr>
             <a:r>
-              <a:rPr sz="1300" b="0">
+              <a:rPr sz="1250" b="0">
                 <a:solidFill>
                   <a:srgbClr val="262626"/>
                 </a:solidFill>
                 <a:latin typeface="Yu Gothic"/>
               </a:rPr>
-              <a:t>● Default環境を管理可能な状態にするため、マネージド環境化により
-共有制限・利用状況の可視化・アクセス制限などを行えるかを確認する</a:t>
+              <a:t>● Default環境を管理可能な状態にするため、マネージド環境化により</a:t>
+            </a:r>
+            <a:br/>
+            <a:r>
+              <a:rPr sz="1250" b="0">
+                <a:solidFill>
+                  <a:srgbClr val="262626"/>
+                </a:solidFill>
+                <a:latin typeface="Yu Gothic"/>
+              </a:rPr>
+              <a:t>共有制限・利用状況の可視化・アクセス制限などを行えるかを確認する</a:t>
             </a:r>
           </a:p>
           <a:p>
@@ -7961,7 +8006,7 @@
               </a:spcAft>
             </a:pPr>
             <a:r>
-              <a:rPr sz="1300" b="0">
+              <a:rPr sz="1250" b="0">
                 <a:solidFill>
                   <a:srgbClr val="262626"/>
                 </a:solidFill>
@@ -7980,14 +8025,23 @@
               </a:spcAft>
             </a:pPr>
             <a:r>
-              <a:rPr sz="1300" b="0">
+              <a:rPr sz="1250" b="0">
                 <a:solidFill>
                   <a:srgbClr val="262626"/>
                 </a:solidFill>
                 <a:latin typeface="Yu Gothic"/>
               </a:rPr>
-              <a:t>● マネージド環境化に伴うPremiumライセンスの要否・対象範囲を明確化し、
-利用制御方針の意思決定に必要な材料を整理する</a:t>
+              <a:t>● マネージド環境化に伴うPremiumライセンスの要否・対象範囲を明確化し、</a:t>
+            </a:r>
+            <a:br/>
+            <a:r>
+              <a:rPr sz="1250" b="0">
+                <a:solidFill>
+                  <a:srgbClr val="262626"/>
+                </a:solidFill>
+                <a:latin typeface="Yu Gothic"/>
+              </a:rPr>
+              <a:t>利用制御方針の意思決定に必要な材料を整理する</a:t>
             </a:r>
           </a:p>
         </p:txBody>
@@ -8000,8 +8054,8 @@
         </p:nvSpPr>
         <p:spPr>
           <a:xfrm>
-            <a:off x="502920" y="5532120"/>
-            <a:ext cx="11155680" cy="777240"/>
+            <a:off x="502920" y="5623560"/>
+            <a:ext cx="11155680" cy="685800"/>
           </a:xfrm>
           <a:prstGeom prst="rect">
             <a:avLst/>
@@ -8044,8 +8098,8 @@
         </p:nvSpPr>
         <p:spPr>
           <a:xfrm>
-            <a:off x="731520" y="5650992"/>
-            <a:ext cx="10698480" cy="548640"/>
+            <a:off x="731520" y="5623560"/>
+            <a:ext cx="10698480" cy="685800"/>
           </a:xfrm>
           <a:prstGeom prst="rect">
             <a:avLst/>
@@ -9612,7 +9666,7 @@
                           </a:solidFill>
                           <a:latin typeface="Yu Gothic"/>
                         </a:rPr>
-                        <a:t>Power Platform管理センターでポリシーを新規作成し、スコープを</a:t>
+                        <a:t>Power Platform 管理センターでポリシーを新規作成し、スコープを</a:t>
                       </a:r>
                     </a:p>
                     <a:p>
@@ -10261,8 +10315,17 @@
                 </a:solidFill>
                 <a:latin typeface="Yu Gothic"/>
               </a:rPr>
-              <a:t>- Microsoft公式：「Admins can use managed environments with any
-type of environment」— 環境の種類を問わず有効化可能と明記</a:t>
+              <a:t>- Microsoft公式：「Admins can use managed environments with any</a:t>
+            </a:r>
+            <a:br/>
+            <a:r>
+              <a:rPr sz="1150" b="0">
+                <a:solidFill>
+                  <a:srgbClr val="262626"/>
+                </a:solidFill>
+                <a:latin typeface="Yu Gothic"/>
+              </a:rPr>
+              <a:t>type of environment」— 環境の種類を問わず有効化可能と明記</a:t>
             </a:r>
           </a:p>
           <a:p>
@@ -10281,8 +10344,17 @@
                 </a:solidFill>
                 <a:latin typeface="Yu Gothic"/>
               </a:rPr>
-              <a:t>- Default環境も例外ではなく、管理センターの操作（環境選択 →
-［Enable Managed Environments］）で有効化できる</a:t>
+              <a:t>- Default環境も例外ではなく、管理センターの操作（環境選択 →</a:t>
+            </a:r>
+            <a:br/>
+            <a:r>
+              <a:rPr sz="1150" b="0">
+                <a:solidFill>
+                  <a:srgbClr val="262626"/>
+                </a:solidFill>
+                <a:latin typeface="Yu Gothic"/>
+              </a:rPr>
+              <a:t>［Enable Managed Environments］）で有効化できる</a:t>
             </a:r>
           </a:p>
           <a:p>
@@ -10320,9 +10392,27 @@
                 </a:solidFill>
                 <a:latin typeface="Yu Gothic"/>
               </a:rPr>
-              <a:t>- 公式ガイダンスでは、共有制限・使用状況インサイト・Dataverse IP
-ファイアウォール等の統治強化のため、Default環境でのマネージド
-環境機能の活用を推奨している</a:t>
+              <a:t>- 公式ガイダンスでは、共有制限・使用状況の分析情報・IP ファイア</a:t>
+            </a:r>
+            <a:br/>
+            <a:r>
+              <a:rPr sz="1150" b="0">
+                <a:solidFill>
+                  <a:srgbClr val="262626"/>
+                </a:solidFill>
+                <a:latin typeface="Yu Gothic"/>
+              </a:rPr>
+              <a:t>ウォール等の統治強化のため、Default環境でのマネージド環境機能</a:t>
+            </a:r>
+            <a:br/>
+            <a:r>
+              <a:rPr sz="1150" b="0">
+                <a:solidFill>
+                  <a:srgbClr val="262626"/>
+                </a:solidFill>
+                <a:latin typeface="Yu Gothic"/>
+              </a:rPr>
+              <a:t>の活用を推奨している</a:t>
             </a:r>
           </a:p>
           <a:p>
@@ -10360,8 +10450,17 @@
                 </a:solidFill>
                 <a:latin typeface="Yu Gothic"/>
               </a:rPr>
-              <a:t>- Default環境は全ライセンスユーザーが標準でアクセス可能なため、
-有効化するとその全員がPremium対象になり得る（詳細はP.7）</a:t>
+              <a:t>- Default環境は全ライセンスユーザーが標準でアクセス可能なため、</a:t>
+            </a:r>
+            <a:br/>
+            <a:r>
+              <a:rPr sz="1150" b="0">
+                <a:solidFill>
+                  <a:srgbClr val="262626"/>
+                </a:solidFill>
+                <a:latin typeface="Yu Gothic"/>
+              </a:rPr>
+              <a:t>有効化するとその全員がPremium対象になり得る（詳細はP.7）</a:t>
             </a:r>
           </a:p>
         </p:txBody>
@@ -10505,7 +10604,7 @@
                 </a:solidFill>
                 <a:latin typeface="Yu Gothic"/>
               </a:rPr>
-              <a:t>● 使用状況インサイト（ダッシュボード）</a:t>
+              <a:t>● 使用状況の分析情報</a:t>
             </a:r>
           </a:p>
           <a:p>
@@ -10524,7 +10623,7 @@
                 </a:solidFill>
                 <a:latin typeface="Yu Gothic"/>
               </a:rPr>
-              <a:t>● Dataverse アクセス制限（IPファイアウォール）</a:t>
+              <a:t>● IP ファイアウォール（許可されたIPからのみDataverseへのアクセスを制限）</a:t>
             </a:r>
           </a:p>
           <a:p>
@@ -10543,7 +10642,7 @@
                 </a:solidFill>
                 <a:latin typeface="Yu Gothic"/>
               </a:rPr>
-              <a:t>● ソリューションチェッカーの自動実行</a:t>
+              <a:t>● ソリューション チェッカーの自動実行</a:t>
             </a:r>
           </a:p>
           <a:p>
@@ -10562,7 +10661,7 @@
                 </a:solidFill>
                 <a:latin typeface="Yu Gothic"/>
               </a:rPr>
-              <a:t>● 最適化推奨事項の自動提示</a:t>
+              <a:t>● アクション ページによる最適化の推奨事項</a:t>
             </a:r>
           </a:p>
         </p:txBody>
@@ -11116,8 +11215,17 @@
                 </a:solidFill>
                 <a:latin typeface="Yu Gothic"/>
               </a:rPr>
-              <a:t>- テナント管理者／環境管理者権限があれば、マネージド環境化の
-有無に関わらずどの環境にもDLPポリシーを設定できる</a:t>
+              <a:t>- テナント管理者／環境管理者権限があれば、マネージド環境化の</a:t>
+            </a:r>
+            <a:br/>
+            <a:r>
+              <a:rPr sz="1150" b="0">
+                <a:solidFill>
+                  <a:srgbClr val="262626"/>
+                </a:solidFill>
+                <a:latin typeface="Yu Gothic"/>
+              </a:rPr>
+              <a:t>有無に関わらずどの環境にもDLPポリシーを設定できる</a:t>
             </a:r>
           </a:p>
           <a:p>
@@ -11174,8 +11282,17 @@
                 </a:solidFill>
                 <a:latin typeface="Yu Gothic"/>
               </a:rPr>
-              <a:t>- テナントレベルポリシー：全環境／複数環境／除外環境を指定して
-適用（Default環境を含めることも可能）</a:t>
+              <a:t>- テナントレベルポリシー：全環境／複数環境／除外環境を指定して</a:t>
+            </a:r>
+            <a:br/>
+            <a:r>
+              <a:rPr sz="1150" b="0">
+                <a:solidFill>
+                  <a:srgbClr val="262626"/>
+                </a:solidFill>
+                <a:latin typeface="Yu Gothic"/>
+              </a:rPr>
+              <a:t>適用（Default環境を含めることも可能）</a:t>
             </a:r>
           </a:p>
           <a:p>
@@ -11213,8 +11330,17 @@
                 </a:solidFill>
                 <a:latin typeface="Yu Gothic"/>
               </a:rPr>
-              <a:t>- コネクタ分類の既定グループを「ブロック済み」に設定し、新規
-コネクタは承認するまで自動的に利用不可とする方式を推奨</a:t>
+              <a:t>- コネクタ分類の既定グループを「ブロック済み」に設定し、新規</a:t>
+            </a:r>
+            <a:br/>
+            <a:r>
+              <a:rPr sz="1150" b="0">
+                <a:solidFill>
+                  <a:srgbClr val="262626"/>
+                </a:solidFill>
+                <a:latin typeface="Yu Gothic"/>
+              </a:rPr>
+              <a:t>コネクタは承認するまで自動的に利用不可とする方式を推奨</a:t>
             </a:r>
           </a:p>
         </p:txBody>
@@ -11339,7 +11465,7 @@
                 </a:solidFill>
                 <a:latin typeface="Yu Gothic"/>
               </a:rPr>
-              <a:t>● ① ブロック不可コネクタ → 「業務データ」グループへ</a:t>
+              <a:t>● ① ブロック不可コネクタ → 「ビジネス」グループへ</a:t>
             </a:r>
           </a:p>
           <a:p>
@@ -11564,7 +11690,7 @@
                 </a:solidFill>
                 <a:latin typeface="Yu Gothic"/>
               </a:rPr>
-              <a:t>「Having a data policy in place is especially critical for the default environment」（Default環境へのデータポリシー整備は特に重要）と明記され、Default環境への適用が公式に推奨されている。環境レベル／テナントレベルのスコープ選択肢についても同ガイダンスに基づく。</a:t>
+              <a:t>「Having a data policy in place is especially critical for the default environment」（Default環境へのデータ ポリシー整備は特に重要）と明記され、Default環境への適用が公式に推奨されている。環境レベル／テナントレベルのスコープ選択肢についても同ガイダンスに基づく。</a:t>
             </a:r>
           </a:p>
         </p:txBody>
@@ -11987,7 +12113,7 @@
                           </a:solidFill>
                           <a:latin typeface="Yu Gothic"/>
                         </a:rPr>
-                        <a:t>役割</a:t>
+                        <a:t>利用者区分</a:t>
                       </a:r>
                     </a:p>
                   </a:txBody>
@@ -12129,7 +12255,19 @@
                           </a:solidFill>
                           <a:latin typeface="Yu Gothic"/>
                         </a:rPr>
-                        <a:t>(Power Platform管理者)</a:t>
+                        <a:t>(Power Platform 管理者／</a:t>
+                      </a:r>
+                    </a:p>
+                    <a:p>
+                      <a:pPr algn="l"/>
+                      <a:r>
+                        <a:rPr sz="1200" b="1">
+                          <a:solidFill>
+                            <a:srgbClr val="1B2A4A"/>
+                          </a:solidFill>
+                          <a:latin typeface="Yu Gothic"/>
+                        </a:rPr>
+                        <a:t>環境管理者)</a:t>
                       </a:r>
                     </a:p>
                   </a:txBody>
@@ -12199,7 +12337,7 @@
                           </a:solidFill>
                           <a:latin typeface="Yu Gothic"/>
                         </a:rPr>
-                        <a:t>他の役割と同様に必要</a:t>
+                        <a:t>他の区分と同様に必要</a:t>
                       </a:r>
                     </a:p>
                   </a:txBody>
@@ -12247,7 +12385,7 @@
                           </a:solidFill>
                           <a:latin typeface="Yu Gothic"/>
                         </a:rPr>
-                        <a:t>作成者(Maker)</a:t>
+                        <a:t>メーカー</a:t>
                       </a:r>
                     </a:p>
                     <a:p>
@@ -12259,7 +12397,7 @@
                           </a:solidFill>
                           <a:latin typeface="Yu Gothic"/>
                         </a:rPr>
-                        <a:t>アプリ/フロー開発</a:t>
+                        <a:t>(アプリ/フローの開発者)</a:t>
                       </a:r>
                     </a:p>
                   </a:txBody>
@@ -12377,7 +12515,7 @@
                           </a:solidFill>
                           <a:latin typeface="Yu Gothic"/>
                         </a:rPr>
-                        <a:t>実行者(Runner)</a:t>
+                        <a:t>一般利用者</a:t>
                       </a:r>
                     </a:p>
                     <a:p>
@@ -12389,7 +12527,7 @@
                           </a:solidFill>
                           <a:latin typeface="Yu Gothic"/>
                         </a:rPr>
-                        <a:t>一般利用者</a:t>
+                        <a:t>(アプリ/フローの実行者)</a:t>
                       </a:r>
                     </a:p>
                   </a:txBody>
@@ -12505,8 +12643,8 @@
         </p:nvSpPr>
         <p:spPr>
           <a:xfrm>
-            <a:off x="502920" y="4937760"/>
-            <a:ext cx="11155680" cy="457200"/>
+            <a:off x="502920" y="4919472"/>
+            <a:ext cx="11155680" cy="548640"/>
           </a:xfrm>
           <a:prstGeom prst="rect">
             <a:avLst/>
@@ -12525,13 +12663,13 @@
               </a:lnSpc>
             </a:pPr>
             <a:r>
-              <a:rPr sz="1150" b="0" i="1">
+              <a:rPr sz="1050" b="0" i="1">
                 <a:solidFill>
                   <a:srgbClr val="6E6E6E"/>
                 </a:solidFill>
                 <a:latin typeface="Yu Gothic"/>
               </a:rPr>
-              <a:t>※ 管理者専用のライセンス区分は存在しない。管理者であっても環境内でアプリ/フローを実行する場合は、一般ユーザーと同じライセンス要件が適用される。</a:t>
+              <a:t>※ 管理者専用のライセンス区分は存在しない。管理者であっても環境内でアプリ/フローを実行する場合は、一般利用者と同じライセンス要件が適用される。「メーカー」はMicrosoft公式のペルソナ名称。「管理者」「一般利用者」は本資料が説明のために用いる区分であり、Microsoft公式の正式なロール名ではない。</a:t>
             </a:r>
           </a:p>
         </p:txBody>
@@ -12544,7 +12682,7 @@
         </p:nvSpPr>
         <p:spPr>
           <a:xfrm>
-            <a:off x="502920" y="5486400"/>
+            <a:off x="502920" y="5532120"/>
             <a:ext cx="11201400" cy="914400"/>
           </a:xfrm>
           <a:prstGeom prst="rect">
@@ -12590,7 +12728,7 @@
         </p:nvSpPr>
         <p:spPr>
           <a:xfrm>
-            <a:off x="502920" y="5486400"/>
+            <a:off x="502920" y="5532120"/>
             <a:ext cx="73152" cy="914400"/>
           </a:xfrm>
           <a:prstGeom prst="rect">
@@ -12634,7 +12772,7 @@
         </p:nvSpPr>
         <p:spPr>
           <a:xfrm>
-            <a:off x="704088" y="5577840"/>
+            <a:off x="704088" y="5623560"/>
             <a:ext cx="10835640" cy="292608"/>
           </a:xfrm>
           <a:prstGeom prst="rect">
@@ -12673,7 +12811,7 @@
         </p:nvSpPr>
         <p:spPr>
           <a:xfrm>
-            <a:off x="704088" y="5907024"/>
+            <a:off x="704088" y="5952744"/>
             <a:ext cx="10835640" cy="402336"/>
           </a:xfrm>
           <a:prstGeom prst="rect">
@@ -13066,8 +13204,17 @@
                 </a:solidFill>
                 <a:latin typeface="Yu Gothic"/>
               </a:rPr>
-              <a:t>● DLPポリシーは「管理者による統制機能」であり、利用者側にライセンスを
-要求するものではない</a:t>
+              <a:t>● DLPポリシーは「管理者による統制機能」であり、利用者側にライセンスを</a:t>
+            </a:r>
+            <a:br/>
+            <a:r>
+              <a:rPr sz="1250" b="1">
+                <a:solidFill>
+                  <a:srgbClr val="262626"/>
+                </a:solidFill>
+                <a:latin typeface="Yu Gothic"/>
+              </a:rPr>
+              <a:t>要求するものではない</a:t>
             </a:r>
           </a:p>
           <a:p>
@@ -13105,8 +13252,17 @@
                 </a:solidFill>
                 <a:latin typeface="Yu Gothic"/>
               </a:rPr>
-              <a:t>- ポリシーに反する接続の組み合わせを含むアプリ/フローは、実行時・
-設計時ともにブロックされ、エラーメッセージが表示される</a:t>
+              <a:t>- ポリシーに反する接続の組み合わせを含むアプリ/フローは、実行時・</a:t>
+            </a:r>
+            <a:br/>
+            <a:r>
+              <a:rPr sz="1150" b="0">
+                <a:solidFill>
+                  <a:srgbClr val="262626"/>
+                </a:solidFill>
+                <a:latin typeface="Yu Gothic"/>
+              </a:rPr>
+              <a:t>設計時ともにブロックされ、エラーメッセージが表示される</a:t>
             </a:r>
           </a:p>
           <a:p>
@@ -13144,8 +13300,17 @@
                 </a:solidFill>
                 <a:latin typeface="Yu Gothic"/>
               </a:rPr>
-              <a:t>- ポリシーの作成・編集・削除には、環境管理者 または Power Platform
-管理者ロールが必要（Premiumライセンスの保有は前提条件ではない）</a:t>
+              <a:t>- ポリシーの作成・編集・削除には、環境管理者 または</a:t>
+            </a:r>
+            <a:br/>
+            <a:r>
+              <a:rPr sz="1150" b="0">
+                <a:solidFill>
+                  <a:srgbClr val="262626"/>
+                </a:solidFill>
+                <a:latin typeface="Yu Gothic"/>
+              </a:rPr>
+              <a:t>Power Platform 管理者ロールが必要（Premiumライセンスの保有は前提条件ではない）</a:t>
             </a:r>
           </a:p>
           <a:p>
@@ -13164,7 +13329,7 @@
                 </a:solidFill>
                 <a:latin typeface="Yu Gothic"/>
               </a:rPr>
-              <a:t>● 唯一の例外：デスクトップフローのデータポリシー</a:t>
+              <a:t>● 唯一の例外：デスクトップ フローのデータ ポリシー</a:t>
             </a:r>
           </a:p>
           <a:p>
@@ -13183,9 +13348,27 @@
                 </a:solidFill>
                 <a:latin typeface="Yu Gothic"/>
               </a:rPr>
-              <a:t>- デスクトップフロー向けデータポリシーは、マネージド環境下でのみ
-機能する制限があり、その場合は確認項目3のPremium要件が
-間接的に関わる</a:t>
+              <a:t>- デスクトップ フロー向けのデータ ポリシーは、マネージド環境下でのみ</a:t>
+            </a:r>
+            <a:br/>
+            <a:r>
+              <a:rPr sz="1150" b="0">
+                <a:solidFill>
+                  <a:srgbClr val="262626"/>
+                </a:solidFill>
+                <a:latin typeface="Yu Gothic"/>
+              </a:rPr>
+              <a:t>機能する制限があり、その場合は確認項目3のPremium要件が</a:t>
+            </a:r>
+            <a:br/>
+            <a:r>
+              <a:rPr sz="1150" b="0">
+                <a:solidFill>
+                  <a:srgbClr val="262626"/>
+                </a:solidFill>
+                <a:latin typeface="Yu Gothic"/>
+              </a:rPr>
+              <a:t>間接的に関わる</a:t>
             </a:r>
           </a:p>
         </p:txBody>
@@ -13310,8 +13493,17 @@
                 </a:solidFill>
                 <a:latin typeface="Yu Gothic"/>
               </a:rPr>
-              <a:t>● DLPポリシーはコスト負担なしで
-即座に導入できる統制手段</a:t>
+              <a:t>● DLPポリシーはコスト負担なしで</a:t>
+            </a:r>
+            <a:br/>
+            <a:r>
+              <a:rPr sz="1250" b="0">
+                <a:solidFill>
+                  <a:srgbClr val="262626"/>
+                </a:solidFill>
+                <a:latin typeface="Yu Gothic"/>
+              </a:rPr>
+              <a:t>即座に導入できる統制手段</a:t>
             </a:r>
           </a:p>
           <a:p>
@@ -13330,9 +13522,27 @@
                 </a:solidFill>
                 <a:latin typeface="Yu Gothic"/>
               </a:rPr>
-              <a:t>● ライセンス予算の議論を待たずに
-Default環境のガードレールを
-構築できる</a:t>
+              <a:t>● ライセンス予算の議論を待たずに</a:t>
+            </a:r>
+            <a:br/>
+            <a:r>
+              <a:rPr sz="1250" b="0">
+                <a:solidFill>
+                  <a:srgbClr val="262626"/>
+                </a:solidFill>
+                <a:latin typeface="Yu Gothic"/>
+              </a:rPr>
+              <a:t>Default環境のガードレールを</a:t>
+            </a:r>
+            <a:br/>
+            <a:r>
+              <a:rPr sz="1250" b="0">
+                <a:solidFill>
+                  <a:srgbClr val="262626"/>
+                </a:solidFill>
+                <a:latin typeface="Yu Gothic"/>
+              </a:rPr>
+              <a:t>構築できる</a:t>
             </a:r>
           </a:p>
           <a:p>
@@ -13351,8 +13561,17 @@
                 </a:solidFill>
                 <a:latin typeface="Yu Gothic"/>
               </a:rPr>
-              <a:t>● マネージド環境化の是非（確認項目
-1・3）とは切り離して意思決定可能</a:t>
+              <a:t>● マネージド環境化の是非（確認項目</a:t>
+            </a:r>
+            <a:br/>
+            <a:r>
+              <a:rPr sz="1250" b="0">
+                <a:solidFill>
+                  <a:srgbClr val="262626"/>
+                </a:solidFill>
+                <a:latin typeface="Yu Gothic"/>
+              </a:rPr>
+              <a:t>1・3）とは切り離して意思決定可能</a:t>
             </a:r>
           </a:p>
         </p:txBody>
@@ -14006,7 +14225,7 @@
                 </a:solidFill>
                 <a:latin typeface="Yu Gothic"/>
               </a:rPr>
-              <a:t>Power Platform管理者 または テナント管理者としてサインイン</a:t>
+              <a:t>Power Platform 管理者 または テナント管理者としてサインイン</a:t>
             </a:r>
           </a:p>
           <a:p>
@@ -14227,7 +14446,7 @@
                 </a:solidFill>
                 <a:latin typeface="Yu Gothic"/>
               </a:rPr>
-              <a:t>左メニューからデータポリシー一覧画面に移動</a:t>
+              <a:t>左メニューからデータ ポリシー一覧画面に移動</a:t>
             </a:r>
           </a:p>
         </p:txBody>
@@ -14614,7 +14833,7 @@
                 </a:solidFill>
                 <a:latin typeface="Yu Gothic"/>
               </a:rPr>
-              <a:t>コネクタを分類（業務データ／非業務データ／ブロック済み）</a:t>
+              <a:t>コネクタを分類（ビジネス／非ビジネス／ブロック済み）</a:t>
             </a:r>
           </a:p>
         </p:txBody>
@@ -14653,7 +14872,7 @@
                 </a:solidFill>
                 <a:latin typeface="Yu Gothic"/>
               </a:rPr>
-              <a:t>承認済み主要コネクタを「業務データ」グループへ、</a:t>
+              <a:t>承認済み主要コネクタを「ビジネス」グループへ、</a:t>
             </a:r>
           </a:p>
           <a:p>
@@ -15247,7 +15466,7 @@
                 </a:solidFill>
                 <a:latin typeface="Yu Gothic"/>
               </a:rPr>
-              <a:t>Power Platform管理センターにおけるデータポリシーの作成・スコープ設定・コネクタ分類の操作手順として明記されている内容に基づく。</a:t>
+              <a:t>Power Platform 管理センターにおけるデータ ポリシーの作成・スコープ設定・コネクタ分類の操作手順として明記されている内容に基づく。</a:t>
             </a:r>
           </a:p>
         </p:txBody>

--- a/docs/PowerPlatform_DefaultEnv_Governance_Report.pptx
+++ b/docs/PowerPlatform_DefaultEnv_Governance_Report.pptx
@@ -17,6 +17,11 @@
     <p:sldId id="265" r:id="rId16"/>
     <p:sldId id="266" r:id="rId17"/>
     <p:sldId id="267" r:id="rId18"/>
+    <p:sldId id="268" r:id="rId19"/>
+    <p:sldId id="269" r:id="rId20"/>
+    <p:sldId id="270" r:id="rId21"/>
+    <p:sldId id="271" r:id="rId22"/>
+    <p:sldId id="272" r:id="rId23"/>
   </p:sldIdLst>
   <p:sldSz cx="12191695" cy="6858000" type="screen4x3"/>
   <p:notesSz cx="6858000" cy="9144000"/>
@@ -3785,7 +3790,7 @@
         </p:nvSpPr>
         <p:spPr>
           <a:xfrm>
-            <a:off x="685800" y="2112264"/>
+            <a:off x="685800" y="2148840"/>
             <a:ext cx="5166360" cy="502920"/>
           </a:xfrm>
           <a:prstGeom prst="rect">
@@ -3840,8 +3845,8 @@
         </p:nvSpPr>
         <p:spPr>
           <a:xfrm>
-            <a:off x="685800" y="2587752"/>
-            <a:ext cx="5166360" cy="822960"/>
+            <a:off x="685800" y="2651760"/>
+            <a:ext cx="5166360" cy="1097280"/>
           </a:xfrm>
           <a:prstGeom prst="rect">
             <a:avLst/>
@@ -3856,95 +3861,24 @@
           <a:p>
             <a:pPr algn="l">
               <a:lnSpc>
-                <a:spcPct val="115000"/>
-              </a:lnSpc>
-            </a:pPr>
-            <a:r>
-              <a:rPr sz="1100" b="0" i="0">
+                <a:spcPct val="120000"/>
+              </a:lnSpc>
+            </a:pPr>
+            <a:r>
+              <a:rPr sz="1150" b="0" i="0">
                 <a:solidFill>
                   <a:srgbClr val="262626"/>
                 </a:solidFill>
                 <a:latin typeface="Yu Gothic"/>
               </a:rPr>
-              <a:t>Copilot Studio／Power Apps／Power Automateへの新規アクセス時、</a:t>
-            </a:r>
-          </a:p>
-          <a:p>
-            <a:pPr algn="l">
-              <a:lnSpc>
-                <a:spcPct val="115000"/>
-              </a:lnSpc>
-            </a:pPr>
-            <a:r>
-              <a:rPr sz="1100" b="0" i="0">
-                <a:solidFill>
-                  <a:srgbClr val="262626"/>
-                </a:solidFill>
-                <a:latin typeface="Yu Gothic"/>
-              </a:rPr>
-              <a:t>メーカーをDefault環境ではなく個人用開発環境へ自動的に誘導し、</a:t>
-            </a:r>
-          </a:p>
-          <a:p>
-            <a:pPr algn="l">
-              <a:lnSpc>
-                <a:spcPct val="115000"/>
-              </a:lnSpc>
-            </a:pPr>
-            <a:r>
-              <a:rPr sz="1100" b="0" i="0">
-                <a:solidFill>
-                  <a:srgbClr val="262626"/>
-                </a:solidFill>
-                <a:latin typeface="Yu Gothic"/>
-              </a:rPr>
-              <a:t>意図しない作成を抑制する。</a:t>
-            </a:r>
-          </a:p>
-        </p:txBody>
-      </p:sp>
-      <p:sp>
-        <p:nvSpPr>
-          <p:cNvPr id="12" name="TextBox 11"/>
-          <p:cNvSpPr txBox="1"/>
-          <p:nvPr/>
-        </p:nvSpPr>
-        <p:spPr>
-          <a:xfrm>
-            <a:off x="685800" y="3639312"/>
-            <a:ext cx="5166360" cy="256032"/>
-          </a:xfrm>
-          <a:prstGeom prst="rect">
-            <a:avLst/>
-          </a:prstGeom>
-          <a:noFill/>
-        </p:spPr>
-        <p:txBody>
-          <a:bodyPr wrap="square" anchor="t" lIns="0" rIns="0" tIns="0" bIns="0">
-            <a:spAutoFit/>
-          </a:bodyPr>
-          <a:lstStyle/>
-          <a:p>
-            <a:pPr algn="l">
-              <a:lnSpc>
-                <a:spcPct val="100000"/>
-              </a:lnSpc>
-            </a:pPr>
-            <a:r>
-              <a:rPr sz="950" b="0" i="1">
-                <a:solidFill>
-                  <a:srgbClr val="6E6E6E"/>
-                </a:solidFill>
-                <a:latin typeface="Yu Gothic"/>
-              </a:rPr>
-              <a:t>根拠：「Environment routing」（Microsoft Learn）</a:t>
-            </a:r>
-          </a:p>
-        </p:txBody>
-      </p:sp>
-      <p:sp>
-        <p:nvSpPr>
-          <p:cNvPr id="13" name="Rectangle 12"/>
+              <a:t>Copilot Studio／Power Apps／Power Automateへの新規アクセス時、メーカーをDefault環境ではなく個人用開発環境へ自動的に誘導し、意図しない作成を抑制する。</a:t>
+            </a:r>
+          </a:p>
+        </p:txBody>
+      </p:sp>
+      <p:sp>
+        <p:nvSpPr>
+          <p:cNvPr id="12" name="Rectangle 11"/>
           <p:cNvSpPr/>
           <p:nvPr/>
         </p:nvSpPr>
@@ -3990,7 +3924,7 @@
       </p:sp>
       <p:sp>
         <p:nvSpPr>
-          <p:cNvPr id="14" name="Rectangle 13"/>
+          <p:cNvPr id="13" name="Rectangle 12"/>
           <p:cNvSpPr/>
           <p:nvPr/>
         </p:nvSpPr>
@@ -4034,13 +3968,13 @@
       </p:sp>
       <p:sp>
         <p:nvSpPr>
-          <p:cNvPr id="15" name="TextBox 14"/>
+          <p:cNvPr id="14" name="TextBox 13"/>
           <p:cNvSpPr txBox="1"/>
           <p:nvPr/>
         </p:nvSpPr>
         <p:spPr>
           <a:xfrm>
-            <a:off x="6355080" y="2112264"/>
+            <a:off x="6355080" y="2148840"/>
             <a:ext cx="5166360" cy="502920"/>
           </a:xfrm>
           <a:prstGeom prst="rect">
@@ -4073,14 +4007,14 @@
       </p:sp>
       <p:sp>
         <p:nvSpPr>
-          <p:cNvPr id="16" name="TextBox 15"/>
+          <p:cNvPr id="15" name="TextBox 14"/>
           <p:cNvSpPr txBox="1"/>
           <p:nvPr/>
         </p:nvSpPr>
         <p:spPr>
           <a:xfrm>
-            <a:off x="6355080" y="2587752"/>
-            <a:ext cx="5166360" cy="822960"/>
+            <a:off x="6355080" y="2651760"/>
+            <a:ext cx="5166360" cy="1097280"/>
           </a:xfrm>
           <a:prstGeom prst="rect">
             <a:avLst/>
@@ -4095,79 +4029,24 @@
           <a:p>
             <a:pPr algn="l">
               <a:lnSpc>
-                <a:spcPct val="115000"/>
-              </a:lnSpc>
-            </a:pPr>
-            <a:r>
-              <a:rPr sz="1100" b="0" i="0">
+                <a:spcPct val="120000"/>
+              </a:lnSpc>
+            </a:pPr>
+            <a:r>
+              <a:rPr sz="1150" b="0" i="0">
                 <a:solidFill>
                   <a:srgbClr val="262626"/>
                 </a:solidFill>
                 <a:latin typeface="Yu Gothic"/>
               </a:rPr>
-              <a:t>確認項目2・5のとおり追加ライセンス不要で即時導入可能。コネクタ</a:t>
-            </a:r>
-          </a:p>
-          <a:p>
-            <a:pPr algn="l">
-              <a:lnSpc>
-                <a:spcPct val="115000"/>
-              </a:lnSpc>
-            </a:pPr>
-            <a:r>
-              <a:rPr sz="1100" b="0" i="0">
-                <a:solidFill>
-                  <a:srgbClr val="262626"/>
-                </a:solidFill>
-                <a:latin typeface="Yu Gothic"/>
-              </a:rPr>
-              <a:t>既定を「ブロック済み」にする方式がMS推奨のベストプラクティス。</a:t>
-            </a:r>
-          </a:p>
-        </p:txBody>
-      </p:sp>
-      <p:sp>
-        <p:nvSpPr>
-          <p:cNvPr id="17" name="TextBox 16"/>
-          <p:cNvSpPr txBox="1"/>
-          <p:nvPr/>
-        </p:nvSpPr>
-        <p:spPr>
-          <a:xfrm>
-            <a:off x="6355080" y="3639312"/>
-            <a:ext cx="5166360" cy="256032"/>
-          </a:xfrm>
-          <a:prstGeom prst="rect">
-            <a:avLst/>
-          </a:prstGeom>
-          <a:noFill/>
-        </p:spPr>
-        <p:txBody>
-          <a:bodyPr wrap="square" anchor="t" lIns="0" rIns="0" tIns="0" bIns="0">
-            <a:spAutoFit/>
-          </a:bodyPr>
-          <a:lstStyle/>
-          <a:p>
-            <a:pPr algn="l">
-              <a:lnSpc>
-                <a:spcPct val="100000"/>
-              </a:lnSpc>
-            </a:pPr>
-            <a:r>
-              <a:rPr sz="950" b="0" i="1">
-                <a:solidFill>
-                  <a:srgbClr val="6E6E6E"/>
-                </a:solidFill>
-                <a:latin typeface="Yu Gothic"/>
-              </a:rPr>
-              <a:t>根拠：「Secure the default environment」（Microsoft Learn）</a:t>
-            </a:r>
-          </a:p>
-        </p:txBody>
-      </p:sp>
-      <p:sp>
-        <p:nvSpPr>
-          <p:cNvPr id="18" name="Rectangle 17"/>
+              <a:t>確認項目2・5のとおり追加ライセンス不要で即時導入可能。コネクタ既定を「ブロック済み」にする方式がMS推奨のベストプラクティス。</a:t>
+            </a:r>
+          </a:p>
+        </p:txBody>
+      </p:sp>
+      <p:sp>
+        <p:nvSpPr>
+          <p:cNvPr id="16" name="Rectangle 15"/>
           <p:cNvSpPr/>
           <p:nvPr/>
         </p:nvSpPr>
@@ -4213,7 +4092,7 @@
       </p:sp>
       <p:sp>
         <p:nvSpPr>
-          <p:cNvPr id="19" name="Rectangle 18"/>
+          <p:cNvPr id="17" name="Rectangle 16"/>
           <p:cNvSpPr/>
           <p:nvPr/>
         </p:nvSpPr>
@@ -4257,13 +4136,13 @@
       </p:sp>
       <p:sp>
         <p:nvSpPr>
-          <p:cNvPr id="20" name="TextBox 19"/>
+          <p:cNvPr id="18" name="TextBox 17"/>
           <p:cNvSpPr txBox="1"/>
           <p:nvPr/>
         </p:nvSpPr>
         <p:spPr>
           <a:xfrm>
-            <a:off x="685800" y="4215384"/>
+            <a:off x="685800" y="4251960"/>
             <a:ext cx="5166360" cy="502920"/>
           </a:xfrm>
           <a:prstGeom prst="rect">
@@ -4312,14 +4191,14 @@
       </p:sp>
       <p:sp>
         <p:nvSpPr>
-          <p:cNvPr id="21" name="TextBox 20"/>
+          <p:cNvPr id="19" name="TextBox 18"/>
           <p:cNvSpPr txBox="1"/>
           <p:nvPr/>
         </p:nvSpPr>
         <p:spPr>
           <a:xfrm>
-            <a:off x="685800" y="4690872"/>
-            <a:ext cx="5166360" cy="822960"/>
+            <a:off x="685800" y="4754880"/>
+            <a:ext cx="5166360" cy="1097280"/>
           </a:xfrm>
           <a:prstGeom prst="rect">
             <a:avLst/>
@@ -4334,79 +4213,24 @@
           <a:p>
             <a:pPr algn="l">
               <a:lnSpc>
-                <a:spcPct val="115000"/>
-              </a:lnSpc>
-            </a:pPr>
-            <a:r>
-              <a:rPr sz="1100" b="0" i="0">
+                <a:spcPct val="120000"/>
+              </a:lnSpc>
+            </a:pPr>
+            <a:r>
+              <a:rPr sz="1150" b="0" i="0">
                 <a:solidFill>
                   <a:srgbClr val="262626"/>
                 </a:solidFill>
                 <a:latin typeface="Yu Gothic"/>
               </a:rPr>
-              <a:t>共有制限・データ保持・AI機能有効化などの統制ルールを複数環境へ</a:t>
-            </a:r>
-          </a:p>
-          <a:p>
-            <a:pPr algn="l">
-              <a:lnSpc>
-                <a:spcPct val="115000"/>
-              </a:lnSpc>
-            </a:pPr>
-            <a:r>
-              <a:rPr sz="1100" b="0" i="0">
-                <a:solidFill>
-                  <a:srgbClr val="262626"/>
-                </a:solidFill>
-                <a:latin typeface="Yu Gothic"/>
-              </a:rPr>
-              <a:t>一括適用するガバナンス機能。適用範囲は個別環境ごとに要確認。</a:t>
-            </a:r>
-          </a:p>
-        </p:txBody>
-      </p:sp>
-      <p:sp>
-        <p:nvSpPr>
-          <p:cNvPr id="22" name="TextBox 21"/>
-          <p:cNvSpPr txBox="1"/>
-          <p:nvPr/>
-        </p:nvSpPr>
-        <p:spPr>
-          <a:xfrm>
-            <a:off x="685800" y="5742432"/>
-            <a:ext cx="5166360" cy="256032"/>
-          </a:xfrm>
-          <a:prstGeom prst="rect">
-            <a:avLst/>
-          </a:prstGeom>
-          <a:noFill/>
-        </p:spPr>
-        <p:txBody>
-          <a:bodyPr wrap="square" anchor="t" lIns="0" rIns="0" tIns="0" bIns="0">
-            <a:spAutoFit/>
-          </a:bodyPr>
-          <a:lstStyle/>
-          <a:p>
-            <a:pPr algn="l">
-              <a:lnSpc>
-                <a:spcPct val="100000"/>
-              </a:lnSpc>
-            </a:pPr>
-            <a:r>
-              <a:rPr sz="950" b="0" i="1">
-                <a:solidFill>
-                  <a:srgbClr val="6E6E6E"/>
-                </a:solidFill>
-                <a:latin typeface="Yu Gothic"/>
-              </a:rPr>
-              <a:t>根拠：「Environment groups」（Microsoft Learn）</a:t>
-            </a:r>
-          </a:p>
-        </p:txBody>
-      </p:sp>
-      <p:sp>
-        <p:nvSpPr>
-          <p:cNvPr id="23" name="Rectangle 22"/>
+              <a:t>共有制限・データ保持・AI機能有効化などの統制ルールを複数環境へ一括適用するガバナンス機能。適用範囲は個別環境ごとに要確認。</a:t>
+            </a:r>
+          </a:p>
+        </p:txBody>
+      </p:sp>
+      <p:sp>
+        <p:nvSpPr>
+          <p:cNvPr id="20" name="Rectangle 19"/>
           <p:cNvSpPr/>
           <p:nvPr/>
         </p:nvSpPr>
@@ -4452,7 +4276,7 @@
       </p:sp>
       <p:sp>
         <p:nvSpPr>
-          <p:cNvPr id="24" name="Rectangle 23"/>
+          <p:cNvPr id="21" name="Rectangle 20"/>
           <p:cNvSpPr/>
           <p:nvPr/>
         </p:nvSpPr>
@@ -4496,13 +4320,13 @@
       </p:sp>
       <p:sp>
         <p:nvSpPr>
-          <p:cNvPr id="25" name="TextBox 24"/>
+          <p:cNvPr id="22" name="TextBox 21"/>
           <p:cNvSpPr txBox="1"/>
           <p:nvPr/>
         </p:nvSpPr>
         <p:spPr>
           <a:xfrm>
-            <a:off x="6355080" y="4215384"/>
+            <a:off x="6355080" y="4251960"/>
             <a:ext cx="5166360" cy="502920"/>
           </a:xfrm>
           <a:prstGeom prst="rect">
@@ -4535,14 +4359,14 @@
       </p:sp>
       <p:sp>
         <p:nvSpPr>
-          <p:cNvPr id="26" name="TextBox 25"/>
+          <p:cNvPr id="23" name="TextBox 22"/>
           <p:cNvSpPr txBox="1"/>
           <p:nvPr/>
         </p:nvSpPr>
         <p:spPr>
           <a:xfrm>
-            <a:off x="6355080" y="4690872"/>
-            <a:ext cx="5166360" cy="822960"/>
+            <a:off x="6355080" y="4754880"/>
+            <a:ext cx="5166360" cy="1097280"/>
           </a:xfrm>
           <a:prstGeom prst="rect">
             <a:avLst/>
@@ -4557,47 +4381,31 @@
           <a:p>
             <a:pPr algn="l">
               <a:lnSpc>
-                <a:spcPct val="115000"/>
-              </a:lnSpc>
-            </a:pPr>
-            <a:r>
-              <a:rPr sz="1100" b="0" i="0">
+                <a:spcPct val="120000"/>
+              </a:lnSpc>
+            </a:pPr>
+            <a:r>
+              <a:rPr sz="1150" b="0" i="0">
                 <a:solidFill>
                   <a:srgbClr val="262626"/>
                 </a:solidFill>
                 <a:latin typeface="Yu Gothic"/>
               </a:rPr>
-              <a:t>利用者数の多い重要アプリ／フローはソリューション化のうえ専用の</a:t>
-            </a:r>
-          </a:p>
-          <a:p>
-            <a:pPr algn="l">
-              <a:lnSpc>
-                <a:spcPct val="115000"/>
-              </a:lnSpc>
-            </a:pPr>
-            <a:r>
-              <a:rPr sz="1100" b="0" i="0">
-                <a:solidFill>
-                  <a:srgbClr val="262626"/>
-                </a:solidFill>
-                <a:latin typeface="Yu Gothic"/>
-              </a:rPr>
-              <a:t>（小規模な）マネージド環境へ移行し、Premium対象を限定する。</a:t>
-            </a:r>
-          </a:p>
-        </p:txBody>
-      </p:sp>
-      <p:sp>
-        <p:nvSpPr>
-          <p:cNvPr id="27" name="TextBox 26"/>
+              <a:t>利用者数の多い重要アプリ／フローはソリューション化のうえ専用の（小規模な）マネージド環境へ移行し、Premium対象を限定する。</a:t>
+            </a:r>
+          </a:p>
+        </p:txBody>
+      </p:sp>
+      <p:sp>
+        <p:nvSpPr>
+          <p:cNvPr id="24" name="TextBox 23"/>
           <p:cNvSpPr txBox="1"/>
           <p:nvPr/>
         </p:nvSpPr>
         <p:spPr>
           <a:xfrm>
-            <a:off x="6355080" y="5742432"/>
-            <a:ext cx="5166360" cy="256032"/>
+            <a:off x="502920" y="6565392"/>
+            <a:ext cx="8229600" cy="274320"/>
           </a:xfrm>
           <a:prstGeom prst="rect">
             <a:avLst/>
@@ -4616,51 +4424,12 @@
               </a:lnSpc>
             </a:pPr>
             <a:r>
-              <a:rPr sz="950" b="0" i="1">
+              <a:rPr sz="900" b="0" i="0">
                 <a:solidFill>
                   <a:srgbClr val="6E6E6E"/>
                 </a:solidFill>
                 <a:latin typeface="Yu Gothic"/>
               </a:rPr>
-              <a:t>根拠：「Manage and govern the default environment」（Microsoft Learn）</a:t>
-            </a:r>
-          </a:p>
-        </p:txBody>
-      </p:sp>
-      <p:sp>
-        <p:nvSpPr>
-          <p:cNvPr id="28" name="TextBox 27"/>
-          <p:cNvSpPr txBox="1"/>
-          <p:nvPr/>
-        </p:nvSpPr>
-        <p:spPr>
-          <a:xfrm>
-            <a:off x="502920" y="6565392"/>
-            <a:ext cx="8229600" cy="274320"/>
-          </a:xfrm>
-          <a:prstGeom prst="rect">
-            <a:avLst/>
-          </a:prstGeom>
-          <a:noFill/>
-        </p:spPr>
-        <p:txBody>
-          <a:bodyPr wrap="square" anchor="t" lIns="0" rIns="0" tIns="0" bIns="0">
-            <a:spAutoFit/>
-          </a:bodyPr>
-          <a:lstStyle/>
-          <a:p>
-            <a:pPr algn="l">
-              <a:lnSpc>
-                <a:spcPct val="100000"/>
-              </a:lnSpc>
-            </a:pPr>
-            <a:r>
-              <a:rPr sz="900" b="0" i="0">
-                <a:solidFill>
-                  <a:srgbClr val="6E6E6E"/>
-                </a:solidFill>
-                <a:latin typeface="Yu Gothic"/>
-              </a:rPr>
               <a:t>Power Platform Default環境 統治 調査報告 ｜ Confidential</a:t>
             </a:r>
           </a:p>
@@ -4668,7 +4437,7 @@
       </p:sp>
       <p:sp>
         <p:nvSpPr>
-          <p:cNvPr id="29" name="TextBox 28"/>
+          <p:cNvPr id="25" name="TextBox 24"/>
           <p:cNvSpPr txBox="1"/>
           <p:nvPr/>
         </p:nvSpPr>
@@ -4905,8 +4674,8 @@
         </p:nvSpPr>
         <p:spPr>
           <a:xfrm>
-            <a:off x="502920" y="1371600"/>
-            <a:ext cx="11201400" cy="1115568"/>
+            <a:off x="502920" y="1463040"/>
+            <a:ext cx="11201400" cy="1024128"/>
           </a:xfrm>
           <a:prstGeom prst="rect">
             <a:avLst/>
@@ -4949,8 +4718,8 @@
         </p:nvSpPr>
         <p:spPr>
           <a:xfrm>
-            <a:off x="502920" y="1371600"/>
-            <a:ext cx="91440" cy="1115568"/>
+            <a:off x="502920" y="1463040"/>
+            <a:ext cx="91440" cy="1024128"/>
           </a:xfrm>
           <a:prstGeom prst="rect">
             <a:avLst/>
@@ -4993,7 +4762,7 @@
         </p:nvSpPr>
         <p:spPr>
           <a:xfrm>
-            <a:off x="777240" y="1463040"/>
+            <a:off x="777240" y="1591056"/>
             <a:ext cx="10698480" cy="292608"/>
           </a:xfrm>
           <a:prstGeom prst="rect">
@@ -5032,8 +4801,8 @@
         </p:nvSpPr>
         <p:spPr>
           <a:xfrm>
-            <a:off x="777240" y="1773936"/>
-            <a:ext cx="10698480" cy="384048"/>
+            <a:off x="777240" y="1920240"/>
+            <a:ext cx="10698480" cy="502920"/>
           </a:xfrm>
           <a:prstGeom prst="rect">
             <a:avLst/>
@@ -5048,11 +4817,11 @@
           <a:p>
             <a:pPr algn="l">
               <a:lnSpc>
-                <a:spcPct val="110000"/>
-              </a:lnSpc>
-            </a:pPr>
-            <a:r>
-              <a:rPr sz="1100" b="0" i="0">
+                <a:spcPct val="115000"/>
+              </a:lnSpc>
+            </a:pPr>
+            <a:r>
+              <a:rPr sz="1150" b="0" i="0">
                 <a:solidFill>
                   <a:srgbClr val="262626"/>
                 </a:solidFill>
@@ -5065,53 +4834,14 @@
       </p:sp>
       <p:sp>
         <p:nvSpPr>
-          <p:cNvPr id="10" name="TextBox 9"/>
-          <p:cNvSpPr txBox="1"/>
-          <p:nvPr/>
-        </p:nvSpPr>
-        <p:spPr>
-          <a:xfrm>
-            <a:off x="777240" y="2167128"/>
-            <a:ext cx="10698480" cy="274320"/>
-          </a:xfrm>
-          <a:prstGeom prst="rect">
-            <a:avLst/>
-          </a:prstGeom>
-          <a:noFill/>
-        </p:spPr>
-        <p:txBody>
-          <a:bodyPr wrap="square" anchor="t" lIns="0" rIns="0" tIns="0" bIns="0">
-            <a:spAutoFit/>
-          </a:bodyPr>
-          <a:lstStyle/>
-          <a:p>
-            <a:pPr algn="l">
-              <a:lnSpc>
-                <a:spcPct val="100000"/>
-              </a:lnSpc>
-            </a:pPr>
-            <a:r>
-              <a:rPr sz="1000" b="0" i="1">
-                <a:solidFill>
-                  <a:srgbClr val="6E6E6E"/>
-                </a:solidFill>
-                <a:latin typeface="Yu Gothic"/>
-              </a:rPr>
-              <a:t>根拠：Microsoft公式ドキュメント「Licensing（Managed Environments）」において、通知の段階的導入スケジュールが明記されている。</a:t>
-            </a:r>
-          </a:p>
-        </p:txBody>
-      </p:sp>
-      <p:sp>
-        <p:nvSpPr>
-          <p:cNvPr id="11" name="Rectangle 10"/>
+          <p:cNvPr id="10" name="Rectangle 9"/>
           <p:cNvSpPr/>
           <p:nvPr/>
         </p:nvSpPr>
         <p:spPr>
           <a:xfrm>
-            <a:off x="502920" y="2606040"/>
-            <a:ext cx="11201400" cy="1115568"/>
+            <a:off x="502920" y="2651760"/>
+            <a:ext cx="11201400" cy="1024128"/>
           </a:xfrm>
           <a:prstGeom prst="rect">
             <a:avLst/>
@@ -5148,14 +4878,14 @@
       </p:sp>
       <p:sp>
         <p:nvSpPr>
-          <p:cNvPr id="12" name="Rectangle 11"/>
+          <p:cNvPr id="11" name="Rectangle 10"/>
           <p:cNvSpPr/>
           <p:nvPr/>
         </p:nvSpPr>
         <p:spPr>
           <a:xfrm>
-            <a:off x="502920" y="2606040"/>
-            <a:ext cx="91440" cy="1115568"/>
+            <a:off x="502920" y="2651760"/>
+            <a:ext cx="91440" cy="1024128"/>
           </a:xfrm>
           <a:prstGeom prst="rect">
             <a:avLst/>
@@ -5192,13 +4922,13 @@
       </p:sp>
       <p:sp>
         <p:nvSpPr>
-          <p:cNvPr id="13" name="TextBox 12"/>
+          <p:cNvPr id="12" name="TextBox 11"/>
           <p:cNvSpPr txBox="1"/>
           <p:nvPr/>
         </p:nvSpPr>
         <p:spPr>
           <a:xfrm>
-            <a:off x="777240" y="2697480"/>
+            <a:off x="777240" y="2779776"/>
             <a:ext cx="10698480" cy="292608"/>
           </a:xfrm>
           <a:prstGeom prst="rect">
@@ -5231,14 +4961,14 @@
       </p:sp>
       <p:sp>
         <p:nvSpPr>
-          <p:cNvPr id="14" name="TextBox 13"/>
+          <p:cNvPr id="13" name="TextBox 12"/>
           <p:cNvSpPr txBox="1"/>
           <p:nvPr/>
         </p:nvSpPr>
         <p:spPr>
           <a:xfrm>
-            <a:off x="777240" y="3008376"/>
-            <a:ext cx="10698480" cy="384048"/>
+            <a:off x="777240" y="3108960"/>
+            <a:ext cx="10698480" cy="502920"/>
           </a:xfrm>
           <a:prstGeom prst="rect">
             <a:avLst/>
@@ -5253,11 +4983,11 @@
           <a:p>
             <a:pPr algn="l">
               <a:lnSpc>
-                <a:spcPct val="110000"/>
-              </a:lnSpc>
-            </a:pPr>
-            <a:r>
-              <a:rPr sz="1100" b="0" i="0">
+                <a:spcPct val="115000"/>
+              </a:lnSpc>
+            </a:pPr>
+            <a:r>
+              <a:rPr sz="1150" b="0" i="0">
                 <a:solidFill>
                   <a:srgbClr val="262626"/>
                 </a:solidFill>
@@ -5270,53 +5000,14 @@
       </p:sp>
       <p:sp>
         <p:nvSpPr>
-          <p:cNvPr id="15" name="TextBox 14"/>
-          <p:cNvSpPr txBox="1"/>
-          <p:nvPr/>
-        </p:nvSpPr>
-        <p:spPr>
-          <a:xfrm>
-            <a:off x="777240" y="3401568"/>
-            <a:ext cx="10698480" cy="274320"/>
-          </a:xfrm>
-          <a:prstGeom prst="rect">
-            <a:avLst/>
-          </a:prstGeom>
-          <a:noFill/>
-        </p:spPr>
-        <p:txBody>
-          <a:bodyPr wrap="square" anchor="t" lIns="0" rIns="0" tIns="0" bIns="0">
-            <a:spAutoFit/>
-          </a:bodyPr>
-          <a:lstStyle/>
-          <a:p>
-            <a:pPr algn="l">
-              <a:lnSpc>
-                <a:spcPct val="100000"/>
-              </a:lnSpc>
-            </a:pPr>
-            <a:r>
-              <a:rPr sz="1000" b="0" i="1">
-                <a:solidFill>
-                  <a:srgbClr val="6E6E6E"/>
-                </a:solidFill>
-                <a:latin typeface="Yu Gothic"/>
-              </a:rPr>
-              <a:t>根拠：Microsoft公式ドキュメント「Manage and govern the default environment」において、一部コネクタがブロック不可である旨が明記されている。</a:t>
-            </a:r>
-          </a:p>
-        </p:txBody>
-      </p:sp>
-      <p:sp>
-        <p:nvSpPr>
-          <p:cNvPr id="16" name="Rectangle 15"/>
+          <p:cNvPr id="14" name="Rectangle 13"/>
           <p:cNvSpPr/>
           <p:nvPr/>
         </p:nvSpPr>
         <p:spPr>
           <a:xfrm>
             <a:off x="502920" y="3840480"/>
-            <a:ext cx="11201400" cy="1115568"/>
+            <a:ext cx="11201400" cy="1024128"/>
           </a:xfrm>
           <a:prstGeom prst="rect">
             <a:avLst/>
@@ -5353,14 +5044,14 @@
       </p:sp>
       <p:sp>
         <p:nvSpPr>
-          <p:cNvPr id="17" name="Rectangle 16"/>
+          <p:cNvPr id="15" name="Rectangle 14"/>
           <p:cNvSpPr/>
           <p:nvPr/>
         </p:nvSpPr>
         <p:spPr>
           <a:xfrm>
             <a:off x="502920" y="3840480"/>
-            <a:ext cx="91440" cy="1115568"/>
+            <a:ext cx="91440" cy="1024128"/>
           </a:xfrm>
           <a:prstGeom prst="rect">
             <a:avLst/>
@@ -5397,13 +5088,13 @@
       </p:sp>
       <p:sp>
         <p:nvSpPr>
-          <p:cNvPr id="18" name="TextBox 17"/>
+          <p:cNvPr id="16" name="TextBox 15"/>
           <p:cNvSpPr txBox="1"/>
           <p:nvPr/>
         </p:nvSpPr>
         <p:spPr>
           <a:xfrm>
-            <a:off x="777240" y="3931920"/>
+            <a:off x="777240" y="3968496"/>
             <a:ext cx="10698480" cy="292608"/>
           </a:xfrm>
           <a:prstGeom prst="rect">
@@ -5436,14 +5127,14 @@
       </p:sp>
       <p:sp>
         <p:nvSpPr>
-          <p:cNvPr id="19" name="TextBox 18"/>
+          <p:cNvPr id="17" name="TextBox 16"/>
           <p:cNvSpPr txBox="1"/>
           <p:nvPr/>
         </p:nvSpPr>
         <p:spPr>
           <a:xfrm>
-            <a:off x="777240" y="4242816"/>
-            <a:ext cx="10698480" cy="384048"/>
+            <a:off x="777240" y="4297680"/>
+            <a:ext cx="10698480" cy="502920"/>
           </a:xfrm>
           <a:prstGeom prst="rect">
             <a:avLst/>
@@ -5458,11 +5149,11 @@
           <a:p>
             <a:pPr algn="l">
               <a:lnSpc>
-                <a:spcPct val="110000"/>
-              </a:lnSpc>
-            </a:pPr>
-            <a:r>
-              <a:rPr sz="1100" b="0" i="0">
+                <a:spcPct val="115000"/>
+              </a:lnSpc>
+            </a:pPr>
+            <a:r>
+              <a:rPr sz="1150" b="0" i="0">
                 <a:solidFill>
                   <a:srgbClr val="262626"/>
                 </a:solidFill>
@@ -5475,53 +5166,14 @@
       </p:sp>
       <p:sp>
         <p:nvSpPr>
-          <p:cNvPr id="20" name="TextBox 19"/>
-          <p:cNvSpPr txBox="1"/>
-          <p:nvPr/>
-        </p:nvSpPr>
-        <p:spPr>
-          <a:xfrm>
-            <a:off x="777240" y="4636008"/>
-            <a:ext cx="10698480" cy="274320"/>
-          </a:xfrm>
-          <a:prstGeom prst="rect">
-            <a:avLst/>
-          </a:prstGeom>
-          <a:noFill/>
-        </p:spPr>
-        <p:txBody>
-          <a:bodyPr wrap="square" anchor="t" lIns="0" rIns="0" tIns="0" bIns="0">
-            <a:spAutoFit/>
-          </a:bodyPr>
-          <a:lstStyle/>
-          <a:p>
-            <a:pPr algn="l">
-              <a:lnSpc>
-                <a:spcPct val="100000"/>
-              </a:lnSpc>
-            </a:pPr>
-            <a:r>
-              <a:rPr sz="1000" b="0" i="1">
-                <a:solidFill>
-                  <a:srgbClr val="6E6E6E"/>
-                </a:solidFill>
-                <a:latin typeface="Yu Gothic"/>
-              </a:rPr>
-              <a:t>根拠：Microsoft公式ドキュメント「Secure the default environment」において、エラーメッセージのカスタマイズ手段（PowerShellコマンドレット）が案内されている。</a:t>
-            </a:r>
-          </a:p>
-        </p:txBody>
-      </p:sp>
-      <p:sp>
-        <p:nvSpPr>
-          <p:cNvPr id="21" name="Rectangle 20"/>
+          <p:cNvPr id="18" name="Rectangle 17"/>
           <p:cNvSpPr/>
           <p:nvPr/>
         </p:nvSpPr>
         <p:spPr>
           <a:xfrm>
-            <a:off x="502920" y="5074920"/>
-            <a:ext cx="11201400" cy="1115568"/>
+            <a:off x="502920" y="5029200"/>
+            <a:ext cx="11201400" cy="1024128"/>
           </a:xfrm>
           <a:prstGeom prst="rect">
             <a:avLst/>
@@ -5558,14 +5210,14 @@
       </p:sp>
       <p:sp>
         <p:nvSpPr>
-          <p:cNvPr id="22" name="Rectangle 21"/>
+          <p:cNvPr id="19" name="Rectangle 18"/>
           <p:cNvSpPr/>
           <p:nvPr/>
         </p:nvSpPr>
         <p:spPr>
           <a:xfrm>
-            <a:off x="502920" y="5074920"/>
-            <a:ext cx="91440" cy="1115568"/>
+            <a:off x="502920" y="5029200"/>
+            <a:ext cx="91440" cy="1024128"/>
           </a:xfrm>
           <a:prstGeom prst="rect">
             <a:avLst/>
@@ -5602,13 +5254,13 @@
       </p:sp>
       <p:sp>
         <p:nvSpPr>
-          <p:cNvPr id="23" name="TextBox 22"/>
+          <p:cNvPr id="20" name="TextBox 19"/>
           <p:cNvSpPr txBox="1"/>
           <p:nvPr/>
         </p:nvSpPr>
         <p:spPr>
           <a:xfrm>
-            <a:off x="777240" y="5166360"/>
+            <a:off x="777240" y="5157216"/>
             <a:ext cx="10698480" cy="292608"/>
           </a:xfrm>
           <a:prstGeom prst="rect">
@@ -5641,14 +5293,14 @@
       </p:sp>
       <p:sp>
         <p:nvSpPr>
-          <p:cNvPr id="24" name="TextBox 23"/>
+          <p:cNvPr id="21" name="TextBox 20"/>
           <p:cNvSpPr txBox="1"/>
           <p:nvPr/>
         </p:nvSpPr>
         <p:spPr>
           <a:xfrm>
-            <a:off x="777240" y="5477256"/>
-            <a:ext cx="10698480" cy="384048"/>
+            <a:off x="777240" y="5486400"/>
+            <a:ext cx="10698480" cy="502920"/>
           </a:xfrm>
           <a:prstGeom prst="rect">
             <a:avLst/>
@@ -5663,11 +5315,11 @@
           <a:p>
             <a:pPr algn="l">
               <a:lnSpc>
-                <a:spcPct val="110000"/>
-              </a:lnSpc>
-            </a:pPr>
-            <a:r>
-              <a:rPr sz="1100" b="0" i="0">
+                <a:spcPct val="115000"/>
+              </a:lnSpc>
+            </a:pPr>
+            <a:r>
+              <a:rPr sz="1150" b="0" i="0">
                 <a:solidFill>
                   <a:srgbClr val="262626"/>
                 </a:solidFill>
@@ -5680,14 +5332,14 @@
       </p:sp>
       <p:sp>
         <p:nvSpPr>
-          <p:cNvPr id="25" name="TextBox 24"/>
+          <p:cNvPr id="22" name="TextBox 21"/>
           <p:cNvSpPr txBox="1"/>
           <p:nvPr/>
         </p:nvSpPr>
         <p:spPr>
           <a:xfrm>
-            <a:off x="777240" y="5870448"/>
-            <a:ext cx="10698480" cy="274320"/>
+            <a:off x="502920" y="6355080"/>
+            <a:ext cx="11155680" cy="228600"/>
           </a:xfrm>
           <a:prstGeom prst="rect">
             <a:avLst/>
@@ -5712,14 +5364,14 @@
                 </a:solidFill>
                 <a:latin typeface="Yu Gothic"/>
               </a:rPr>
-              <a:t>根拠：Microsoft公式ドキュメント「Managed environments overview／Licensing（Managed Environments）」において、機能・ライセンス要件は継続的に更新される旨が案内されているため、実施直前の再確認が必要。</a:t>
-            </a:r>
-          </a:p>
-        </p:txBody>
-      </p:sp>
-      <p:sp>
-        <p:nvSpPr>
-          <p:cNvPr id="26" name="TextBox 25"/>
+              <a:t>※ 各項目の根拠（公式ドキュメントの該当箇所・原文抜粋）は巻末Appendixに記載</a:t>
+            </a:r>
+          </a:p>
+        </p:txBody>
+      </p:sp>
+      <p:sp>
+        <p:nvSpPr>
+          <p:cNvPr id="23" name="TextBox 22"/>
           <p:cNvSpPr txBox="1"/>
           <p:nvPr/>
         </p:nvSpPr>
@@ -5758,7 +5410,7 @@
       </p:sp>
       <p:sp>
         <p:nvSpPr>
-          <p:cNvPr id="27" name="TextBox 26"/>
+          <p:cNvPr id="24" name="TextBox 23"/>
           <p:cNvSpPr txBox="1"/>
           <p:nvPr/>
         </p:nvSpPr>
@@ -5804,6 +5456,271 @@
 </file>
 
 <file path=ppt/slides/slide12.xml><?xml version="1.0" encoding="utf-8"?>
+<p:sld xmlns:a="http://schemas.openxmlformats.org/drawingml/2006/main" xmlns:p="http://schemas.openxmlformats.org/presentationml/2006/main" xmlns:r="http://schemas.openxmlformats.org/officeDocument/2006/relationships">
+  <p:cSld>
+    <p:bg>
+      <p:bgPr>
+        <a:solidFill>
+          <a:srgbClr val="1B2A4A"/>
+        </a:solidFill>
+        <a:effectLst/>
+      </p:bgPr>
+    </p:bg>
+    <p:spTree>
+      <p:nvGrpSpPr>
+        <p:cNvPr id="1" name=""/>
+        <p:cNvGrpSpPr/>
+        <p:nvPr/>
+      </p:nvGrpSpPr>
+      <p:grpSpPr/>
+      <p:sp>
+        <p:nvSpPr>
+          <p:cNvPr id="2" name="Rectangle 1"/>
+          <p:cNvSpPr/>
+          <p:nvPr/>
+        </p:nvSpPr>
+        <p:spPr>
+          <a:xfrm>
+            <a:off x="0" y="3246120"/>
+            <a:ext cx="12191695" cy="54864"/>
+          </a:xfrm>
+          <a:prstGeom prst="rect">
+            <a:avLst/>
+          </a:prstGeom>
+          <a:solidFill>
+            <a:srgbClr val="2E5AAC"/>
+          </a:solidFill>
+          <a:ln>
+            <a:noFill/>
+          </a:ln>
+          <a:effectLst/>
+        </p:spPr>
+        <p:style>
+          <a:lnRef idx="1">
+            <a:schemeClr val="accent1"/>
+          </a:lnRef>
+          <a:fillRef idx="3">
+            <a:schemeClr val="accent1"/>
+          </a:fillRef>
+          <a:effectRef idx="2">
+            <a:schemeClr val="accent1"/>
+          </a:effectRef>
+          <a:fontRef idx="minor">
+            <a:schemeClr val="lt1"/>
+          </a:fontRef>
+        </p:style>
+        <p:txBody>
+          <a:bodyPr rtlCol="0" anchor="ctr"/>
+          <a:lstStyle/>
+          <a:p>
+            <a:pPr algn="ctr"/>
+          </a:p>
+        </p:txBody>
+      </p:sp>
+      <p:sp>
+        <p:nvSpPr>
+          <p:cNvPr id="3" name="TextBox 2"/>
+          <p:cNvSpPr txBox="1"/>
+          <p:nvPr/>
+        </p:nvSpPr>
+        <p:spPr>
+          <a:xfrm>
+            <a:off x="822960" y="2743200"/>
+            <a:ext cx="10058400" cy="457200"/>
+          </a:xfrm>
+          <a:prstGeom prst="rect">
+            <a:avLst/>
+          </a:prstGeom>
+          <a:noFill/>
+        </p:spPr>
+        <p:txBody>
+          <a:bodyPr wrap="square" anchor="t" lIns="0" rIns="0" tIns="0" bIns="0">
+            <a:spAutoFit/>
+          </a:bodyPr>
+          <a:lstStyle/>
+          <a:p>
+            <a:pPr algn="l">
+              <a:lnSpc>
+                <a:spcPct val="100000"/>
+              </a:lnSpc>
+            </a:pPr>
+            <a:r>
+              <a:rPr sz="1600" b="1" i="0">
+                <a:solidFill>
+                  <a:srgbClr val="B9C7E6"/>
+                </a:solidFill>
+                <a:latin typeface="Yu Gothic"/>
+              </a:rPr>
+              <a:t>APPENDIX</a:t>
+            </a:r>
+          </a:p>
+        </p:txBody>
+      </p:sp>
+      <p:sp>
+        <p:nvSpPr>
+          <p:cNvPr id="4" name="TextBox 3"/>
+          <p:cNvSpPr txBox="1"/>
+          <p:nvPr/>
+        </p:nvSpPr>
+        <p:spPr>
+          <a:xfrm>
+            <a:off x="822960" y="3337560"/>
+            <a:ext cx="10515600" cy="822960"/>
+          </a:xfrm>
+          <a:prstGeom prst="rect">
+            <a:avLst/>
+          </a:prstGeom>
+          <a:noFill/>
+        </p:spPr>
+        <p:txBody>
+          <a:bodyPr wrap="square" anchor="t" lIns="0" rIns="0" tIns="0" bIns="0">
+            <a:spAutoFit/>
+          </a:bodyPr>
+          <a:lstStyle/>
+          <a:p>
+            <a:pPr algn="l">
+              <a:lnSpc>
+                <a:spcPct val="100000"/>
+              </a:lnSpc>
+            </a:pPr>
+            <a:r>
+              <a:rPr sz="3000" b="1" i="0">
+                <a:solidFill>
+                  <a:srgbClr val="FFFFFF"/>
+                </a:solidFill>
+                <a:latin typeface="Yu Gothic"/>
+              </a:rPr>
+              <a:t>根拠資料一覧</a:t>
+            </a:r>
+          </a:p>
+        </p:txBody>
+      </p:sp>
+      <p:sp>
+        <p:nvSpPr>
+          <p:cNvPr id="5" name="TextBox 4"/>
+          <p:cNvSpPr txBox="1"/>
+          <p:nvPr/>
+        </p:nvSpPr>
+        <p:spPr>
+          <a:xfrm>
+            <a:off x="822960" y="4160520"/>
+            <a:ext cx="10515600" cy="457200"/>
+          </a:xfrm>
+          <a:prstGeom prst="rect">
+            <a:avLst/>
+          </a:prstGeom>
+          <a:noFill/>
+        </p:spPr>
+        <p:txBody>
+          <a:bodyPr wrap="square" anchor="t" lIns="0" rIns="0" tIns="0" bIns="0">
+            <a:spAutoFit/>
+          </a:bodyPr>
+          <a:lstStyle/>
+          <a:p>
+            <a:pPr algn="l">
+              <a:lnSpc>
+                <a:spcPct val="100000"/>
+              </a:lnSpc>
+            </a:pPr>
+            <a:r>
+              <a:rPr sz="1400" b="0" i="0">
+                <a:solidFill>
+                  <a:srgbClr val="CED8EE"/>
+                </a:solidFill>
+                <a:latin typeface="Yu Gothic"/>
+              </a:rPr>
+              <a:t>本文中の各判定・記述の根拠となったMicrosoft公式ドキュメントのURL・該当箇所・原文抜粋</a:t>
+            </a:r>
+          </a:p>
+        </p:txBody>
+      </p:sp>
+      <p:sp>
+        <p:nvSpPr>
+          <p:cNvPr id="6" name="TextBox 5"/>
+          <p:cNvSpPr txBox="1"/>
+          <p:nvPr/>
+        </p:nvSpPr>
+        <p:spPr>
+          <a:xfrm>
+            <a:off x="502920" y="6565392"/>
+            <a:ext cx="8229600" cy="274320"/>
+          </a:xfrm>
+          <a:prstGeom prst="rect">
+            <a:avLst/>
+          </a:prstGeom>
+          <a:noFill/>
+        </p:spPr>
+        <p:txBody>
+          <a:bodyPr wrap="square" anchor="t" lIns="0" rIns="0" tIns="0" bIns="0">
+            <a:spAutoFit/>
+          </a:bodyPr>
+          <a:lstStyle/>
+          <a:p>
+            <a:pPr algn="l">
+              <a:lnSpc>
+                <a:spcPct val="100000"/>
+              </a:lnSpc>
+            </a:pPr>
+            <a:r>
+              <a:rPr sz="900" b="0" i="0">
+                <a:solidFill>
+                  <a:srgbClr val="6E6E6E"/>
+                </a:solidFill>
+                <a:latin typeface="Yu Gothic"/>
+              </a:rPr>
+              <a:t>Power Platform Default環境 統治 調査報告 ｜ Confidential</a:t>
+            </a:r>
+          </a:p>
+        </p:txBody>
+      </p:sp>
+      <p:sp>
+        <p:nvSpPr>
+          <p:cNvPr id="7" name="TextBox 6"/>
+          <p:cNvSpPr txBox="1"/>
+          <p:nvPr/>
+        </p:nvSpPr>
+        <p:spPr>
+          <a:xfrm>
+            <a:off x="11338560" y="6565392"/>
+            <a:ext cx="548640" cy="274320"/>
+          </a:xfrm>
+          <a:prstGeom prst="rect">
+            <a:avLst/>
+          </a:prstGeom>
+          <a:noFill/>
+        </p:spPr>
+        <p:txBody>
+          <a:bodyPr wrap="square" anchor="t" lIns="0" rIns="0" tIns="0" bIns="0">
+            <a:spAutoFit/>
+          </a:bodyPr>
+          <a:lstStyle/>
+          <a:p>
+            <a:pPr algn="r">
+              <a:lnSpc>
+                <a:spcPct val="100000"/>
+              </a:lnSpc>
+            </a:pPr>
+            <a:r>
+              <a:rPr sz="900" b="0" i="0">
+                <a:solidFill>
+                  <a:srgbClr val="6E6E6E"/>
+                </a:solidFill>
+                <a:latin typeface="Yu Gothic"/>
+              </a:rPr>
+              <a:t>12</a:t>
+            </a:r>
+          </a:p>
+        </p:txBody>
+      </p:sp>
+    </p:spTree>
+  </p:cSld>
+  <p:clrMapOvr>
+    <a:masterClrMapping/>
+  </p:clrMapOvr>
+</p:sld>
+</file>
+
+<file path=ppt/slides/slide13.xml><?xml version="1.0" encoding="utf-8"?>
 <p:sld xmlns:a="http://schemas.openxmlformats.org/drawingml/2006/main" xmlns:p="http://schemas.openxmlformats.org/presentationml/2006/main" xmlns:r="http://schemas.openxmlformats.org/officeDocument/2006/relationships">
   <p:cSld>
     <p:bg>
@@ -5943,7 +5860,7 @@
                 </a:solidFill>
                 <a:latin typeface="Yu Gothic"/>
               </a:rPr>
-              <a:t>REFERENCES</a:t>
+              <a:t>APPENDIX</a:t>
             </a:r>
           </a:p>
         </p:txBody>
@@ -5982,21 +5899,111 @@
                 </a:solidFill>
                 <a:latin typeface="Yu Gothic"/>
               </a:rPr>
-              <a:t>参考文献・出典一覧</a:t>
-            </a:r>
-          </a:p>
-        </p:txBody>
-      </p:sp>
-      <p:sp>
-        <p:nvSpPr>
-          <p:cNvPr id="6" name="TextBox 5"/>
+              <a:t>Appendix A：確認項目①の根拠（マネージド環境化）</a:t>
+            </a:r>
+          </a:p>
+        </p:txBody>
+      </p:sp>
+      <p:sp>
+        <p:nvSpPr>
+          <p:cNvPr id="6" name="Rectangle 5"/>
+          <p:cNvSpPr/>
+          <p:nvPr/>
+        </p:nvSpPr>
+        <p:spPr>
+          <a:xfrm>
+            <a:off x="502920" y="1325880"/>
+            <a:ext cx="11201400" cy="1627632"/>
+          </a:xfrm>
+          <a:prstGeom prst="rect">
+            <a:avLst/>
+          </a:prstGeom>
+          <a:solidFill>
+            <a:srgbClr val="F5F6F8"/>
+          </a:solidFill>
+          <a:ln w="9525">
+            <a:solidFill>
+              <a:srgbClr val="D9DCE1"/>
+            </a:solidFill>
+          </a:ln>
+          <a:effectLst/>
+        </p:spPr>
+        <p:style>
+          <a:lnRef idx="1">
+            <a:schemeClr val="accent1"/>
+          </a:lnRef>
+          <a:fillRef idx="3">
+            <a:schemeClr val="accent1"/>
+          </a:fillRef>
+          <a:effectRef idx="2">
+            <a:schemeClr val="accent1"/>
+          </a:effectRef>
+          <a:fontRef idx="minor">
+            <a:schemeClr val="lt1"/>
+          </a:fontRef>
+        </p:style>
+        <p:txBody>
+          <a:bodyPr rtlCol="0" anchor="ctr"/>
+          <a:lstStyle/>
+          <a:p>
+            <a:pPr algn="ctr"/>
+          </a:p>
+        </p:txBody>
+      </p:sp>
+      <p:sp>
+        <p:nvSpPr>
+          <p:cNvPr id="7" name="Rectangle 6"/>
+          <p:cNvSpPr/>
+          <p:nvPr/>
+        </p:nvSpPr>
+        <p:spPr>
+          <a:xfrm>
+            <a:off x="502920" y="1325880"/>
+            <a:ext cx="73152" cy="1627632"/>
+          </a:xfrm>
+          <a:prstGeom prst="rect">
+            <a:avLst/>
+          </a:prstGeom>
+          <a:solidFill>
+            <a:srgbClr val="2E5AAC"/>
+          </a:solidFill>
+          <a:ln>
+            <a:noFill/>
+          </a:ln>
+          <a:effectLst/>
+        </p:spPr>
+        <p:style>
+          <a:lnRef idx="1">
+            <a:schemeClr val="accent1"/>
+          </a:lnRef>
+          <a:fillRef idx="3">
+            <a:schemeClr val="accent1"/>
+          </a:fillRef>
+          <a:effectRef idx="2">
+            <a:schemeClr val="accent1"/>
+          </a:effectRef>
+          <a:fontRef idx="minor">
+            <a:schemeClr val="lt1"/>
+          </a:fontRef>
+        </p:style>
+        <p:txBody>
+          <a:bodyPr rtlCol="0" anchor="ctr"/>
+          <a:lstStyle/>
+          <a:p>
+            <a:pPr algn="ctr"/>
+          </a:p>
+        </p:txBody>
+      </p:sp>
+      <p:sp>
+        <p:nvSpPr>
+          <p:cNvPr id="8" name="TextBox 7"/>
           <p:cNvSpPr txBox="1"/>
           <p:nvPr/>
         </p:nvSpPr>
         <p:spPr>
           <a:xfrm>
-            <a:off x="502920" y="1170432"/>
-            <a:ext cx="11155680" cy="274320"/>
+            <a:off x="713232" y="1417320"/>
+            <a:ext cx="7863840" cy="292608"/>
           </a:xfrm>
           <a:prstGeom prst="rect">
             <a:avLst/>
@@ -6015,27 +6022,82 @@
               </a:lnSpc>
             </a:pPr>
             <a:r>
-              <a:rPr sz="1200" b="0" i="1">
-                <a:solidFill>
-                  <a:srgbClr val="6E6E6E"/>
-                </a:solidFill>
-                <a:latin typeface="Yu Gothic"/>
-              </a:rPr>
-              <a:t>本文中の各「根拠（Microsoft公式情報）」で引用したドキュメントの一覧</a:t>
-            </a:r>
-          </a:p>
-        </p:txBody>
-      </p:sp>
-      <p:sp>
-        <p:nvSpPr>
-          <p:cNvPr id="7" name="TextBox 6"/>
+              <a:rPr sz="1300" b="1" i="0">
+                <a:solidFill>
+                  <a:srgbClr val="1B2A4A"/>
+                </a:solidFill>
+                <a:latin typeface="Yu Gothic"/>
+              </a:rPr>
+              <a:t>Managed environments overview</a:t>
+            </a:r>
+          </a:p>
+        </p:txBody>
+      </p:sp>
+      <p:sp>
+        <p:nvSpPr>
+          <p:cNvPr id="9" name="Rounded Rectangle 8"/>
+          <p:cNvSpPr/>
+          <p:nvPr/>
+        </p:nvSpPr>
+        <p:spPr>
+          <a:xfrm>
+            <a:off x="9875520" y="1417320"/>
+            <a:ext cx="1737360" cy="292608"/>
+          </a:xfrm>
+          <a:prstGeom prst="roundRect">
+            <a:avLst>
+              <a:gd name="adj" fmla="val 50000"/>
+            </a:avLst>
+          </a:prstGeom>
+          <a:solidFill>
+            <a:srgbClr val="E9EFF9"/>
+          </a:solidFill>
+          <a:ln>
+            <a:noFill/>
+          </a:ln>
+          <a:effectLst/>
+        </p:spPr>
+        <p:style>
+          <a:lnRef idx="1">
+            <a:schemeClr val="accent1"/>
+          </a:lnRef>
+          <a:fillRef idx="3">
+            <a:schemeClr val="accent1"/>
+          </a:fillRef>
+          <a:effectRef idx="2">
+            <a:schemeClr val="accent1"/>
+          </a:effectRef>
+          <a:fontRef idx="minor">
+            <a:schemeClr val="lt1"/>
+          </a:fontRef>
+        </p:style>
+        <p:txBody>
+          <a:bodyPr rtlCol="0" anchor="ctr" wrap="none" lIns="25400" rIns="25400" tIns="12700" bIns="12700"/>
+          <a:lstStyle/>
+          <a:p>
+            <a:pPr algn="ctr"/>
+            <a:r>
+              <a:rPr sz="1050" b="1">
+                <a:solidFill>
+                  <a:srgbClr val="2E5AAC"/>
+                </a:solidFill>
+                <a:latin typeface="Yu Gothic"/>
+              </a:rPr>
+              <a:t>P.5 対応</a:t>
+            </a:r>
+          </a:p>
+        </p:txBody>
+      </p:sp>
+      <p:sp>
+        <p:nvSpPr>
+          <p:cNvPr id="10" name="TextBox 9"/>
           <p:cNvSpPr txBox="1"/>
           <p:nvPr/>
         </p:nvSpPr>
         <p:spPr>
           <a:xfrm>
-            <a:off x="502920" y="1600200"/>
-            <a:ext cx="365760" cy="320040"/>
+            <a:off x="713232" y="1728216"/>
+            <a:ext cx="10881360" cy="237744"/>
           </a:xfrm>
           <a:prstGeom prst="rect">
             <a:avLst/>
@@ -6054,27 +6116,27 @@
               </a:lnSpc>
             </a:pPr>
             <a:r>
-              <a:rPr sz="1200" b="1" i="0">
-                <a:solidFill>
-                  <a:srgbClr val="2E5AAC"/>
-                </a:solidFill>
-                <a:latin typeface="Yu Gothic"/>
-              </a:rPr>
-              <a:t>1.</a:t>
-            </a:r>
-          </a:p>
-        </p:txBody>
-      </p:sp>
-      <p:sp>
-        <p:nvSpPr>
-          <p:cNvPr id="8" name="TextBox 7"/>
+              <a:rPr sz="1000" b="0" i="0">
+                <a:solidFill>
+                  <a:srgbClr val="6E6E6E"/>
+                </a:solidFill>
+                <a:latin typeface="Yu Gothic"/>
+              </a:rPr>
+              <a:t>learn.microsoft.com/ja-jp/power-platform/admin/managed-environment-overview</a:t>
+            </a:r>
+          </a:p>
+        </p:txBody>
+      </p:sp>
+      <p:sp>
+        <p:nvSpPr>
+          <p:cNvPr id="11" name="TextBox 10"/>
           <p:cNvSpPr txBox="1"/>
           <p:nvPr/>
         </p:nvSpPr>
         <p:spPr>
           <a:xfrm>
-            <a:off x="960120" y="1600200"/>
-            <a:ext cx="5120640" cy="731520"/>
+            <a:off x="713232" y="2002536"/>
+            <a:ext cx="10881360" cy="859536"/>
           </a:xfrm>
           <a:prstGeom prst="rect">
             <a:avLst/>
@@ -6089,7 +6151,7 @@
           <a:p>
             <a:pPr algn="l">
               <a:lnSpc>
-                <a:spcPct val="115000"/>
+                <a:spcPct val="118000"/>
               </a:lnSpc>
             </a:pPr>
             <a:r>
@@ -6099,37 +6161,111 @@
                 </a:solidFill>
                 <a:latin typeface="Yu Gothic"/>
               </a:rPr>
-              <a:t>Managed environments overview － Microsoft Learn</a:t>
-            </a:r>
-          </a:p>
-          <a:p>
-            <a:pPr algn="l">
-              <a:lnSpc>
-                <a:spcPct val="115000"/>
-              </a:lnSpc>
-            </a:pPr>
-            <a:r>
-              <a:rPr sz="1100" b="0" i="0">
-                <a:solidFill>
-                  <a:srgbClr val="262626"/>
-                </a:solidFill>
-                <a:latin typeface="Yu Gothic"/>
-              </a:rPr>
-              <a:t>learn.microsoft.com/power-platform/admin/managed-environment-overview</a:t>
-            </a:r>
-          </a:p>
-        </p:txBody>
-      </p:sp>
-      <p:sp>
-        <p:nvSpPr>
-          <p:cNvPr id="9" name="TextBox 8"/>
+              <a:t>原文：「Admins can use managed environments with any type of environment.」（管理者は環境の種類を問わずマネージド環境を利用できる）— Default環境も対象に含まれることの根拠。</a:t>
+            </a:r>
+          </a:p>
+        </p:txBody>
+      </p:sp>
+      <p:sp>
+        <p:nvSpPr>
+          <p:cNvPr id="12" name="Rectangle 11"/>
+          <p:cNvSpPr/>
+          <p:nvPr/>
+        </p:nvSpPr>
+        <p:spPr>
+          <a:xfrm>
+            <a:off x="502920" y="3044952"/>
+            <a:ext cx="11201400" cy="1627632"/>
+          </a:xfrm>
+          <a:prstGeom prst="rect">
+            <a:avLst/>
+          </a:prstGeom>
+          <a:solidFill>
+            <a:srgbClr val="F5F6F8"/>
+          </a:solidFill>
+          <a:ln w="9525">
+            <a:solidFill>
+              <a:srgbClr val="D9DCE1"/>
+            </a:solidFill>
+          </a:ln>
+          <a:effectLst/>
+        </p:spPr>
+        <p:style>
+          <a:lnRef idx="1">
+            <a:schemeClr val="accent1"/>
+          </a:lnRef>
+          <a:fillRef idx="3">
+            <a:schemeClr val="accent1"/>
+          </a:fillRef>
+          <a:effectRef idx="2">
+            <a:schemeClr val="accent1"/>
+          </a:effectRef>
+          <a:fontRef idx="minor">
+            <a:schemeClr val="lt1"/>
+          </a:fontRef>
+        </p:style>
+        <p:txBody>
+          <a:bodyPr rtlCol="0" anchor="ctr"/>
+          <a:lstStyle/>
+          <a:p>
+            <a:pPr algn="ctr"/>
+          </a:p>
+        </p:txBody>
+      </p:sp>
+      <p:sp>
+        <p:nvSpPr>
+          <p:cNvPr id="13" name="Rectangle 12"/>
+          <p:cNvSpPr/>
+          <p:nvPr/>
+        </p:nvSpPr>
+        <p:spPr>
+          <a:xfrm>
+            <a:off x="502920" y="3044952"/>
+            <a:ext cx="73152" cy="1627632"/>
+          </a:xfrm>
+          <a:prstGeom prst="rect">
+            <a:avLst/>
+          </a:prstGeom>
+          <a:solidFill>
+            <a:srgbClr val="2E5AAC"/>
+          </a:solidFill>
+          <a:ln>
+            <a:noFill/>
+          </a:ln>
+          <a:effectLst/>
+        </p:spPr>
+        <p:style>
+          <a:lnRef idx="1">
+            <a:schemeClr val="accent1"/>
+          </a:lnRef>
+          <a:fillRef idx="3">
+            <a:schemeClr val="accent1"/>
+          </a:fillRef>
+          <a:effectRef idx="2">
+            <a:schemeClr val="accent1"/>
+          </a:effectRef>
+          <a:fontRef idx="minor">
+            <a:schemeClr val="lt1"/>
+          </a:fontRef>
+        </p:style>
+        <p:txBody>
+          <a:bodyPr rtlCol="0" anchor="ctr"/>
+          <a:lstStyle/>
+          <a:p>
+            <a:pPr algn="ctr"/>
+          </a:p>
+        </p:txBody>
+      </p:sp>
+      <p:sp>
+        <p:nvSpPr>
+          <p:cNvPr id="14" name="TextBox 13"/>
           <p:cNvSpPr txBox="1"/>
           <p:nvPr/>
         </p:nvSpPr>
         <p:spPr>
           <a:xfrm>
-            <a:off x="502920" y="2377440"/>
-            <a:ext cx="365760" cy="320040"/>
+            <a:off x="713232" y="3136392"/>
+            <a:ext cx="7863840" cy="292608"/>
           </a:xfrm>
           <a:prstGeom prst="rect">
             <a:avLst/>
@@ -6148,27 +6284,82 @@
               </a:lnSpc>
             </a:pPr>
             <a:r>
-              <a:rPr sz="1200" b="1" i="0">
+              <a:rPr sz="1300" b="1" i="0">
+                <a:solidFill>
+                  <a:srgbClr val="1B2A4A"/>
+                </a:solidFill>
+                <a:latin typeface="Yu Gothic"/>
+              </a:rPr>
+              <a:t>Enable managed environments</a:t>
+            </a:r>
+          </a:p>
+        </p:txBody>
+      </p:sp>
+      <p:sp>
+        <p:nvSpPr>
+          <p:cNvPr id="15" name="Rounded Rectangle 14"/>
+          <p:cNvSpPr/>
+          <p:nvPr/>
+        </p:nvSpPr>
+        <p:spPr>
+          <a:xfrm>
+            <a:off x="9875520" y="3136392"/>
+            <a:ext cx="1737360" cy="292608"/>
+          </a:xfrm>
+          <a:prstGeom prst="roundRect">
+            <a:avLst>
+              <a:gd name="adj" fmla="val 50000"/>
+            </a:avLst>
+          </a:prstGeom>
+          <a:solidFill>
+            <a:srgbClr val="E9EFF9"/>
+          </a:solidFill>
+          <a:ln>
+            <a:noFill/>
+          </a:ln>
+          <a:effectLst/>
+        </p:spPr>
+        <p:style>
+          <a:lnRef idx="1">
+            <a:schemeClr val="accent1"/>
+          </a:lnRef>
+          <a:fillRef idx="3">
+            <a:schemeClr val="accent1"/>
+          </a:fillRef>
+          <a:effectRef idx="2">
+            <a:schemeClr val="accent1"/>
+          </a:effectRef>
+          <a:fontRef idx="minor">
+            <a:schemeClr val="lt1"/>
+          </a:fontRef>
+        </p:style>
+        <p:txBody>
+          <a:bodyPr rtlCol="0" anchor="ctr" wrap="none" lIns="25400" rIns="25400" tIns="12700" bIns="12700"/>
+          <a:lstStyle/>
+          <a:p>
+            <a:pPr algn="ctr"/>
+            <a:r>
+              <a:rPr sz="1050" b="1">
                 <a:solidFill>
                   <a:srgbClr val="2E5AAC"/>
                 </a:solidFill>
                 <a:latin typeface="Yu Gothic"/>
               </a:rPr>
-              <a:t>2.</a:t>
-            </a:r>
-          </a:p>
-        </p:txBody>
-      </p:sp>
-      <p:sp>
-        <p:nvSpPr>
-          <p:cNvPr id="10" name="TextBox 9"/>
+              <a:t>P.5 対応</a:t>
+            </a:r>
+          </a:p>
+        </p:txBody>
+      </p:sp>
+      <p:sp>
+        <p:nvSpPr>
+          <p:cNvPr id="16" name="TextBox 15"/>
           <p:cNvSpPr txBox="1"/>
           <p:nvPr/>
         </p:nvSpPr>
         <p:spPr>
           <a:xfrm>
-            <a:off x="960120" y="2377440"/>
-            <a:ext cx="5120640" cy="731520"/>
+            <a:off x="713232" y="3447288"/>
+            <a:ext cx="10881360" cy="237744"/>
           </a:xfrm>
           <a:prstGeom prst="rect">
             <a:avLst/>
@@ -6183,47 +6374,31 @@
           <a:p>
             <a:pPr algn="l">
               <a:lnSpc>
-                <a:spcPct val="115000"/>
-              </a:lnSpc>
-            </a:pPr>
-            <a:r>
-              <a:rPr sz="1100" b="0" i="0">
-                <a:solidFill>
-                  <a:srgbClr val="262626"/>
-                </a:solidFill>
-                <a:latin typeface="Yu Gothic"/>
-              </a:rPr>
-              <a:t>Enable managed environments － Microsoft Learn</a:t>
-            </a:r>
-          </a:p>
-          <a:p>
-            <a:pPr algn="l">
-              <a:lnSpc>
-                <a:spcPct val="115000"/>
-              </a:lnSpc>
-            </a:pPr>
-            <a:r>
-              <a:rPr sz="1100" b="0" i="0">
-                <a:solidFill>
-                  <a:srgbClr val="262626"/>
-                </a:solidFill>
-                <a:latin typeface="Yu Gothic"/>
-              </a:rPr>
-              <a:t>learn.microsoft.com/power-platform/admin/managed-environment-enable</a:t>
-            </a:r>
-          </a:p>
-        </p:txBody>
-      </p:sp>
-      <p:sp>
-        <p:nvSpPr>
-          <p:cNvPr id="11" name="TextBox 10"/>
+                <a:spcPct val="100000"/>
+              </a:lnSpc>
+            </a:pPr>
+            <a:r>
+              <a:rPr sz="1000" b="0" i="0">
+                <a:solidFill>
+                  <a:srgbClr val="6E6E6E"/>
+                </a:solidFill>
+                <a:latin typeface="Yu Gothic"/>
+              </a:rPr>
+              <a:t>learn.microsoft.com/ja-jp/power-platform/admin/managed-environment-enable</a:t>
+            </a:r>
+          </a:p>
+        </p:txBody>
+      </p:sp>
+      <p:sp>
+        <p:nvSpPr>
+          <p:cNvPr id="17" name="TextBox 16"/>
           <p:cNvSpPr txBox="1"/>
           <p:nvPr/>
         </p:nvSpPr>
         <p:spPr>
           <a:xfrm>
-            <a:off x="502920" y="3154680"/>
-            <a:ext cx="365760" cy="320040"/>
+            <a:off x="713232" y="3721608"/>
+            <a:ext cx="10881360" cy="859536"/>
           </a:xfrm>
           <a:prstGeom prst="rect">
             <a:avLst/>
@@ -6238,31 +6413,121 @@
           <a:p>
             <a:pPr algn="l">
               <a:lnSpc>
-                <a:spcPct val="100000"/>
-              </a:lnSpc>
-            </a:pPr>
-            <a:r>
-              <a:rPr sz="1200" b="1" i="0">
-                <a:solidFill>
-                  <a:srgbClr val="2E5AAC"/>
-                </a:solidFill>
-                <a:latin typeface="Yu Gothic"/>
-              </a:rPr>
-              <a:t>3.</a:t>
-            </a:r>
-          </a:p>
-        </p:txBody>
-      </p:sp>
-      <p:sp>
-        <p:nvSpPr>
-          <p:cNvPr id="12" name="TextBox 11"/>
+                <a:spcPct val="118000"/>
+              </a:lnSpc>
+            </a:pPr>
+            <a:r>
+              <a:rPr sz="1100" b="0" i="0">
+                <a:solidFill>
+                  <a:srgbClr val="262626"/>
+                </a:solidFill>
+                <a:latin typeface="Yu Gothic"/>
+              </a:rPr>
+              <a:t>要旨：マネージド環境の有効化・編集には、Microsoft Entra IDでPower Platform Administrator または Dynamics 365 Administrator ロールが必要。環境一覧の操作メニューから［Enable Managed Environments］を選択して有効化する。</a:t>
+            </a:r>
+          </a:p>
+        </p:txBody>
+      </p:sp>
+      <p:sp>
+        <p:nvSpPr>
+          <p:cNvPr id="18" name="Rectangle 17"/>
+          <p:cNvSpPr/>
+          <p:nvPr/>
+        </p:nvSpPr>
+        <p:spPr>
+          <a:xfrm>
+            <a:off x="502920" y="4764024"/>
+            <a:ext cx="11201400" cy="1627632"/>
+          </a:xfrm>
+          <a:prstGeom prst="rect">
+            <a:avLst/>
+          </a:prstGeom>
+          <a:solidFill>
+            <a:srgbClr val="F5F6F8"/>
+          </a:solidFill>
+          <a:ln w="9525">
+            <a:solidFill>
+              <a:srgbClr val="D9DCE1"/>
+            </a:solidFill>
+          </a:ln>
+          <a:effectLst/>
+        </p:spPr>
+        <p:style>
+          <a:lnRef idx="1">
+            <a:schemeClr val="accent1"/>
+          </a:lnRef>
+          <a:fillRef idx="3">
+            <a:schemeClr val="accent1"/>
+          </a:fillRef>
+          <a:effectRef idx="2">
+            <a:schemeClr val="accent1"/>
+          </a:effectRef>
+          <a:fontRef idx="minor">
+            <a:schemeClr val="lt1"/>
+          </a:fontRef>
+        </p:style>
+        <p:txBody>
+          <a:bodyPr rtlCol="0" anchor="ctr"/>
+          <a:lstStyle/>
+          <a:p>
+            <a:pPr algn="ctr"/>
+          </a:p>
+        </p:txBody>
+      </p:sp>
+      <p:sp>
+        <p:nvSpPr>
+          <p:cNvPr id="19" name="Rectangle 18"/>
+          <p:cNvSpPr/>
+          <p:nvPr/>
+        </p:nvSpPr>
+        <p:spPr>
+          <a:xfrm>
+            <a:off x="502920" y="4764024"/>
+            <a:ext cx="73152" cy="1627632"/>
+          </a:xfrm>
+          <a:prstGeom prst="rect">
+            <a:avLst/>
+          </a:prstGeom>
+          <a:solidFill>
+            <a:srgbClr val="2E5AAC"/>
+          </a:solidFill>
+          <a:ln>
+            <a:noFill/>
+          </a:ln>
+          <a:effectLst/>
+        </p:spPr>
+        <p:style>
+          <a:lnRef idx="1">
+            <a:schemeClr val="accent1"/>
+          </a:lnRef>
+          <a:fillRef idx="3">
+            <a:schemeClr val="accent1"/>
+          </a:fillRef>
+          <a:effectRef idx="2">
+            <a:schemeClr val="accent1"/>
+          </a:effectRef>
+          <a:fontRef idx="minor">
+            <a:schemeClr val="lt1"/>
+          </a:fontRef>
+        </p:style>
+        <p:txBody>
+          <a:bodyPr rtlCol="0" anchor="ctr"/>
+          <a:lstStyle/>
+          <a:p>
+            <a:pPr algn="ctr"/>
+          </a:p>
+        </p:txBody>
+      </p:sp>
+      <p:sp>
+        <p:nvSpPr>
+          <p:cNvPr id="20" name="TextBox 19"/>
           <p:cNvSpPr txBox="1"/>
           <p:nvPr/>
         </p:nvSpPr>
         <p:spPr>
           <a:xfrm>
-            <a:off x="960120" y="3154680"/>
-            <a:ext cx="5120640" cy="731520"/>
+            <a:off x="713232" y="4855464"/>
+            <a:ext cx="7863840" cy="292608"/>
           </a:xfrm>
           <a:prstGeom prst="rect">
             <a:avLst/>
@@ -6277,47 +6542,86 @@
           <a:p>
             <a:pPr algn="l">
               <a:lnSpc>
-                <a:spcPct val="115000"/>
-              </a:lnSpc>
-            </a:pPr>
-            <a:r>
-              <a:rPr sz="1100" b="0" i="0">
-                <a:solidFill>
-                  <a:srgbClr val="262626"/>
-                </a:solidFill>
-                <a:latin typeface="Yu Gothic"/>
-              </a:rPr>
-              <a:t>Licensing (Managed Environments) － Microsoft Learn</a:t>
-            </a:r>
-          </a:p>
-          <a:p>
-            <a:pPr algn="l">
-              <a:lnSpc>
-                <a:spcPct val="115000"/>
-              </a:lnSpc>
-            </a:pPr>
-            <a:r>
-              <a:rPr sz="1100" b="0" i="0">
-                <a:solidFill>
-                  <a:srgbClr val="262626"/>
-                </a:solidFill>
-                <a:latin typeface="Yu Gothic"/>
-              </a:rPr>
-              <a:t>learn.microsoft.com/power-platform/admin/managed-environment-licensing</a:t>
-            </a:r>
-          </a:p>
-        </p:txBody>
-      </p:sp>
-      <p:sp>
-        <p:nvSpPr>
-          <p:cNvPr id="13" name="TextBox 12"/>
+                <a:spcPct val="100000"/>
+              </a:lnSpc>
+            </a:pPr>
+            <a:r>
+              <a:rPr sz="1300" b="1" i="0">
+                <a:solidFill>
+                  <a:srgbClr val="1B2A4A"/>
+                </a:solidFill>
+                <a:latin typeface="Yu Gothic"/>
+              </a:rPr>
+              <a:t>Manage and govern the default environment</a:t>
+            </a:r>
+          </a:p>
+        </p:txBody>
+      </p:sp>
+      <p:sp>
+        <p:nvSpPr>
+          <p:cNvPr id="21" name="Rounded Rectangle 20"/>
+          <p:cNvSpPr/>
+          <p:nvPr/>
+        </p:nvSpPr>
+        <p:spPr>
+          <a:xfrm>
+            <a:off x="9875520" y="4855464"/>
+            <a:ext cx="1737360" cy="292608"/>
+          </a:xfrm>
+          <a:prstGeom prst="roundRect">
+            <a:avLst>
+              <a:gd name="adj" fmla="val 50000"/>
+            </a:avLst>
+          </a:prstGeom>
+          <a:solidFill>
+            <a:srgbClr val="E9EFF9"/>
+          </a:solidFill>
+          <a:ln>
+            <a:noFill/>
+          </a:ln>
+          <a:effectLst/>
+        </p:spPr>
+        <p:style>
+          <a:lnRef idx="1">
+            <a:schemeClr val="accent1"/>
+          </a:lnRef>
+          <a:fillRef idx="3">
+            <a:schemeClr val="accent1"/>
+          </a:fillRef>
+          <a:effectRef idx="2">
+            <a:schemeClr val="accent1"/>
+          </a:effectRef>
+          <a:fontRef idx="minor">
+            <a:schemeClr val="lt1"/>
+          </a:fontRef>
+        </p:style>
+        <p:txBody>
+          <a:bodyPr rtlCol="0" anchor="ctr" wrap="none" lIns="25400" rIns="25400" tIns="12700" bIns="12700"/>
+          <a:lstStyle/>
+          <a:p>
+            <a:pPr algn="ctr"/>
+            <a:r>
+              <a:rPr sz="1050" b="1">
+                <a:solidFill>
+                  <a:srgbClr val="2E5AAC"/>
+                </a:solidFill>
+                <a:latin typeface="Yu Gothic"/>
+              </a:rPr>
+              <a:t>P.5・P.11 対応</a:t>
+            </a:r>
+          </a:p>
+        </p:txBody>
+      </p:sp>
+      <p:sp>
+        <p:nvSpPr>
+          <p:cNvPr id="22" name="TextBox 21"/>
           <p:cNvSpPr txBox="1"/>
           <p:nvPr/>
         </p:nvSpPr>
         <p:spPr>
           <a:xfrm>
-            <a:off x="502920" y="3931920"/>
-            <a:ext cx="365760" cy="320040"/>
+            <a:off x="713232" y="5166360"/>
+            <a:ext cx="10881360" cy="237744"/>
           </a:xfrm>
           <a:prstGeom prst="rect">
             <a:avLst/>
@@ -6336,27 +6640,27 @@
               </a:lnSpc>
             </a:pPr>
             <a:r>
-              <a:rPr sz="1200" b="1" i="0">
-                <a:solidFill>
-                  <a:srgbClr val="2E5AAC"/>
-                </a:solidFill>
-                <a:latin typeface="Yu Gothic"/>
-              </a:rPr>
-              <a:t>4.</a:t>
-            </a:r>
-          </a:p>
-        </p:txBody>
-      </p:sp>
-      <p:sp>
-        <p:nvSpPr>
-          <p:cNvPr id="14" name="TextBox 13"/>
+              <a:rPr sz="1000" b="0" i="0">
+                <a:solidFill>
+                  <a:srgbClr val="6E6E6E"/>
+                </a:solidFill>
+                <a:latin typeface="Yu Gothic"/>
+              </a:rPr>
+              <a:t>learn.microsoft.com/ja-jp/power-platform/guidance/adoption/manage-default-environment</a:t>
+            </a:r>
+          </a:p>
+        </p:txBody>
+      </p:sp>
+      <p:sp>
+        <p:nvSpPr>
+          <p:cNvPr id="23" name="TextBox 22"/>
           <p:cNvSpPr txBox="1"/>
           <p:nvPr/>
         </p:nvSpPr>
         <p:spPr>
           <a:xfrm>
-            <a:off x="960120" y="3931920"/>
-            <a:ext cx="5120640" cy="731520"/>
+            <a:off x="713232" y="5440680"/>
+            <a:ext cx="10881360" cy="859536"/>
           </a:xfrm>
           <a:prstGeom prst="rect">
             <a:avLst/>
@@ -6371,7 +6675,7 @@
           <a:p>
             <a:pPr algn="l">
               <a:lnSpc>
-                <a:spcPct val="115000"/>
+                <a:spcPct val="118000"/>
               </a:lnSpc>
             </a:pPr>
             <a:r>
@@ -6381,37 +6685,21 @@
                 </a:solidFill>
                 <a:latin typeface="Yu Gothic"/>
               </a:rPr>
-              <a:t>Manage data policies (DLP) － Microsoft Learn</a:t>
-            </a:r>
-          </a:p>
-          <a:p>
-            <a:pPr algn="l">
-              <a:lnSpc>
-                <a:spcPct val="115000"/>
-              </a:lnSpc>
-            </a:pPr>
-            <a:r>
-              <a:rPr sz="1100" b="0" i="0">
-                <a:solidFill>
-                  <a:srgbClr val="262626"/>
-                </a:solidFill>
-                <a:latin typeface="Yu Gothic"/>
-              </a:rPr>
-              <a:t>learn.microsoft.com/power-platform/admin/prevent-data-loss</a:t>
-            </a:r>
-          </a:p>
-        </p:txBody>
-      </p:sp>
-      <p:sp>
-        <p:nvSpPr>
-          <p:cNvPr id="15" name="TextBox 14"/>
+              <a:t>要旨：Default環境でもマネージド環境機能（共有制限・使用状況の分析情報・IP ファイアウォール等）を活用し、堅牢なセキュリティとガバナンスを維持することを推奨。一部コネクタは「ブロック不可」である旨も記載。</a:t>
+            </a:r>
+          </a:p>
+        </p:txBody>
+      </p:sp>
+      <p:sp>
+        <p:nvSpPr>
+          <p:cNvPr id="24" name="TextBox 23"/>
           <p:cNvSpPr txBox="1"/>
           <p:nvPr/>
         </p:nvSpPr>
         <p:spPr>
           <a:xfrm>
-            <a:off x="502920" y="4709160"/>
-            <a:ext cx="365760" cy="320040"/>
+            <a:off x="502920" y="6565392"/>
+            <a:ext cx="8229600" cy="274320"/>
           </a:xfrm>
           <a:prstGeom prst="rect">
             <a:avLst/>
@@ -6430,27 +6718,27 @@
               </a:lnSpc>
             </a:pPr>
             <a:r>
-              <a:rPr sz="1200" b="1" i="0">
-                <a:solidFill>
-                  <a:srgbClr val="2E5AAC"/>
-                </a:solidFill>
-                <a:latin typeface="Yu Gothic"/>
-              </a:rPr>
-              <a:t>5.</a:t>
-            </a:r>
-          </a:p>
-        </p:txBody>
-      </p:sp>
-      <p:sp>
-        <p:nvSpPr>
-          <p:cNvPr id="16" name="TextBox 15"/>
+              <a:rPr sz="900" b="0" i="0">
+                <a:solidFill>
+                  <a:srgbClr val="6E6E6E"/>
+                </a:solidFill>
+                <a:latin typeface="Yu Gothic"/>
+              </a:rPr>
+              <a:t>Power Platform Default環境 統治 調査報告 ｜ Confidential</a:t>
+            </a:r>
+          </a:p>
+        </p:txBody>
+      </p:sp>
+      <p:sp>
+        <p:nvSpPr>
+          <p:cNvPr id="25" name="TextBox 24"/>
           <p:cNvSpPr txBox="1"/>
           <p:nvPr/>
         </p:nvSpPr>
         <p:spPr>
           <a:xfrm>
-            <a:off x="960120" y="4709160"/>
-            <a:ext cx="5120640" cy="731520"/>
+            <a:off x="11338560" y="6565392"/>
+            <a:ext cx="548640" cy="274320"/>
           </a:xfrm>
           <a:prstGeom prst="rect">
             <a:avLst/>
@@ -6463,49 +6751,147 @@
           </a:bodyPr>
           <a:lstStyle/>
           <a:p>
-            <a:pPr algn="l">
-              <a:lnSpc>
-                <a:spcPct val="115000"/>
-              </a:lnSpc>
-            </a:pPr>
-            <a:r>
-              <a:rPr sz="1100" b="0" i="0">
-                <a:solidFill>
-                  <a:srgbClr val="262626"/>
-                </a:solidFill>
-                <a:latin typeface="Yu Gothic"/>
-              </a:rPr>
-              <a:t>View policies and scope － Microsoft Learn</a:t>
-            </a:r>
-          </a:p>
-          <a:p>
-            <a:pPr algn="l">
-              <a:lnSpc>
-                <a:spcPct val="115000"/>
-              </a:lnSpc>
-            </a:pPr>
-            <a:r>
-              <a:rPr sz="1100" b="0" i="0">
-                <a:solidFill>
-                  <a:srgbClr val="262626"/>
-                </a:solidFill>
-                <a:latin typeface="Yu Gothic"/>
-              </a:rPr>
-              <a:t>learn.microsoft.com/power-platform/admin/dlp-policy-scope</a:t>
-            </a:r>
-          </a:p>
-        </p:txBody>
-      </p:sp>
-      <p:sp>
-        <p:nvSpPr>
-          <p:cNvPr id="17" name="TextBox 16"/>
+            <a:pPr algn="r">
+              <a:lnSpc>
+                <a:spcPct val="100000"/>
+              </a:lnSpc>
+            </a:pPr>
+            <a:r>
+              <a:rPr sz="900" b="0" i="0">
+                <a:solidFill>
+                  <a:srgbClr val="6E6E6E"/>
+                </a:solidFill>
+                <a:latin typeface="Yu Gothic"/>
+              </a:rPr>
+              <a:t>13</a:t>
+            </a:r>
+          </a:p>
+        </p:txBody>
+      </p:sp>
+    </p:spTree>
+  </p:cSld>
+  <p:clrMapOvr>
+    <a:masterClrMapping/>
+  </p:clrMapOvr>
+</p:sld>
+</file>
+
+<file path=ppt/slides/slide14.xml><?xml version="1.0" encoding="utf-8"?>
+<p:sld xmlns:a="http://schemas.openxmlformats.org/drawingml/2006/main" xmlns:p="http://schemas.openxmlformats.org/presentationml/2006/main" xmlns:r="http://schemas.openxmlformats.org/officeDocument/2006/relationships">
+  <p:cSld>
+    <p:bg>
+      <p:bgPr>
+        <a:solidFill>
+          <a:srgbClr val="FFFFFF"/>
+        </a:solidFill>
+        <a:effectLst/>
+      </p:bgPr>
+    </p:bg>
+    <p:spTree>
+      <p:nvGrpSpPr>
+        <p:cNvPr id="1" name=""/>
+        <p:cNvGrpSpPr/>
+        <p:nvPr/>
+      </p:nvGrpSpPr>
+      <p:grpSpPr/>
+      <p:sp>
+        <p:nvSpPr>
+          <p:cNvPr id="2" name="Rectangle 1"/>
+          <p:cNvSpPr/>
+          <p:nvPr/>
+        </p:nvSpPr>
+        <p:spPr>
+          <a:xfrm>
+            <a:off x="0" y="0"/>
+            <a:ext cx="12191695" cy="1051560"/>
+          </a:xfrm>
+          <a:prstGeom prst="rect">
+            <a:avLst/>
+          </a:prstGeom>
+          <a:solidFill>
+            <a:srgbClr val="1B2A4A"/>
+          </a:solidFill>
+          <a:ln>
+            <a:noFill/>
+          </a:ln>
+          <a:effectLst/>
+        </p:spPr>
+        <p:style>
+          <a:lnRef idx="1">
+            <a:schemeClr val="accent1"/>
+          </a:lnRef>
+          <a:fillRef idx="3">
+            <a:schemeClr val="accent1"/>
+          </a:fillRef>
+          <a:effectRef idx="2">
+            <a:schemeClr val="accent1"/>
+          </a:effectRef>
+          <a:fontRef idx="minor">
+            <a:schemeClr val="lt1"/>
+          </a:fontRef>
+        </p:style>
+        <p:txBody>
+          <a:bodyPr rtlCol="0" anchor="ctr"/>
+          <a:lstStyle/>
+          <a:p>
+            <a:pPr algn="ctr"/>
+          </a:p>
+        </p:txBody>
+      </p:sp>
+      <p:sp>
+        <p:nvSpPr>
+          <p:cNvPr id="3" name="Rectangle 2"/>
+          <p:cNvSpPr/>
+          <p:nvPr/>
+        </p:nvSpPr>
+        <p:spPr>
+          <a:xfrm>
+            <a:off x="0" y="1051560"/>
+            <a:ext cx="12191695" cy="38100"/>
+          </a:xfrm>
+          <a:prstGeom prst="rect">
+            <a:avLst/>
+          </a:prstGeom>
+          <a:solidFill>
+            <a:srgbClr val="2E5AAC"/>
+          </a:solidFill>
+          <a:ln>
+            <a:noFill/>
+          </a:ln>
+          <a:effectLst/>
+        </p:spPr>
+        <p:style>
+          <a:lnRef idx="1">
+            <a:schemeClr val="accent1"/>
+          </a:lnRef>
+          <a:fillRef idx="3">
+            <a:schemeClr val="accent1"/>
+          </a:fillRef>
+          <a:effectRef idx="2">
+            <a:schemeClr val="accent1"/>
+          </a:effectRef>
+          <a:fontRef idx="minor">
+            <a:schemeClr val="lt1"/>
+          </a:fontRef>
+        </p:style>
+        <p:txBody>
+          <a:bodyPr rtlCol="0" anchor="ctr"/>
+          <a:lstStyle/>
+          <a:p>
+            <a:pPr algn="ctr"/>
+          </a:p>
+        </p:txBody>
+      </p:sp>
+      <p:sp>
+        <p:nvSpPr>
+          <p:cNvPr id="4" name="TextBox 3"/>
           <p:cNvSpPr txBox="1"/>
           <p:nvPr/>
         </p:nvSpPr>
         <p:spPr>
           <a:xfrm>
-            <a:off x="502920" y="5486400"/>
-            <a:ext cx="365760" cy="320040"/>
+            <a:off x="502920" y="118872"/>
+            <a:ext cx="9144000" cy="320040"/>
           </a:xfrm>
           <a:prstGeom prst="rect">
             <a:avLst/>
@@ -6526,25 +6912,25 @@
             <a:r>
               <a:rPr sz="1200" b="1" i="0">
                 <a:solidFill>
-                  <a:srgbClr val="2E5AAC"/>
-                </a:solidFill>
-                <a:latin typeface="Yu Gothic"/>
-              </a:rPr>
-              <a:t>6.</a:t>
-            </a:r>
-          </a:p>
-        </p:txBody>
-      </p:sp>
-      <p:sp>
-        <p:nvSpPr>
-          <p:cNvPr id="18" name="TextBox 17"/>
+                  <a:srgbClr val="B9C7E6"/>
+                </a:solidFill>
+                <a:latin typeface="Yu Gothic"/>
+              </a:rPr>
+              <a:t>APPENDIX</a:t>
+            </a:r>
+          </a:p>
+        </p:txBody>
+      </p:sp>
+      <p:sp>
+        <p:nvSpPr>
+          <p:cNvPr id="5" name="TextBox 4"/>
           <p:cNvSpPr txBox="1"/>
           <p:nvPr/>
         </p:nvSpPr>
         <p:spPr>
           <a:xfrm>
-            <a:off x="960120" y="5486400"/>
-            <a:ext cx="5120640" cy="731520"/>
+            <a:off x="502920" y="411480"/>
+            <a:ext cx="10972800" cy="594360"/>
           </a:xfrm>
           <a:prstGeom prst="rect">
             <a:avLst/>
@@ -6559,47 +6945,121 @@
           <a:p>
             <a:pPr algn="l">
               <a:lnSpc>
-                <a:spcPct val="115000"/>
-              </a:lnSpc>
-            </a:pPr>
-            <a:r>
-              <a:rPr sz="1100" b="0" i="0">
-                <a:solidFill>
-                  <a:srgbClr val="262626"/>
-                </a:solidFill>
-                <a:latin typeface="Yu Gothic"/>
-              </a:rPr>
-              <a:t>Impact of data policies on apps and flows － Microsoft Learn</a:t>
-            </a:r>
-          </a:p>
-          <a:p>
-            <a:pPr algn="l">
-              <a:lnSpc>
-                <a:spcPct val="115000"/>
-              </a:lnSpc>
-            </a:pPr>
-            <a:r>
-              <a:rPr sz="1100" b="0" i="0">
-                <a:solidFill>
-                  <a:srgbClr val="262626"/>
-                </a:solidFill>
-                <a:latin typeface="Yu Gothic"/>
-              </a:rPr>
-              <a:t>learn.microsoft.com/power-platform/admin/dlp-impact-policies-apps-flows</a:t>
-            </a:r>
-          </a:p>
-        </p:txBody>
-      </p:sp>
-      <p:sp>
-        <p:nvSpPr>
-          <p:cNvPr id="19" name="TextBox 18"/>
+                <a:spcPct val="100000"/>
+              </a:lnSpc>
+            </a:pPr>
+            <a:r>
+              <a:rPr sz="2300" b="1" i="0">
+                <a:solidFill>
+                  <a:srgbClr val="FFFFFF"/>
+                </a:solidFill>
+                <a:latin typeface="Yu Gothic"/>
+              </a:rPr>
+              <a:t>Appendix B：確認項目②の根拠（DLPポリシー適用）</a:t>
+            </a:r>
+          </a:p>
+        </p:txBody>
+      </p:sp>
+      <p:sp>
+        <p:nvSpPr>
+          <p:cNvPr id="6" name="Rectangle 5"/>
+          <p:cNvSpPr/>
+          <p:nvPr/>
+        </p:nvSpPr>
+        <p:spPr>
+          <a:xfrm>
+            <a:off x="502920" y="1325880"/>
+            <a:ext cx="11201400" cy="1627632"/>
+          </a:xfrm>
+          <a:prstGeom prst="rect">
+            <a:avLst/>
+          </a:prstGeom>
+          <a:solidFill>
+            <a:srgbClr val="F5F6F8"/>
+          </a:solidFill>
+          <a:ln w="9525">
+            <a:solidFill>
+              <a:srgbClr val="D9DCE1"/>
+            </a:solidFill>
+          </a:ln>
+          <a:effectLst/>
+        </p:spPr>
+        <p:style>
+          <a:lnRef idx="1">
+            <a:schemeClr val="accent1"/>
+          </a:lnRef>
+          <a:fillRef idx="3">
+            <a:schemeClr val="accent1"/>
+          </a:fillRef>
+          <a:effectRef idx="2">
+            <a:schemeClr val="accent1"/>
+          </a:effectRef>
+          <a:fontRef idx="minor">
+            <a:schemeClr val="lt1"/>
+          </a:fontRef>
+        </p:style>
+        <p:txBody>
+          <a:bodyPr rtlCol="0" anchor="ctr"/>
+          <a:lstStyle/>
+          <a:p>
+            <a:pPr algn="ctr"/>
+          </a:p>
+        </p:txBody>
+      </p:sp>
+      <p:sp>
+        <p:nvSpPr>
+          <p:cNvPr id="7" name="Rectangle 6"/>
+          <p:cNvSpPr/>
+          <p:nvPr/>
+        </p:nvSpPr>
+        <p:spPr>
+          <a:xfrm>
+            <a:off x="502920" y="1325880"/>
+            <a:ext cx="73152" cy="1627632"/>
+          </a:xfrm>
+          <a:prstGeom prst="rect">
+            <a:avLst/>
+          </a:prstGeom>
+          <a:solidFill>
+            <a:srgbClr val="2E5AAC"/>
+          </a:solidFill>
+          <a:ln>
+            <a:noFill/>
+          </a:ln>
+          <a:effectLst/>
+        </p:spPr>
+        <p:style>
+          <a:lnRef idx="1">
+            <a:schemeClr val="accent1"/>
+          </a:lnRef>
+          <a:fillRef idx="3">
+            <a:schemeClr val="accent1"/>
+          </a:fillRef>
+          <a:effectRef idx="2">
+            <a:schemeClr val="accent1"/>
+          </a:effectRef>
+          <a:fontRef idx="minor">
+            <a:schemeClr val="lt1"/>
+          </a:fontRef>
+        </p:style>
+        <p:txBody>
+          <a:bodyPr rtlCol="0" anchor="ctr"/>
+          <a:lstStyle/>
+          <a:p>
+            <a:pPr algn="ctr"/>
+          </a:p>
+        </p:txBody>
+      </p:sp>
+      <p:sp>
+        <p:nvSpPr>
+          <p:cNvPr id="8" name="TextBox 7"/>
           <p:cNvSpPr txBox="1"/>
           <p:nvPr/>
         </p:nvSpPr>
         <p:spPr>
           <a:xfrm>
-            <a:off x="6263640" y="1600200"/>
-            <a:ext cx="365760" cy="320040"/>
+            <a:off x="713232" y="1417320"/>
+            <a:ext cx="7863840" cy="292608"/>
           </a:xfrm>
           <a:prstGeom prst="rect">
             <a:avLst/>
@@ -6618,27 +7078,82 @@
               </a:lnSpc>
             </a:pPr>
             <a:r>
-              <a:rPr sz="1200" b="1" i="0">
+              <a:rPr sz="1300" b="1" i="0">
+                <a:solidFill>
+                  <a:srgbClr val="1B2A4A"/>
+                </a:solidFill>
+                <a:latin typeface="Yu Gothic"/>
+              </a:rPr>
+              <a:t>Secure the default environment</a:t>
+            </a:r>
+          </a:p>
+        </p:txBody>
+      </p:sp>
+      <p:sp>
+        <p:nvSpPr>
+          <p:cNvPr id="9" name="Rounded Rectangle 8"/>
+          <p:cNvSpPr/>
+          <p:nvPr/>
+        </p:nvSpPr>
+        <p:spPr>
+          <a:xfrm>
+            <a:off x="9875520" y="1417320"/>
+            <a:ext cx="1737360" cy="292608"/>
+          </a:xfrm>
+          <a:prstGeom prst="roundRect">
+            <a:avLst>
+              <a:gd name="adj" fmla="val 50000"/>
+            </a:avLst>
+          </a:prstGeom>
+          <a:solidFill>
+            <a:srgbClr val="E9EFF9"/>
+          </a:solidFill>
+          <a:ln>
+            <a:noFill/>
+          </a:ln>
+          <a:effectLst/>
+        </p:spPr>
+        <p:style>
+          <a:lnRef idx="1">
+            <a:schemeClr val="accent1"/>
+          </a:lnRef>
+          <a:fillRef idx="3">
+            <a:schemeClr val="accent1"/>
+          </a:fillRef>
+          <a:effectRef idx="2">
+            <a:schemeClr val="accent1"/>
+          </a:effectRef>
+          <a:fontRef idx="minor">
+            <a:schemeClr val="lt1"/>
+          </a:fontRef>
+        </p:style>
+        <p:txBody>
+          <a:bodyPr rtlCol="0" anchor="ctr" wrap="none" lIns="25400" rIns="25400" tIns="12700" bIns="12700"/>
+          <a:lstStyle/>
+          <a:p>
+            <a:pPr algn="ctr"/>
+            <a:r>
+              <a:rPr sz="1050" b="1">
                 <a:solidFill>
                   <a:srgbClr val="2E5AAC"/>
                 </a:solidFill>
                 <a:latin typeface="Yu Gothic"/>
               </a:rPr>
-              <a:t>7.</a:t>
-            </a:r>
-          </a:p>
-        </p:txBody>
-      </p:sp>
-      <p:sp>
-        <p:nvSpPr>
-          <p:cNvPr id="20" name="TextBox 19"/>
+              <a:t>P.6・P.11 対応</a:t>
+            </a:r>
+          </a:p>
+        </p:txBody>
+      </p:sp>
+      <p:sp>
+        <p:nvSpPr>
+          <p:cNvPr id="10" name="TextBox 9"/>
           <p:cNvSpPr txBox="1"/>
           <p:nvPr/>
         </p:nvSpPr>
         <p:spPr>
           <a:xfrm>
-            <a:off x="6720840" y="1600200"/>
-            <a:ext cx="5120640" cy="731520"/>
+            <a:off x="713232" y="1728216"/>
+            <a:ext cx="10881360" cy="237744"/>
           </a:xfrm>
           <a:prstGeom prst="rect">
             <a:avLst/>
@@ -6653,47 +7168,31 @@
           <a:p>
             <a:pPr algn="l">
               <a:lnSpc>
-                <a:spcPct val="115000"/>
-              </a:lnSpc>
-            </a:pPr>
-            <a:r>
-              <a:rPr sz="1100" b="0" i="0">
-                <a:solidFill>
-                  <a:srgbClr val="262626"/>
-                </a:solidFill>
-                <a:latin typeface="Yu Gothic"/>
-              </a:rPr>
-              <a:t>Secure the default environment － Microsoft Learn（Adoption Guidance）</a:t>
-            </a:r>
-          </a:p>
-          <a:p>
-            <a:pPr algn="l">
-              <a:lnSpc>
-                <a:spcPct val="115000"/>
-              </a:lnSpc>
-            </a:pPr>
-            <a:r>
-              <a:rPr sz="1100" b="0" i="0">
-                <a:solidFill>
-                  <a:srgbClr val="262626"/>
-                </a:solidFill>
-                <a:latin typeface="Yu Gothic"/>
-              </a:rPr>
-              <a:t>learn.microsoft.com/power-platform/guidance/adoption/secure-default-environment</a:t>
-            </a:r>
-          </a:p>
-        </p:txBody>
-      </p:sp>
-      <p:sp>
-        <p:nvSpPr>
-          <p:cNvPr id="21" name="TextBox 20"/>
+                <a:spcPct val="100000"/>
+              </a:lnSpc>
+            </a:pPr>
+            <a:r>
+              <a:rPr sz="1000" b="0" i="0">
+                <a:solidFill>
+                  <a:srgbClr val="6E6E6E"/>
+                </a:solidFill>
+                <a:latin typeface="Yu Gothic"/>
+              </a:rPr>
+              <a:t>learn.microsoft.com/ja-jp/power-platform/guidance/adoption/secure-default-environment</a:t>
+            </a:r>
+          </a:p>
+        </p:txBody>
+      </p:sp>
+      <p:sp>
+        <p:nvSpPr>
+          <p:cNvPr id="11" name="TextBox 10"/>
           <p:cNvSpPr txBox="1"/>
           <p:nvPr/>
         </p:nvSpPr>
         <p:spPr>
           <a:xfrm>
-            <a:off x="6263640" y="2377440"/>
-            <a:ext cx="365760" cy="320040"/>
+            <a:off x="713232" y="2002536"/>
+            <a:ext cx="10881360" cy="859536"/>
           </a:xfrm>
           <a:prstGeom prst="rect">
             <a:avLst/>
@@ -6708,31 +7207,121 @@
           <a:p>
             <a:pPr algn="l">
               <a:lnSpc>
-                <a:spcPct val="100000"/>
-              </a:lnSpc>
-            </a:pPr>
-            <a:r>
-              <a:rPr sz="1200" b="1" i="0">
-                <a:solidFill>
-                  <a:srgbClr val="2E5AAC"/>
-                </a:solidFill>
-                <a:latin typeface="Yu Gothic"/>
-              </a:rPr>
-              <a:t>8.</a:t>
-            </a:r>
-          </a:p>
-        </p:txBody>
-      </p:sp>
-      <p:sp>
-        <p:nvSpPr>
-          <p:cNvPr id="22" name="TextBox 21"/>
+                <a:spcPct val="118000"/>
+              </a:lnSpc>
+            </a:pPr>
+            <a:r>
+              <a:rPr sz="1100" b="0" i="0">
+                <a:solidFill>
+                  <a:srgbClr val="262626"/>
+                </a:solidFill>
+                <a:latin typeface="Yu Gothic"/>
+              </a:rPr>
+              <a:t>原文：「Having a data policy in place is especially critical for the default environment.」（Default環境へのデータ ポリシー整備は特に重要）。新規コネクタの既定グループを「ブロック済み」に設定することを推奨。Set-PowerAppDlpErrorSettingsによるエラーメッセージのカスタマイズも案内。</a:t>
+            </a:r>
+          </a:p>
+        </p:txBody>
+      </p:sp>
+      <p:sp>
+        <p:nvSpPr>
+          <p:cNvPr id="12" name="Rectangle 11"/>
+          <p:cNvSpPr/>
+          <p:nvPr/>
+        </p:nvSpPr>
+        <p:spPr>
+          <a:xfrm>
+            <a:off x="502920" y="3044952"/>
+            <a:ext cx="11201400" cy="1627632"/>
+          </a:xfrm>
+          <a:prstGeom prst="rect">
+            <a:avLst/>
+          </a:prstGeom>
+          <a:solidFill>
+            <a:srgbClr val="F5F6F8"/>
+          </a:solidFill>
+          <a:ln w="9525">
+            <a:solidFill>
+              <a:srgbClr val="D9DCE1"/>
+            </a:solidFill>
+          </a:ln>
+          <a:effectLst/>
+        </p:spPr>
+        <p:style>
+          <a:lnRef idx="1">
+            <a:schemeClr val="accent1"/>
+          </a:lnRef>
+          <a:fillRef idx="3">
+            <a:schemeClr val="accent1"/>
+          </a:fillRef>
+          <a:effectRef idx="2">
+            <a:schemeClr val="accent1"/>
+          </a:effectRef>
+          <a:fontRef idx="minor">
+            <a:schemeClr val="lt1"/>
+          </a:fontRef>
+        </p:style>
+        <p:txBody>
+          <a:bodyPr rtlCol="0" anchor="ctr"/>
+          <a:lstStyle/>
+          <a:p>
+            <a:pPr algn="ctr"/>
+          </a:p>
+        </p:txBody>
+      </p:sp>
+      <p:sp>
+        <p:nvSpPr>
+          <p:cNvPr id="13" name="Rectangle 12"/>
+          <p:cNvSpPr/>
+          <p:nvPr/>
+        </p:nvSpPr>
+        <p:spPr>
+          <a:xfrm>
+            <a:off x="502920" y="3044952"/>
+            <a:ext cx="73152" cy="1627632"/>
+          </a:xfrm>
+          <a:prstGeom prst="rect">
+            <a:avLst/>
+          </a:prstGeom>
+          <a:solidFill>
+            <a:srgbClr val="2E5AAC"/>
+          </a:solidFill>
+          <a:ln>
+            <a:noFill/>
+          </a:ln>
+          <a:effectLst/>
+        </p:spPr>
+        <p:style>
+          <a:lnRef idx="1">
+            <a:schemeClr val="accent1"/>
+          </a:lnRef>
+          <a:fillRef idx="3">
+            <a:schemeClr val="accent1"/>
+          </a:fillRef>
+          <a:effectRef idx="2">
+            <a:schemeClr val="accent1"/>
+          </a:effectRef>
+          <a:fontRef idx="minor">
+            <a:schemeClr val="lt1"/>
+          </a:fontRef>
+        </p:style>
+        <p:txBody>
+          <a:bodyPr rtlCol="0" anchor="ctr"/>
+          <a:lstStyle/>
+          <a:p>
+            <a:pPr algn="ctr"/>
+          </a:p>
+        </p:txBody>
+      </p:sp>
+      <p:sp>
+        <p:nvSpPr>
+          <p:cNvPr id="14" name="TextBox 13"/>
           <p:cNvSpPr txBox="1"/>
           <p:nvPr/>
         </p:nvSpPr>
         <p:spPr>
           <a:xfrm>
-            <a:off x="6720840" y="2377440"/>
-            <a:ext cx="5120640" cy="731520"/>
+            <a:off x="713232" y="3136392"/>
+            <a:ext cx="7863840" cy="292608"/>
           </a:xfrm>
           <a:prstGeom prst="rect">
             <a:avLst/>
@@ -6747,47 +7336,86 @@
           <a:p>
             <a:pPr algn="l">
               <a:lnSpc>
-                <a:spcPct val="115000"/>
-              </a:lnSpc>
-            </a:pPr>
-            <a:r>
-              <a:rPr sz="1100" b="0" i="0">
-                <a:solidFill>
-                  <a:srgbClr val="262626"/>
-                </a:solidFill>
-                <a:latin typeface="Yu Gothic"/>
-              </a:rPr>
-              <a:t>Manage and govern the default environment － Microsoft Learn（Adoption Guidance）</a:t>
-            </a:r>
-          </a:p>
-          <a:p>
-            <a:pPr algn="l">
-              <a:lnSpc>
-                <a:spcPct val="115000"/>
-              </a:lnSpc>
-            </a:pPr>
-            <a:r>
-              <a:rPr sz="1100" b="0" i="0">
-                <a:solidFill>
-                  <a:srgbClr val="262626"/>
-                </a:solidFill>
-                <a:latin typeface="Yu Gothic"/>
-              </a:rPr>
-              <a:t>learn.microsoft.com/power-platform/guidance/adoption/manage-default-environment</a:t>
-            </a:r>
-          </a:p>
-        </p:txBody>
-      </p:sp>
-      <p:sp>
-        <p:nvSpPr>
-          <p:cNvPr id="23" name="TextBox 22"/>
+                <a:spcPct val="100000"/>
+              </a:lnSpc>
+            </a:pPr>
+            <a:r>
+              <a:rPr sz="1300" b="1" i="0">
+                <a:solidFill>
+                  <a:srgbClr val="1B2A4A"/>
+                </a:solidFill>
+                <a:latin typeface="Yu Gothic"/>
+              </a:rPr>
+              <a:t>View policies and scope</a:t>
+            </a:r>
+          </a:p>
+        </p:txBody>
+      </p:sp>
+      <p:sp>
+        <p:nvSpPr>
+          <p:cNvPr id="15" name="Rounded Rectangle 14"/>
+          <p:cNvSpPr/>
+          <p:nvPr/>
+        </p:nvSpPr>
+        <p:spPr>
+          <a:xfrm>
+            <a:off x="9875520" y="3136392"/>
+            <a:ext cx="1737360" cy="292608"/>
+          </a:xfrm>
+          <a:prstGeom prst="roundRect">
+            <a:avLst>
+              <a:gd name="adj" fmla="val 50000"/>
+            </a:avLst>
+          </a:prstGeom>
+          <a:solidFill>
+            <a:srgbClr val="E9EFF9"/>
+          </a:solidFill>
+          <a:ln>
+            <a:noFill/>
+          </a:ln>
+          <a:effectLst/>
+        </p:spPr>
+        <p:style>
+          <a:lnRef idx="1">
+            <a:schemeClr val="accent1"/>
+          </a:lnRef>
+          <a:fillRef idx="3">
+            <a:schemeClr val="accent1"/>
+          </a:fillRef>
+          <a:effectRef idx="2">
+            <a:schemeClr val="accent1"/>
+          </a:effectRef>
+          <a:fontRef idx="minor">
+            <a:schemeClr val="lt1"/>
+          </a:fontRef>
+        </p:style>
+        <p:txBody>
+          <a:bodyPr rtlCol="0" anchor="ctr" wrap="none" lIns="25400" rIns="25400" tIns="12700" bIns="12700"/>
+          <a:lstStyle/>
+          <a:p>
+            <a:pPr algn="ctr"/>
+            <a:r>
+              <a:rPr sz="1050" b="1">
+                <a:solidFill>
+                  <a:srgbClr val="2E5AAC"/>
+                </a:solidFill>
+                <a:latin typeface="Yu Gothic"/>
+              </a:rPr>
+              <a:t>P.6・P.9 対応</a:t>
+            </a:r>
+          </a:p>
+        </p:txBody>
+      </p:sp>
+      <p:sp>
+        <p:nvSpPr>
+          <p:cNvPr id="16" name="TextBox 15"/>
           <p:cNvSpPr txBox="1"/>
           <p:nvPr/>
         </p:nvSpPr>
         <p:spPr>
           <a:xfrm>
-            <a:off x="6263640" y="3154680"/>
-            <a:ext cx="365760" cy="320040"/>
+            <a:off x="713232" y="3447288"/>
+            <a:ext cx="10881360" cy="237744"/>
           </a:xfrm>
           <a:prstGeom prst="rect">
             <a:avLst/>
@@ -6806,27 +7434,27 @@
               </a:lnSpc>
             </a:pPr>
             <a:r>
-              <a:rPr sz="1200" b="1" i="0">
-                <a:solidFill>
-                  <a:srgbClr val="2E5AAC"/>
-                </a:solidFill>
-                <a:latin typeface="Yu Gothic"/>
-              </a:rPr>
-              <a:t>9.</a:t>
-            </a:r>
-          </a:p>
-        </p:txBody>
-      </p:sp>
-      <p:sp>
-        <p:nvSpPr>
-          <p:cNvPr id="24" name="TextBox 23"/>
+              <a:rPr sz="1000" b="0" i="0">
+                <a:solidFill>
+                  <a:srgbClr val="6E6E6E"/>
+                </a:solidFill>
+                <a:latin typeface="Yu Gothic"/>
+              </a:rPr>
+              <a:t>learn.microsoft.com/ja-jp/power-platform/admin/dlp-policy-scope</a:t>
+            </a:r>
+          </a:p>
+        </p:txBody>
+      </p:sp>
+      <p:sp>
+        <p:nvSpPr>
+          <p:cNvPr id="17" name="TextBox 16"/>
           <p:cNvSpPr txBox="1"/>
           <p:nvPr/>
         </p:nvSpPr>
         <p:spPr>
           <a:xfrm>
-            <a:off x="6720840" y="3154680"/>
-            <a:ext cx="5120640" cy="731520"/>
+            <a:off x="713232" y="3721608"/>
+            <a:ext cx="10881360" cy="859536"/>
           </a:xfrm>
           <a:prstGeom prst="rect">
             <a:avLst/>
@@ -6841,7 +7469,7 @@
           <a:p>
             <a:pPr algn="l">
               <a:lnSpc>
-                <a:spcPct val="115000"/>
+                <a:spcPct val="118000"/>
               </a:lnSpc>
             </a:pPr>
             <a:r>
@@ -6851,37 +7479,111 @@
                 </a:solidFill>
                 <a:latin typeface="Yu Gothic"/>
               </a:rPr>
-              <a:t>Environment routing － Microsoft Learn</a:t>
-            </a:r>
-          </a:p>
-          <a:p>
-            <a:pPr algn="l">
-              <a:lnSpc>
-                <a:spcPct val="115000"/>
-              </a:lnSpc>
-            </a:pPr>
-            <a:r>
-              <a:rPr sz="1100" b="0" i="0">
-                <a:solidFill>
-                  <a:srgbClr val="262626"/>
-                </a:solidFill>
-                <a:latin typeface="Yu Gothic"/>
-              </a:rPr>
-              <a:t>learn.microsoft.com/power-platform/admin/default-environment-routing</a:t>
-            </a:r>
-          </a:p>
-        </p:txBody>
-      </p:sp>
-      <p:sp>
-        <p:nvSpPr>
-          <p:cNvPr id="25" name="TextBox 24"/>
+              <a:t>要旨：テナントレベルのデータポリシーは「全環境」「複数環境（一部を除く）」「特定環境を除く全環境」の3種類のスコープから選択して適用できる。</a:t>
+            </a:r>
+          </a:p>
+        </p:txBody>
+      </p:sp>
+      <p:sp>
+        <p:nvSpPr>
+          <p:cNvPr id="18" name="Rectangle 17"/>
+          <p:cNvSpPr/>
+          <p:nvPr/>
+        </p:nvSpPr>
+        <p:spPr>
+          <a:xfrm>
+            <a:off x="502920" y="4764024"/>
+            <a:ext cx="11201400" cy="1627632"/>
+          </a:xfrm>
+          <a:prstGeom prst="rect">
+            <a:avLst/>
+          </a:prstGeom>
+          <a:solidFill>
+            <a:srgbClr val="F5F6F8"/>
+          </a:solidFill>
+          <a:ln w="9525">
+            <a:solidFill>
+              <a:srgbClr val="D9DCE1"/>
+            </a:solidFill>
+          </a:ln>
+          <a:effectLst/>
+        </p:spPr>
+        <p:style>
+          <a:lnRef idx="1">
+            <a:schemeClr val="accent1"/>
+          </a:lnRef>
+          <a:fillRef idx="3">
+            <a:schemeClr val="accent1"/>
+          </a:fillRef>
+          <a:effectRef idx="2">
+            <a:schemeClr val="accent1"/>
+          </a:effectRef>
+          <a:fontRef idx="minor">
+            <a:schemeClr val="lt1"/>
+          </a:fontRef>
+        </p:style>
+        <p:txBody>
+          <a:bodyPr rtlCol="0" anchor="ctr"/>
+          <a:lstStyle/>
+          <a:p>
+            <a:pPr algn="ctr"/>
+          </a:p>
+        </p:txBody>
+      </p:sp>
+      <p:sp>
+        <p:nvSpPr>
+          <p:cNvPr id="19" name="Rectangle 18"/>
+          <p:cNvSpPr/>
+          <p:nvPr/>
+        </p:nvSpPr>
+        <p:spPr>
+          <a:xfrm>
+            <a:off x="502920" y="4764024"/>
+            <a:ext cx="73152" cy="1627632"/>
+          </a:xfrm>
+          <a:prstGeom prst="rect">
+            <a:avLst/>
+          </a:prstGeom>
+          <a:solidFill>
+            <a:srgbClr val="2E5AAC"/>
+          </a:solidFill>
+          <a:ln>
+            <a:noFill/>
+          </a:ln>
+          <a:effectLst/>
+        </p:spPr>
+        <p:style>
+          <a:lnRef idx="1">
+            <a:schemeClr val="accent1"/>
+          </a:lnRef>
+          <a:fillRef idx="3">
+            <a:schemeClr val="accent1"/>
+          </a:fillRef>
+          <a:effectRef idx="2">
+            <a:schemeClr val="accent1"/>
+          </a:effectRef>
+          <a:fontRef idx="minor">
+            <a:schemeClr val="lt1"/>
+          </a:fontRef>
+        </p:style>
+        <p:txBody>
+          <a:bodyPr rtlCol="0" anchor="ctr"/>
+          <a:lstStyle/>
+          <a:p>
+            <a:pPr algn="ctr"/>
+          </a:p>
+        </p:txBody>
+      </p:sp>
+      <p:sp>
+        <p:nvSpPr>
+          <p:cNvPr id="20" name="TextBox 19"/>
           <p:cNvSpPr txBox="1"/>
           <p:nvPr/>
         </p:nvSpPr>
         <p:spPr>
           <a:xfrm>
-            <a:off x="6263640" y="3931920"/>
-            <a:ext cx="365760" cy="320040"/>
+            <a:off x="713232" y="4855464"/>
+            <a:ext cx="7863840" cy="292608"/>
           </a:xfrm>
           <a:prstGeom prst="rect">
             <a:avLst/>
@@ -6900,27 +7602,82 @@
               </a:lnSpc>
             </a:pPr>
             <a:r>
-              <a:rPr sz="1200" b="1" i="0">
+              <a:rPr sz="1300" b="1" i="0">
+                <a:solidFill>
+                  <a:srgbClr val="1B2A4A"/>
+                </a:solidFill>
+                <a:latin typeface="Yu Gothic"/>
+              </a:rPr>
+              <a:t>Impact of data policies on apps and flows</a:t>
+            </a:r>
+          </a:p>
+        </p:txBody>
+      </p:sp>
+      <p:sp>
+        <p:nvSpPr>
+          <p:cNvPr id="21" name="Rounded Rectangle 20"/>
+          <p:cNvSpPr/>
+          <p:nvPr/>
+        </p:nvSpPr>
+        <p:spPr>
+          <a:xfrm>
+            <a:off x="9875520" y="4855464"/>
+            <a:ext cx="1737360" cy="292608"/>
+          </a:xfrm>
+          <a:prstGeom prst="roundRect">
+            <a:avLst>
+              <a:gd name="adj" fmla="val 50000"/>
+            </a:avLst>
+          </a:prstGeom>
+          <a:solidFill>
+            <a:srgbClr val="E9EFF9"/>
+          </a:solidFill>
+          <a:ln>
+            <a:noFill/>
+          </a:ln>
+          <a:effectLst/>
+        </p:spPr>
+        <p:style>
+          <a:lnRef idx="1">
+            <a:schemeClr val="accent1"/>
+          </a:lnRef>
+          <a:fillRef idx="3">
+            <a:schemeClr val="accent1"/>
+          </a:fillRef>
+          <a:effectRef idx="2">
+            <a:schemeClr val="accent1"/>
+          </a:effectRef>
+          <a:fontRef idx="minor">
+            <a:schemeClr val="lt1"/>
+          </a:fontRef>
+        </p:style>
+        <p:txBody>
+          <a:bodyPr rtlCol="0" anchor="ctr" wrap="none" lIns="25400" rIns="25400" tIns="12700" bIns="12700"/>
+          <a:lstStyle/>
+          <a:p>
+            <a:pPr algn="ctr"/>
+            <a:r>
+              <a:rPr sz="1050" b="1">
                 <a:solidFill>
                   <a:srgbClr val="2E5AAC"/>
                 </a:solidFill>
                 <a:latin typeface="Yu Gothic"/>
               </a:rPr>
-              <a:t>10.</a:t>
-            </a:r>
-          </a:p>
-        </p:txBody>
-      </p:sp>
-      <p:sp>
-        <p:nvSpPr>
-          <p:cNvPr id="26" name="TextBox 25"/>
+              <a:t>P.8 対応</a:t>
+            </a:r>
+          </a:p>
+        </p:txBody>
+      </p:sp>
+      <p:sp>
+        <p:nvSpPr>
+          <p:cNvPr id="22" name="TextBox 21"/>
           <p:cNvSpPr txBox="1"/>
           <p:nvPr/>
         </p:nvSpPr>
         <p:spPr>
           <a:xfrm>
-            <a:off x="6720840" y="3931920"/>
-            <a:ext cx="5120640" cy="731520"/>
+            <a:off x="713232" y="5166360"/>
+            <a:ext cx="10881360" cy="237744"/>
           </a:xfrm>
           <a:prstGeom prst="rect">
             <a:avLst/>
@@ -6935,47 +7692,31 @@
           <a:p>
             <a:pPr algn="l">
               <a:lnSpc>
-                <a:spcPct val="115000"/>
-              </a:lnSpc>
-            </a:pPr>
-            <a:r>
-              <a:rPr sz="1100" b="0" i="0">
-                <a:solidFill>
-                  <a:srgbClr val="262626"/>
-                </a:solidFill>
-                <a:latin typeface="Yu Gothic"/>
-              </a:rPr>
-              <a:t>Environment groups － Microsoft Learn</a:t>
-            </a:r>
-          </a:p>
-          <a:p>
-            <a:pPr algn="l">
-              <a:lnSpc>
-                <a:spcPct val="115000"/>
-              </a:lnSpc>
-            </a:pPr>
-            <a:r>
-              <a:rPr sz="1100" b="0" i="0">
-                <a:solidFill>
-                  <a:srgbClr val="262626"/>
-                </a:solidFill>
-                <a:latin typeface="Yu Gothic"/>
-              </a:rPr>
-              <a:t>learn.microsoft.com/power-platform/admin/environment-groups</a:t>
-            </a:r>
-          </a:p>
-        </p:txBody>
-      </p:sp>
-      <p:sp>
-        <p:nvSpPr>
-          <p:cNvPr id="27" name="TextBox 26"/>
+                <a:spcPct val="100000"/>
+              </a:lnSpc>
+            </a:pPr>
+            <a:r>
+              <a:rPr sz="1000" b="0" i="0">
+                <a:solidFill>
+                  <a:srgbClr val="6E6E6E"/>
+                </a:solidFill>
+                <a:latin typeface="Yu Gothic"/>
+              </a:rPr>
+              <a:t>learn.microsoft.com/ja-jp/power-platform/admin/dlp-impact-policies-apps-flows</a:t>
+            </a:r>
+          </a:p>
+        </p:txBody>
+      </p:sp>
+      <p:sp>
+        <p:nvSpPr>
+          <p:cNvPr id="23" name="TextBox 22"/>
           <p:cNvSpPr txBox="1"/>
           <p:nvPr/>
         </p:nvSpPr>
         <p:spPr>
           <a:xfrm>
-            <a:off x="6263640" y="4709160"/>
-            <a:ext cx="365760" cy="320040"/>
+            <a:off x="713232" y="5440680"/>
+            <a:ext cx="10881360" cy="859536"/>
           </a:xfrm>
           <a:prstGeom prst="rect">
             <a:avLst/>
@@ -6990,31 +7731,31 @@
           <a:p>
             <a:pPr algn="l">
               <a:lnSpc>
-                <a:spcPct val="100000"/>
-              </a:lnSpc>
-            </a:pPr>
-            <a:r>
-              <a:rPr sz="1200" b="1" i="0">
-                <a:solidFill>
-                  <a:srgbClr val="2E5AAC"/>
-                </a:solidFill>
-                <a:latin typeface="Yu Gothic"/>
-              </a:rPr>
-              <a:t>11.</a:t>
-            </a:r>
-          </a:p>
-        </p:txBody>
-      </p:sp>
-      <p:sp>
-        <p:nvSpPr>
-          <p:cNvPr id="28" name="TextBox 27"/>
+                <a:spcPct val="118000"/>
+              </a:lnSpc>
+            </a:pPr>
+            <a:r>
+              <a:rPr sz="1100" b="0" i="0">
+                <a:solidFill>
+                  <a:srgbClr val="262626"/>
+                </a:solidFill>
+                <a:latin typeface="Yu Gothic"/>
+              </a:rPr>
+              <a:t>要旨：データポリシーに違反する接続の組み合わせを含むアプリ／フローは、設計時・実行時の両方でエラーとしてブロックされ、利用者のライセンス種別は問われない。</a:t>
+            </a:r>
+          </a:p>
+        </p:txBody>
+      </p:sp>
+      <p:sp>
+        <p:nvSpPr>
+          <p:cNvPr id="24" name="TextBox 23"/>
           <p:cNvSpPr txBox="1"/>
           <p:nvPr/>
         </p:nvSpPr>
         <p:spPr>
           <a:xfrm>
-            <a:off x="6720840" y="4709160"/>
-            <a:ext cx="5120640" cy="731520"/>
+            <a:off x="502920" y="6565392"/>
+            <a:ext cx="8229600" cy="274320"/>
           </a:xfrm>
           <a:prstGeom prst="rect">
             <a:avLst/>
@@ -7029,47 +7770,31 @@
           <a:p>
             <a:pPr algn="l">
               <a:lnSpc>
-                <a:spcPct val="115000"/>
-              </a:lnSpc>
-            </a:pPr>
-            <a:r>
-              <a:rPr sz="1100" b="0" i="0">
-                <a:solidFill>
-                  <a:srgbClr val="262626"/>
-                </a:solidFill>
-                <a:latin typeface="Yu Gothic"/>
-              </a:rPr>
-              <a:t>Power Automate licensing FAQ － Microsoft Learn</a:t>
-            </a:r>
-          </a:p>
-          <a:p>
-            <a:pPr algn="l">
-              <a:lnSpc>
-                <a:spcPct val="115000"/>
-              </a:lnSpc>
-            </a:pPr>
-            <a:r>
-              <a:rPr sz="1100" b="0" i="0">
-                <a:solidFill>
-                  <a:srgbClr val="262626"/>
-                </a:solidFill>
-                <a:latin typeface="Yu Gothic"/>
-              </a:rPr>
-              <a:t>learn.microsoft.com/power-platform/admin/power-automate-licensing/faqs</a:t>
-            </a:r>
-          </a:p>
-        </p:txBody>
-      </p:sp>
-      <p:sp>
-        <p:nvSpPr>
-          <p:cNvPr id="29" name="TextBox 28"/>
+                <a:spcPct val="100000"/>
+              </a:lnSpc>
+            </a:pPr>
+            <a:r>
+              <a:rPr sz="900" b="0" i="0">
+                <a:solidFill>
+                  <a:srgbClr val="6E6E6E"/>
+                </a:solidFill>
+                <a:latin typeface="Yu Gothic"/>
+              </a:rPr>
+              <a:t>Power Platform Default環境 統治 調査報告 ｜ Confidential</a:t>
+            </a:r>
+          </a:p>
+        </p:txBody>
+      </p:sp>
+      <p:sp>
+        <p:nvSpPr>
+          <p:cNvPr id="25" name="TextBox 24"/>
           <p:cNvSpPr txBox="1"/>
           <p:nvPr/>
         </p:nvSpPr>
         <p:spPr>
           <a:xfrm>
-            <a:off x="6263640" y="5486400"/>
-            <a:ext cx="365760" cy="320040"/>
+            <a:off x="11338560" y="6565392"/>
+            <a:ext cx="548640" cy="274320"/>
           </a:xfrm>
           <a:prstGeom prst="rect">
             <a:avLst/>
@@ -7082,33 +7807,147 @@
           </a:bodyPr>
           <a:lstStyle/>
           <a:p>
-            <a:pPr algn="l">
+            <a:pPr algn="r">
               <a:lnSpc>
                 <a:spcPct val="100000"/>
               </a:lnSpc>
             </a:pPr>
             <a:r>
-              <a:rPr sz="1200" b="1" i="0">
-                <a:solidFill>
-                  <a:srgbClr val="2E5AAC"/>
-                </a:solidFill>
-                <a:latin typeface="Yu Gothic"/>
-              </a:rPr>
-              <a:t>12.</a:t>
-            </a:r>
-          </a:p>
-        </p:txBody>
-      </p:sp>
-      <p:sp>
-        <p:nvSpPr>
-          <p:cNvPr id="30" name="TextBox 29"/>
+              <a:rPr sz="900" b="0" i="0">
+                <a:solidFill>
+                  <a:srgbClr val="6E6E6E"/>
+                </a:solidFill>
+                <a:latin typeface="Yu Gothic"/>
+              </a:rPr>
+              <a:t>14</a:t>
+            </a:r>
+          </a:p>
+        </p:txBody>
+      </p:sp>
+    </p:spTree>
+  </p:cSld>
+  <p:clrMapOvr>
+    <a:masterClrMapping/>
+  </p:clrMapOvr>
+</p:sld>
+</file>
+
+<file path=ppt/slides/slide15.xml><?xml version="1.0" encoding="utf-8"?>
+<p:sld xmlns:a="http://schemas.openxmlformats.org/drawingml/2006/main" xmlns:p="http://schemas.openxmlformats.org/presentationml/2006/main" xmlns:r="http://schemas.openxmlformats.org/officeDocument/2006/relationships">
+  <p:cSld>
+    <p:bg>
+      <p:bgPr>
+        <a:solidFill>
+          <a:srgbClr val="FFFFFF"/>
+        </a:solidFill>
+        <a:effectLst/>
+      </p:bgPr>
+    </p:bg>
+    <p:spTree>
+      <p:nvGrpSpPr>
+        <p:cNvPr id="1" name=""/>
+        <p:cNvGrpSpPr/>
+        <p:nvPr/>
+      </p:nvGrpSpPr>
+      <p:grpSpPr/>
+      <p:sp>
+        <p:nvSpPr>
+          <p:cNvPr id="2" name="Rectangle 1"/>
+          <p:cNvSpPr/>
+          <p:nvPr/>
+        </p:nvSpPr>
+        <p:spPr>
+          <a:xfrm>
+            <a:off x="0" y="0"/>
+            <a:ext cx="12191695" cy="1051560"/>
+          </a:xfrm>
+          <a:prstGeom prst="rect">
+            <a:avLst/>
+          </a:prstGeom>
+          <a:solidFill>
+            <a:srgbClr val="1B2A4A"/>
+          </a:solidFill>
+          <a:ln>
+            <a:noFill/>
+          </a:ln>
+          <a:effectLst/>
+        </p:spPr>
+        <p:style>
+          <a:lnRef idx="1">
+            <a:schemeClr val="accent1"/>
+          </a:lnRef>
+          <a:fillRef idx="3">
+            <a:schemeClr val="accent1"/>
+          </a:fillRef>
+          <a:effectRef idx="2">
+            <a:schemeClr val="accent1"/>
+          </a:effectRef>
+          <a:fontRef idx="minor">
+            <a:schemeClr val="lt1"/>
+          </a:fontRef>
+        </p:style>
+        <p:txBody>
+          <a:bodyPr rtlCol="0" anchor="ctr"/>
+          <a:lstStyle/>
+          <a:p>
+            <a:pPr algn="ctr"/>
+          </a:p>
+        </p:txBody>
+      </p:sp>
+      <p:sp>
+        <p:nvSpPr>
+          <p:cNvPr id="3" name="Rectangle 2"/>
+          <p:cNvSpPr/>
+          <p:nvPr/>
+        </p:nvSpPr>
+        <p:spPr>
+          <a:xfrm>
+            <a:off x="0" y="1051560"/>
+            <a:ext cx="12191695" cy="38100"/>
+          </a:xfrm>
+          <a:prstGeom prst="rect">
+            <a:avLst/>
+          </a:prstGeom>
+          <a:solidFill>
+            <a:srgbClr val="2E5AAC"/>
+          </a:solidFill>
+          <a:ln>
+            <a:noFill/>
+          </a:ln>
+          <a:effectLst/>
+        </p:spPr>
+        <p:style>
+          <a:lnRef idx="1">
+            <a:schemeClr val="accent1"/>
+          </a:lnRef>
+          <a:fillRef idx="3">
+            <a:schemeClr val="accent1"/>
+          </a:fillRef>
+          <a:effectRef idx="2">
+            <a:schemeClr val="accent1"/>
+          </a:effectRef>
+          <a:fontRef idx="minor">
+            <a:schemeClr val="lt1"/>
+          </a:fontRef>
+        </p:style>
+        <p:txBody>
+          <a:bodyPr rtlCol="0" anchor="ctr"/>
+          <a:lstStyle/>
+          <a:p>
+            <a:pPr algn="ctr"/>
+          </a:p>
+        </p:txBody>
+      </p:sp>
+      <p:sp>
+        <p:nvSpPr>
+          <p:cNvPr id="4" name="TextBox 3"/>
           <p:cNvSpPr txBox="1"/>
           <p:nvPr/>
         </p:nvSpPr>
         <p:spPr>
           <a:xfrm>
-            <a:off x="6720840" y="5486400"/>
-            <a:ext cx="5120640" cy="731520"/>
+            <a:off x="502920" y="118872"/>
+            <a:ext cx="9144000" cy="320040"/>
           </a:xfrm>
           <a:prstGeom prst="rect">
             <a:avLst/>
@@ -7123,47 +7962,31 @@
           <a:p>
             <a:pPr algn="l">
               <a:lnSpc>
-                <a:spcPct val="115000"/>
-              </a:lnSpc>
-            </a:pPr>
-            <a:r>
-              <a:rPr sz="1100" b="0" i="0">
-                <a:solidFill>
-                  <a:srgbClr val="262626"/>
-                </a:solidFill>
-                <a:latin typeface="Yu Gothic"/>
-              </a:rPr>
-              <a:t>Power Platform environments overview － Microsoft Learn</a:t>
-            </a:r>
-          </a:p>
-          <a:p>
-            <a:pPr algn="l">
-              <a:lnSpc>
-                <a:spcPct val="115000"/>
-              </a:lnSpc>
-            </a:pPr>
-            <a:r>
-              <a:rPr sz="1100" b="0" i="0">
-                <a:solidFill>
-                  <a:srgbClr val="262626"/>
-                </a:solidFill>
-                <a:latin typeface="Yu Gothic"/>
-              </a:rPr>
-              <a:t>learn.microsoft.com/power-platform/admin/environments-overview</a:t>
-            </a:r>
-          </a:p>
-        </p:txBody>
-      </p:sp>
-      <p:sp>
-        <p:nvSpPr>
-          <p:cNvPr id="31" name="TextBox 30"/>
+                <a:spcPct val="100000"/>
+              </a:lnSpc>
+            </a:pPr>
+            <a:r>
+              <a:rPr sz="1200" b="1" i="0">
+                <a:solidFill>
+                  <a:srgbClr val="B9C7E6"/>
+                </a:solidFill>
+                <a:latin typeface="Yu Gothic"/>
+              </a:rPr>
+              <a:t>APPENDIX</a:t>
+            </a:r>
+          </a:p>
+        </p:txBody>
+      </p:sp>
+      <p:sp>
+        <p:nvSpPr>
+          <p:cNvPr id="5" name="TextBox 4"/>
           <p:cNvSpPr txBox="1"/>
           <p:nvPr/>
         </p:nvSpPr>
         <p:spPr>
           <a:xfrm>
-            <a:off x="502920" y="6263640"/>
-            <a:ext cx="11155680" cy="365760"/>
+            <a:off x="502920" y="411480"/>
+            <a:ext cx="10972800" cy="594360"/>
           </a:xfrm>
           <a:prstGeom prst="rect">
             <a:avLst/>
@@ -7182,27 +8005,117 @@
               </a:lnSpc>
             </a:pPr>
             <a:r>
-              <a:rPr sz="1050" b="0" i="1">
-                <a:solidFill>
-                  <a:srgbClr val="6E6E6E"/>
-                </a:solidFill>
-                <a:latin typeface="Yu Gothic"/>
-              </a:rPr>
-              <a:t>※ 本資料はMicrosoft公式ドキュメントに基づき2026年7月時点の情報を整理したものです。設定前に最新情報をご確認ください。</a:t>
-            </a:r>
-          </a:p>
-        </p:txBody>
-      </p:sp>
-      <p:sp>
-        <p:nvSpPr>
-          <p:cNvPr id="32" name="TextBox 31"/>
+              <a:rPr sz="2300" b="1" i="0">
+                <a:solidFill>
+                  <a:srgbClr val="FFFFFF"/>
+                </a:solidFill>
+                <a:latin typeface="Yu Gothic"/>
+              </a:rPr>
+              <a:t>Appendix C：確認項目③④⑤の根拠（ライセンス）</a:t>
+            </a:r>
+          </a:p>
+        </p:txBody>
+      </p:sp>
+      <p:sp>
+        <p:nvSpPr>
+          <p:cNvPr id="6" name="Rectangle 5"/>
+          <p:cNvSpPr/>
+          <p:nvPr/>
+        </p:nvSpPr>
+        <p:spPr>
+          <a:xfrm>
+            <a:off x="502920" y="1325880"/>
+            <a:ext cx="11201400" cy="1627632"/>
+          </a:xfrm>
+          <a:prstGeom prst="rect">
+            <a:avLst/>
+          </a:prstGeom>
+          <a:solidFill>
+            <a:srgbClr val="F5F6F8"/>
+          </a:solidFill>
+          <a:ln w="9525">
+            <a:solidFill>
+              <a:srgbClr val="D9DCE1"/>
+            </a:solidFill>
+          </a:ln>
+          <a:effectLst/>
+        </p:spPr>
+        <p:style>
+          <a:lnRef idx="1">
+            <a:schemeClr val="accent1"/>
+          </a:lnRef>
+          <a:fillRef idx="3">
+            <a:schemeClr val="accent1"/>
+          </a:fillRef>
+          <a:effectRef idx="2">
+            <a:schemeClr val="accent1"/>
+          </a:effectRef>
+          <a:fontRef idx="minor">
+            <a:schemeClr val="lt1"/>
+          </a:fontRef>
+        </p:style>
+        <p:txBody>
+          <a:bodyPr rtlCol="0" anchor="ctr"/>
+          <a:lstStyle/>
+          <a:p>
+            <a:pPr algn="ctr"/>
+          </a:p>
+        </p:txBody>
+      </p:sp>
+      <p:sp>
+        <p:nvSpPr>
+          <p:cNvPr id="7" name="Rectangle 6"/>
+          <p:cNvSpPr/>
+          <p:nvPr/>
+        </p:nvSpPr>
+        <p:spPr>
+          <a:xfrm>
+            <a:off x="502920" y="1325880"/>
+            <a:ext cx="73152" cy="1627632"/>
+          </a:xfrm>
+          <a:prstGeom prst="rect">
+            <a:avLst/>
+          </a:prstGeom>
+          <a:solidFill>
+            <a:srgbClr val="2E5AAC"/>
+          </a:solidFill>
+          <a:ln>
+            <a:noFill/>
+          </a:ln>
+          <a:effectLst/>
+        </p:spPr>
+        <p:style>
+          <a:lnRef idx="1">
+            <a:schemeClr val="accent1"/>
+          </a:lnRef>
+          <a:fillRef idx="3">
+            <a:schemeClr val="accent1"/>
+          </a:fillRef>
+          <a:effectRef idx="2">
+            <a:schemeClr val="accent1"/>
+          </a:effectRef>
+          <a:fontRef idx="minor">
+            <a:schemeClr val="lt1"/>
+          </a:fontRef>
+        </p:style>
+        <p:txBody>
+          <a:bodyPr rtlCol="0" anchor="ctr"/>
+          <a:lstStyle/>
+          <a:p>
+            <a:pPr algn="ctr"/>
+          </a:p>
+        </p:txBody>
+      </p:sp>
+      <p:sp>
+        <p:nvSpPr>
+          <p:cNvPr id="8" name="TextBox 7"/>
           <p:cNvSpPr txBox="1"/>
           <p:nvPr/>
         </p:nvSpPr>
         <p:spPr>
           <a:xfrm>
-            <a:off x="502920" y="6565392"/>
-            <a:ext cx="8229600" cy="274320"/>
+            <a:off x="713232" y="1417320"/>
+            <a:ext cx="7863840" cy="292608"/>
           </a:xfrm>
           <a:prstGeom prst="rect">
             <a:avLst/>
@@ -7221,27 +8134,82 @@
               </a:lnSpc>
             </a:pPr>
             <a:r>
-              <a:rPr sz="900" b="0" i="0">
-                <a:solidFill>
-                  <a:srgbClr val="6E6E6E"/>
-                </a:solidFill>
-                <a:latin typeface="Yu Gothic"/>
-              </a:rPr>
-              <a:t>Power Platform Default環境 統治 調査報告 ｜ Confidential</a:t>
-            </a:r>
-          </a:p>
-        </p:txBody>
-      </p:sp>
-      <p:sp>
-        <p:nvSpPr>
-          <p:cNvPr id="33" name="TextBox 32"/>
+              <a:rPr sz="1300" b="1" i="0">
+                <a:solidFill>
+                  <a:srgbClr val="1B2A4A"/>
+                </a:solidFill>
+                <a:latin typeface="Yu Gothic"/>
+              </a:rPr>
+              <a:t>Licensing（Managed Environments）</a:t>
+            </a:r>
+          </a:p>
+        </p:txBody>
+      </p:sp>
+      <p:sp>
+        <p:nvSpPr>
+          <p:cNvPr id="9" name="Rounded Rectangle 8"/>
+          <p:cNvSpPr/>
+          <p:nvPr/>
+        </p:nvSpPr>
+        <p:spPr>
+          <a:xfrm>
+            <a:off x="9875520" y="1417320"/>
+            <a:ext cx="1737360" cy="292608"/>
+          </a:xfrm>
+          <a:prstGeom prst="roundRect">
+            <a:avLst>
+              <a:gd name="adj" fmla="val 50000"/>
+            </a:avLst>
+          </a:prstGeom>
+          <a:solidFill>
+            <a:srgbClr val="E9EFF9"/>
+          </a:solidFill>
+          <a:ln>
+            <a:noFill/>
+          </a:ln>
+          <a:effectLst/>
+        </p:spPr>
+        <p:style>
+          <a:lnRef idx="1">
+            <a:schemeClr val="accent1"/>
+          </a:lnRef>
+          <a:fillRef idx="3">
+            <a:schemeClr val="accent1"/>
+          </a:fillRef>
+          <a:effectRef idx="2">
+            <a:schemeClr val="accent1"/>
+          </a:effectRef>
+          <a:fontRef idx="minor">
+            <a:schemeClr val="lt1"/>
+          </a:fontRef>
+        </p:style>
+        <p:txBody>
+          <a:bodyPr rtlCol="0" anchor="ctr" wrap="none" lIns="25400" rIns="25400" tIns="12700" bIns="12700"/>
+          <a:lstStyle/>
+          <a:p>
+            <a:pPr algn="ctr"/>
+            <a:r>
+              <a:rPr sz="1050" b="1">
+                <a:solidFill>
+                  <a:srgbClr val="2E5AAC"/>
+                </a:solidFill>
+                <a:latin typeface="Yu Gothic"/>
+              </a:rPr>
+              <a:t>P.7・P.11 対応</a:t>
+            </a:r>
+          </a:p>
+        </p:txBody>
+      </p:sp>
+      <p:sp>
+        <p:nvSpPr>
+          <p:cNvPr id="10" name="TextBox 9"/>
           <p:cNvSpPr txBox="1"/>
           <p:nvPr/>
         </p:nvSpPr>
         <p:spPr>
           <a:xfrm>
-            <a:off x="11338560" y="6565392"/>
-            <a:ext cx="548640" cy="274320"/>
+            <a:off x="713232" y="1728216"/>
+            <a:ext cx="10881360" cy="237744"/>
           </a:xfrm>
           <a:prstGeom prst="rect">
             <a:avLst/>
@@ -7254,6 +8222,647 @@
           </a:bodyPr>
           <a:lstStyle/>
           <a:p>
+            <a:pPr algn="l">
+              <a:lnSpc>
+                <a:spcPct val="100000"/>
+              </a:lnSpc>
+            </a:pPr>
+            <a:r>
+              <a:rPr sz="1000" b="0" i="0">
+                <a:solidFill>
+                  <a:srgbClr val="6E6E6E"/>
+                </a:solidFill>
+                <a:latin typeface="Yu Gothic"/>
+              </a:rPr>
+              <a:t>learn.microsoft.com/ja-jp/power-platform/admin/managed-environment-licensing</a:t>
+            </a:r>
+          </a:p>
+        </p:txBody>
+      </p:sp>
+      <p:sp>
+        <p:nvSpPr>
+          <p:cNvPr id="11" name="TextBox 10"/>
+          <p:cNvSpPr txBox="1"/>
+          <p:nvPr/>
+        </p:nvSpPr>
+        <p:spPr>
+          <a:xfrm>
+            <a:off x="713232" y="2002536"/>
+            <a:ext cx="10881360" cy="859536"/>
+          </a:xfrm>
+          <a:prstGeom prst="rect">
+            <a:avLst/>
+          </a:prstGeom>
+          <a:noFill/>
+        </p:spPr>
+        <p:txBody>
+          <a:bodyPr wrap="square" anchor="t" lIns="0" rIns="0" tIns="0" bIns="0">
+            <a:spAutoFit/>
+          </a:bodyPr>
+          <a:lstStyle/>
+          <a:p>
+            <a:pPr algn="l">
+              <a:lnSpc>
+                <a:spcPct val="118000"/>
+              </a:lnSpc>
+            </a:pPr>
+            <a:r>
+              <a:rPr sz="1100" b="0" i="0">
+                <a:solidFill>
+                  <a:srgbClr val="262626"/>
+                </a:solidFill>
+                <a:latin typeface="Yu Gothic"/>
+              </a:rPr>
+              <a:t>原文：「When you activate managed environments in an environment, all active usage requires one of these standalone licenses or pay-as-you-go meters.」マネージド環境下でアプリ/フローを実行する全ユーザーが対象。2026年3月（管理者向け）・6月（エンドユーザー向け）に順次通知開始。</a:t>
+            </a:r>
+          </a:p>
+        </p:txBody>
+      </p:sp>
+      <p:sp>
+        <p:nvSpPr>
+          <p:cNvPr id="12" name="Rectangle 11"/>
+          <p:cNvSpPr/>
+          <p:nvPr/>
+        </p:nvSpPr>
+        <p:spPr>
+          <a:xfrm>
+            <a:off x="502920" y="3044952"/>
+            <a:ext cx="11201400" cy="1627632"/>
+          </a:xfrm>
+          <a:prstGeom prst="rect">
+            <a:avLst/>
+          </a:prstGeom>
+          <a:solidFill>
+            <a:srgbClr val="F5F6F8"/>
+          </a:solidFill>
+          <a:ln w="9525">
+            <a:solidFill>
+              <a:srgbClr val="D9DCE1"/>
+            </a:solidFill>
+          </a:ln>
+          <a:effectLst/>
+        </p:spPr>
+        <p:style>
+          <a:lnRef idx="1">
+            <a:schemeClr val="accent1"/>
+          </a:lnRef>
+          <a:fillRef idx="3">
+            <a:schemeClr val="accent1"/>
+          </a:fillRef>
+          <a:effectRef idx="2">
+            <a:schemeClr val="accent1"/>
+          </a:effectRef>
+          <a:fontRef idx="minor">
+            <a:schemeClr val="lt1"/>
+          </a:fontRef>
+        </p:style>
+        <p:txBody>
+          <a:bodyPr rtlCol="0" anchor="ctr"/>
+          <a:lstStyle/>
+          <a:p>
+            <a:pPr algn="ctr"/>
+          </a:p>
+        </p:txBody>
+      </p:sp>
+      <p:sp>
+        <p:nvSpPr>
+          <p:cNvPr id="13" name="Rectangle 12"/>
+          <p:cNvSpPr/>
+          <p:nvPr/>
+        </p:nvSpPr>
+        <p:spPr>
+          <a:xfrm>
+            <a:off x="502920" y="3044952"/>
+            <a:ext cx="73152" cy="1627632"/>
+          </a:xfrm>
+          <a:prstGeom prst="rect">
+            <a:avLst/>
+          </a:prstGeom>
+          <a:solidFill>
+            <a:srgbClr val="2E5AAC"/>
+          </a:solidFill>
+          <a:ln>
+            <a:noFill/>
+          </a:ln>
+          <a:effectLst/>
+        </p:spPr>
+        <p:style>
+          <a:lnRef idx="1">
+            <a:schemeClr val="accent1"/>
+          </a:lnRef>
+          <a:fillRef idx="3">
+            <a:schemeClr val="accent1"/>
+          </a:fillRef>
+          <a:effectRef idx="2">
+            <a:schemeClr val="accent1"/>
+          </a:effectRef>
+          <a:fontRef idx="minor">
+            <a:schemeClr val="lt1"/>
+          </a:fontRef>
+        </p:style>
+        <p:txBody>
+          <a:bodyPr rtlCol="0" anchor="ctr"/>
+          <a:lstStyle/>
+          <a:p>
+            <a:pPr algn="ctr"/>
+          </a:p>
+        </p:txBody>
+      </p:sp>
+      <p:sp>
+        <p:nvSpPr>
+          <p:cNvPr id="14" name="TextBox 13"/>
+          <p:cNvSpPr txBox="1"/>
+          <p:nvPr/>
+        </p:nvSpPr>
+        <p:spPr>
+          <a:xfrm>
+            <a:off x="713232" y="3136392"/>
+            <a:ext cx="7863840" cy="292608"/>
+          </a:xfrm>
+          <a:prstGeom prst="rect">
+            <a:avLst/>
+          </a:prstGeom>
+          <a:noFill/>
+        </p:spPr>
+        <p:txBody>
+          <a:bodyPr wrap="square" anchor="t" lIns="0" rIns="0" tIns="0" bIns="0">
+            <a:spAutoFit/>
+          </a:bodyPr>
+          <a:lstStyle/>
+          <a:p>
+            <a:pPr algn="l">
+              <a:lnSpc>
+                <a:spcPct val="100000"/>
+              </a:lnSpc>
+            </a:pPr>
+            <a:r>
+              <a:rPr sz="1300" b="1" i="0">
+                <a:solidFill>
+                  <a:srgbClr val="1B2A4A"/>
+                </a:solidFill>
+                <a:latin typeface="Yu Gothic"/>
+              </a:rPr>
+              <a:t>Power Automate licensing FAQ</a:t>
+            </a:r>
+          </a:p>
+        </p:txBody>
+      </p:sp>
+      <p:sp>
+        <p:nvSpPr>
+          <p:cNvPr id="15" name="Rounded Rectangle 14"/>
+          <p:cNvSpPr/>
+          <p:nvPr/>
+        </p:nvSpPr>
+        <p:spPr>
+          <a:xfrm>
+            <a:off x="9875520" y="3136392"/>
+            <a:ext cx="1737360" cy="292608"/>
+          </a:xfrm>
+          <a:prstGeom prst="roundRect">
+            <a:avLst>
+              <a:gd name="adj" fmla="val 50000"/>
+            </a:avLst>
+          </a:prstGeom>
+          <a:solidFill>
+            <a:srgbClr val="E9EFF9"/>
+          </a:solidFill>
+          <a:ln>
+            <a:noFill/>
+          </a:ln>
+          <a:effectLst/>
+        </p:spPr>
+        <p:style>
+          <a:lnRef idx="1">
+            <a:schemeClr val="accent1"/>
+          </a:lnRef>
+          <a:fillRef idx="3">
+            <a:schemeClr val="accent1"/>
+          </a:fillRef>
+          <a:effectRef idx="2">
+            <a:schemeClr val="accent1"/>
+          </a:effectRef>
+          <a:fontRef idx="minor">
+            <a:schemeClr val="lt1"/>
+          </a:fontRef>
+        </p:style>
+        <p:txBody>
+          <a:bodyPr rtlCol="0" anchor="ctr" wrap="none" lIns="25400" rIns="25400" tIns="12700" bIns="12700"/>
+          <a:lstStyle/>
+          <a:p>
+            <a:pPr algn="ctr"/>
+            <a:r>
+              <a:rPr sz="1050" b="1">
+                <a:solidFill>
+                  <a:srgbClr val="2E5AAC"/>
+                </a:solidFill>
+                <a:latin typeface="Yu Gothic"/>
+              </a:rPr>
+              <a:t>P.7 対応</a:t>
+            </a:r>
+          </a:p>
+        </p:txBody>
+      </p:sp>
+      <p:sp>
+        <p:nvSpPr>
+          <p:cNvPr id="16" name="TextBox 15"/>
+          <p:cNvSpPr txBox="1"/>
+          <p:nvPr/>
+        </p:nvSpPr>
+        <p:spPr>
+          <a:xfrm>
+            <a:off x="713232" y="3447288"/>
+            <a:ext cx="10881360" cy="237744"/>
+          </a:xfrm>
+          <a:prstGeom prst="rect">
+            <a:avLst/>
+          </a:prstGeom>
+          <a:noFill/>
+        </p:spPr>
+        <p:txBody>
+          <a:bodyPr wrap="square" anchor="t" lIns="0" rIns="0" tIns="0" bIns="0">
+            <a:spAutoFit/>
+          </a:bodyPr>
+          <a:lstStyle/>
+          <a:p>
+            <a:pPr algn="l">
+              <a:lnSpc>
+                <a:spcPct val="100000"/>
+              </a:lnSpc>
+            </a:pPr>
+            <a:r>
+              <a:rPr sz="1000" b="0" i="0">
+                <a:solidFill>
+                  <a:srgbClr val="6E6E6E"/>
+                </a:solidFill>
+                <a:latin typeface="Yu Gothic"/>
+              </a:rPr>
+              <a:t>learn.microsoft.com/ja-jp/power-platform/admin/power-automate-licensing/faqs</a:t>
+            </a:r>
+          </a:p>
+        </p:txBody>
+      </p:sp>
+      <p:sp>
+        <p:nvSpPr>
+          <p:cNvPr id="17" name="TextBox 16"/>
+          <p:cNvSpPr txBox="1"/>
+          <p:nvPr/>
+        </p:nvSpPr>
+        <p:spPr>
+          <a:xfrm>
+            <a:off x="713232" y="3721608"/>
+            <a:ext cx="10881360" cy="859536"/>
+          </a:xfrm>
+          <a:prstGeom prst="rect">
+            <a:avLst/>
+          </a:prstGeom>
+          <a:noFill/>
+        </p:spPr>
+        <p:txBody>
+          <a:bodyPr wrap="square" anchor="t" lIns="0" rIns="0" tIns="0" bIns="0">
+            <a:spAutoFit/>
+          </a:bodyPr>
+          <a:lstStyle/>
+          <a:p>
+            <a:pPr algn="l">
+              <a:lnSpc>
+                <a:spcPct val="118000"/>
+              </a:lnSpc>
+            </a:pPr>
+            <a:r>
+              <a:rPr sz="1100" b="0" i="0">
+                <a:solidFill>
+                  <a:srgbClr val="262626"/>
+                </a:solidFill>
+                <a:latin typeface="Yu Gothic"/>
+              </a:rPr>
+              <a:t>原文：「If an instant flow has premium connectors, every user who runs the flow needs a Power Automate Premium license.」— プレミアムコネクタを含むフローは実行者にもライセンスが必要。</a:t>
+            </a:r>
+          </a:p>
+        </p:txBody>
+      </p:sp>
+      <p:sp>
+        <p:nvSpPr>
+          <p:cNvPr id="18" name="Rectangle 17"/>
+          <p:cNvSpPr/>
+          <p:nvPr/>
+        </p:nvSpPr>
+        <p:spPr>
+          <a:xfrm>
+            <a:off x="502920" y="4764024"/>
+            <a:ext cx="11201400" cy="1627632"/>
+          </a:xfrm>
+          <a:prstGeom prst="rect">
+            <a:avLst/>
+          </a:prstGeom>
+          <a:solidFill>
+            <a:srgbClr val="F5F6F8"/>
+          </a:solidFill>
+          <a:ln w="9525">
+            <a:solidFill>
+              <a:srgbClr val="D9DCE1"/>
+            </a:solidFill>
+          </a:ln>
+          <a:effectLst/>
+        </p:spPr>
+        <p:style>
+          <a:lnRef idx="1">
+            <a:schemeClr val="accent1"/>
+          </a:lnRef>
+          <a:fillRef idx="3">
+            <a:schemeClr val="accent1"/>
+          </a:fillRef>
+          <a:effectRef idx="2">
+            <a:schemeClr val="accent1"/>
+          </a:effectRef>
+          <a:fontRef idx="minor">
+            <a:schemeClr val="lt1"/>
+          </a:fontRef>
+        </p:style>
+        <p:txBody>
+          <a:bodyPr rtlCol="0" anchor="ctr"/>
+          <a:lstStyle/>
+          <a:p>
+            <a:pPr algn="ctr"/>
+          </a:p>
+        </p:txBody>
+      </p:sp>
+      <p:sp>
+        <p:nvSpPr>
+          <p:cNvPr id="19" name="Rectangle 18"/>
+          <p:cNvSpPr/>
+          <p:nvPr/>
+        </p:nvSpPr>
+        <p:spPr>
+          <a:xfrm>
+            <a:off x="502920" y="4764024"/>
+            <a:ext cx="73152" cy="1627632"/>
+          </a:xfrm>
+          <a:prstGeom prst="rect">
+            <a:avLst/>
+          </a:prstGeom>
+          <a:solidFill>
+            <a:srgbClr val="2E5AAC"/>
+          </a:solidFill>
+          <a:ln>
+            <a:noFill/>
+          </a:ln>
+          <a:effectLst/>
+        </p:spPr>
+        <p:style>
+          <a:lnRef idx="1">
+            <a:schemeClr val="accent1"/>
+          </a:lnRef>
+          <a:fillRef idx="3">
+            <a:schemeClr val="accent1"/>
+          </a:fillRef>
+          <a:effectRef idx="2">
+            <a:schemeClr val="accent1"/>
+          </a:effectRef>
+          <a:fontRef idx="minor">
+            <a:schemeClr val="lt1"/>
+          </a:fontRef>
+        </p:style>
+        <p:txBody>
+          <a:bodyPr rtlCol="0" anchor="ctr"/>
+          <a:lstStyle/>
+          <a:p>
+            <a:pPr algn="ctr"/>
+          </a:p>
+        </p:txBody>
+      </p:sp>
+      <p:sp>
+        <p:nvSpPr>
+          <p:cNvPr id="20" name="TextBox 19"/>
+          <p:cNvSpPr txBox="1"/>
+          <p:nvPr/>
+        </p:nvSpPr>
+        <p:spPr>
+          <a:xfrm>
+            <a:off x="713232" y="4855464"/>
+            <a:ext cx="7863840" cy="292608"/>
+          </a:xfrm>
+          <a:prstGeom prst="rect">
+            <a:avLst/>
+          </a:prstGeom>
+          <a:noFill/>
+        </p:spPr>
+        <p:txBody>
+          <a:bodyPr wrap="square" anchor="t" lIns="0" rIns="0" tIns="0" bIns="0">
+            <a:spAutoFit/>
+          </a:bodyPr>
+          <a:lstStyle/>
+          <a:p>
+            <a:pPr algn="l">
+              <a:lnSpc>
+                <a:spcPct val="100000"/>
+              </a:lnSpc>
+            </a:pPr>
+            <a:r>
+              <a:rPr sz="1300" b="1" i="0">
+                <a:solidFill>
+                  <a:srgbClr val="1B2A4A"/>
+                </a:solidFill>
+                <a:latin typeface="Yu Gothic"/>
+              </a:rPr>
+              <a:t>Manage data policies</a:t>
+            </a:r>
+          </a:p>
+        </p:txBody>
+      </p:sp>
+      <p:sp>
+        <p:nvSpPr>
+          <p:cNvPr id="21" name="Rounded Rectangle 20"/>
+          <p:cNvSpPr/>
+          <p:nvPr/>
+        </p:nvSpPr>
+        <p:spPr>
+          <a:xfrm>
+            <a:off x="9875520" y="4855464"/>
+            <a:ext cx="1737360" cy="292608"/>
+          </a:xfrm>
+          <a:prstGeom prst="roundRect">
+            <a:avLst>
+              <a:gd name="adj" fmla="val 50000"/>
+            </a:avLst>
+          </a:prstGeom>
+          <a:solidFill>
+            <a:srgbClr val="E9EFF9"/>
+          </a:solidFill>
+          <a:ln>
+            <a:noFill/>
+          </a:ln>
+          <a:effectLst/>
+        </p:spPr>
+        <p:style>
+          <a:lnRef idx="1">
+            <a:schemeClr val="accent1"/>
+          </a:lnRef>
+          <a:fillRef idx="3">
+            <a:schemeClr val="accent1"/>
+          </a:fillRef>
+          <a:effectRef idx="2">
+            <a:schemeClr val="accent1"/>
+          </a:effectRef>
+          <a:fontRef idx="minor">
+            <a:schemeClr val="lt1"/>
+          </a:fontRef>
+        </p:style>
+        <p:txBody>
+          <a:bodyPr rtlCol="0" anchor="ctr" wrap="none" lIns="25400" rIns="25400" tIns="12700" bIns="12700"/>
+          <a:lstStyle/>
+          <a:p>
+            <a:pPr algn="ctr"/>
+            <a:r>
+              <a:rPr sz="1050" b="1">
+                <a:solidFill>
+                  <a:srgbClr val="2E5AAC"/>
+                </a:solidFill>
+                <a:latin typeface="Yu Gothic"/>
+              </a:rPr>
+              <a:t>P.8・P.9 対応</a:t>
+            </a:r>
+          </a:p>
+        </p:txBody>
+      </p:sp>
+      <p:sp>
+        <p:nvSpPr>
+          <p:cNvPr id="22" name="TextBox 21"/>
+          <p:cNvSpPr txBox="1"/>
+          <p:nvPr/>
+        </p:nvSpPr>
+        <p:spPr>
+          <a:xfrm>
+            <a:off x="713232" y="5166360"/>
+            <a:ext cx="10881360" cy="237744"/>
+          </a:xfrm>
+          <a:prstGeom prst="rect">
+            <a:avLst/>
+          </a:prstGeom>
+          <a:noFill/>
+        </p:spPr>
+        <p:txBody>
+          <a:bodyPr wrap="square" anchor="t" lIns="0" rIns="0" tIns="0" bIns="0">
+            <a:spAutoFit/>
+          </a:bodyPr>
+          <a:lstStyle/>
+          <a:p>
+            <a:pPr algn="l">
+              <a:lnSpc>
+                <a:spcPct val="100000"/>
+              </a:lnSpc>
+            </a:pPr>
+            <a:r>
+              <a:rPr sz="1000" b="0" i="0">
+                <a:solidFill>
+                  <a:srgbClr val="6E6E6E"/>
+                </a:solidFill>
+                <a:latin typeface="Yu Gothic"/>
+              </a:rPr>
+              <a:t>learn.microsoft.com/ja-jp/power-platform/admin/prevent-data-loss</a:t>
+            </a:r>
+          </a:p>
+        </p:txBody>
+      </p:sp>
+      <p:sp>
+        <p:nvSpPr>
+          <p:cNvPr id="23" name="TextBox 22"/>
+          <p:cNvSpPr txBox="1"/>
+          <p:nvPr/>
+        </p:nvSpPr>
+        <p:spPr>
+          <a:xfrm>
+            <a:off x="713232" y="5440680"/>
+            <a:ext cx="10881360" cy="859536"/>
+          </a:xfrm>
+          <a:prstGeom prst="rect">
+            <a:avLst/>
+          </a:prstGeom>
+          <a:noFill/>
+        </p:spPr>
+        <p:txBody>
+          <a:bodyPr wrap="square" anchor="t" lIns="0" rIns="0" tIns="0" bIns="0">
+            <a:spAutoFit/>
+          </a:bodyPr>
+          <a:lstStyle/>
+          <a:p>
+            <a:pPr algn="l">
+              <a:lnSpc>
+                <a:spcPct val="118000"/>
+              </a:lnSpc>
+            </a:pPr>
+            <a:r>
+              <a:rPr sz="1100" b="0" i="0">
+                <a:solidFill>
+                  <a:srgbClr val="262626"/>
+                </a:solidFill>
+                <a:latin typeface="Yu Gothic"/>
+              </a:rPr>
+              <a:t>要旨：データポリシーの作成・編集・削除には環境管理者またはPower Platform管理者の「権限」が必要（ライセンスではない）。コネクタは「ビジネス」「非ビジネス」「ブロック済み」に分類される。</a:t>
+            </a:r>
+          </a:p>
+        </p:txBody>
+      </p:sp>
+      <p:sp>
+        <p:nvSpPr>
+          <p:cNvPr id="24" name="TextBox 23"/>
+          <p:cNvSpPr txBox="1"/>
+          <p:nvPr/>
+        </p:nvSpPr>
+        <p:spPr>
+          <a:xfrm>
+            <a:off x="502920" y="6565392"/>
+            <a:ext cx="8229600" cy="274320"/>
+          </a:xfrm>
+          <a:prstGeom prst="rect">
+            <a:avLst/>
+          </a:prstGeom>
+          <a:noFill/>
+        </p:spPr>
+        <p:txBody>
+          <a:bodyPr wrap="square" anchor="t" lIns="0" rIns="0" tIns="0" bIns="0">
+            <a:spAutoFit/>
+          </a:bodyPr>
+          <a:lstStyle/>
+          <a:p>
+            <a:pPr algn="l">
+              <a:lnSpc>
+                <a:spcPct val="100000"/>
+              </a:lnSpc>
+            </a:pPr>
+            <a:r>
+              <a:rPr sz="900" b="0" i="0">
+                <a:solidFill>
+                  <a:srgbClr val="6E6E6E"/>
+                </a:solidFill>
+                <a:latin typeface="Yu Gothic"/>
+              </a:rPr>
+              <a:t>Power Platform Default環境 統治 調査報告 ｜ Confidential</a:t>
+            </a:r>
+          </a:p>
+        </p:txBody>
+      </p:sp>
+      <p:sp>
+        <p:nvSpPr>
+          <p:cNvPr id="25" name="TextBox 24"/>
+          <p:cNvSpPr txBox="1"/>
+          <p:nvPr/>
+        </p:nvSpPr>
+        <p:spPr>
+          <a:xfrm>
+            <a:off x="11338560" y="6565392"/>
+            <a:ext cx="548640" cy="274320"/>
+          </a:xfrm>
+          <a:prstGeom prst="rect">
+            <a:avLst/>
+          </a:prstGeom>
+          <a:noFill/>
+        </p:spPr>
+        <p:txBody>
+          <a:bodyPr wrap="square" anchor="t" lIns="0" rIns="0" tIns="0" bIns="0">
+            <a:spAutoFit/>
+          </a:bodyPr>
+          <a:lstStyle/>
+          <a:p>
             <a:pPr algn="r">
               <a:lnSpc>
                 <a:spcPct val="100000"/>
@@ -7266,7 +8875,2135 @@
                 </a:solidFill>
                 <a:latin typeface="Yu Gothic"/>
               </a:rPr>
-              <a:t>12</a:t>
+              <a:t>15</a:t>
+            </a:r>
+          </a:p>
+        </p:txBody>
+      </p:sp>
+    </p:spTree>
+  </p:cSld>
+  <p:clrMapOvr>
+    <a:masterClrMapping/>
+  </p:clrMapOvr>
+</p:sld>
+</file>
+
+<file path=ppt/slides/slide16.xml><?xml version="1.0" encoding="utf-8"?>
+<p:sld xmlns:a="http://schemas.openxmlformats.org/drawingml/2006/main" xmlns:p="http://schemas.openxmlformats.org/presentationml/2006/main" xmlns:r="http://schemas.openxmlformats.org/officeDocument/2006/relationships">
+  <p:cSld>
+    <p:bg>
+      <p:bgPr>
+        <a:solidFill>
+          <a:srgbClr val="FFFFFF"/>
+        </a:solidFill>
+        <a:effectLst/>
+      </p:bgPr>
+    </p:bg>
+    <p:spTree>
+      <p:nvGrpSpPr>
+        <p:cNvPr id="1" name=""/>
+        <p:cNvGrpSpPr/>
+        <p:nvPr/>
+      </p:nvGrpSpPr>
+      <p:grpSpPr/>
+      <p:sp>
+        <p:nvSpPr>
+          <p:cNvPr id="2" name="Rectangle 1"/>
+          <p:cNvSpPr/>
+          <p:nvPr/>
+        </p:nvSpPr>
+        <p:spPr>
+          <a:xfrm>
+            <a:off x="0" y="0"/>
+            <a:ext cx="12191695" cy="1051560"/>
+          </a:xfrm>
+          <a:prstGeom prst="rect">
+            <a:avLst/>
+          </a:prstGeom>
+          <a:solidFill>
+            <a:srgbClr val="1B2A4A"/>
+          </a:solidFill>
+          <a:ln>
+            <a:noFill/>
+          </a:ln>
+          <a:effectLst/>
+        </p:spPr>
+        <p:style>
+          <a:lnRef idx="1">
+            <a:schemeClr val="accent1"/>
+          </a:lnRef>
+          <a:fillRef idx="3">
+            <a:schemeClr val="accent1"/>
+          </a:fillRef>
+          <a:effectRef idx="2">
+            <a:schemeClr val="accent1"/>
+          </a:effectRef>
+          <a:fontRef idx="minor">
+            <a:schemeClr val="lt1"/>
+          </a:fontRef>
+        </p:style>
+        <p:txBody>
+          <a:bodyPr rtlCol="0" anchor="ctr"/>
+          <a:lstStyle/>
+          <a:p>
+            <a:pPr algn="ctr"/>
+          </a:p>
+        </p:txBody>
+      </p:sp>
+      <p:sp>
+        <p:nvSpPr>
+          <p:cNvPr id="3" name="Rectangle 2"/>
+          <p:cNvSpPr/>
+          <p:nvPr/>
+        </p:nvSpPr>
+        <p:spPr>
+          <a:xfrm>
+            <a:off x="0" y="1051560"/>
+            <a:ext cx="12191695" cy="38100"/>
+          </a:xfrm>
+          <a:prstGeom prst="rect">
+            <a:avLst/>
+          </a:prstGeom>
+          <a:solidFill>
+            <a:srgbClr val="2E5AAC"/>
+          </a:solidFill>
+          <a:ln>
+            <a:noFill/>
+          </a:ln>
+          <a:effectLst/>
+        </p:spPr>
+        <p:style>
+          <a:lnRef idx="1">
+            <a:schemeClr val="accent1"/>
+          </a:lnRef>
+          <a:fillRef idx="3">
+            <a:schemeClr val="accent1"/>
+          </a:fillRef>
+          <a:effectRef idx="2">
+            <a:schemeClr val="accent1"/>
+          </a:effectRef>
+          <a:fontRef idx="minor">
+            <a:schemeClr val="lt1"/>
+          </a:fontRef>
+        </p:style>
+        <p:txBody>
+          <a:bodyPr rtlCol="0" anchor="ctr"/>
+          <a:lstStyle/>
+          <a:p>
+            <a:pPr algn="ctr"/>
+          </a:p>
+        </p:txBody>
+      </p:sp>
+      <p:sp>
+        <p:nvSpPr>
+          <p:cNvPr id="4" name="TextBox 3"/>
+          <p:cNvSpPr txBox="1"/>
+          <p:nvPr/>
+        </p:nvSpPr>
+        <p:spPr>
+          <a:xfrm>
+            <a:off x="502920" y="118872"/>
+            <a:ext cx="9144000" cy="320040"/>
+          </a:xfrm>
+          <a:prstGeom prst="rect">
+            <a:avLst/>
+          </a:prstGeom>
+          <a:noFill/>
+        </p:spPr>
+        <p:txBody>
+          <a:bodyPr wrap="square" anchor="t" lIns="0" rIns="0" tIns="0" bIns="0">
+            <a:spAutoFit/>
+          </a:bodyPr>
+          <a:lstStyle/>
+          <a:p>
+            <a:pPr algn="l">
+              <a:lnSpc>
+                <a:spcPct val="100000"/>
+              </a:lnSpc>
+            </a:pPr>
+            <a:r>
+              <a:rPr sz="1200" b="1" i="0">
+                <a:solidFill>
+                  <a:srgbClr val="B9C7E6"/>
+                </a:solidFill>
+                <a:latin typeface="Yu Gothic"/>
+              </a:rPr>
+              <a:t>APPENDIX</a:t>
+            </a:r>
+          </a:p>
+        </p:txBody>
+      </p:sp>
+      <p:sp>
+        <p:nvSpPr>
+          <p:cNvPr id="5" name="TextBox 4"/>
+          <p:cNvSpPr txBox="1"/>
+          <p:nvPr/>
+        </p:nvSpPr>
+        <p:spPr>
+          <a:xfrm>
+            <a:off x="502920" y="411480"/>
+            <a:ext cx="10972800" cy="594360"/>
+          </a:xfrm>
+          <a:prstGeom prst="rect">
+            <a:avLst/>
+          </a:prstGeom>
+          <a:noFill/>
+        </p:spPr>
+        <p:txBody>
+          <a:bodyPr wrap="square" anchor="t" lIns="0" rIns="0" tIns="0" bIns="0">
+            <a:spAutoFit/>
+          </a:bodyPr>
+          <a:lstStyle/>
+          <a:p>
+            <a:pPr algn="l">
+              <a:lnSpc>
+                <a:spcPct val="100000"/>
+              </a:lnSpc>
+            </a:pPr>
+            <a:r>
+              <a:rPr sz="2300" b="1" i="0">
+                <a:solidFill>
+                  <a:srgbClr val="FFFFFF"/>
+                </a:solidFill>
+                <a:latin typeface="Yu Gothic"/>
+              </a:rPr>
+              <a:t>Appendix D：確認項目⑦の根拠（代替案・現実的な統制手段）</a:t>
+            </a:r>
+          </a:p>
+        </p:txBody>
+      </p:sp>
+      <p:sp>
+        <p:nvSpPr>
+          <p:cNvPr id="6" name="Rectangle 5"/>
+          <p:cNvSpPr/>
+          <p:nvPr/>
+        </p:nvSpPr>
+        <p:spPr>
+          <a:xfrm>
+            <a:off x="502920" y="1325880"/>
+            <a:ext cx="11201400" cy="1627632"/>
+          </a:xfrm>
+          <a:prstGeom prst="rect">
+            <a:avLst/>
+          </a:prstGeom>
+          <a:solidFill>
+            <a:srgbClr val="F5F6F8"/>
+          </a:solidFill>
+          <a:ln w="9525">
+            <a:solidFill>
+              <a:srgbClr val="D9DCE1"/>
+            </a:solidFill>
+          </a:ln>
+          <a:effectLst/>
+        </p:spPr>
+        <p:style>
+          <a:lnRef idx="1">
+            <a:schemeClr val="accent1"/>
+          </a:lnRef>
+          <a:fillRef idx="3">
+            <a:schemeClr val="accent1"/>
+          </a:fillRef>
+          <a:effectRef idx="2">
+            <a:schemeClr val="accent1"/>
+          </a:effectRef>
+          <a:fontRef idx="minor">
+            <a:schemeClr val="lt1"/>
+          </a:fontRef>
+        </p:style>
+        <p:txBody>
+          <a:bodyPr rtlCol="0" anchor="ctr"/>
+          <a:lstStyle/>
+          <a:p>
+            <a:pPr algn="ctr"/>
+          </a:p>
+        </p:txBody>
+      </p:sp>
+      <p:sp>
+        <p:nvSpPr>
+          <p:cNvPr id="7" name="Rectangle 6"/>
+          <p:cNvSpPr/>
+          <p:nvPr/>
+        </p:nvSpPr>
+        <p:spPr>
+          <a:xfrm>
+            <a:off x="502920" y="1325880"/>
+            <a:ext cx="73152" cy="1627632"/>
+          </a:xfrm>
+          <a:prstGeom prst="rect">
+            <a:avLst/>
+          </a:prstGeom>
+          <a:solidFill>
+            <a:srgbClr val="2E5AAC"/>
+          </a:solidFill>
+          <a:ln>
+            <a:noFill/>
+          </a:ln>
+          <a:effectLst/>
+        </p:spPr>
+        <p:style>
+          <a:lnRef idx="1">
+            <a:schemeClr val="accent1"/>
+          </a:lnRef>
+          <a:fillRef idx="3">
+            <a:schemeClr val="accent1"/>
+          </a:fillRef>
+          <a:effectRef idx="2">
+            <a:schemeClr val="accent1"/>
+          </a:effectRef>
+          <a:fontRef idx="minor">
+            <a:schemeClr val="lt1"/>
+          </a:fontRef>
+        </p:style>
+        <p:txBody>
+          <a:bodyPr rtlCol="0" anchor="ctr"/>
+          <a:lstStyle/>
+          <a:p>
+            <a:pPr algn="ctr"/>
+          </a:p>
+        </p:txBody>
+      </p:sp>
+      <p:sp>
+        <p:nvSpPr>
+          <p:cNvPr id="8" name="TextBox 7"/>
+          <p:cNvSpPr txBox="1"/>
+          <p:nvPr/>
+        </p:nvSpPr>
+        <p:spPr>
+          <a:xfrm>
+            <a:off x="713232" y="1417320"/>
+            <a:ext cx="7863840" cy="292608"/>
+          </a:xfrm>
+          <a:prstGeom prst="rect">
+            <a:avLst/>
+          </a:prstGeom>
+          <a:noFill/>
+        </p:spPr>
+        <p:txBody>
+          <a:bodyPr wrap="square" anchor="t" lIns="0" rIns="0" tIns="0" bIns="0">
+            <a:spAutoFit/>
+          </a:bodyPr>
+          <a:lstStyle/>
+          <a:p>
+            <a:pPr algn="l">
+              <a:lnSpc>
+                <a:spcPct val="100000"/>
+              </a:lnSpc>
+            </a:pPr>
+            <a:r>
+              <a:rPr sz="1300" b="1" i="0">
+                <a:solidFill>
+                  <a:srgbClr val="1B2A4A"/>
+                </a:solidFill>
+                <a:latin typeface="Yu Gothic"/>
+              </a:rPr>
+              <a:t>Environment routing</a:t>
+            </a:r>
+          </a:p>
+        </p:txBody>
+      </p:sp>
+      <p:sp>
+        <p:nvSpPr>
+          <p:cNvPr id="9" name="Rounded Rectangle 8"/>
+          <p:cNvSpPr/>
+          <p:nvPr/>
+        </p:nvSpPr>
+        <p:spPr>
+          <a:xfrm>
+            <a:off x="9875520" y="1417320"/>
+            <a:ext cx="1737360" cy="292608"/>
+          </a:xfrm>
+          <a:prstGeom prst="roundRect">
+            <a:avLst>
+              <a:gd name="adj" fmla="val 50000"/>
+            </a:avLst>
+          </a:prstGeom>
+          <a:solidFill>
+            <a:srgbClr val="E9EFF9"/>
+          </a:solidFill>
+          <a:ln>
+            <a:noFill/>
+          </a:ln>
+          <a:effectLst/>
+        </p:spPr>
+        <p:style>
+          <a:lnRef idx="1">
+            <a:schemeClr val="accent1"/>
+          </a:lnRef>
+          <a:fillRef idx="3">
+            <a:schemeClr val="accent1"/>
+          </a:fillRef>
+          <a:effectRef idx="2">
+            <a:schemeClr val="accent1"/>
+          </a:effectRef>
+          <a:fontRef idx="minor">
+            <a:schemeClr val="lt1"/>
+          </a:fontRef>
+        </p:style>
+        <p:txBody>
+          <a:bodyPr rtlCol="0" anchor="ctr" wrap="none" lIns="25400" rIns="25400" tIns="12700" bIns="12700"/>
+          <a:lstStyle/>
+          <a:p>
+            <a:pPr algn="ctr"/>
+            <a:r>
+              <a:rPr sz="1050" b="1">
+                <a:solidFill>
+                  <a:srgbClr val="2E5AAC"/>
+                </a:solidFill>
+                <a:latin typeface="Yu Gothic"/>
+              </a:rPr>
+              <a:t>P.10 対応</a:t>
+            </a:r>
+          </a:p>
+        </p:txBody>
+      </p:sp>
+      <p:sp>
+        <p:nvSpPr>
+          <p:cNvPr id="10" name="TextBox 9"/>
+          <p:cNvSpPr txBox="1"/>
+          <p:nvPr/>
+        </p:nvSpPr>
+        <p:spPr>
+          <a:xfrm>
+            <a:off x="713232" y="1728216"/>
+            <a:ext cx="10881360" cy="237744"/>
+          </a:xfrm>
+          <a:prstGeom prst="rect">
+            <a:avLst/>
+          </a:prstGeom>
+          <a:noFill/>
+        </p:spPr>
+        <p:txBody>
+          <a:bodyPr wrap="square" anchor="t" lIns="0" rIns="0" tIns="0" bIns="0">
+            <a:spAutoFit/>
+          </a:bodyPr>
+          <a:lstStyle/>
+          <a:p>
+            <a:pPr algn="l">
+              <a:lnSpc>
+                <a:spcPct val="100000"/>
+              </a:lnSpc>
+            </a:pPr>
+            <a:r>
+              <a:rPr sz="1000" b="0" i="0">
+                <a:solidFill>
+                  <a:srgbClr val="6E6E6E"/>
+                </a:solidFill>
+                <a:latin typeface="Yu Gothic"/>
+              </a:rPr>
+              <a:t>learn.microsoft.com/ja-jp/power-platform/admin/default-environment-routing</a:t>
+            </a:r>
+          </a:p>
+        </p:txBody>
+      </p:sp>
+      <p:sp>
+        <p:nvSpPr>
+          <p:cNvPr id="11" name="TextBox 10"/>
+          <p:cNvSpPr txBox="1"/>
+          <p:nvPr/>
+        </p:nvSpPr>
+        <p:spPr>
+          <a:xfrm>
+            <a:off x="713232" y="2002536"/>
+            <a:ext cx="10881360" cy="859536"/>
+          </a:xfrm>
+          <a:prstGeom prst="rect">
+            <a:avLst/>
+          </a:prstGeom>
+          <a:noFill/>
+        </p:spPr>
+        <p:txBody>
+          <a:bodyPr wrap="square" anchor="t" lIns="0" rIns="0" tIns="0" bIns="0">
+            <a:spAutoFit/>
+          </a:bodyPr>
+          <a:lstStyle/>
+          <a:p>
+            <a:pPr algn="l">
+              <a:lnSpc>
+                <a:spcPct val="118000"/>
+              </a:lnSpc>
+            </a:pPr>
+            <a:r>
+              <a:rPr sz="1100" b="0" i="0">
+                <a:solidFill>
+                  <a:srgbClr val="262626"/>
+                </a:solidFill>
+                <a:latin typeface="Yu Gothic"/>
+              </a:rPr>
+              <a:t>要旨：新規・既存のメーカーがCopilot Studio／Power Apps／Power Automateにアクセスした際、共有のDefault環境ではなく個人用開発環境へ自動的に誘導する、テナント管理者が有効化する機能。</a:t>
+            </a:r>
+          </a:p>
+        </p:txBody>
+      </p:sp>
+      <p:sp>
+        <p:nvSpPr>
+          <p:cNvPr id="12" name="Rectangle 11"/>
+          <p:cNvSpPr/>
+          <p:nvPr/>
+        </p:nvSpPr>
+        <p:spPr>
+          <a:xfrm>
+            <a:off x="502920" y="3044952"/>
+            <a:ext cx="11201400" cy="1627632"/>
+          </a:xfrm>
+          <a:prstGeom prst="rect">
+            <a:avLst/>
+          </a:prstGeom>
+          <a:solidFill>
+            <a:srgbClr val="F5F6F8"/>
+          </a:solidFill>
+          <a:ln w="9525">
+            <a:solidFill>
+              <a:srgbClr val="D9DCE1"/>
+            </a:solidFill>
+          </a:ln>
+          <a:effectLst/>
+        </p:spPr>
+        <p:style>
+          <a:lnRef idx="1">
+            <a:schemeClr val="accent1"/>
+          </a:lnRef>
+          <a:fillRef idx="3">
+            <a:schemeClr val="accent1"/>
+          </a:fillRef>
+          <a:effectRef idx="2">
+            <a:schemeClr val="accent1"/>
+          </a:effectRef>
+          <a:fontRef idx="minor">
+            <a:schemeClr val="lt1"/>
+          </a:fontRef>
+        </p:style>
+        <p:txBody>
+          <a:bodyPr rtlCol="0" anchor="ctr"/>
+          <a:lstStyle/>
+          <a:p>
+            <a:pPr algn="ctr"/>
+          </a:p>
+        </p:txBody>
+      </p:sp>
+      <p:sp>
+        <p:nvSpPr>
+          <p:cNvPr id="13" name="Rectangle 12"/>
+          <p:cNvSpPr/>
+          <p:nvPr/>
+        </p:nvSpPr>
+        <p:spPr>
+          <a:xfrm>
+            <a:off x="502920" y="3044952"/>
+            <a:ext cx="73152" cy="1627632"/>
+          </a:xfrm>
+          <a:prstGeom prst="rect">
+            <a:avLst/>
+          </a:prstGeom>
+          <a:solidFill>
+            <a:srgbClr val="2E5AAC"/>
+          </a:solidFill>
+          <a:ln>
+            <a:noFill/>
+          </a:ln>
+          <a:effectLst/>
+        </p:spPr>
+        <p:style>
+          <a:lnRef idx="1">
+            <a:schemeClr val="accent1"/>
+          </a:lnRef>
+          <a:fillRef idx="3">
+            <a:schemeClr val="accent1"/>
+          </a:fillRef>
+          <a:effectRef idx="2">
+            <a:schemeClr val="accent1"/>
+          </a:effectRef>
+          <a:fontRef idx="minor">
+            <a:schemeClr val="lt1"/>
+          </a:fontRef>
+        </p:style>
+        <p:txBody>
+          <a:bodyPr rtlCol="0" anchor="ctr"/>
+          <a:lstStyle/>
+          <a:p>
+            <a:pPr algn="ctr"/>
+          </a:p>
+        </p:txBody>
+      </p:sp>
+      <p:sp>
+        <p:nvSpPr>
+          <p:cNvPr id="14" name="TextBox 13"/>
+          <p:cNvSpPr txBox="1"/>
+          <p:nvPr/>
+        </p:nvSpPr>
+        <p:spPr>
+          <a:xfrm>
+            <a:off x="713232" y="3136392"/>
+            <a:ext cx="7863840" cy="292608"/>
+          </a:xfrm>
+          <a:prstGeom prst="rect">
+            <a:avLst/>
+          </a:prstGeom>
+          <a:noFill/>
+        </p:spPr>
+        <p:txBody>
+          <a:bodyPr wrap="square" anchor="t" lIns="0" rIns="0" tIns="0" bIns="0">
+            <a:spAutoFit/>
+          </a:bodyPr>
+          <a:lstStyle/>
+          <a:p>
+            <a:pPr algn="l">
+              <a:lnSpc>
+                <a:spcPct val="100000"/>
+              </a:lnSpc>
+            </a:pPr>
+            <a:r>
+              <a:rPr sz="1300" b="1" i="0">
+                <a:solidFill>
+                  <a:srgbClr val="1B2A4A"/>
+                </a:solidFill>
+                <a:latin typeface="Yu Gothic"/>
+              </a:rPr>
+              <a:t>Environment groups</a:t>
+            </a:r>
+          </a:p>
+        </p:txBody>
+      </p:sp>
+      <p:sp>
+        <p:nvSpPr>
+          <p:cNvPr id="15" name="Rounded Rectangle 14"/>
+          <p:cNvSpPr/>
+          <p:nvPr/>
+        </p:nvSpPr>
+        <p:spPr>
+          <a:xfrm>
+            <a:off x="9875520" y="3136392"/>
+            <a:ext cx="1737360" cy="292608"/>
+          </a:xfrm>
+          <a:prstGeom prst="roundRect">
+            <a:avLst>
+              <a:gd name="adj" fmla="val 50000"/>
+            </a:avLst>
+          </a:prstGeom>
+          <a:solidFill>
+            <a:srgbClr val="E9EFF9"/>
+          </a:solidFill>
+          <a:ln>
+            <a:noFill/>
+          </a:ln>
+          <a:effectLst/>
+        </p:spPr>
+        <p:style>
+          <a:lnRef idx="1">
+            <a:schemeClr val="accent1"/>
+          </a:lnRef>
+          <a:fillRef idx="3">
+            <a:schemeClr val="accent1"/>
+          </a:fillRef>
+          <a:effectRef idx="2">
+            <a:schemeClr val="accent1"/>
+          </a:effectRef>
+          <a:fontRef idx="minor">
+            <a:schemeClr val="lt1"/>
+          </a:fontRef>
+        </p:style>
+        <p:txBody>
+          <a:bodyPr rtlCol="0" anchor="ctr" wrap="none" lIns="25400" rIns="25400" tIns="12700" bIns="12700"/>
+          <a:lstStyle/>
+          <a:p>
+            <a:pPr algn="ctr"/>
+            <a:r>
+              <a:rPr sz="1050" b="1">
+                <a:solidFill>
+                  <a:srgbClr val="2E5AAC"/>
+                </a:solidFill>
+                <a:latin typeface="Yu Gothic"/>
+              </a:rPr>
+              <a:t>P.10 対応</a:t>
+            </a:r>
+          </a:p>
+        </p:txBody>
+      </p:sp>
+      <p:sp>
+        <p:nvSpPr>
+          <p:cNvPr id="16" name="TextBox 15"/>
+          <p:cNvSpPr txBox="1"/>
+          <p:nvPr/>
+        </p:nvSpPr>
+        <p:spPr>
+          <a:xfrm>
+            <a:off x="713232" y="3447288"/>
+            <a:ext cx="10881360" cy="237744"/>
+          </a:xfrm>
+          <a:prstGeom prst="rect">
+            <a:avLst/>
+          </a:prstGeom>
+          <a:noFill/>
+        </p:spPr>
+        <p:txBody>
+          <a:bodyPr wrap="square" anchor="t" lIns="0" rIns="0" tIns="0" bIns="0">
+            <a:spAutoFit/>
+          </a:bodyPr>
+          <a:lstStyle/>
+          <a:p>
+            <a:pPr algn="l">
+              <a:lnSpc>
+                <a:spcPct val="100000"/>
+              </a:lnSpc>
+            </a:pPr>
+            <a:r>
+              <a:rPr sz="1000" b="0" i="0">
+                <a:solidFill>
+                  <a:srgbClr val="6E6E6E"/>
+                </a:solidFill>
+                <a:latin typeface="Yu Gothic"/>
+              </a:rPr>
+              <a:t>learn.microsoft.com/ja-jp/power-platform/admin/environment-groups</a:t>
+            </a:r>
+          </a:p>
+        </p:txBody>
+      </p:sp>
+      <p:sp>
+        <p:nvSpPr>
+          <p:cNvPr id="17" name="TextBox 16"/>
+          <p:cNvSpPr txBox="1"/>
+          <p:nvPr/>
+        </p:nvSpPr>
+        <p:spPr>
+          <a:xfrm>
+            <a:off x="713232" y="3721608"/>
+            <a:ext cx="10881360" cy="859536"/>
+          </a:xfrm>
+          <a:prstGeom prst="rect">
+            <a:avLst/>
+          </a:prstGeom>
+          <a:noFill/>
+        </p:spPr>
+        <p:txBody>
+          <a:bodyPr wrap="square" anchor="t" lIns="0" rIns="0" tIns="0" bIns="0">
+            <a:spAutoFit/>
+          </a:bodyPr>
+          <a:lstStyle/>
+          <a:p>
+            <a:pPr algn="l">
+              <a:lnSpc>
+                <a:spcPct val="118000"/>
+              </a:lnSpc>
+            </a:pPr>
+            <a:r>
+              <a:rPr sz="1100" b="0" i="0">
+                <a:solidFill>
+                  <a:srgbClr val="262626"/>
+                </a:solidFill>
+                <a:latin typeface="Yu Gothic"/>
+              </a:rPr>
+              <a:t>原文：「When a rule is published at the environment group level, it's enforced across every environment within that group.」— 共有制限やAI機能有効化等のルールを複数環境へ一括適用できる。</a:t>
+            </a:r>
+          </a:p>
+        </p:txBody>
+      </p:sp>
+      <p:sp>
+        <p:nvSpPr>
+          <p:cNvPr id="18" name="Rectangle 17"/>
+          <p:cNvSpPr/>
+          <p:nvPr/>
+        </p:nvSpPr>
+        <p:spPr>
+          <a:xfrm>
+            <a:off x="502920" y="4764024"/>
+            <a:ext cx="11201400" cy="1627632"/>
+          </a:xfrm>
+          <a:prstGeom prst="rect">
+            <a:avLst/>
+          </a:prstGeom>
+          <a:solidFill>
+            <a:srgbClr val="F5F6F8"/>
+          </a:solidFill>
+          <a:ln w="9525">
+            <a:solidFill>
+              <a:srgbClr val="D9DCE1"/>
+            </a:solidFill>
+          </a:ln>
+          <a:effectLst/>
+        </p:spPr>
+        <p:style>
+          <a:lnRef idx="1">
+            <a:schemeClr val="accent1"/>
+          </a:lnRef>
+          <a:fillRef idx="3">
+            <a:schemeClr val="accent1"/>
+          </a:fillRef>
+          <a:effectRef idx="2">
+            <a:schemeClr val="accent1"/>
+          </a:effectRef>
+          <a:fontRef idx="minor">
+            <a:schemeClr val="lt1"/>
+          </a:fontRef>
+        </p:style>
+        <p:txBody>
+          <a:bodyPr rtlCol="0" anchor="ctr"/>
+          <a:lstStyle/>
+          <a:p>
+            <a:pPr algn="ctr"/>
+          </a:p>
+        </p:txBody>
+      </p:sp>
+      <p:sp>
+        <p:nvSpPr>
+          <p:cNvPr id="19" name="Rectangle 18"/>
+          <p:cNvSpPr/>
+          <p:nvPr/>
+        </p:nvSpPr>
+        <p:spPr>
+          <a:xfrm>
+            <a:off x="502920" y="4764024"/>
+            <a:ext cx="73152" cy="1627632"/>
+          </a:xfrm>
+          <a:prstGeom prst="rect">
+            <a:avLst/>
+          </a:prstGeom>
+          <a:solidFill>
+            <a:srgbClr val="2E5AAC"/>
+          </a:solidFill>
+          <a:ln>
+            <a:noFill/>
+          </a:ln>
+          <a:effectLst/>
+        </p:spPr>
+        <p:style>
+          <a:lnRef idx="1">
+            <a:schemeClr val="accent1"/>
+          </a:lnRef>
+          <a:fillRef idx="3">
+            <a:schemeClr val="accent1"/>
+          </a:fillRef>
+          <a:effectRef idx="2">
+            <a:schemeClr val="accent1"/>
+          </a:effectRef>
+          <a:fontRef idx="minor">
+            <a:schemeClr val="lt1"/>
+          </a:fontRef>
+        </p:style>
+        <p:txBody>
+          <a:bodyPr rtlCol="0" anchor="ctr"/>
+          <a:lstStyle/>
+          <a:p>
+            <a:pPr algn="ctr"/>
+          </a:p>
+        </p:txBody>
+      </p:sp>
+      <p:sp>
+        <p:nvSpPr>
+          <p:cNvPr id="20" name="TextBox 19"/>
+          <p:cNvSpPr txBox="1"/>
+          <p:nvPr/>
+        </p:nvSpPr>
+        <p:spPr>
+          <a:xfrm>
+            <a:off x="713232" y="4855464"/>
+            <a:ext cx="7863840" cy="292608"/>
+          </a:xfrm>
+          <a:prstGeom prst="rect">
+            <a:avLst/>
+          </a:prstGeom>
+          <a:noFill/>
+        </p:spPr>
+        <p:txBody>
+          <a:bodyPr wrap="square" anchor="t" lIns="0" rIns="0" tIns="0" bIns="0">
+            <a:spAutoFit/>
+          </a:bodyPr>
+          <a:lstStyle/>
+          <a:p>
+            <a:pPr algn="l">
+              <a:lnSpc>
+                <a:spcPct val="100000"/>
+              </a:lnSpc>
+            </a:pPr>
+            <a:r>
+              <a:rPr sz="1300" b="1" i="0">
+                <a:solidFill>
+                  <a:srgbClr val="1B2A4A"/>
+                </a:solidFill>
+                <a:latin typeface="Yu Gothic"/>
+              </a:rPr>
+              <a:t>Power Platform environments overview</a:t>
+            </a:r>
+          </a:p>
+        </p:txBody>
+      </p:sp>
+      <p:sp>
+        <p:nvSpPr>
+          <p:cNvPr id="21" name="Rounded Rectangle 20"/>
+          <p:cNvSpPr/>
+          <p:nvPr/>
+        </p:nvSpPr>
+        <p:spPr>
+          <a:xfrm>
+            <a:off x="9875520" y="4855464"/>
+            <a:ext cx="1737360" cy="292608"/>
+          </a:xfrm>
+          <a:prstGeom prst="roundRect">
+            <a:avLst>
+              <a:gd name="adj" fmla="val 50000"/>
+            </a:avLst>
+          </a:prstGeom>
+          <a:solidFill>
+            <a:srgbClr val="E9EFF9"/>
+          </a:solidFill>
+          <a:ln>
+            <a:noFill/>
+          </a:ln>
+          <a:effectLst/>
+        </p:spPr>
+        <p:style>
+          <a:lnRef idx="1">
+            <a:schemeClr val="accent1"/>
+          </a:lnRef>
+          <a:fillRef idx="3">
+            <a:schemeClr val="accent1"/>
+          </a:fillRef>
+          <a:effectRef idx="2">
+            <a:schemeClr val="accent1"/>
+          </a:effectRef>
+          <a:fontRef idx="minor">
+            <a:schemeClr val="lt1"/>
+          </a:fontRef>
+        </p:style>
+        <p:txBody>
+          <a:bodyPr rtlCol="0" anchor="ctr" wrap="none" lIns="25400" rIns="25400" tIns="12700" bIns="12700"/>
+          <a:lstStyle/>
+          <a:p>
+            <a:pPr algn="ctr"/>
+            <a:r>
+              <a:rPr sz="1050" b="1">
+                <a:solidFill>
+                  <a:srgbClr val="2E5AAC"/>
+                </a:solidFill>
+                <a:latin typeface="Yu Gothic"/>
+              </a:rPr>
+              <a:t>P.2 対応</a:t>
+            </a:r>
+          </a:p>
+        </p:txBody>
+      </p:sp>
+      <p:sp>
+        <p:nvSpPr>
+          <p:cNvPr id="22" name="TextBox 21"/>
+          <p:cNvSpPr txBox="1"/>
+          <p:nvPr/>
+        </p:nvSpPr>
+        <p:spPr>
+          <a:xfrm>
+            <a:off x="713232" y="5166360"/>
+            <a:ext cx="10881360" cy="237744"/>
+          </a:xfrm>
+          <a:prstGeom prst="rect">
+            <a:avLst/>
+          </a:prstGeom>
+          <a:noFill/>
+        </p:spPr>
+        <p:txBody>
+          <a:bodyPr wrap="square" anchor="t" lIns="0" rIns="0" tIns="0" bIns="0">
+            <a:spAutoFit/>
+          </a:bodyPr>
+          <a:lstStyle/>
+          <a:p>
+            <a:pPr algn="l">
+              <a:lnSpc>
+                <a:spcPct val="100000"/>
+              </a:lnSpc>
+            </a:pPr>
+            <a:r>
+              <a:rPr sz="1000" b="0" i="0">
+                <a:solidFill>
+                  <a:srgbClr val="6E6E6E"/>
+                </a:solidFill>
+                <a:latin typeface="Yu Gothic"/>
+              </a:rPr>
+              <a:t>learn.microsoft.com/ja-jp/power-platform/admin/environments-overview</a:t>
+            </a:r>
+          </a:p>
+        </p:txBody>
+      </p:sp>
+      <p:sp>
+        <p:nvSpPr>
+          <p:cNvPr id="23" name="TextBox 22"/>
+          <p:cNvSpPr txBox="1"/>
+          <p:nvPr/>
+        </p:nvSpPr>
+        <p:spPr>
+          <a:xfrm>
+            <a:off x="713232" y="5440680"/>
+            <a:ext cx="10881360" cy="859536"/>
+          </a:xfrm>
+          <a:prstGeom prst="rect">
+            <a:avLst/>
+          </a:prstGeom>
+          <a:noFill/>
+        </p:spPr>
+        <p:txBody>
+          <a:bodyPr wrap="square" anchor="t" lIns="0" rIns="0" tIns="0" bIns="0">
+            <a:spAutoFit/>
+          </a:bodyPr>
+          <a:lstStyle/>
+          <a:p>
+            <a:pPr algn="l">
+              <a:lnSpc>
+                <a:spcPct val="118000"/>
+              </a:lnSpc>
+            </a:pPr>
+            <a:r>
+              <a:rPr sz="1100" b="0" i="0">
+                <a:solidFill>
+                  <a:srgbClr val="262626"/>
+                </a:solidFill>
+                <a:latin typeface="Yu Gothic"/>
+              </a:rPr>
+              <a:t>原文：「A single default environment is automatically created by Power Apps for each tenant and shared by all users in that tenant.」「Whenever a new user signs up for Power Apps, they're automatically added to the Maker role of the default environment.」</a:t>
+            </a:r>
+          </a:p>
+        </p:txBody>
+      </p:sp>
+      <p:sp>
+        <p:nvSpPr>
+          <p:cNvPr id="24" name="TextBox 23"/>
+          <p:cNvSpPr txBox="1"/>
+          <p:nvPr/>
+        </p:nvSpPr>
+        <p:spPr>
+          <a:xfrm>
+            <a:off x="502920" y="6565392"/>
+            <a:ext cx="8229600" cy="274320"/>
+          </a:xfrm>
+          <a:prstGeom prst="rect">
+            <a:avLst/>
+          </a:prstGeom>
+          <a:noFill/>
+        </p:spPr>
+        <p:txBody>
+          <a:bodyPr wrap="square" anchor="t" lIns="0" rIns="0" tIns="0" bIns="0">
+            <a:spAutoFit/>
+          </a:bodyPr>
+          <a:lstStyle/>
+          <a:p>
+            <a:pPr algn="l">
+              <a:lnSpc>
+                <a:spcPct val="100000"/>
+              </a:lnSpc>
+            </a:pPr>
+            <a:r>
+              <a:rPr sz="900" b="0" i="0">
+                <a:solidFill>
+                  <a:srgbClr val="6E6E6E"/>
+                </a:solidFill>
+                <a:latin typeface="Yu Gothic"/>
+              </a:rPr>
+              <a:t>Power Platform Default環境 統治 調査報告 ｜ Confidential</a:t>
+            </a:r>
+          </a:p>
+        </p:txBody>
+      </p:sp>
+      <p:sp>
+        <p:nvSpPr>
+          <p:cNvPr id="25" name="TextBox 24"/>
+          <p:cNvSpPr txBox="1"/>
+          <p:nvPr/>
+        </p:nvSpPr>
+        <p:spPr>
+          <a:xfrm>
+            <a:off x="11338560" y="6565392"/>
+            <a:ext cx="548640" cy="274320"/>
+          </a:xfrm>
+          <a:prstGeom prst="rect">
+            <a:avLst/>
+          </a:prstGeom>
+          <a:noFill/>
+        </p:spPr>
+        <p:txBody>
+          <a:bodyPr wrap="square" anchor="t" lIns="0" rIns="0" tIns="0" bIns="0">
+            <a:spAutoFit/>
+          </a:bodyPr>
+          <a:lstStyle/>
+          <a:p>
+            <a:pPr algn="r">
+              <a:lnSpc>
+                <a:spcPct val="100000"/>
+              </a:lnSpc>
+            </a:pPr>
+            <a:r>
+              <a:rPr sz="900" b="0" i="0">
+                <a:solidFill>
+                  <a:srgbClr val="6E6E6E"/>
+                </a:solidFill>
+                <a:latin typeface="Yu Gothic"/>
+              </a:rPr>
+              <a:t>16</a:t>
+            </a:r>
+          </a:p>
+        </p:txBody>
+      </p:sp>
+    </p:spTree>
+  </p:cSld>
+  <p:clrMapOvr>
+    <a:masterClrMapping/>
+  </p:clrMapOvr>
+</p:sld>
+</file>
+
+<file path=ppt/slides/slide17.xml><?xml version="1.0" encoding="utf-8"?>
+<p:sld xmlns:a="http://schemas.openxmlformats.org/drawingml/2006/main" xmlns:p="http://schemas.openxmlformats.org/presentationml/2006/main" xmlns:r="http://schemas.openxmlformats.org/officeDocument/2006/relationships">
+  <p:cSld>
+    <p:bg>
+      <p:bgPr>
+        <a:solidFill>
+          <a:srgbClr val="FFFFFF"/>
+        </a:solidFill>
+        <a:effectLst/>
+      </p:bgPr>
+    </p:bg>
+    <p:spTree>
+      <p:nvGrpSpPr>
+        <p:cNvPr id="1" name=""/>
+        <p:cNvGrpSpPr/>
+        <p:nvPr/>
+      </p:nvGrpSpPr>
+      <p:grpSpPr/>
+      <p:sp>
+        <p:nvSpPr>
+          <p:cNvPr id="2" name="Rectangle 1"/>
+          <p:cNvSpPr/>
+          <p:nvPr/>
+        </p:nvSpPr>
+        <p:spPr>
+          <a:xfrm>
+            <a:off x="0" y="0"/>
+            <a:ext cx="12191695" cy="1051560"/>
+          </a:xfrm>
+          <a:prstGeom prst="rect">
+            <a:avLst/>
+          </a:prstGeom>
+          <a:solidFill>
+            <a:srgbClr val="1B2A4A"/>
+          </a:solidFill>
+          <a:ln>
+            <a:noFill/>
+          </a:ln>
+          <a:effectLst/>
+        </p:spPr>
+        <p:style>
+          <a:lnRef idx="1">
+            <a:schemeClr val="accent1"/>
+          </a:lnRef>
+          <a:fillRef idx="3">
+            <a:schemeClr val="accent1"/>
+          </a:fillRef>
+          <a:effectRef idx="2">
+            <a:schemeClr val="accent1"/>
+          </a:effectRef>
+          <a:fontRef idx="minor">
+            <a:schemeClr val="lt1"/>
+          </a:fontRef>
+        </p:style>
+        <p:txBody>
+          <a:bodyPr rtlCol="0" anchor="ctr"/>
+          <a:lstStyle/>
+          <a:p>
+            <a:pPr algn="ctr"/>
+          </a:p>
+        </p:txBody>
+      </p:sp>
+      <p:sp>
+        <p:nvSpPr>
+          <p:cNvPr id="3" name="Rectangle 2"/>
+          <p:cNvSpPr/>
+          <p:nvPr/>
+        </p:nvSpPr>
+        <p:spPr>
+          <a:xfrm>
+            <a:off x="0" y="1051560"/>
+            <a:ext cx="12191695" cy="38100"/>
+          </a:xfrm>
+          <a:prstGeom prst="rect">
+            <a:avLst/>
+          </a:prstGeom>
+          <a:solidFill>
+            <a:srgbClr val="2E5AAC"/>
+          </a:solidFill>
+          <a:ln>
+            <a:noFill/>
+          </a:ln>
+          <a:effectLst/>
+        </p:spPr>
+        <p:style>
+          <a:lnRef idx="1">
+            <a:schemeClr val="accent1"/>
+          </a:lnRef>
+          <a:fillRef idx="3">
+            <a:schemeClr val="accent1"/>
+          </a:fillRef>
+          <a:effectRef idx="2">
+            <a:schemeClr val="accent1"/>
+          </a:effectRef>
+          <a:fontRef idx="minor">
+            <a:schemeClr val="lt1"/>
+          </a:fontRef>
+        </p:style>
+        <p:txBody>
+          <a:bodyPr rtlCol="0" anchor="ctr"/>
+          <a:lstStyle/>
+          <a:p>
+            <a:pPr algn="ctr"/>
+          </a:p>
+        </p:txBody>
+      </p:sp>
+      <p:sp>
+        <p:nvSpPr>
+          <p:cNvPr id="4" name="TextBox 3"/>
+          <p:cNvSpPr txBox="1"/>
+          <p:nvPr/>
+        </p:nvSpPr>
+        <p:spPr>
+          <a:xfrm>
+            <a:off x="502920" y="118872"/>
+            <a:ext cx="9144000" cy="320040"/>
+          </a:xfrm>
+          <a:prstGeom prst="rect">
+            <a:avLst/>
+          </a:prstGeom>
+          <a:noFill/>
+        </p:spPr>
+        <p:txBody>
+          <a:bodyPr wrap="square" anchor="t" lIns="0" rIns="0" tIns="0" bIns="0">
+            <a:spAutoFit/>
+          </a:bodyPr>
+          <a:lstStyle/>
+          <a:p>
+            <a:pPr algn="l">
+              <a:lnSpc>
+                <a:spcPct val="100000"/>
+              </a:lnSpc>
+            </a:pPr>
+            <a:r>
+              <a:rPr sz="1200" b="1" i="0">
+                <a:solidFill>
+                  <a:srgbClr val="B9C7E6"/>
+                </a:solidFill>
+                <a:latin typeface="Yu Gothic"/>
+              </a:rPr>
+              <a:t>APPENDIX</a:t>
+            </a:r>
+          </a:p>
+        </p:txBody>
+      </p:sp>
+      <p:sp>
+        <p:nvSpPr>
+          <p:cNvPr id="5" name="TextBox 4"/>
+          <p:cNvSpPr txBox="1"/>
+          <p:nvPr/>
+        </p:nvSpPr>
+        <p:spPr>
+          <a:xfrm>
+            <a:off x="502920" y="411480"/>
+            <a:ext cx="10972800" cy="594360"/>
+          </a:xfrm>
+          <a:prstGeom prst="rect">
+            <a:avLst/>
+          </a:prstGeom>
+          <a:noFill/>
+        </p:spPr>
+        <p:txBody>
+          <a:bodyPr wrap="square" anchor="t" lIns="0" rIns="0" tIns="0" bIns="0">
+            <a:spAutoFit/>
+          </a:bodyPr>
+          <a:lstStyle/>
+          <a:p>
+            <a:pPr algn="l">
+              <a:lnSpc>
+                <a:spcPct val="100000"/>
+              </a:lnSpc>
+            </a:pPr>
+            <a:r>
+              <a:rPr sz="2300" b="1" i="0">
+                <a:solidFill>
+                  <a:srgbClr val="FFFFFF"/>
+                </a:solidFill>
+                <a:latin typeface="Yu Gothic"/>
+              </a:rPr>
+              <a:t>Appendix E：背景（環境作成者ロールのリスク）の根拠</a:t>
+            </a:r>
+          </a:p>
+        </p:txBody>
+      </p:sp>
+      <p:sp>
+        <p:nvSpPr>
+          <p:cNvPr id="6" name="Rectangle 5"/>
+          <p:cNvSpPr/>
+          <p:nvPr/>
+        </p:nvSpPr>
+        <p:spPr>
+          <a:xfrm>
+            <a:off x="502920" y="1325880"/>
+            <a:ext cx="11201400" cy="1627632"/>
+          </a:xfrm>
+          <a:prstGeom prst="rect">
+            <a:avLst/>
+          </a:prstGeom>
+          <a:solidFill>
+            <a:srgbClr val="F5F6F8"/>
+          </a:solidFill>
+          <a:ln w="9525">
+            <a:solidFill>
+              <a:srgbClr val="D9DCE1"/>
+            </a:solidFill>
+          </a:ln>
+          <a:effectLst/>
+        </p:spPr>
+        <p:style>
+          <a:lnRef idx="1">
+            <a:schemeClr val="accent1"/>
+          </a:lnRef>
+          <a:fillRef idx="3">
+            <a:schemeClr val="accent1"/>
+          </a:fillRef>
+          <a:effectRef idx="2">
+            <a:schemeClr val="accent1"/>
+          </a:effectRef>
+          <a:fontRef idx="minor">
+            <a:schemeClr val="lt1"/>
+          </a:fontRef>
+        </p:style>
+        <p:txBody>
+          <a:bodyPr rtlCol="0" anchor="ctr"/>
+          <a:lstStyle/>
+          <a:p>
+            <a:pPr algn="ctr"/>
+          </a:p>
+        </p:txBody>
+      </p:sp>
+      <p:sp>
+        <p:nvSpPr>
+          <p:cNvPr id="7" name="Rectangle 6"/>
+          <p:cNvSpPr/>
+          <p:nvPr/>
+        </p:nvSpPr>
+        <p:spPr>
+          <a:xfrm>
+            <a:off x="502920" y="1325880"/>
+            <a:ext cx="73152" cy="1627632"/>
+          </a:xfrm>
+          <a:prstGeom prst="rect">
+            <a:avLst/>
+          </a:prstGeom>
+          <a:solidFill>
+            <a:srgbClr val="2E5AAC"/>
+          </a:solidFill>
+          <a:ln>
+            <a:noFill/>
+          </a:ln>
+          <a:effectLst/>
+        </p:spPr>
+        <p:style>
+          <a:lnRef idx="1">
+            <a:schemeClr val="accent1"/>
+          </a:lnRef>
+          <a:fillRef idx="3">
+            <a:schemeClr val="accent1"/>
+          </a:fillRef>
+          <a:effectRef idx="2">
+            <a:schemeClr val="accent1"/>
+          </a:effectRef>
+          <a:fontRef idx="minor">
+            <a:schemeClr val="lt1"/>
+          </a:fontRef>
+        </p:style>
+        <p:txBody>
+          <a:bodyPr rtlCol="0" anchor="ctr"/>
+          <a:lstStyle/>
+          <a:p>
+            <a:pPr algn="ctr"/>
+          </a:p>
+        </p:txBody>
+      </p:sp>
+      <p:sp>
+        <p:nvSpPr>
+          <p:cNvPr id="8" name="TextBox 7"/>
+          <p:cNvSpPr txBox="1"/>
+          <p:nvPr/>
+        </p:nvSpPr>
+        <p:spPr>
+          <a:xfrm>
+            <a:off x="713232" y="1417320"/>
+            <a:ext cx="7863840" cy="292608"/>
+          </a:xfrm>
+          <a:prstGeom prst="rect">
+            <a:avLst/>
+          </a:prstGeom>
+          <a:noFill/>
+        </p:spPr>
+        <p:txBody>
+          <a:bodyPr wrap="square" anchor="t" lIns="0" rIns="0" tIns="0" bIns="0">
+            <a:spAutoFit/>
+          </a:bodyPr>
+          <a:lstStyle/>
+          <a:p>
+            <a:pPr algn="l">
+              <a:lnSpc>
+                <a:spcPct val="100000"/>
+              </a:lnSpc>
+            </a:pPr>
+            <a:r>
+              <a:rPr sz="1300" b="1" i="0">
+                <a:solidFill>
+                  <a:srgbClr val="1B2A4A"/>
+                </a:solidFill>
+                <a:latin typeface="Yu Gothic"/>
+              </a:rPr>
+              <a:t>Role-based security roles for Dataverse</a:t>
+            </a:r>
+          </a:p>
+        </p:txBody>
+      </p:sp>
+      <p:sp>
+        <p:nvSpPr>
+          <p:cNvPr id="9" name="Rounded Rectangle 8"/>
+          <p:cNvSpPr/>
+          <p:nvPr/>
+        </p:nvSpPr>
+        <p:spPr>
+          <a:xfrm>
+            <a:off x="9875520" y="1417320"/>
+            <a:ext cx="1737360" cy="292608"/>
+          </a:xfrm>
+          <a:prstGeom prst="roundRect">
+            <a:avLst>
+              <a:gd name="adj" fmla="val 50000"/>
+            </a:avLst>
+          </a:prstGeom>
+          <a:solidFill>
+            <a:srgbClr val="E9EFF9"/>
+          </a:solidFill>
+          <a:ln>
+            <a:noFill/>
+          </a:ln>
+          <a:effectLst/>
+        </p:spPr>
+        <p:style>
+          <a:lnRef idx="1">
+            <a:schemeClr val="accent1"/>
+          </a:lnRef>
+          <a:fillRef idx="3">
+            <a:schemeClr val="accent1"/>
+          </a:fillRef>
+          <a:effectRef idx="2">
+            <a:schemeClr val="accent1"/>
+          </a:effectRef>
+          <a:fontRef idx="minor">
+            <a:schemeClr val="lt1"/>
+          </a:fontRef>
+        </p:style>
+        <p:txBody>
+          <a:bodyPr rtlCol="0" anchor="ctr" wrap="none" lIns="25400" rIns="25400" tIns="12700" bIns="12700"/>
+          <a:lstStyle/>
+          <a:p>
+            <a:pPr algn="ctr"/>
+            <a:r>
+              <a:rPr sz="1050" b="1">
+                <a:solidFill>
+                  <a:srgbClr val="2E5AAC"/>
+                </a:solidFill>
+                <a:latin typeface="Yu Gothic"/>
+              </a:rPr>
+              <a:t>P.2 対応</a:t>
+            </a:r>
+          </a:p>
+        </p:txBody>
+      </p:sp>
+      <p:sp>
+        <p:nvSpPr>
+          <p:cNvPr id="10" name="TextBox 9"/>
+          <p:cNvSpPr txBox="1"/>
+          <p:nvPr/>
+        </p:nvSpPr>
+        <p:spPr>
+          <a:xfrm>
+            <a:off x="713232" y="1728216"/>
+            <a:ext cx="10881360" cy="237744"/>
+          </a:xfrm>
+          <a:prstGeom prst="rect">
+            <a:avLst/>
+          </a:prstGeom>
+          <a:noFill/>
+        </p:spPr>
+        <p:txBody>
+          <a:bodyPr wrap="square" anchor="t" lIns="0" rIns="0" tIns="0" bIns="0">
+            <a:spAutoFit/>
+          </a:bodyPr>
+          <a:lstStyle/>
+          <a:p>
+            <a:pPr algn="l">
+              <a:lnSpc>
+                <a:spcPct val="100000"/>
+              </a:lnSpc>
+            </a:pPr>
+            <a:r>
+              <a:rPr sz="1000" b="0" i="0">
+                <a:solidFill>
+                  <a:srgbClr val="6E6E6E"/>
+                </a:solidFill>
+                <a:latin typeface="Yu Gothic"/>
+              </a:rPr>
+              <a:t>learn.microsoft.com/ja-jp/power-platform/admin/database-security</a:t>
+            </a:r>
+          </a:p>
+        </p:txBody>
+      </p:sp>
+      <p:sp>
+        <p:nvSpPr>
+          <p:cNvPr id="11" name="TextBox 10"/>
+          <p:cNvSpPr txBox="1"/>
+          <p:nvPr/>
+        </p:nvSpPr>
+        <p:spPr>
+          <a:xfrm>
+            <a:off x="713232" y="2002536"/>
+            <a:ext cx="10881360" cy="859536"/>
+          </a:xfrm>
+          <a:prstGeom prst="rect">
+            <a:avLst/>
+          </a:prstGeom>
+          <a:noFill/>
+        </p:spPr>
+        <p:txBody>
+          <a:bodyPr wrap="square" anchor="t" lIns="0" rIns="0" tIns="0" bIns="0">
+            <a:spAutoFit/>
+          </a:bodyPr>
+          <a:lstStyle/>
+          <a:p>
+            <a:pPr algn="l">
+              <a:lnSpc>
+                <a:spcPct val="118000"/>
+              </a:lnSpc>
+            </a:pPr>
+            <a:r>
+              <a:rPr sz="1100" b="0" i="0">
+                <a:solidFill>
+                  <a:srgbClr val="262626"/>
+                </a:solidFill>
+                <a:latin typeface="Yu Gothic"/>
+              </a:rPr>
+              <a:t>原文：「Can create new resources associated with an environment, including apps, connections, custom APIs, and flows using Microsoft Power Automate. However, this role doesn't have privileges to access data in an environment.」— 環境作成者ロールの権限範囲。</a:t>
+            </a:r>
+          </a:p>
+        </p:txBody>
+      </p:sp>
+      <p:sp>
+        <p:nvSpPr>
+          <p:cNvPr id="12" name="Rectangle 11"/>
+          <p:cNvSpPr/>
+          <p:nvPr/>
+        </p:nvSpPr>
+        <p:spPr>
+          <a:xfrm>
+            <a:off x="502920" y="3044952"/>
+            <a:ext cx="11201400" cy="1627632"/>
+          </a:xfrm>
+          <a:prstGeom prst="rect">
+            <a:avLst/>
+          </a:prstGeom>
+          <a:solidFill>
+            <a:srgbClr val="F5F6F8"/>
+          </a:solidFill>
+          <a:ln w="9525">
+            <a:solidFill>
+              <a:srgbClr val="D9DCE1"/>
+            </a:solidFill>
+          </a:ln>
+          <a:effectLst/>
+        </p:spPr>
+        <p:style>
+          <a:lnRef idx="1">
+            <a:schemeClr val="accent1"/>
+          </a:lnRef>
+          <a:fillRef idx="3">
+            <a:schemeClr val="accent1"/>
+          </a:fillRef>
+          <a:effectRef idx="2">
+            <a:schemeClr val="accent1"/>
+          </a:effectRef>
+          <a:fontRef idx="minor">
+            <a:schemeClr val="lt1"/>
+          </a:fontRef>
+        </p:style>
+        <p:txBody>
+          <a:bodyPr rtlCol="0" anchor="ctr"/>
+          <a:lstStyle/>
+          <a:p>
+            <a:pPr algn="ctr"/>
+          </a:p>
+        </p:txBody>
+      </p:sp>
+      <p:sp>
+        <p:nvSpPr>
+          <p:cNvPr id="13" name="Rectangle 12"/>
+          <p:cNvSpPr/>
+          <p:nvPr/>
+        </p:nvSpPr>
+        <p:spPr>
+          <a:xfrm>
+            <a:off x="502920" y="3044952"/>
+            <a:ext cx="73152" cy="1627632"/>
+          </a:xfrm>
+          <a:prstGeom prst="rect">
+            <a:avLst/>
+          </a:prstGeom>
+          <a:solidFill>
+            <a:srgbClr val="2E5AAC"/>
+          </a:solidFill>
+          <a:ln>
+            <a:noFill/>
+          </a:ln>
+          <a:effectLst/>
+        </p:spPr>
+        <p:style>
+          <a:lnRef idx="1">
+            <a:schemeClr val="accent1"/>
+          </a:lnRef>
+          <a:fillRef idx="3">
+            <a:schemeClr val="accent1"/>
+          </a:fillRef>
+          <a:effectRef idx="2">
+            <a:schemeClr val="accent1"/>
+          </a:effectRef>
+          <a:fontRef idx="minor">
+            <a:schemeClr val="lt1"/>
+          </a:fontRef>
+        </p:style>
+        <p:txBody>
+          <a:bodyPr rtlCol="0" anchor="ctr"/>
+          <a:lstStyle/>
+          <a:p>
+            <a:pPr algn="ctr"/>
+          </a:p>
+        </p:txBody>
+      </p:sp>
+      <p:sp>
+        <p:nvSpPr>
+          <p:cNvPr id="14" name="TextBox 13"/>
+          <p:cNvSpPr txBox="1"/>
+          <p:nvPr/>
+        </p:nvSpPr>
+        <p:spPr>
+          <a:xfrm>
+            <a:off x="713232" y="3136392"/>
+            <a:ext cx="7863840" cy="292608"/>
+          </a:xfrm>
+          <a:prstGeom prst="rect">
+            <a:avLst/>
+          </a:prstGeom>
+          <a:noFill/>
+        </p:spPr>
+        <p:txBody>
+          <a:bodyPr wrap="square" anchor="t" lIns="0" rIns="0" tIns="0" bIns="0">
+            <a:spAutoFit/>
+          </a:bodyPr>
+          <a:lstStyle/>
+          <a:p>
+            <a:pPr algn="l">
+              <a:lnSpc>
+                <a:spcPct val="100000"/>
+              </a:lnSpc>
+            </a:pPr>
+            <a:r>
+              <a:rPr sz="1300" b="1" i="0">
+                <a:solidFill>
+                  <a:srgbClr val="1B2A4A"/>
+                </a:solidFill>
+                <a:latin typeface="Yu Gothic"/>
+              </a:rPr>
+              <a:t>Copilot Studio：Assign user licenses and manage access</a:t>
+            </a:r>
+          </a:p>
+        </p:txBody>
+      </p:sp>
+      <p:sp>
+        <p:nvSpPr>
+          <p:cNvPr id="15" name="Rounded Rectangle 14"/>
+          <p:cNvSpPr/>
+          <p:nvPr/>
+        </p:nvSpPr>
+        <p:spPr>
+          <a:xfrm>
+            <a:off x="9875520" y="3136392"/>
+            <a:ext cx="1737360" cy="292608"/>
+          </a:xfrm>
+          <a:prstGeom prst="roundRect">
+            <a:avLst>
+              <a:gd name="adj" fmla="val 50000"/>
+            </a:avLst>
+          </a:prstGeom>
+          <a:solidFill>
+            <a:srgbClr val="E9EFF9"/>
+          </a:solidFill>
+          <a:ln>
+            <a:noFill/>
+          </a:ln>
+          <a:effectLst/>
+        </p:spPr>
+        <p:style>
+          <a:lnRef idx="1">
+            <a:schemeClr val="accent1"/>
+          </a:lnRef>
+          <a:fillRef idx="3">
+            <a:schemeClr val="accent1"/>
+          </a:fillRef>
+          <a:effectRef idx="2">
+            <a:schemeClr val="accent1"/>
+          </a:effectRef>
+          <a:fontRef idx="minor">
+            <a:schemeClr val="lt1"/>
+          </a:fontRef>
+        </p:style>
+        <p:txBody>
+          <a:bodyPr rtlCol="0" anchor="ctr" wrap="none" lIns="25400" rIns="25400" tIns="12700" bIns="12700"/>
+          <a:lstStyle/>
+          <a:p>
+            <a:pPr algn="ctr"/>
+            <a:r>
+              <a:rPr sz="1050" b="1">
+                <a:solidFill>
+                  <a:srgbClr val="2E5AAC"/>
+                </a:solidFill>
+                <a:latin typeface="Yu Gothic"/>
+              </a:rPr>
+              <a:t>P.2 対応</a:t>
+            </a:r>
+          </a:p>
+        </p:txBody>
+      </p:sp>
+      <p:sp>
+        <p:nvSpPr>
+          <p:cNvPr id="16" name="TextBox 15"/>
+          <p:cNvSpPr txBox="1"/>
+          <p:nvPr/>
+        </p:nvSpPr>
+        <p:spPr>
+          <a:xfrm>
+            <a:off x="713232" y="3447288"/>
+            <a:ext cx="10881360" cy="237744"/>
+          </a:xfrm>
+          <a:prstGeom prst="rect">
+            <a:avLst/>
+          </a:prstGeom>
+          <a:noFill/>
+        </p:spPr>
+        <p:txBody>
+          <a:bodyPr wrap="square" anchor="t" lIns="0" rIns="0" tIns="0" bIns="0">
+            <a:spAutoFit/>
+          </a:bodyPr>
+          <a:lstStyle/>
+          <a:p>
+            <a:pPr algn="l">
+              <a:lnSpc>
+                <a:spcPct val="100000"/>
+              </a:lnSpc>
+            </a:pPr>
+            <a:r>
+              <a:rPr sz="1000" b="0" i="0">
+                <a:solidFill>
+                  <a:srgbClr val="6E6E6E"/>
+                </a:solidFill>
+                <a:latin typeface="Yu Gothic"/>
+              </a:rPr>
+              <a:t>learn.microsoft.com/ja-jp/microsoft-copilot-studio/requirements-licensing</a:t>
+            </a:r>
+          </a:p>
+        </p:txBody>
+      </p:sp>
+      <p:sp>
+        <p:nvSpPr>
+          <p:cNvPr id="17" name="TextBox 16"/>
+          <p:cNvSpPr txBox="1"/>
+          <p:nvPr/>
+        </p:nvSpPr>
+        <p:spPr>
+          <a:xfrm>
+            <a:off x="713232" y="3721608"/>
+            <a:ext cx="10881360" cy="859536"/>
+          </a:xfrm>
+          <a:prstGeom prst="rect">
+            <a:avLst/>
+          </a:prstGeom>
+          <a:noFill/>
+        </p:spPr>
+        <p:txBody>
+          <a:bodyPr wrap="square" anchor="t" lIns="0" rIns="0" tIns="0" bIns="0">
+            <a:spAutoFit/>
+          </a:bodyPr>
+          <a:lstStyle/>
+          <a:p>
+            <a:pPr algn="l">
+              <a:lnSpc>
+                <a:spcPct val="118000"/>
+              </a:lnSpc>
+            </a:pPr>
+            <a:r>
+              <a:rPr sz="1100" b="0" i="0">
+                <a:solidFill>
+                  <a:srgbClr val="262626"/>
+                </a:solidFill>
+                <a:latin typeface="Yu Gothic"/>
+              </a:rPr>
+              <a:t>要旨：エージェントの作成・管理にはユーザー単位のライセンス（per userライセンス）とテナント</a:t>
+            </a:r>
+          </a:p>
+          <a:p>
+            <a:pPr algn="l">
+              <a:lnSpc>
+                <a:spcPct val="118000"/>
+              </a:lnSpc>
+            </a:pPr>
+            <a:r>
+              <a:rPr sz="1100" b="0" i="0">
+                <a:solidFill>
+                  <a:srgbClr val="262626"/>
+                </a:solidFill>
+                <a:latin typeface="Yu Gothic"/>
+              </a:rPr>
+              <a:t>ライセンスが必要。作成されたエージェントの利用者側には特別なライセンスは不要。</a:t>
+            </a:r>
+          </a:p>
+        </p:txBody>
+      </p:sp>
+      <p:sp>
+        <p:nvSpPr>
+          <p:cNvPr id="18" name="Rectangle 17"/>
+          <p:cNvSpPr/>
+          <p:nvPr/>
+        </p:nvSpPr>
+        <p:spPr>
+          <a:xfrm>
+            <a:off x="502920" y="4764024"/>
+            <a:ext cx="11201400" cy="1627632"/>
+          </a:xfrm>
+          <a:prstGeom prst="rect">
+            <a:avLst/>
+          </a:prstGeom>
+          <a:solidFill>
+            <a:srgbClr val="F5F6F8"/>
+          </a:solidFill>
+          <a:ln w="9525">
+            <a:solidFill>
+              <a:srgbClr val="D9DCE1"/>
+            </a:solidFill>
+          </a:ln>
+          <a:effectLst/>
+        </p:spPr>
+        <p:style>
+          <a:lnRef idx="1">
+            <a:schemeClr val="accent1"/>
+          </a:lnRef>
+          <a:fillRef idx="3">
+            <a:schemeClr val="accent1"/>
+          </a:fillRef>
+          <a:effectRef idx="2">
+            <a:schemeClr val="accent1"/>
+          </a:effectRef>
+          <a:fontRef idx="minor">
+            <a:schemeClr val="lt1"/>
+          </a:fontRef>
+        </p:style>
+        <p:txBody>
+          <a:bodyPr rtlCol="0" anchor="ctr"/>
+          <a:lstStyle/>
+          <a:p>
+            <a:pPr algn="ctr"/>
+          </a:p>
+        </p:txBody>
+      </p:sp>
+      <p:sp>
+        <p:nvSpPr>
+          <p:cNvPr id="19" name="Rectangle 18"/>
+          <p:cNvSpPr/>
+          <p:nvPr/>
+        </p:nvSpPr>
+        <p:spPr>
+          <a:xfrm>
+            <a:off x="502920" y="4764024"/>
+            <a:ext cx="73152" cy="1627632"/>
+          </a:xfrm>
+          <a:prstGeom prst="rect">
+            <a:avLst/>
+          </a:prstGeom>
+          <a:solidFill>
+            <a:srgbClr val="2E5AAC"/>
+          </a:solidFill>
+          <a:ln>
+            <a:noFill/>
+          </a:ln>
+          <a:effectLst/>
+        </p:spPr>
+        <p:style>
+          <a:lnRef idx="1">
+            <a:schemeClr val="accent1"/>
+          </a:lnRef>
+          <a:fillRef idx="3">
+            <a:schemeClr val="accent1"/>
+          </a:fillRef>
+          <a:effectRef idx="2">
+            <a:schemeClr val="accent1"/>
+          </a:effectRef>
+          <a:fontRef idx="minor">
+            <a:schemeClr val="lt1"/>
+          </a:fontRef>
+        </p:style>
+        <p:txBody>
+          <a:bodyPr rtlCol="0" anchor="ctr"/>
+          <a:lstStyle/>
+          <a:p>
+            <a:pPr algn="ctr"/>
+          </a:p>
+        </p:txBody>
+      </p:sp>
+      <p:sp>
+        <p:nvSpPr>
+          <p:cNvPr id="20" name="TextBox 19"/>
+          <p:cNvSpPr txBox="1"/>
+          <p:nvPr/>
+        </p:nvSpPr>
+        <p:spPr>
+          <a:xfrm>
+            <a:off x="713232" y="4855464"/>
+            <a:ext cx="7863840" cy="292608"/>
+          </a:xfrm>
+          <a:prstGeom prst="rect">
+            <a:avLst/>
+          </a:prstGeom>
+          <a:noFill/>
+        </p:spPr>
+        <p:txBody>
+          <a:bodyPr wrap="square" anchor="t" lIns="0" rIns="0" tIns="0" bIns="0">
+            <a:spAutoFit/>
+          </a:bodyPr>
+          <a:lstStyle/>
+          <a:p>
+            <a:pPr algn="l">
+              <a:lnSpc>
+                <a:spcPct val="100000"/>
+              </a:lnSpc>
+            </a:pPr>
+            <a:r>
+              <a:rPr sz="1300" b="1" i="0">
+                <a:solidFill>
+                  <a:srgbClr val="1B2A4A"/>
+                </a:solidFill>
+                <a:latin typeface="Yu Gothic"/>
+              </a:rPr>
+              <a:t>Copilot Studio：Billing rates and management</a:t>
+            </a:r>
+          </a:p>
+        </p:txBody>
+      </p:sp>
+      <p:sp>
+        <p:nvSpPr>
+          <p:cNvPr id="21" name="Rounded Rectangle 20"/>
+          <p:cNvSpPr/>
+          <p:nvPr/>
+        </p:nvSpPr>
+        <p:spPr>
+          <a:xfrm>
+            <a:off x="9875520" y="4855464"/>
+            <a:ext cx="1737360" cy="292608"/>
+          </a:xfrm>
+          <a:prstGeom prst="roundRect">
+            <a:avLst>
+              <a:gd name="adj" fmla="val 50000"/>
+            </a:avLst>
+          </a:prstGeom>
+          <a:solidFill>
+            <a:srgbClr val="E9EFF9"/>
+          </a:solidFill>
+          <a:ln>
+            <a:noFill/>
+          </a:ln>
+          <a:effectLst/>
+        </p:spPr>
+        <p:style>
+          <a:lnRef idx="1">
+            <a:schemeClr val="accent1"/>
+          </a:lnRef>
+          <a:fillRef idx="3">
+            <a:schemeClr val="accent1"/>
+          </a:fillRef>
+          <a:effectRef idx="2">
+            <a:schemeClr val="accent1"/>
+          </a:effectRef>
+          <a:fontRef idx="minor">
+            <a:schemeClr val="lt1"/>
+          </a:fontRef>
+        </p:style>
+        <p:txBody>
+          <a:bodyPr rtlCol="0" anchor="ctr" wrap="none" lIns="25400" rIns="25400" tIns="12700" bIns="12700"/>
+          <a:lstStyle/>
+          <a:p>
+            <a:pPr algn="ctr"/>
+            <a:r>
+              <a:rPr sz="1050" b="1">
+                <a:solidFill>
+                  <a:srgbClr val="2E5AAC"/>
+                </a:solidFill>
+                <a:latin typeface="Yu Gothic"/>
+              </a:rPr>
+              <a:t>P.2 対応</a:t>
+            </a:r>
+          </a:p>
+        </p:txBody>
+      </p:sp>
+      <p:sp>
+        <p:nvSpPr>
+          <p:cNvPr id="22" name="TextBox 21"/>
+          <p:cNvSpPr txBox="1"/>
+          <p:nvPr/>
+        </p:nvSpPr>
+        <p:spPr>
+          <a:xfrm>
+            <a:off x="713232" y="5166360"/>
+            <a:ext cx="10881360" cy="237744"/>
+          </a:xfrm>
+          <a:prstGeom prst="rect">
+            <a:avLst/>
+          </a:prstGeom>
+          <a:noFill/>
+        </p:spPr>
+        <p:txBody>
+          <a:bodyPr wrap="square" anchor="t" lIns="0" rIns="0" tIns="0" bIns="0">
+            <a:spAutoFit/>
+          </a:bodyPr>
+          <a:lstStyle/>
+          <a:p>
+            <a:pPr algn="l">
+              <a:lnSpc>
+                <a:spcPct val="100000"/>
+              </a:lnSpc>
+            </a:pPr>
+            <a:r>
+              <a:rPr sz="1000" b="0" i="0">
+                <a:solidFill>
+                  <a:srgbClr val="6E6E6E"/>
+                </a:solidFill>
+                <a:latin typeface="Yu Gothic"/>
+              </a:rPr>
+              <a:t>learn.microsoft.com/ja-jp/microsoft-copilot-studio/requirements-messages-management</a:t>
+            </a:r>
+          </a:p>
+        </p:txBody>
+      </p:sp>
+      <p:sp>
+        <p:nvSpPr>
+          <p:cNvPr id="23" name="TextBox 22"/>
+          <p:cNvSpPr txBox="1"/>
+          <p:nvPr/>
+        </p:nvSpPr>
+        <p:spPr>
+          <a:xfrm>
+            <a:off x="713232" y="5440680"/>
+            <a:ext cx="10881360" cy="859536"/>
+          </a:xfrm>
+          <a:prstGeom prst="rect">
+            <a:avLst/>
+          </a:prstGeom>
+          <a:noFill/>
+        </p:spPr>
+        <p:txBody>
+          <a:bodyPr wrap="square" anchor="t" lIns="0" rIns="0" tIns="0" bIns="0">
+            <a:spAutoFit/>
+          </a:bodyPr>
+          <a:lstStyle/>
+          <a:p>
+            <a:pPr algn="l">
+              <a:lnSpc>
+                <a:spcPct val="118000"/>
+              </a:lnSpc>
+            </a:pPr>
+            <a:r>
+              <a:rPr sz="1100" b="0" i="0">
+                <a:solidFill>
+                  <a:srgbClr val="262626"/>
+                </a:solidFill>
+                <a:latin typeface="Yu Gothic"/>
+              </a:rPr>
+              <a:t>要旨：エージェントのメッセージ消費に基づく課金の仕組みが存在し、環境にPay-as-you-go請求ポリシーが紐づいている場合、想定を超えたメッセージ消費により従量課金が発生し得る。</a:t>
+            </a:r>
+          </a:p>
+        </p:txBody>
+      </p:sp>
+      <p:sp>
+        <p:nvSpPr>
+          <p:cNvPr id="24" name="TextBox 23"/>
+          <p:cNvSpPr txBox="1"/>
+          <p:nvPr/>
+        </p:nvSpPr>
+        <p:spPr>
+          <a:xfrm>
+            <a:off x="502920" y="6565392"/>
+            <a:ext cx="8229600" cy="274320"/>
+          </a:xfrm>
+          <a:prstGeom prst="rect">
+            <a:avLst/>
+          </a:prstGeom>
+          <a:noFill/>
+        </p:spPr>
+        <p:txBody>
+          <a:bodyPr wrap="square" anchor="t" lIns="0" rIns="0" tIns="0" bIns="0">
+            <a:spAutoFit/>
+          </a:bodyPr>
+          <a:lstStyle/>
+          <a:p>
+            <a:pPr algn="l">
+              <a:lnSpc>
+                <a:spcPct val="100000"/>
+              </a:lnSpc>
+            </a:pPr>
+            <a:r>
+              <a:rPr sz="900" b="0" i="0">
+                <a:solidFill>
+                  <a:srgbClr val="6E6E6E"/>
+                </a:solidFill>
+                <a:latin typeface="Yu Gothic"/>
+              </a:rPr>
+              <a:t>Power Platform Default環境 統治 調査報告 ｜ Confidential</a:t>
+            </a:r>
+          </a:p>
+        </p:txBody>
+      </p:sp>
+      <p:sp>
+        <p:nvSpPr>
+          <p:cNvPr id="25" name="TextBox 24"/>
+          <p:cNvSpPr txBox="1"/>
+          <p:nvPr/>
+        </p:nvSpPr>
+        <p:spPr>
+          <a:xfrm>
+            <a:off x="11338560" y="6565392"/>
+            <a:ext cx="548640" cy="274320"/>
+          </a:xfrm>
+          <a:prstGeom prst="rect">
+            <a:avLst/>
+          </a:prstGeom>
+          <a:noFill/>
+        </p:spPr>
+        <p:txBody>
+          <a:bodyPr wrap="square" anchor="t" lIns="0" rIns="0" tIns="0" bIns="0">
+            <a:spAutoFit/>
+          </a:bodyPr>
+          <a:lstStyle/>
+          <a:p>
+            <a:pPr algn="r">
+              <a:lnSpc>
+                <a:spcPct val="100000"/>
+              </a:lnSpc>
+            </a:pPr>
+            <a:r>
+              <a:rPr sz="900" b="0" i="0">
+                <a:solidFill>
+                  <a:srgbClr val="6E6E6E"/>
+                </a:solidFill>
+                <a:latin typeface="Yu Gothic"/>
+              </a:rPr>
+              <a:t>17</a:t>
             </a:r>
           </a:p>
         </p:txBody>
@@ -7471,8 +11208,8 @@
         </p:nvSpPr>
         <p:spPr>
           <a:xfrm>
-            <a:off x="502920" y="1170432"/>
-            <a:ext cx="11155680" cy="274320"/>
+            <a:off x="502920" y="1115568"/>
+            <a:ext cx="11155680" cy="256032"/>
           </a:xfrm>
           <a:prstGeom prst="rect">
             <a:avLst/>
@@ -7491,7 +11228,7 @@
               </a:lnSpc>
             </a:pPr>
             <a:r>
-              <a:rPr sz="1250" b="0" i="1">
+              <a:rPr sz="1200" b="0" i="1">
                 <a:solidFill>
                   <a:srgbClr val="6E6E6E"/>
                 </a:solidFill>
@@ -7510,8 +11247,8 @@
         </p:nvSpPr>
         <p:spPr>
           <a:xfrm>
-            <a:off x="502920" y="1508760"/>
-            <a:ext cx="5394960" cy="457200"/>
+            <a:off x="502920" y="1417320"/>
+            <a:ext cx="5394960" cy="365760"/>
           </a:xfrm>
           <a:prstGeom prst="rect">
             <a:avLst/>
@@ -7554,8 +11291,8 @@
         </p:nvSpPr>
         <p:spPr>
           <a:xfrm>
-            <a:off x="685800" y="1581912"/>
-            <a:ext cx="5029200" cy="365760"/>
+            <a:off x="658368" y="1463040"/>
+            <a:ext cx="5029200" cy="292608"/>
           </a:xfrm>
           <a:prstGeom prst="rect">
             <a:avLst/>
@@ -7574,7 +11311,7 @@
               </a:lnSpc>
             </a:pPr>
             <a:r>
-              <a:rPr sz="1500" b="1" i="0">
+              <a:rPr sz="1350" b="1" i="0">
                 <a:solidFill>
                   <a:srgbClr val="2E5AAC"/>
                 </a:solidFill>
@@ -7593,8 +11330,8 @@
         </p:nvSpPr>
         <p:spPr>
           <a:xfrm>
-            <a:off x="548640" y="2103120"/>
-            <a:ext cx="5349240" cy="1828800"/>
+            <a:off x="548640" y="1847088"/>
+            <a:ext cx="5349240" cy="1280160"/>
           </a:xfrm>
           <a:prstGeom prst="rect">
             <a:avLst/>
@@ -7609,14 +11346,14 @@
           <a:p>
             <a:pPr>
               <a:lnSpc>
-                <a:spcPct val="120000"/>
+                <a:spcPct val="115000"/>
               </a:lnSpc>
               <a:spcAft>
-                <a:spcPts val="1000"/>
+                <a:spcPts val="700"/>
               </a:spcAft>
             </a:pPr>
             <a:r>
-              <a:rPr sz="1250" b="0">
+              <a:rPr sz="1150" b="0">
                 <a:solidFill>
                   <a:srgbClr val="262626"/>
                 </a:solidFill>
@@ -7626,7 +11363,7 @@
             </a:r>
             <a:br/>
             <a:r>
-              <a:rPr sz="1250" b="0">
+              <a:rPr sz="1150" b="0">
                 <a:solidFill>
                   <a:srgbClr val="262626"/>
                 </a:solidFill>
@@ -7636,7 +11373,7 @@
             </a:r>
             <a:br/>
             <a:r>
-              <a:rPr sz="1250" b="0">
+              <a:rPr sz="1150" b="0">
                 <a:solidFill>
                   <a:srgbClr val="262626"/>
                 </a:solidFill>
@@ -7648,14 +11385,14 @@
           <a:p>
             <a:pPr>
               <a:lnSpc>
-                <a:spcPct val="120000"/>
+                <a:spcPct val="115000"/>
               </a:lnSpc>
               <a:spcAft>
-                <a:spcPts val="1000"/>
+                <a:spcPts val="700"/>
               </a:spcAft>
             </a:pPr>
             <a:r>
-              <a:rPr sz="1250" b="0">
+              <a:rPr sz="1150" b="0">
                 <a:solidFill>
                   <a:srgbClr val="262626"/>
                 </a:solidFill>
@@ -7665,7 +11402,7 @@
             </a:r>
             <a:br/>
             <a:r>
-              <a:rPr sz="1250" b="0">
+              <a:rPr sz="1150" b="0">
                 <a:solidFill>
                   <a:srgbClr val="262626"/>
                 </a:solidFill>
@@ -7675,7 +11412,7 @@
             </a:r>
             <a:br/>
             <a:r>
-              <a:rPr sz="1250" b="0">
+              <a:rPr sz="1150" b="0">
                 <a:solidFill>
                   <a:srgbClr val="262626"/>
                 </a:solidFill>
@@ -7688,191 +11425,14 @@
       </p:sp>
       <p:sp>
         <p:nvSpPr>
-          <p:cNvPr id="10" name="TextBox 9"/>
-          <p:cNvSpPr txBox="1"/>
-          <p:nvPr/>
-        </p:nvSpPr>
-        <p:spPr>
-          <a:xfrm>
-            <a:off x="548640" y="3977639"/>
-            <a:ext cx="5349240" cy="274320"/>
-          </a:xfrm>
-          <a:prstGeom prst="rect">
-            <a:avLst/>
-          </a:prstGeom>
-          <a:noFill/>
-        </p:spPr>
-        <p:txBody>
-          <a:bodyPr wrap="square" anchor="t" lIns="0" rIns="0" tIns="0" bIns="0">
-            <a:spAutoFit/>
-          </a:bodyPr>
-          <a:lstStyle/>
-          <a:p>
-            <a:pPr algn="l">
-              <a:lnSpc>
-                <a:spcPct val="100000"/>
-              </a:lnSpc>
-            </a:pPr>
-            <a:r>
-              <a:rPr sz="1050" b="0" i="1">
-                <a:solidFill>
-                  <a:srgbClr val="6E6E6E"/>
-                </a:solidFill>
-                <a:latin typeface="Yu Gothic"/>
-              </a:rPr>
-              <a:t>出典：Microsoft公式ドキュメント「Power Platform environments overview」</a:t>
-            </a:r>
-          </a:p>
-        </p:txBody>
-      </p:sp>
-      <p:sp>
-        <p:nvSpPr>
-          <p:cNvPr id="11" name="Rectangle 10"/>
+          <p:cNvPr id="10" name="Rectangle 9"/>
           <p:cNvSpPr/>
           <p:nvPr/>
         </p:nvSpPr>
         <p:spPr>
           <a:xfrm>
-            <a:off x="548640" y="4343400"/>
-            <a:ext cx="5349240" cy="1051560"/>
-          </a:xfrm>
-          <a:prstGeom prst="rect">
-            <a:avLst/>
-          </a:prstGeom>
-          <a:solidFill>
-            <a:srgbClr val="F5F6F8"/>
-          </a:solidFill>
-          <a:ln>
-            <a:noFill/>
-          </a:ln>
-          <a:effectLst/>
-        </p:spPr>
-        <p:style>
-          <a:lnRef idx="1">
-            <a:schemeClr val="accent1"/>
-          </a:lnRef>
-          <a:fillRef idx="3">
-            <a:schemeClr val="accent1"/>
-          </a:fillRef>
-          <a:effectRef idx="2">
-            <a:schemeClr val="accent1"/>
-          </a:effectRef>
-          <a:fontRef idx="minor">
-            <a:schemeClr val="lt1"/>
-          </a:fontRef>
-        </p:style>
-        <p:txBody>
-          <a:bodyPr rtlCol="0" anchor="ctr"/>
-          <a:lstStyle/>
-          <a:p>
-            <a:pPr algn="ctr"/>
-          </a:p>
-        </p:txBody>
-      </p:sp>
-      <p:sp>
-        <p:nvSpPr>
-          <p:cNvPr id="12" name="TextBox 11"/>
-          <p:cNvSpPr txBox="1"/>
-          <p:nvPr/>
-        </p:nvSpPr>
-        <p:spPr>
-          <a:xfrm>
-            <a:off x="713232" y="4434840"/>
-            <a:ext cx="5029200" cy="274320"/>
-          </a:xfrm>
-          <a:prstGeom prst="rect">
-            <a:avLst/>
-          </a:prstGeom>
-          <a:noFill/>
-        </p:spPr>
-        <p:txBody>
-          <a:bodyPr wrap="square" anchor="t" lIns="0" rIns="0" tIns="0" bIns="0">
-            <a:spAutoFit/>
-          </a:bodyPr>
-          <a:lstStyle/>
-          <a:p>
-            <a:pPr algn="l">
-              <a:lnSpc>
-                <a:spcPct val="100000"/>
-              </a:lnSpc>
-            </a:pPr>
-            <a:r>
-              <a:rPr sz="1050" b="1" i="0">
-                <a:solidFill>
-                  <a:srgbClr val="6E6E6E"/>
-                </a:solidFill>
-                <a:latin typeface="Yu Gothic"/>
-              </a:rPr>
-              <a:t>【補足／一般的な背景（依頼内容には含まれない参考情報）】</a:t>
-            </a:r>
-          </a:p>
-        </p:txBody>
-      </p:sp>
-      <p:sp>
-        <p:nvSpPr>
-          <p:cNvPr id="13" name="TextBox 12"/>
-          <p:cNvSpPr txBox="1"/>
-          <p:nvPr/>
-        </p:nvSpPr>
-        <p:spPr>
-          <a:xfrm>
-            <a:off x="713232" y="4718304"/>
-            <a:ext cx="5029200" cy="640080"/>
-          </a:xfrm>
-          <a:prstGeom prst="rect">
-            <a:avLst/>
-          </a:prstGeom>
-          <a:noFill/>
-        </p:spPr>
-        <p:txBody>
-          <a:bodyPr wrap="square" anchor="t" lIns="0" rIns="0" tIns="0" bIns="0">
-            <a:spAutoFit/>
-          </a:bodyPr>
-          <a:lstStyle/>
-          <a:p>
-            <a:pPr algn="l">
-              <a:lnSpc>
-                <a:spcPct val="120000"/>
-              </a:lnSpc>
-            </a:pPr>
-            <a:r>
-              <a:rPr sz="1100" b="0" i="0">
-                <a:solidFill>
-                  <a:srgbClr val="262626"/>
-                </a:solidFill>
-                <a:latin typeface="Yu Gothic"/>
-              </a:rPr>
-              <a:t>無秩序な利用（シャドーIT化）は、一般的に情報漏えい・コンプライアンス・</a:t>
-            </a:r>
-          </a:p>
-          <a:p>
-            <a:pPr algn="l">
-              <a:lnSpc>
-                <a:spcPct val="120000"/>
-              </a:lnSpc>
-            </a:pPr>
-            <a:r>
-              <a:rPr sz="1100" b="0" i="0">
-                <a:solidFill>
-                  <a:srgbClr val="262626"/>
-                </a:solidFill>
-                <a:latin typeface="Yu Gothic"/>
-              </a:rPr>
-              <a:t>コスト管理上のリスク要因として指摘されることが多い。</a:t>
-            </a:r>
-          </a:p>
-        </p:txBody>
-      </p:sp>
-      <p:sp>
-        <p:nvSpPr>
-          <p:cNvPr id="14" name="Rectangle 13"/>
-          <p:cNvSpPr/>
-          <p:nvPr/>
-        </p:nvSpPr>
-        <p:spPr>
-          <a:xfrm>
-            <a:off x="6263640" y="1508760"/>
-            <a:ext cx="5394960" cy="457200"/>
+            <a:off x="6263640" y="1417320"/>
+            <a:ext cx="5394960" cy="365760"/>
           </a:xfrm>
           <a:prstGeom prst="rect">
             <a:avLst/>
@@ -7909,14 +11469,14 @@
       </p:sp>
       <p:sp>
         <p:nvSpPr>
-          <p:cNvPr id="15" name="TextBox 14"/>
+          <p:cNvPr id="11" name="TextBox 10"/>
           <p:cNvSpPr txBox="1"/>
           <p:nvPr/>
         </p:nvSpPr>
         <p:spPr>
           <a:xfrm>
-            <a:off x="6446520" y="1581912"/>
-            <a:ext cx="5029200" cy="365760"/>
+            <a:off x="6419088" y="1463040"/>
+            <a:ext cx="5029200" cy="292608"/>
           </a:xfrm>
           <a:prstGeom prst="rect">
             <a:avLst/>
@@ -7935,7 +11495,7 @@
               </a:lnSpc>
             </a:pPr>
             <a:r>
-              <a:rPr sz="1500" b="1" i="0">
+              <a:rPr sz="1350" b="1" i="0">
                 <a:solidFill>
                   <a:srgbClr val="1E8A4A"/>
                 </a:solidFill>
@@ -7948,14 +11508,14 @@
       </p:sp>
       <p:sp>
         <p:nvSpPr>
-          <p:cNvPr id="16" name="TextBox 15"/>
+          <p:cNvPr id="12" name="TextBox 11"/>
           <p:cNvSpPr txBox="1"/>
           <p:nvPr/>
         </p:nvSpPr>
         <p:spPr>
           <a:xfrm>
-            <a:off x="6309360" y="2103120"/>
-            <a:ext cx="5349240" cy="3108960"/>
+            <a:off x="6309360" y="1847088"/>
+            <a:ext cx="5349240" cy="1280160"/>
           </a:xfrm>
           <a:prstGeom prst="rect">
             <a:avLst/>
@@ -7970,14 +11530,14 @@
           <a:p>
             <a:pPr>
               <a:lnSpc>
-                <a:spcPct val="120000"/>
+                <a:spcPct val="115000"/>
               </a:lnSpc>
               <a:spcAft>
-                <a:spcPts val="1200"/>
+                <a:spcPts val="700"/>
               </a:spcAft>
             </a:pPr>
             <a:r>
-              <a:rPr sz="1250" b="0">
+              <a:rPr sz="1150" b="0">
                 <a:solidFill>
                   <a:srgbClr val="262626"/>
                 </a:solidFill>
@@ -7987,7 +11547,7 @@
             </a:r>
             <a:br/>
             <a:r>
-              <a:rPr sz="1250" b="0">
+              <a:rPr sz="1150" b="0">
                 <a:solidFill>
                   <a:srgbClr val="262626"/>
                 </a:solidFill>
@@ -7999,14 +11559,14 @@
           <a:p>
             <a:pPr>
               <a:lnSpc>
-                <a:spcPct val="120000"/>
+                <a:spcPct val="115000"/>
               </a:lnSpc>
               <a:spcAft>
-                <a:spcPts val="1200"/>
+                <a:spcPts val="700"/>
               </a:spcAft>
             </a:pPr>
             <a:r>
-              <a:rPr sz="1250" b="0">
+              <a:rPr sz="1150" b="0">
                 <a:solidFill>
                   <a:srgbClr val="262626"/>
                 </a:solidFill>
@@ -8018,14 +11578,14 @@
           <a:p>
             <a:pPr>
               <a:lnSpc>
-                <a:spcPct val="120000"/>
+                <a:spcPct val="115000"/>
               </a:lnSpc>
               <a:spcAft>
-                <a:spcPts val="1200"/>
+                <a:spcPts val="700"/>
               </a:spcAft>
             </a:pPr>
             <a:r>
-              <a:rPr sz="1250" b="0">
+              <a:rPr sz="1150" b="0">
                 <a:solidFill>
                   <a:srgbClr val="262626"/>
                 </a:solidFill>
@@ -8035,7 +11595,7 @@
             </a:r>
             <a:br/>
             <a:r>
-              <a:rPr sz="1250" b="0">
+              <a:rPr sz="1150" b="0">
                 <a:solidFill>
                   <a:srgbClr val="262626"/>
                 </a:solidFill>
@@ -8048,20 +11608,59 @@
       </p:sp>
       <p:sp>
         <p:nvSpPr>
-          <p:cNvPr id="17" name="Rectangle 16"/>
+          <p:cNvPr id="13" name="TextBox 12"/>
+          <p:cNvSpPr txBox="1"/>
+          <p:nvPr/>
+        </p:nvSpPr>
+        <p:spPr>
+          <a:xfrm>
+            <a:off x="502920" y="3310128"/>
+            <a:ext cx="10058400" cy="274320"/>
+          </a:xfrm>
+          <a:prstGeom prst="rect">
+            <a:avLst/>
+          </a:prstGeom>
+          <a:noFill/>
+        </p:spPr>
+        <p:txBody>
+          <a:bodyPr wrap="square" anchor="t" lIns="0" rIns="0" tIns="0" bIns="0">
+            <a:spAutoFit/>
+          </a:bodyPr>
+          <a:lstStyle/>
+          <a:p>
+            <a:pPr algn="l">
+              <a:lnSpc>
+                <a:spcPct val="100000"/>
+              </a:lnSpc>
+            </a:pPr>
+            <a:r>
+              <a:rPr sz="1300" b="1" i="0">
+                <a:solidFill>
+                  <a:srgbClr val="1B2A4A"/>
+                </a:solidFill>
+                <a:latin typeface="Yu Gothic"/>
+              </a:rPr>
+              <a:t>【補足】環境作成者ロールにより想定される主なリスク</a:t>
+            </a:r>
+          </a:p>
+        </p:txBody>
+      </p:sp>
+      <p:sp>
+        <p:nvSpPr>
+          <p:cNvPr id="14" name="Rectangle 13"/>
           <p:cNvSpPr/>
           <p:nvPr/>
         </p:nvSpPr>
         <p:spPr>
           <a:xfrm>
-            <a:off x="502920" y="5623560"/>
-            <a:ext cx="11155680" cy="685800"/>
+            <a:off x="502920" y="3639312"/>
+            <a:ext cx="5532120" cy="1024128"/>
           </a:xfrm>
           <a:prstGeom prst="rect">
             <a:avLst/>
           </a:prstGeom>
           <a:solidFill>
-            <a:srgbClr val="1B2A4A"/>
+            <a:srgbClr val="E9EFF9"/>
           </a:solidFill>
           <a:ln>
             <a:noFill/>
@@ -8092,53 +11691,58 @@
       </p:sp>
       <p:sp>
         <p:nvSpPr>
-          <p:cNvPr id="18" name="TextBox 17"/>
+          <p:cNvPr id="15" name="Rectangle 14"/>
+          <p:cNvSpPr/>
+          <p:nvPr/>
+        </p:nvSpPr>
+        <p:spPr>
+          <a:xfrm>
+            <a:off x="502920" y="3639312"/>
+            <a:ext cx="64008" cy="1024128"/>
+          </a:xfrm>
+          <a:prstGeom prst="rect">
+            <a:avLst/>
+          </a:prstGeom>
+          <a:solidFill>
+            <a:srgbClr val="2E5AAC"/>
+          </a:solidFill>
+          <a:ln>
+            <a:noFill/>
+          </a:ln>
+          <a:effectLst/>
+        </p:spPr>
+        <p:style>
+          <a:lnRef idx="1">
+            <a:schemeClr val="accent1"/>
+          </a:lnRef>
+          <a:fillRef idx="3">
+            <a:schemeClr val="accent1"/>
+          </a:fillRef>
+          <a:effectRef idx="2">
+            <a:schemeClr val="accent1"/>
+          </a:effectRef>
+          <a:fontRef idx="minor">
+            <a:schemeClr val="lt1"/>
+          </a:fontRef>
+        </p:style>
+        <p:txBody>
+          <a:bodyPr rtlCol="0" anchor="ctr"/>
+          <a:lstStyle/>
+          <a:p>
+            <a:pPr algn="ctr"/>
+          </a:p>
+        </p:txBody>
+      </p:sp>
+      <p:sp>
+        <p:nvSpPr>
+          <p:cNvPr id="16" name="TextBox 15"/>
           <p:cNvSpPr txBox="1"/>
           <p:nvPr/>
         </p:nvSpPr>
         <p:spPr>
           <a:xfrm>
-            <a:off x="731520" y="5623560"/>
-            <a:ext cx="10698480" cy="685800"/>
-          </a:xfrm>
-          <a:prstGeom prst="rect">
-            <a:avLst/>
-          </a:prstGeom>
-          <a:noFill/>
-        </p:spPr>
-        <p:txBody>
-          <a:bodyPr wrap="square" anchor="ctr" lIns="0" rIns="0" tIns="0" bIns="0">
-            <a:spAutoFit/>
-          </a:bodyPr>
-          <a:lstStyle/>
-          <a:p>
-            <a:pPr algn="l">
-              <a:lnSpc>
-                <a:spcPct val="100000"/>
-              </a:lnSpc>
-            </a:pPr>
-            <a:r>
-              <a:rPr sz="1300" b="1" i="0">
-                <a:solidFill>
-                  <a:srgbClr val="FFFFFF"/>
-                </a:solidFill>
-                <a:latin typeface="Yu Gothic"/>
-              </a:rPr>
-              <a:t>本資料は依頼内容の各確認項目に対し、Microsoft公式情報を根拠として明記した結論を提示するものである。</a:t>
-            </a:r>
-          </a:p>
-        </p:txBody>
-      </p:sp>
-      <p:sp>
-        <p:nvSpPr>
-          <p:cNvPr id="19" name="TextBox 18"/>
-          <p:cNvSpPr txBox="1"/>
-          <p:nvPr/>
-        </p:nvSpPr>
-        <p:spPr>
-          <a:xfrm>
-            <a:off x="502920" y="6565392"/>
-            <a:ext cx="8229600" cy="274320"/>
+            <a:off x="704088" y="3730752"/>
+            <a:ext cx="5166360" cy="256032"/>
           </a:xfrm>
           <a:prstGeom prst="rect">
             <a:avLst/>
@@ -8157,6 +11761,621 @@
               </a:lnSpc>
             </a:pPr>
             <a:r>
+              <a:rPr sz="1250" b="1" i="0">
+                <a:solidFill>
+                  <a:srgbClr val="2E5AAC"/>
+                </a:solidFill>
+                <a:latin typeface="Yu Gothic"/>
+              </a:rPr>
+              <a:t>できてしまうこと</a:t>
+            </a:r>
+          </a:p>
+        </p:txBody>
+      </p:sp>
+      <p:sp>
+        <p:nvSpPr>
+          <p:cNvPr id="17" name="TextBox 16"/>
+          <p:cNvSpPr txBox="1"/>
+          <p:nvPr/>
+        </p:nvSpPr>
+        <p:spPr>
+          <a:xfrm>
+            <a:off x="704088" y="4023360"/>
+            <a:ext cx="5166360" cy="566928"/>
+          </a:xfrm>
+          <a:prstGeom prst="rect">
+            <a:avLst/>
+          </a:prstGeom>
+          <a:noFill/>
+        </p:spPr>
+        <p:txBody>
+          <a:bodyPr wrap="square" anchor="t" lIns="0" rIns="0" tIns="0" bIns="0">
+            <a:spAutoFit/>
+          </a:bodyPr>
+          <a:lstStyle/>
+          <a:p>
+            <a:pPr algn="l">
+              <a:lnSpc>
+                <a:spcPct val="115000"/>
+              </a:lnSpc>
+            </a:pPr>
+            <a:r>
+              <a:rPr sz="1100" b="0" i="0">
+                <a:solidFill>
+                  <a:srgbClr val="262626"/>
+                </a:solidFill>
+                <a:latin typeface="Yu Gothic"/>
+              </a:rPr>
+              <a:t>アプリ・接続（コネクタ）・カスタムコネクタ・Power Automateフローの作成と組織内共有。Copilot Studioのライセンスが別途付与されている場合はエージェントの作成も可能</a:t>
+            </a:r>
+          </a:p>
+        </p:txBody>
+      </p:sp>
+      <p:sp>
+        <p:nvSpPr>
+          <p:cNvPr id="18" name="Rectangle 17"/>
+          <p:cNvSpPr/>
+          <p:nvPr/>
+        </p:nvSpPr>
+        <p:spPr>
+          <a:xfrm>
+            <a:off x="6144768" y="3639312"/>
+            <a:ext cx="5532120" cy="1024128"/>
+          </a:xfrm>
+          <a:prstGeom prst="rect">
+            <a:avLst/>
+          </a:prstGeom>
+          <a:solidFill>
+            <a:srgbClr val="F8E3E3"/>
+          </a:solidFill>
+          <a:ln>
+            <a:noFill/>
+          </a:ln>
+          <a:effectLst/>
+        </p:spPr>
+        <p:style>
+          <a:lnRef idx="1">
+            <a:schemeClr val="accent1"/>
+          </a:lnRef>
+          <a:fillRef idx="3">
+            <a:schemeClr val="accent1"/>
+          </a:fillRef>
+          <a:effectRef idx="2">
+            <a:schemeClr val="accent1"/>
+          </a:effectRef>
+          <a:fontRef idx="minor">
+            <a:schemeClr val="lt1"/>
+          </a:fontRef>
+        </p:style>
+        <p:txBody>
+          <a:bodyPr rtlCol="0" anchor="ctr"/>
+          <a:lstStyle/>
+          <a:p>
+            <a:pPr algn="ctr"/>
+          </a:p>
+        </p:txBody>
+      </p:sp>
+      <p:sp>
+        <p:nvSpPr>
+          <p:cNvPr id="19" name="Rectangle 18"/>
+          <p:cNvSpPr/>
+          <p:nvPr/>
+        </p:nvSpPr>
+        <p:spPr>
+          <a:xfrm>
+            <a:off x="6144768" y="3639312"/>
+            <a:ext cx="64008" cy="1024128"/>
+          </a:xfrm>
+          <a:prstGeom prst="rect">
+            <a:avLst/>
+          </a:prstGeom>
+          <a:solidFill>
+            <a:srgbClr val="B02A2A"/>
+          </a:solidFill>
+          <a:ln>
+            <a:noFill/>
+          </a:ln>
+          <a:effectLst/>
+        </p:spPr>
+        <p:style>
+          <a:lnRef idx="1">
+            <a:schemeClr val="accent1"/>
+          </a:lnRef>
+          <a:fillRef idx="3">
+            <a:schemeClr val="accent1"/>
+          </a:fillRef>
+          <a:effectRef idx="2">
+            <a:schemeClr val="accent1"/>
+          </a:effectRef>
+          <a:fontRef idx="minor">
+            <a:schemeClr val="lt1"/>
+          </a:fontRef>
+        </p:style>
+        <p:txBody>
+          <a:bodyPr rtlCol="0" anchor="ctr"/>
+          <a:lstStyle/>
+          <a:p>
+            <a:pPr algn="ctr"/>
+          </a:p>
+        </p:txBody>
+      </p:sp>
+      <p:sp>
+        <p:nvSpPr>
+          <p:cNvPr id="20" name="TextBox 19"/>
+          <p:cNvSpPr txBox="1"/>
+          <p:nvPr/>
+        </p:nvSpPr>
+        <p:spPr>
+          <a:xfrm>
+            <a:off x="6345936" y="3730752"/>
+            <a:ext cx="5166360" cy="256032"/>
+          </a:xfrm>
+          <a:prstGeom prst="rect">
+            <a:avLst/>
+          </a:prstGeom>
+          <a:noFill/>
+        </p:spPr>
+        <p:txBody>
+          <a:bodyPr wrap="square" anchor="t" lIns="0" rIns="0" tIns="0" bIns="0">
+            <a:spAutoFit/>
+          </a:bodyPr>
+          <a:lstStyle/>
+          <a:p>
+            <a:pPr algn="l">
+              <a:lnSpc>
+                <a:spcPct val="100000"/>
+              </a:lnSpc>
+            </a:pPr>
+            <a:r>
+              <a:rPr sz="1250" b="1" i="0">
+                <a:solidFill>
+                  <a:srgbClr val="B02A2A"/>
+                </a:solidFill>
+                <a:latin typeface="Yu Gothic"/>
+              </a:rPr>
+              <a:t>セキュリティ面のリスク</a:t>
+            </a:r>
+          </a:p>
+        </p:txBody>
+      </p:sp>
+      <p:sp>
+        <p:nvSpPr>
+          <p:cNvPr id="21" name="TextBox 20"/>
+          <p:cNvSpPr txBox="1"/>
+          <p:nvPr/>
+        </p:nvSpPr>
+        <p:spPr>
+          <a:xfrm>
+            <a:off x="6345936" y="4023360"/>
+            <a:ext cx="5166360" cy="566928"/>
+          </a:xfrm>
+          <a:prstGeom prst="rect">
+            <a:avLst/>
+          </a:prstGeom>
+          <a:noFill/>
+        </p:spPr>
+        <p:txBody>
+          <a:bodyPr wrap="square" anchor="t" lIns="0" rIns="0" tIns="0" bIns="0">
+            <a:spAutoFit/>
+          </a:bodyPr>
+          <a:lstStyle/>
+          <a:p>
+            <a:pPr algn="l">
+              <a:lnSpc>
+                <a:spcPct val="115000"/>
+              </a:lnSpc>
+            </a:pPr>
+            <a:r>
+              <a:rPr sz="1100" b="0" i="0">
+                <a:solidFill>
+                  <a:srgbClr val="262626"/>
+                </a:solidFill>
+                <a:latin typeface="Yu Gothic"/>
+              </a:rPr>
+              <a:t>承認前のコネクタを介した外部サービスへの未承認データ接続や、意図しない情報漏えいにつながる可能性がある</a:t>
+            </a:r>
+          </a:p>
+        </p:txBody>
+      </p:sp>
+      <p:sp>
+        <p:nvSpPr>
+          <p:cNvPr id="22" name="Rectangle 21"/>
+          <p:cNvSpPr/>
+          <p:nvPr/>
+        </p:nvSpPr>
+        <p:spPr>
+          <a:xfrm>
+            <a:off x="502920" y="4773168"/>
+            <a:ext cx="5532120" cy="1024128"/>
+          </a:xfrm>
+          <a:prstGeom prst="rect">
+            <a:avLst/>
+          </a:prstGeom>
+          <a:solidFill>
+            <a:srgbClr val="FCEED9"/>
+          </a:solidFill>
+          <a:ln>
+            <a:noFill/>
+          </a:ln>
+          <a:effectLst/>
+        </p:spPr>
+        <p:style>
+          <a:lnRef idx="1">
+            <a:schemeClr val="accent1"/>
+          </a:lnRef>
+          <a:fillRef idx="3">
+            <a:schemeClr val="accent1"/>
+          </a:fillRef>
+          <a:effectRef idx="2">
+            <a:schemeClr val="accent1"/>
+          </a:effectRef>
+          <a:fontRef idx="minor">
+            <a:schemeClr val="lt1"/>
+          </a:fontRef>
+        </p:style>
+        <p:txBody>
+          <a:bodyPr rtlCol="0" anchor="ctr"/>
+          <a:lstStyle/>
+          <a:p>
+            <a:pPr algn="ctr"/>
+          </a:p>
+        </p:txBody>
+      </p:sp>
+      <p:sp>
+        <p:nvSpPr>
+          <p:cNvPr id="23" name="Rectangle 22"/>
+          <p:cNvSpPr/>
+          <p:nvPr/>
+        </p:nvSpPr>
+        <p:spPr>
+          <a:xfrm>
+            <a:off x="502920" y="4773168"/>
+            <a:ext cx="64008" cy="1024128"/>
+          </a:xfrm>
+          <a:prstGeom prst="rect">
+            <a:avLst/>
+          </a:prstGeom>
+          <a:solidFill>
+            <a:srgbClr val="B86E00"/>
+          </a:solidFill>
+          <a:ln>
+            <a:noFill/>
+          </a:ln>
+          <a:effectLst/>
+        </p:spPr>
+        <p:style>
+          <a:lnRef idx="1">
+            <a:schemeClr val="accent1"/>
+          </a:lnRef>
+          <a:fillRef idx="3">
+            <a:schemeClr val="accent1"/>
+          </a:fillRef>
+          <a:effectRef idx="2">
+            <a:schemeClr val="accent1"/>
+          </a:effectRef>
+          <a:fontRef idx="minor">
+            <a:schemeClr val="lt1"/>
+          </a:fontRef>
+        </p:style>
+        <p:txBody>
+          <a:bodyPr rtlCol="0" anchor="ctr"/>
+          <a:lstStyle/>
+          <a:p>
+            <a:pPr algn="ctr"/>
+          </a:p>
+        </p:txBody>
+      </p:sp>
+      <p:sp>
+        <p:nvSpPr>
+          <p:cNvPr id="24" name="TextBox 23"/>
+          <p:cNvSpPr txBox="1"/>
+          <p:nvPr/>
+        </p:nvSpPr>
+        <p:spPr>
+          <a:xfrm>
+            <a:off x="704088" y="4864608"/>
+            <a:ext cx="5166360" cy="256032"/>
+          </a:xfrm>
+          <a:prstGeom prst="rect">
+            <a:avLst/>
+          </a:prstGeom>
+          <a:noFill/>
+        </p:spPr>
+        <p:txBody>
+          <a:bodyPr wrap="square" anchor="t" lIns="0" rIns="0" tIns="0" bIns="0">
+            <a:spAutoFit/>
+          </a:bodyPr>
+          <a:lstStyle/>
+          <a:p>
+            <a:pPr algn="l">
+              <a:lnSpc>
+                <a:spcPct val="100000"/>
+              </a:lnSpc>
+            </a:pPr>
+            <a:r>
+              <a:rPr sz="1250" b="1" i="0">
+                <a:solidFill>
+                  <a:srgbClr val="B86E00"/>
+                </a:solidFill>
+                <a:latin typeface="Yu Gothic"/>
+              </a:rPr>
+              <a:t>ガバナンス面のリスク</a:t>
+            </a:r>
+          </a:p>
+        </p:txBody>
+      </p:sp>
+      <p:sp>
+        <p:nvSpPr>
+          <p:cNvPr id="25" name="TextBox 24"/>
+          <p:cNvSpPr txBox="1"/>
+          <p:nvPr/>
+        </p:nvSpPr>
+        <p:spPr>
+          <a:xfrm>
+            <a:off x="704088" y="5157216"/>
+            <a:ext cx="5166360" cy="566928"/>
+          </a:xfrm>
+          <a:prstGeom prst="rect">
+            <a:avLst/>
+          </a:prstGeom>
+          <a:noFill/>
+        </p:spPr>
+        <p:txBody>
+          <a:bodyPr wrap="square" anchor="t" lIns="0" rIns="0" tIns="0" bIns="0">
+            <a:spAutoFit/>
+          </a:bodyPr>
+          <a:lstStyle/>
+          <a:p>
+            <a:pPr algn="l">
+              <a:lnSpc>
+                <a:spcPct val="115000"/>
+              </a:lnSpc>
+            </a:pPr>
+            <a:r>
+              <a:rPr sz="1100" b="0" i="0">
+                <a:solidFill>
+                  <a:srgbClr val="262626"/>
+                </a:solidFill>
+                <a:latin typeface="Yu Gothic"/>
+              </a:rPr>
+              <a:t>IT部門が把握しないアプリ・フロー・エージェントが乱立し、利用実態が不透明化する（シャドーIT化）</a:t>
+            </a:r>
+          </a:p>
+        </p:txBody>
+      </p:sp>
+      <p:sp>
+        <p:nvSpPr>
+          <p:cNvPr id="26" name="Rectangle 25"/>
+          <p:cNvSpPr/>
+          <p:nvPr/>
+        </p:nvSpPr>
+        <p:spPr>
+          <a:xfrm>
+            <a:off x="6144768" y="4773168"/>
+            <a:ext cx="5532120" cy="1024128"/>
+          </a:xfrm>
+          <a:prstGeom prst="rect">
+            <a:avLst/>
+          </a:prstGeom>
+          <a:solidFill>
+            <a:srgbClr val="FCEED9"/>
+          </a:solidFill>
+          <a:ln>
+            <a:noFill/>
+          </a:ln>
+          <a:effectLst/>
+        </p:spPr>
+        <p:style>
+          <a:lnRef idx="1">
+            <a:schemeClr val="accent1"/>
+          </a:lnRef>
+          <a:fillRef idx="3">
+            <a:schemeClr val="accent1"/>
+          </a:fillRef>
+          <a:effectRef idx="2">
+            <a:schemeClr val="accent1"/>
+          </a:effectRef>
+          <a:fontRef idx="minor">
+            <a:schemeClr val="lt1"/>
+          </a:fontRef>
+        </p:style>
+        <p:txBody>
+          <a:bodyPr rtlCol="0" anchor="ctr"/>
+          <a:lstStyle/>
+          <a:p>
+            <a:pPr algn="ctr"/>
+          </a:p>
+        </p:txBody>
+      </p:sp>
+      <p:sp>
+        <p:nvSpPr>
+          <p:cNvPr id="27" name="Rectangle 26"/>
+          <p:cNvSpPr/>
+          <p:nvPr/>
+        </p:nvSpPr>
+        <p:spPr>
+          <a:xfrm>
+            <a:off x="6144768" y="4773168"/>
+            <a:ext cx="64008" cy="1024128"/>
+          </a:xfrm>
+          <a:prstGeom prst="rect">
+            <a:avLst/>
+          </a:prstGeom>
+          <a:solidFill>
+            <a:srgbClr val="B86E00"/>
+          </a:solidFill>
+          <a:ln>
+            <a:noFill/>
+          </a:ln>
+          <a:effectLst/>
+        </p:spPr>
+        <p:style>
+          <a:lnRef idx="1">
+            <a:schemeClr val="accent1"/>
+          </a:lnRef>
+          <a:fillRef idx="3">
+            <a:schemeClr val="accent1"/>
+          </a:fillRef>
+          <a:effectRef idx="2">
+            <a:schemeClr val="accent1"/>
+          </a:effectRef>
+          <a:fontRef idx="minor">
+            <a:schemeClr val="lt1"/>
+          </a:fontRef>
+        </p:style>
+        <p:txBody>
+          <a:bodyPr rtlCol="0" anchor="ctr"/>
+          <a:lstStyle/>
+          <a:p>
+            <a:pPr algn="ctr"/>
+          </a:p>
+        </p:txBody>
+      </p:sp>
+      <p:sp>
+        <p:nvSpPr>
+          <p:cNvPr id="28" name="TextBox 27"/>
+          <p:cNvSpPr txBox="1"/>
+          <p:nvPr/>
+        </p:nvSpPr>
+        <p:spPr>
+          <a:xfrm>
+            <a:off x="6345936" y="4864608"/>
+            <a:ext cx="5166360" cy="256032"/>
+          </a:xfrm>
+          <a:prstGeom prst="rect">
+            <a:avLst/>
+          </a:prstGeom>
+          <a:noFill/>
+        </p:spPr>
+        <p:txBody>
+          <a:bodyPr wrap="square" anchor="t" lIns="0" rIns="0" tIns="0" bIns="0">
+            <a:spAutoFit/>
+          </a:bodyPr>
+          <a:lstStyle/>
+          <a:p>
+            <a:pPr algn="l">
+              <a:lnSpc>
+                <a:spcPct val="100000"/>
+              </a:lnSpc>
+            </a:pPr>
+            <a:r>
+              <a:rPr sz="1250" b="1" i="0">
+                <a:solidFill>
+                  <a:srgbClr val="B86E00"/>
+                </a:solidFill>
+                <a:latin typeface="Yu Gothic"/>
+              </a:rPr>
+              <a:t>コスト面のリスク</a:t>
+            </a:r>
+          </a:p>
+        </p:txBody>
+      </p:sp>
+      <p:sp>
+        <p:nvSpPr>
+          <p:cNvPr id="29" name="TextBox 28"/>
+          <p:cNvSpPr txBox="1"/>
+          <p:nvPr/>
+        </p:nvSpPr>
+        <p:spPr>
+          <a:xfrm>
+            <a:off x="6345936" y="5157216"/>
+            <a:ext cx="5166360" cy="566928"/>
+          </a:xfrm>
+          <a:prstGeom prst="rect">
+            <a:avLst/>
+          </a:prstGeom>
+          <a:noFill/>
+        </p:spPr>
+        <p:txBody>
+          <a:bodyPr wrap="square" anchor="t" lIns="0" rIns="0" tIns="0" bIns="0">
+            <a:spAutoFit/>
+          </a:bodyPr>
+          <a:lstStyle/>
+          <a:p>
+            <a:pPr algn="l">
+              <a:lnSpc>
+                <a:spcPct val="115000"/>
+              </a:lnSpc>
+            </a:pPr>
+            <a:r>
+              <a:rPr sz="1100" b="0" i="0">
+                <a:solidFill>
+                  <a:srgbClr val="262626"/>
+                </a:solidFill>
+                <a:latin typeface="Yu Gothic"/>
+              </a:rPr>
+              <a:t>Copilot StudioやAI Builder等の生成AI機能利用時のメッセージ／クレジット消費、Pay-as-you-go請求ポリシーが環境に紐づく場合の従量課金が意図せず発生し得る</a:t>
+            </a:r>
+          </a:p>
+        </p:txBody>
+      </p:sp>
+      <p:sp>
+        <p:nvSpPr>
+          <p:cNvPr id="30" name="TextBox 29"/>
+          <p:cNvSpPr txBox="1"/>
+          <p:nvPr/>
+        </p:nvSpPr>
+        <p:spPr>
+          <a:xfrm>
+            <a:off x="502920" y="5925312"/>
+            <a:ext cx="11155680" cy="274320"/>
+          </a:xfrm>
+          <a:prstGeom prst="rect">
+            <a:avLst/>
+          </a:prstGeom>
+          <a:noFill/>
+        </p:spPr>
+        <p:txBody>
+          <a:bodyPr wrap="square" anchor="t" lIns="0" rIns="0" tIns="0" bIns="0">
+            <a:spAutoFit/>
+          </a:bodyPr>
+          <a:lstStyle/>
+          <a:p>
+            <a:pPr algn="l">
+              <a:lnSpc>
+                <a:spcPct val="100000"/>
+              </a:lnSpc>
+            </a:pPr>
+            <a:r>
+              <a:rPr sz="1000" b="0" i="1">
+                <a:solidFill>
+                  <a:srgbClr val="6E6E6E"/>
+                </a:solidFill>
+                <a:latin typeface="Yu Gothic"/>
+              </a:rPr>
+              <a:t>※ 各項目の根拠（公式ドキュメントの該当箇所・原文抜粋）は巻末Appendixに記載</a:t>
+            </a:r>
+          </a:p>
+        </p:txBody>
+      </p:sp>
+      <p:sp>
+        <p:nvSpPr>
+          <p:cNvPr id="31" name="TextBox 30"/>
+          <p:cNvSpPr txBox="1"/>
+          <p:nvPr/>
+        </p:nvSpPr>
+        <p:spPr>
+          <a:xfrm>
+            <a:off x="502920" y="6565392"/>
+            <a:ext cx="8229600" cy="274320"/>
+          </a:xfrm>
+          <a:prstGeom prst="rect">
+            <a:avLst/>
+          </a:prstGeom>
+          <a:noFill/>
+        </p:spPr>
+        <p:txBody>
+          <a:bodyPr wrap="square" anchor="t" lIns="0" rIns="0" tIns="0" bIns="0">
+            <a:spAutoFit/>
+          </a:bodyPr>
+          <a:lstStyle/>
+          <a:p>
+            <a:pPr algn="l">
+              <a:lnSpc>
+                <a:spcPct val="100000"/>
+              </a:lnSpc>
+            </a:pPr>
+            <a:r>
               <a:rPr sz="900" b="0" i="0">
                 <a:solidFill>
                   <a:srgbClr val="6E6E6E"/>
@@ -8170,7 +12389,7 @@
       </p:sp>
       <p:sp>
         <p:nvSpPr>
-          <p:cNvPr id="20" name="TextBox 19"/>
+          <p:cNvPr id="32" name="TextBox 31"/>
           <p:cNvSpPr txBox="1"/>
           <p:nvPr/>
         </p:nvSpPr>
@@ -10268,7 +14487,7 @@
         <p:spPr>
           <a:xfrm>
             <a:off x="502920" y="1965960"/>
-            <a:ext cx="6949440" cy="3246120"/>
+            <a:ext cx="6949440" cy="3657600"/>
           </a:xfrm>
           <a:prstGeom prst="rect">
             <a:avLst/>
@@ -10474,7 +14693,7 @@
         <p:spPr>
           <a:xfrm>
             <a:off x="7818120" y="1325880"/>
-            <a:ext cx="3886200" cy="3337560"/>
+            <a:ext cx="3886200" cy="4297680"/>
           </a:xfrm>
           <a:prstGeom prst="rect">
             <a:avLst/>
@@ -10557,7 +14776,7 @@
         <p:spPr>
           <a:xfrm>
             <a:off x="8046720" y="1965960"/>
-            <a:ext cx="3474720" cy="2651760"/>
+            <a:ext cx="3474720" cy="3657600"/>
           </a:xfrm>
           <a:prstGeom prst="rect">
             <a:avLst/>
@@ -10668,104 +14887,14 @@
       </p:sp>
       <p:sp>
         <p:nvSpPr>
-          <p:cNvPr id="11" name="Rectangle 10"/>
-          <p:cNvSpPr/>
-          <p:nvPr/>
-        </p:nvSpPr>
-        <p:spPr>
-          <a:xfrm>
-            <a:off x="502920" y="5349240"/>
-            <a:ext cx="11201400" cy="1051560"/>
-          </a:xfrm>
-          <a:prstGeom prst="rect">
-            <a:avLst/>
-          </a:prstGeom>
-          <a:solidFill>
-            <a:srgbClr val="EFF2F7"/>
-          </a:solidFill>
-          <a:ln w="9525">
-            <a:solidFill>
-              <a:srgbClr val="D9DCE1"/>
-            </a:solidFill>
-          </a:ln>
-          <a:effectLst/>
-        </p:spPr>
-        <p:style>
-          <a:lnRef idx="1">
-            <a:schemeClr val="accent1"/>
-          </a:lnRef>
-          <a:fillRef idx="3">
-            <a:schemeClr val="accent1"/>
-          </a:fillRef>
-          <a:effectRef idx="2">
-            <a:schemeClr val="accent1"/>
-          </a:effectRef>
-          <a:fontRef idx="minor">
-            <a:schemeClr val="lt1"/>
-          </a:fontRef>
-        </p:style>
-        <p:txBody>
-          <a:bodyPr rtlCol="0" anchor="ctr"/>
-          <a:lstStyle/>
-          <a:p>
-            <a:pPr algn="ctr"/>
-          </a:p>
-        </p:txBody>
-      </p:sp>
-      <p:sp>
-        <p:nvSpPr>
-          <p:cNvPr id="12" name="Rectangle 11"/>
-          <p:cNvSpPr/>
-          <p:nvPr/>
-        </p:nvSpPr>
-        <p:spPr>
-          <a:xfrm>
-            <a:off x="502920" y="5349240"/>
-            <a:ext cx="73152" cy="1051560"/>
-          </a:xfrm>
-          <a:prstGeom prst="rect">
-            <a:avLst/>
-          </a:prstGeom>
-          <a:solidFill>
-            <a:srgbClr val="2E5AAC"/>
-          </a:solidFill>
-          <a:ln>
-            <a:noFill/>
-          </a:ln>
-          <a:effectLst/>
-        </p:spPr>
-        <p:style>
-          <a:lnRef idx="1">
-            <a:schemeClr val="accent1"/>
-          </a:lnRef>
-          <a:fillRef idx="3">
-            <a:schemeClr val="accent1"/>
-          </a:fillRef>
-          <a:effectRef idx="2">
-            <a:schemeClr val="accent1"/>
-          </a:effectRef>
-          <a:fontRef idx="minor">
-            <a:schemeClr val="lt1"/>
-          </a:fontRef>
-        </p:style>
-        <p:txBody>
-          <a:bodyPr rtlCol="0" anchor="ctr"/>
-          <a:lstStyle/>
-          <a:p>
-            <a:pPr algn="ctr"/>
-          </a:p>
-        </p:txBody>
-      </p:sp>
-      <p:sp>
-        <p:nvSpPr>
-          <p:cNvPr id="13" name="TextBox 12"/>
+          <p:cNvPr id="11" name="TextBox 10"/>
           <p:cNvSpPr txBox="1"/>
           <p:nvPr/>
         </p:nvSpPr>
         <p:spPr>
           <a:xfrm>
-            <a:off x="704088" y="5440680"/>
-            <a:ext cx="10835640" cy="292608"/>
+            <a:off x="502920" y="6565392"/>
+            <a:ext cx="8229600" cy="274320"/>
           </a:xfrm>
           <a:prstGeom prst="rect">
             <a:avLst/>
@@ -10784,84 +14913,6 @@
               </a:lnSpc>
             </a:pPr>
             <a:r>
-              <a:rPr sz="1200" b="1" i="0">
-                <a:solidFill>
-                  <a:srgbClr val="1B2A4A"/>
-                </a:solidFill>
-                <a:latin typeface="Yu Gothic"/>
-              </a:rPr>
-              <a:t>根拠（Microsoft公式情報）： 「Managed environments overview／Enable managed environments／Manage and govern the default environment」</a:t>
-            </a:r>
-          </a:p>
-        </p:txBody>
-      </p:sp>
-      <p:sp>
-        <p:nvSpPr>
-          <p:cNvPr id="14" name="TextBox 13"/>
-          <p:cNvSpPr txBox="1"/>
-          <p:nvPr/>
-        </p:nvSpPr>
-        <p:spPr>
-          <a:xfrm>
-            <a:off x="704088" y="5769864"/>
-            <a:ext cx="10835640" cy="539496"/>
-          </a:xfrm>
-          <a:prstGeom prst="rect">
-            <a:avLst/>
-          </a:prstGeom>
-          <a:noFill/>
-        </p:spPr>
-        <p:txBody>
-          <a:bodyPr wrap="square" anchor="t" lIns="0" rIns="0" tIns="0" bIns="0">
-            <a:spAutoFit/>
-          </a:bodyPr>
-          <a:lstStyle/>
-          <a:p>
-            <a:pPr algn="l">
-              <a:lnSpc>
-                <a:spcPct val="120000"/>
-              </a:lnSpc>
-            </a:pPr>
-            <a:r>
-              <a:rPr sz="1130" b="0" i="0">
-                <a:solidFill>
-                  <a:srgbClr val="262626"/>
-                </a:solidFill>
-                <a:latin typeface="Yu Gothic"/>
-              </a:rPr>
-              <a:t>「Admins can use managed environments with any type of environment」（環境の種類を問わず利用可能）と明記されており、Default環境も対象に含まれる。また、Default環境における統治強化のためマネージド環境機能の活用を推奨する記載があり、これらが本判定の根拠となっている。</a:t>
-            </a:r>
-          </a:p>
-        </p:txBody>
-      </p:sp>
-      <p:sp>
-        <p:nvSpPr>
-          <p:cNvPr id="15" name="TextBox 14"/>
-          <p:cNvSpPr txBox="1"/>
-          <p:nvPr/>
-        </p:nvSpPr>
-        <p:spPr>
-          <a:xfrm>
-            <a:off x="502920" y="6565392"/>
-            <a:ext cx="8229600" cy="274320"/>
-          </a:xfrm>
-          <a:prstGeom prst="rect">
-            <a:avLst/>
-          </a:prstGeom>
-          <a:noFill/>
-        </p:spPr>
-        <p:txBody>
-          <a:bodyPr wrap="square" anchor="t" lIns="0" rIns="0" tIns="0" bIns="0">
-            <a:spAutoFit/>
-          </a:bodyPr>
-          <a:lstStyle/>
-          <a:p>
-            <a:pPr algn="l">
-              <a:lnSpc>
-                <a:spcPct val="100000"/>
-              </a:lnSpc>
-            </a:pPr>
-            <a:r>
               <a:rPr sz="900" b="0" i="0">
                 <a:solidFill>
                   <a:srgbClr val="6E6E6E"/>
@@ -10875,7 +14926,7 @@
       </p:sp>
       <p:sp>
         <p:nvSpPr>
-          <p:cNvPr id="16" name="TextBox 15"/>
+          <p:cNvPr id="12" name="TextBox 11"/>
           <p:cNvSpPr txBox="1"/>
           <p:nvPr/>
         </p:nvSpPr>
@@ -11168,7 +15219,7 @@
         <p:spPr>
           <a:xfrm>
             <a:off x="502920" y="1965960"/>
-            <a:ext cx="6949440" cy="3246120"/>
+            <a:ext cx="6949440" cy="3657600"/>
           </a:xfrm>
           <a:prstGeom prst="rect">
             <a:avLst/>
@@ -11354,7 +15405,7 @@
         <p:spPr>
           <a:xfrm>
             <a:off x="7818120" y="1325880"/>
-            <a:ext cx="3886200" cy="3337560"/>
+            <a:ext cx="3886200" cy="4297680"/>
           </a:xfrm>
           <a:prstGeom prst="rect">
             <a:avLst/>
@@ -11437,7 +15488,7 @@
         <p:spPr>
           <a:xfrm>
             <a:off x="8046720" y="1965960"/>
-            <a:ext cx="3474720" cy="2743200"/>
+            <a:ext cx="3474720" cy="3657600"/>
           </a:xfrm>
           <a:prstGeom prst="rect">
             <a:avLst/>
@@ -11529,104 +15580,14 @@
       </p:sp>
       <p:sp>
         <p:nvSpPr>
-          <p:cNvPr id="11" name="Rectangle 10"/>
-          <p:cNvSpPr/>
-          <p:nvPr/>
-        </p:nvSpPr>
-        <p:spPr>
-          <a:xfrm>
-            <a:off x="502920" y="5349240"/>
-            <a:ext cx="11201400" cy="1051560"/>
-          </a:xfrm>
-          <a:prstGeom prst="rect">
-            <a:avLst/>
-          </a:prstGeom>
-          <a:solidFill>
-            <a:srgbClr val="EFF2F7"/>
-          </a:solidFill>
-          <a:ln w="9525">
-            <a:solidFill>
-              <a:srgbClr val="D9DCE1"/>
-            </a:solidFill>
-          </a:ln>
-          <a:effectLst/>
-        </p:spPr>
-        <p:style>
-          <a:lnRef idx="1">
-            <a:schemeClr val="accent1"/>
-          </a:lnRef>
-          <a:fillRef idx="3">
-            <a:schemeClr val="accent1"/>
-          </a:fillRef>
-          <a:effectRef idx="2">
-            <a:schemeClr val="accent1"/>
-          </a:effectRef>
-          <a:fontRef idx="minor">
-            <a:schemeClr val="lt1"/>
-          </a:fontRef>
-        </p:style>
-        <p:txBody>
-          <a:bodyPr rtlCol="0" anchor="ctr"/>
-          <a:lstStyle/>
-          <a:p>
-            <a:pPr algn="ctr"/>
-          </a:p>
-        </p:txBody>
-      </p:sp>
-      <p:sp>
-        <p:nvSpPr>
-          <p:cNvPr id="12" name="Rectangle 11"/>
-          <p:cNvSpPr/>
-          <p:nvPr/>
-        </p:nvSpPr>
-        <p:spPr>
-          <a:xfrm>
-            <a:off x="502920" y="5349240"/>
-            <a:ext cx="73152" cy="1051560"/>
-          </a:xfrm>
-          <a:prstGeom prst="rect">
-            <a:avLst/>
-          </a:prstGeom>
-          <a:solidFill>
-            <a:srgbClr val="2E5AAC"/>
-          </a:solidFill>
-          <a:ln>
-            <a:noFill/>
-          </a:ln>
-          <a:effectLst/>
-        </p:spPr>
-        <p:style>
-          <a:lnRef idx="1">
-            <a:schemeClr val="accent1"/>
-          </a:lnRef>
-          <a:fillRef idx="3">
-            <a:schemeClr val="accent1"/>
-          </a:fillRef>
-          <a:effectRef idx="2">
-            <a:schemeClr val="accent1"/>
-          </a:effectRef>
-          <a:fontRef idx="minor">
-            <a:schemeClr val="lt1"/>
-          </a:fontRef>
-        </p:style>
-        <p:txBody>
-          <a:bodyPr rtlCol="0" anchor="ctr"/>
-          <a:lstStyle/>
-          <a:p>
-            <a:pPr algn="ctr"/>
-          </a:p>
-        </p:txBody>
-      </p:sp>
-      <p:sp>
-        <p:nvSpPr>
-          <p:cNvPr id="13" name="TextBox 12"/>
+          <p:cNvPr id="11" name="TextBox 10"/>
           <p:cNvSpPr txBox="1"/>
           <p:nvPr/>
         </p:nvSpPr>
         <p:spPr>
           <a:xfrm>
-            <a:off x="704088" y="5440680"/>
-            <a:ext cx="10835640" cy="292608"/>
+            <a:off x="502920" y="6565392"/>
+            <a:ext cx="8229600" cy="274320"/>
           </a:xfrm>
           <a:prstGeom prst="rect">
             <a:avLst/>
@@ -11645,84 +15606,6 @@
               </a:lnSpc>
             </a:pPr>
             <a:r>
-              <a:rPr sz="1200" b="1" i="0">
-                <a:solidFill>
-                  <a:srgbClr val="1B2A4A"/>
-                </a:solidFill>
-                <a:latin typeface="Yu Gothic"/>
-              </a:rPr>
-              <a:t>根拠（Microsoft公式情報）： 「Secure the default environment／View policies and scope」</a:t>
-            </a:r>
-          </a:p>
-        </p:txBody>
-      </p:sp>
-      <p:sp>
-        <p:nvSpPr>
-          <p:cNvPr id="14" name="TextBox 13"/>
-          <p:cNvSpPr txBox="1"/>
-          <p:nvPr/>
-        </p:nvSpPr>
-        <p:spPr>
-          <a:xfrm>
-            <a:off x="704088" y="5769864"/>
-            <a:ext cx="10835640" cy="539496"/>
-          </a:xfrm>
-          <a:prstGeom prst="rect">
-            <a:avLst/>
-          </a:prstGeom>
-          <a:noFill/>
-        </p:spPr>
-        <p:txBody>
-          <a:bodyPr wrap="square" anchor="t" lIns="0" rIns="0" tIns="0" bIns="0">
-            <a:spAutoFit/>
-          </a:bodyPr>
-          <a:lstStyle/>
-          <a:p>
-            <a:pPr algn="l">
-              <a:lnSpc>
-                <a:spcPct val="120000"/>
-              </a:lnSpc>
-            </a:pPr>
-            <a:r>
-              <a:rPr sz="1130" b="0" i="0">
-                <a:solidFill>
-                  <a:srgbClr val="262626"/>
-                </a:solidFill>
-                <a:latin typeface="Yu Gothic"/>
-              </a:rPr>
-              <a:t>「Having a data policy in place is especially critical for the default environment」（Default環境へのデータ ポリシー整備は特に重要）と明記され、Default環境への適用が公式に推奨されている。環境レベル／テナントレベルのスコープ選択肢についても同ガイダンスに基づく。</a:t>
-            </a:r>
-          </a:p>
-        </p:txBody>
-      </p:sp>
-      <p:sp>
-        <p:nvSpPr>
-          <p:cNvPr id="15" name="TextBox 14"/>
-          <p:cNvSpPr txBox="1"/>
-          <p:nvPr/>
-        </p:nvSpPr>
-        <p:spPr>
-          <a:xfrm>
-            <a:off x="502920" y="6565392"/>
-            <a:ext cx="8229600" cy="274320"/>
-          </a:xfrm>
-          <a:prstGeom prst="rect">
-            <a:avLst/>
-          </a:prstGeom>
-          <a:noFill/>
-        </p:spPr>
-        <p:txBody>
-          <a:bodyPr wrap="square" anchor="t" lIns="0" rIns="0" tIns="0" bIns="0">
-            <a:spAutoFit/>
-          </a:bodyPr>
-          <a:lstStyle/>
-          <a:p>
-            <a:pPr algn="l">
-              <a:lnSpc>
-                <a:spcPct val="100000"/>
-              </a:lnSpc>
-            </a:pPr>
-            <a:r>
               <a:rPr sz="900" b="0" i="0">
                 <a:solidFill>
                   <a:srgbClr val="6E6E6E"/>
@@ -11736,7 +15619,7 @@
       </p:sp>
       <p:sp>
         <p:nvSpPr>
-          <p:cNvPr id="16" name="TextBox 15"/>
+          <p:cNvPr id="12" name="TextBox 11"/>
           <p:cNvSpPr txBox="1"/>
           <p:nvPr/>
         </p:nvSpPr>
@@ -12643,8 +16526,8 @@
         </p:nvSpPr>
         <p:spPr>
           <a:xfrm>
-            <a:off x="502920" y="4919472"/>
-            <a:ext cx="11155680" cy="548640"/>
+            <a:off x="502920" y="4983480"/>
+            <a:ext cx="11155680" cy="822960"/>
           </a:xfrm>
           <a:prstGeom prst="rect">
             <a:avLst/>
@@ -12676,104 +16559,14 @@
       </p:sp>
       <p:sp>
         <p:nvSpPr>
-          <p:cNvPr id="10" name="Rectangle 9"/>
-          <p:cNvSpPr/>
-          <p:nvPr/>
-        </p:nvSpPr>
-        <p:spPr>
-          <a:xfrm>
-            <a:off x="502920" y="5532120"/>
-            <a:ext cx="11201400" cy="914400"/>
-          </a:xfrm>
-          <a:prstGeom prst="rect">
-            <a:avLst/>
-          </a:prstGeom>
-          <a:solidFill>
-            <a:srgbClr val="EFF2F7"/>
-          </a:solidFill>
-          <a:ln w="9525">
-            <a:solidFill>
-              <a:srgbClr val="D9DCE1"/>
-            </a:solidFill>
-          </a:ln>
-          <a:effectLst/>
-        </p:spPr>
-        <p:style>
-          <a:lnRef idx="1">
-            <a:schemeClr val="accent1"/>
-          </a:lnRef>
-          <a:fillRef idx="3">
-            <a:schemeClr val="accent1"/>
-          </a:fillRef>
-          <a:effectRef idx="2">
-            <a:schemeClr val="accent1"/>
-          </a:effectRef>
-          <a:fontRef idx="minor">
-            <a:schemeClr val="lt1"/>
-          </a:fontRef>
-        </p:style>
-        <p:txBody>
-          <a:bodyPr rtlCol="0" anchor="ctr"/>
-          <a:lstStyle/>
-          <a:p>
-            <a:pPr algn="ctr"/>
-          </a:p>
-        </p:txBody>
-      </p:sp>
-      <p:sp>
-        <p:nvSpPr>
-          <p:cNvPr id="11" name="Rectangle 10"/>
-          <p:cNvSpPr/>
-          <p:nvPr/>
-        </p:nvSpPr>
-        <p:spPr>
-          <a:xfrm>
-            <a:off x="502920" y="5532120"/>
-            <a:ext cx="73152" cy="914400"/>
-          </a:xfrm>
-          <a:prstGeom prst="rect">
-            <a:avLst/>
-          </a:prstGeom>
-          <a:solidFill>
-            <a:srgbClr val="2E5AAC"/>
-          </a:solidFill>
-          <a:ln>
-            <a:noFill/>
-          </a:ln>
-          <a:effectLst/>
-        </p:spPr>
-        <p:style>
-          <a:lnRef idx="1">
-            <a:schemeClr val="accent1"/>
-          </a:lnRef>
-          <a:fillRef idx="3">
-            <a:schemeClr val="accent1"/>
-          </a:fillRef>
-          <a:effectRef idx="2">
-            <a:schemeClr val="accent1"/>
-          </a:effectRef>
-          <a:fontRef idx="minor">
-            <a:schemeClr val="lt1"/>
-          </a:fontRef>
-        </p:style>
-        <p:txBody>
-          <a:bodyPr rtlCol="0" anchor="ctr"/>
-          <a:lstStyle/>
-          <a:p>
-            <a:pPr algn="ctr"/>
-          </a:p>
-        </p:txBody>
-      </p:sp>
-      <p:sp>
-        <p:nvSpPr>
-          <p:cNvPr id="12" name="TextBox 11"/>
+          <p:cNvPr id="10" name="TextBox 9"/>
           <p:cNvSpPr txBox="1"/>
           <p:nvPr/>
         </p:nvSpPr>
         <p:spPr>
           <a:xfrm>
-            <a:off x="704088" y="5623560"/>
-            <a:ext cx="10835640" cy="292608"/>
+            <a:off x="502920" y="6565392"/>
+            <a:ext cx="8229600" cy="274320"/>
           </a:xfrm>
           <a:prstGeom prst="rect">
             <a:avLst/>
@@ -12792,84 +16585,6 @@
               </a:lnSpc>
             </a:pPr>
             <a:r>
-              <a:rPr sz="1200" b="1" i="0">
-                <a:solidFill>
-                  <a:srgbClr val="1B2A4A"/>
-                </a:solidFill>
-                <a:latin typeface="Yu Gothic"/>
-              </a:rPr>
-              <a:t>根拠（Microsoft公式情報）： 「Licensing（Managed Environments）／Power Automate licensing FAQ」</a:t>
-            </a:r>
-          </a:p>
-        </p:txBody>
-      </p:sp>
-      <p:sp>
-        <p:nvSpPr>
-          <p:cNvPr id="13" name="TextBox 12"/>
-          <p:cNvSpPr txBox="1"/>
-          <p:nvPr/>
-        </p:nvSpPr>
-        <p:spPr>
-          <a:xfrm>
-            <a:off x="704088" y="5952744"/>
-            <a:ext cx="10835640" cy="402336"/>
-          </a:xfrm>
-          <a:prstGeom prst="rect">
-            <a:avLst/>
-          </a:prstGeom>
-          <a:noFill/>
-        </p:spPr>
-        <p:txBody>
-          <a:bodyPr wrap="square" anchor="t" lIns="0" rIns="0" tIns="0" bIns="0">
-            <a:spAutoFit/>
-          </a:bodyPr>
-          <a:lstStyle/>
-          <a:p>
-            <a:pPr algn="l">
-              <a:lnSpc>
-                <a:spcPct val="120000"/>
-              </a:lnSpc>
-            </a:pPr>
-            <a:r>
-              <a:rPr sz="1130" b="0" i="0">
-                <a:solidFill>
-                  <a:srgbClr val="262626"/>
-                </a:solidFill>
-                <a:latin typeface="Yu Gothic"/>
-              </a:rPr>
-              <a:t>マネージド環境下でアプリ・クラウドフローを実行するすべてのユーザーは、Power Apps Premium・Power Automate Premium・Dynamics 365 Enterprise のいずれかのライセンスが必須と明記されており、管理者専用の例外は記載されていない。</a:t>
-            </a:r>
-          </a:p>
-        </p:txBody>
-      </p:sp>
-      <p:sp>
-        <p:nvSpPr>
-          <p:cNvPr id="14" name="TextBox 13"/>
-          <p:cNvSpPr txBox="1"/>
-          <p:nvPr/>
-        </p:nvSpPr>
-        <p:spPr>
-          <a:xfrm>
-            <a:off x="502920" y="6565392"/>
-            <a:ext cx="8229600" cy="274320"/>
-          </a:xfrm>
-          <a:prstGeom prst="rect">
-            <a:avLst/>
-          </a:prstGeom>
-          <a:noFill/>
-        </p:spPr>
-        <p:txBody>
-          <a:bodyPr wrap="square" anchor="t" lIns="0" rIns="0" tIns="0" bIns="0">
-            <a:spAutoFit/>
-          </a:bodyPr>
-          <a:lstStyle/>
-          <a:p>
-            <a:pPr algn="l">
-              <a:lnSpc>
-                <a:spcPct val="100000"/>
-              </a:lnSpc>
-            </a:pPr>
-            <a:r>
               <a:rPr sz="900" b="0" i="0">
                 <a:solidFill>
                   <a:srgbClr val="6E6E6E"/>
@@ -12883,7 +16598,7 @@
       </p:sp>
       <p:sp>
         <p:nvSpPr>
-          <p:cNvPr id="15" name="TextBox 14"/>
+          <p:cNvPr id="11" name="TextBox 10"/>
           <p:cNvSpPr txBox="1"/>
           <p:nvPr/>
         </p:nvSpPr>
@@ -13176,7 +16891,7 @@
         <p:spPr>
           <a:xfrm>
             <a:off x="502920" y="1965960"/>
-            <a:ext cx="6949440" cy="3246120"/>
+            <a:ext cx="6949440" cy="3657600"/>
           </a:xfrm>
           <a:prstGeom prst="rect">
             <a:avLst/>
@@ -13382,7 +17097,7 @@
         <p:spPr>
           <a:xfrm>
             <a:off x="7726679" y="1325880"/>
-            <a:ext cx="3977639" cy="3337560"/>
+            <a:ext cx="3977639" cy="4297680"/>
           </a:xfrm>
           <a:prstGeom prst="rect">
             <a:avLst/>
@@ -13465,7 +17180,7 @@
         <p:spPr>
           <a:xfrm>
             <a:off x="7955279" y="2103120"/>
-            <a:ext cx="3566160" cy="2468880"/>
+            <a:ext cx="3566160" cy="3291840"/>
           </a:xfrm>
           <a:prstGeom prst="rect">
             <a:avLst/>
@@ -13578,104 +17293,14 @@
       </p:sp>
       <p:sp>
         <p:nvSpPr>
-          <p:cNvPr id="11" name="Rectangle 10"/>
-          <p:cNvSpPr/>
-          <p:nvPr/>
-        </p:nvSpPr>
-        <p:spPr>
-          <a:xfrm>
-            <a:off x="502920" y="5349240"/>
-            <a:ext cx="11201400" cy="1051560"/>
-          </a:xfrm>
-          <a:prstGeom prst="rect">
-            <a:avLst/>
-          </a:prstGeom>
-          <a:solidFill>
-            <a:srgbClr val="EFF2F7"/>
-          </a:solidFill>
-          <a:ln w="9525">
-            <a:solidFill>
-              <a:srgbClr val="D9DCE1"/>
-            </a:solidFill>
-          </a:ln>
-          <a:effectLst/>
-        </p:spPr>
-        <p:style>
-          <a:lnRef idx="1">
-            <a:schemeClr val="accent1"/>
-          </a:lnRef>
-          <a:fillRef idx="3">
-            <a:schemeClr val="accent1"/>
-          </a:fillRef>
-          <a:effectRef idx="2">
-            <a:schemeClr val="accent1"/>
-          </a:effectRef>
-          <a:fontRef idx="minor">
-            <a:schemeClr val="lt1"/>
-          </a:fontRef>
-        </p:style>
-        <p:txBody>
-          <a:bodyPr rtlCol="0" anchor="ctr"/>
-          <a:lstStyle/>
-          <a:p>
-            <a:pPr algn="ctr"/>
-          </a:p>
-        </p:txBody>
-      </p:sp>
-      <p:sp>
-        <p:nvSpPr>
-          <p:cNvPr id="12" name="Rectangle 11"/>
-          <p:cNvSpPr/>
-          <p:nvPr/>
-        </p:nvSpPr>
-        <p:spPr>
-          <a:xfrm>
-            <a:off x="502920" y="5349240"/>
-            <a:ext cx="73152" cy="1051560"/>
-          </a:xfrm>
-          <a:prstGeom prst="rect">
-            <a:avLst/>
-          </a:prstGeom>
-          <a:solidFill>
-            <a:srgbClr val="2E5AAC"/>
-          </a:solidFill>
-          <a:ln>
-            <a:noFill/>
-          </a:ln>
-          <a:effectLst/>
-        </p:spPr>
-        <p:style>
-          <a:lnRef idx="1">
-            <a:schemeClr val="accent1"/>
-          </a:lnRef>
-          <a:fillRef idx="3">
-            <a:schemeClr val="accent1"/>
-          </a:fillRef>
-          <a:effectRef idx="2">
-            <a:schemeClr val="accent1"/>
-          </a:effectRef>
-          <a:fontRef idx="minor">
-            <a:schemeClr val="lt1"/>
-          </a:fontRef>
-        </p:style>
-        <p:txBody>
-          <a:bodyPr rtlCol="0" anchor="ctr"/>
-          <a:lstStyle/>
-          <a:p>
-            <a:pPr algn="ctr"/>
-          </a:p>
-        </p:txBody>
-      </p:sp>
-      <p:sp>
-        <p:nvSpPr>
-          <p:cNvPr id="13" name="TextBox 12"/>
+          <p:cNvPr id="11" name="TextBox 10"/>
           <p:cNvSpPr txBox="1"/>
           <p:nvPr/>
         </p:nvSpPr>
         <p:spPr>
           <a:xfrm>
-            <a:off x="704088" y="5440680"/>
-            <a:ext cx="10835640" cy="292608"/>
+            <a:off x="502920" y="6565392"/>
+            <a:ext cx="8229600" cy="274320"/>
           </a:xfrm>
           <a:prstGeom prst="rect">
             <a:avLst/>
@@ -13694,84 +17319,6 @@
               </a:lnSpc>
             </a:pPr>
             <a:r>
-              <a:rPr sz="1200" b="1" i="0">
-                <a:solidFill>
-                  <a:srgbClr val="1B2A4A"/>
-                </a:solidFill>
-                <a:latin typeface="Yu Gothic"/>
-              </a:rPr>
-              <a:t>根拠（Microsoft公式情報）： 「Manage data policies／Impact of data policies on apps and flows」</a:t>
-            </a:r>
-          </a:p>
-        </p:txBody>
-      </p:sp>
-      <p:sp>
-        <p:nvSpPr>
-          <p:cNvPr id="14" name="TextBox 13"/>
-          <p:cNvSpPr txBox="1"/>
-          <p:nvPr/>
-        </p:nvSpPr>
-        <p:spPr>
-          <a:xfrm>
-            <a:off x="704088" y="5769864"/>
-            <a:ext cx="10835640" cy="539496"/>
-          </a:xfrm>
-          <a:prstGeom prst="rect">
-            <a:avLst/>
-          </a:prstGeom>
-          <a:noFill/>
-        </p:spPr>
-        <p:txBody>
-          <a:bodyPr wrap="square" anchor="t" lIns="0" rIns="0" tIns="0" bIns="0">
-            <a:spAutoFit/>
-          </a:bodyPr>
-          <a:lstStyle/>
-          <a:p>
-            <a:pPr algn="l">
-              <a:lnSpc>
-                <a:spcPct val="120000"/>
-              </a:lnSpc>
-            </a:pPr>
-            <a:r>
-              <a:rPr sz="1130" b="0" i="0">
-                <a:solidFill>
-                  <a:srgbClr val="262626"/>
-                </a:solidFill>
-                <a:latin typeface="Yu Gothic"/>
-              </a:rPr>
-              <a:t>DLPポリシーはライセンス種別を問わず全利用者に適用され、違反時は実行時・設計時にエラーとしてブロックされると説明されている。ポリシー適用の条件としてPremiumライセンスの保有は記載されておらず、これが本判定の根拠となっている。</a:t>
-            </a:r>
-          </a:p>
-        </p:txBody>
-      </p:sp>
-      <p:sp>
-        <p:nvSpPr>
-          <p:cNvPr id="15" name="TextBox 14"/>
-          <p:cNvSpPr txBox="1"/>
-          <p:nvPr/>
-        </p:nvSpPr>
-        <p:spPr>
-          <a:xfrm>
-            <a:off x="502920" y="6565392"/>
-            <a:ext cx="8229600" cy="274320"/>
-          </a:xfrm>
-          <a:prstGeom prst="rect">
-            <a:avLst/>
-          </a:prstGeom>
-          <a:noFill/>
-        </p:spPr>
-        <p:txBody>
-          <a:bodyPr wrap="square" anchor="t" lIns="0" rIns="0" tIns="0" bIns="0">
-            <a:spAutoFit/>
-          </a:bodyPr>
-          <a:lstStyle/>
-          <a:p>
-            <a:pPr algn="l">
-              <a:lnSpc>
-                <a:spcPct val="100000"/>
-              </a:lnSpc>
-            </a:pPr>
-            <a:r>
               <a:rPr sz="900" b="0" i="0">
                 <a:solidFill>
                   <a:srgbClr val="6E6E6E"/>
@@ -13785,7 +17332,7 @@
       </p:sp>
       <p:sp>
         <p:nvSpPr>
-          <p:cNvPr id="16" name="TextBox 15"/>
+          <p:cNvPr id="12" name="TextBox 11"/>
           <p:cNvSpPr txBox="1"/>
           <p:nvPr/>
         </p:nvSpPr>
@@ -14077,7 +17624,7 @@
         </p:nvSpPr>
         <p:spPr>
           <a:xfrm>
-            <a:off x="502920" y="1920240"/>
+            <a:off x="502920" y="2011680"/>
             <a:ext cx="384048" cy="384048"/>
           </a:xfrm>
           <a:prstGeom prst="ellipse">
@@ -14121,7 +17668,7 @@
         </p:nvSpPr>
         <p:spPr>
           <a:xfrm>
-            <a:off x="502920" y="1965960"/>
+            <a:off x="502920" y="2057400"/>
             <a:ext cx="384048" cy="292608"/>
           </a:xfrm>
           <a:prstGeom prst="rect">
@@ -14160,7 +17707,7 @@
         </p:nvSpPr>
         <p:spPr>
           <a:xfrm>
-            <a:off x="1051560" y="1901952"/>
+            <a:off x="1051560" y="1993392"/>
             <a:ext cx="4480560" cy="457200"/>
           </a:xfrm>
           <a:prstGeom prst="rect">
@@ -14199,8 +17746,8 @@
         </p:nvSpPr>
         <p:spPr>
           <a:xfrm>
-            <a:off x="5669280" y="1901952"/>
-            <a:ext cx="6035040" cy="502920"/>
+            <a:off x="5669280" y="1993392"/>
+            <a:ext cx="6035040" cy="548640"/>
           </a:xfrm>
           <a:prstGeom prst="rect">
             <a:avLst/>
@@ -14254,8 +17801,8 @@
         </p:nvSpPr>
         <p:spPr>
           <a:xfrm>
-            <a:off x="685800" y="2304288"/>
-            <a:ext cx="19050" cy="173736"/>
+            <a:off x="685800" y="2395728"/>
+            <a:ext cx="19050" cy="283464"/>
           </a:xfrm>
           <a:prstGeom prst="rect">
             <a:avLst/>
@@ -14298,7 +17845,7 @@
         </p:nvSpPr>
         <p:spPr>
           <a:xfrm>
-            <a:off x="502920" y="2496312"/>
+            <a:off x="502920" y="2697480"/>
             <a:ext cx="384048" cy="384048"/>
           </a:xfrm>
           <a:prstGeom prst="ellipse">
@@ -14342,7 +17889,7 @@
         </p:nvSpPr>
         <p:spPr>
           <a:xfrm>
-            <a:off x="502920" y="2542032"/>
+            <a:off x="502920" y="2743200"/>
             <a:ext cx="384048" cy="292608"/>
           </a:xfrm>
           <a:prstGeom prst="rect">
@@ -14381,7 +17928,7 @@
         </p:nvSpPr>
         <p:spPr>
           <a:xfrm>
-            <a:off x="1051560" y="2478024"/>
+            <a:off x="1051560" y="2679192"/>
             <a:ext cx="4480560" cy="457200"/>
           </a:xfrm>
           <a:prstGeom prst="rect">
@@ -14420,8 +17967,8 @@
         </p:nvSpPr>
         <p:spPr>
           <a:xfrm>
-            <a:off x="5669280" y="2478024"/>
-            <a:ext cx="6035040" cy="502920"/>
+            <a:off x="5669280" y="2679192"/>
+            <a:ext cx="6035040" cy="548640"/>
           </a:xfrm>
           <a:prstGeom prst="rect">
             <a:avLst/>
@@ -14459,8 +18006,8 @@
         </p:nvSpPr>
         <p:spPr>
           <a:xfrm>
-            <a:off x="685800" y="2880360"/>
-            <a:ext cx="19050" cy="173736"/>
+            <a:off x="685800" y="3081528"/>
+            <a:ext cx="19050" cy="283464"/>
           </a:xfrm>
           <a:prstGeom prst="rect">
             <a:avLst/>
@@ -14503,7 +18050,7 @@
         </p:nvSpPr>
         <p:spPr>
           <a:xfrm>
-            <a:off x="502920" y="3072384"/>
+            <a:off x="502920" y="3383280"/>
             <a:ext cx="384048" cy="384048"/>
           </a:xfrm>
           <a:prstGeom prst="ellipse">
@@ -14547,7 +18094,7 @@
         </p:nvSpPr>
         <p:spPr>
           <a:xfrm>
-            <a:off x="502920" y="3118104"/>
+            <a:off x="502920" y="3429000"/>
             <a:ext cx="384048" cy="292608"/>
           </a:xfrm>
           <a:prstGeom prst="rect">
@@ -14586,7 +18133,7 @@
         </p:nvSpPr>
         <p:spPr>
           <a:xfrm>
-            <a:off x="1051560" y="3054096"/>
+            <a:off x="1051560" y="3364992"/>
             <a:ext cx="4480560" cy="457200"/>
           </a:xfrm>
           <a:prstGeom prst="rect">
@@ -14625,8 +18172,8 @@
         </p:nvSpPr>
         <p:spPr>
           <a:xfrm>
-            <a:off x="5669280" y="3054096"/>
-            <a:ext cx="6035040" cy="502920"/>
+            <a:off x="5669280" y="3364992"/>
+            <a:ext cx="6035040" cy="548640"/>
           </a:xfrm>
           <a:prstGeom prst="rect">
             <a:avLst/>
@@ -14680,8 +18227,8 @@
         </p:nvSpPr>
         <p:spPr>
           <a:xfrm>
-            <a:off x="685800" y="3456432"/>
-            <a:ext cx="19050" cy="173736"/>
+            <a:off x="685800" y="3767328"/>
+            <a:ext cx="19050" cy="283464"/>
           </a:xfrm>
           <a:prstGeom prst="rect">
             <a:avLst/>
@@ -14724,7 +18271,7 @@
         </p:nvSpPr>
         <p:spPr>
           <a:xfrm>
-            <a:off x="502920" y="3648456"/>
+            <a:off x="502920" y="4069080"/>
             <a:ext cx="384048" cy="384048"/>
           </a:xfrm>
           <a:prstGeom prst="ellipse">
@@ -14768,7 +18315,7 @@
         </p:nvSpPr>
         <p:spPr>
           <a:xfrm>
-            <a:off x="502920" y="3694176"/>
+            <a:off x="502920" y="4114800"/>
             <a:ext cx="384048" cy="292608"/>
           </a:xfrm>
           <a:prstGeom prst="rect">
@@ -14807,7 +18354,7 @@
         </p:nvSpPr>
         <p:spPr>
           <a:xfrm>
-            <a:off x="1051560" y="3630168"/>
+            <a:off x="1051560" y="4050792"/>
             <a:ext cx="4480560" cy="457200"/>
           </a:xfrm>
           <a:prstGeom prst="rect">
@@ -14846,8 +18393,8 @@
         </p:nvSpPr>
         <p:spPr>
           <a:xfrm>
-            <a:off x="5669280" y="3630168"/>
-            <a:ext cx="6035040" cy="502920"/>
+            <a:off x="5669280" y="4050792"/>
+            <a:ext cx="6035040" cy="548640"/>
           </a:xfrm>
           <a:prstGeom prst="rect">
             <a:avLst/>
@@ -14901,8 +18448,8 @@
         </p:nvSpPr>
         <p:spPr>
           <a:xfrm>
-            <a:off x="685800" y="4032504"/>
-            <a:ext cx="19050" cy="173736"/>
+            <a:off x="685800" y="4453128"/>
+            <a:ext cx="19050" cy="283464"/>
           </a:xfrm>
           <a:prstGeom prst="rect">
             <a:avLst/>
@@ -14945,7 +18492,7 @@
         </p:nvSpPr>
         <p:spPr>
           <a:xfrm>
-            <a:off x="502920" y="4224528"/>
+            <a:off x="502920" y="4754880"/>
             <a:ext cx="384048" cy="384048"/>
           </a:xfrm>
           <a:prstGeom prst="ellipse">
@@ -14989,7 +18536,7 @@
         </p:nvSpPr>
         <p:spPr>
           <a:xfrm>
-            <a:off x="502920" y="4270248"/>
+            <a:off x="502920" y="4800600"/>
             <a:ext cx="384048" cy="292608"/>
           </a:xfrm>
           <a:prstGeom prst="rect">
@@ -15028,7 +18575,7 @@
         </p:nvSpPr>
         <p:spPr>
           <a:xfrm>
-            <a:off x="1051560" y="4206240"/>
+            <a:off x="1051560" y="4736592"/>
             <a:ext cx="4480560" cy="457200"/>
           </a:xfrm>
           <a:prstGeom prst="rect">
@@ -15067,8 +18614,8 @@
         </p:nvSpPr>
         <p:spPr>
           <a:xfrm>
-            <a:off x="5669280" y="4206240"/>
-            <a:ext cx="6035040" cy="502920"/>
+            <a:off x="5669280" y="4736592"/>
+            <a:ext cx="6035040" cy="548640"/>
           </a:xfrm>
           <a:prstGeom prst="rect">
             <a:avLst/>
@@ -15106,8 +18653,8 @@
         </p:nvSpPr>
         <p:spPr>
           <a:xfrm>
-            <a:off x="685800" y="4608576"/>
-            <a:ext cx="19050" cy="173736"/>
+            <a:off x="685800" y="5138928"/>
+            <a:ext cx="19050" cy="283464"/>
           </a:xfrm>
           <a:prstGeom prst="rect">
             <a:avLst/>
@@ -15150,7 +18697,7 @@
         </p:nvSpPr>
         <p:spPr>
           <a:xfrm>
-            <a:off x="502920" y="4800600"/>
+            <a:off x="502920" y="5440680"/>
             <a:ext cx="384048" cy="384048"/>
           </a:xfrm>
           <a:prstGeom prst="ellipse">
@@ -15194,7 +18741,7 @@
         </p:nvSpPr>
         <p:spPr>
           <a:xfrm>
-            <a:off x="502920" y="4846320"/>
+            <a:off x="502920" y="5486400"/>
             <a:ext cx="384048" cy="292608"/>
           </a:xfrm>
           <a:prstGeom prst="rect">
@@ -15233,7 +18780,7 @@
         </p:nvSpPr>
         <p:spPr>
           <a:xfrm>
-            <a:off x="1051560" y="4782312"/>
+            <a:off x="1051560" y="5422392"/>
             <a:ext cx="4480560" cy="457200"/>
           </a:xfrm>
           <a:prstGeom prst="rect">
@@ -15272,8 +18819,8 @@
         </p:nvSpPr>
         <p:spPr>
           <a:xfrm>
-            <a:off x="5669280" y="4782312"/>
-            <a:ext cx="6035040" cy="502920"/>
+            <a:off x="5669280" y="5422392"/>
+            <a:ext cx="6035040" cy="548640"/>
           </a:xfrm>
           <a:prstGeom prst="rect">
             <a:avLst/>
@@ -15305,104 +18852,14 @@
       </p:sp>
       <p:sp>
         <p:nvSpPr>
-          <p:cNvPr id="36" name="Rectangle 35"/>
-          <p:cNvSpPr/>
-          <p:nvPr/>
-        </p:nvSpPr>
-        <p:spPr>
-          <a:xfrm>
-            <a:off x="502920" y="5532120"/>
-            <a:ext cx="11201400" cy="914400"/>
-          </a:xfrm>
-          <a:prstGeom prst="rect">
-            <a:avLst/>
-          </a:prstGeom>
-          <a:solidFill>
-            <a:srgbClr val="EFF2F7"/>
-          </a:solidFill>
-          <a:ln w="9525">
-            <a:solidFill>
-              <a:srgbClr val="D9DCE1"/>
-            </a:solidFill>
-          </a:ln>
-          <a:effectLst/>
-        </p:spPr>
-        <p:style>
-          <a:lnRef idx="1">
-            <a:schemeClr val="accent1"/>
-          </a:lnRef>
-          <a:fillRef idx="3">
-            <a:schemeClr val="accent1"/>
-          </a:fillRef>
-          <a:effectRef idx="2">
-            <a:schemeClr val="accent1"/>
-          </a:effectRef>
-          <a:fontRef idx="minor">
-            <a:schemeClr val="lt1"/>
-          </a:fontRef>
-        </p:style>
-        <p:txBody>
-          <a:bodyPr rtlCol="0" anchor="ctr"/>
-          <a:lstStyle/>
-          <a:p>
-            <a:pPr algn="ctr"/>
-          </a:p>
-        </p:txBody>
-      </p:sp>
-      <p:sp>
-        <p:nvSpPr>
-          <p:cNvPr id="37" name="Rectangle 36"/>
-          <p:cNvSpPr/>
-          <p:nvPr/>
-        </p:nvSpPr>
-        <p:spPr>
-          <a:xfrm>
-            <a:off x="502920" y="5532120"/>
-            <a:ext cx="73152" cy="914400"/>
-          </a:xfrm>
-          <a:prstGeom prst="rect">
-            <a:avLst/>
-          </a:prstGeom>
-          <a:solidFill>
-            <a:srgbClr val="2E5AAC"/>
-          </a:solidFill>
-          <a:ln>
-            <a:noFill/>
-          </a:ln>
-          <a:effectLst/>
-        </p:spPr>
-        <p:style>
-          <a:lnRef idx="1">
-            <a:schemeClr val="accent1"/>
-          </a:lnRef>
-          <a:fillRef idx="3">
-            <a:schemeClr val="accent1"/>
-          </a:fillRef>
-          <a:effectRef idx="2">
-            <a:schemeClr val="accent1"/>
-          </a:effectRef>
-          <a:fontRef idx="minor">
-            <a:schemeClr val="lt1"/>
-          </a:fontRef>
-        </p:style>
-        <p:txBody>
-          <a:bodyPr rtlCol="0" anchor="ctr"/>
-          <a:lstStyle/>
-          <a:p>
-            <a:pPr algn="ctr"/>
-          </a:p>
-        </p:txBody>
-      </p:sp>
-      <p:sp>
-        <p:nvSpPr>
-          <p:cNvPr id="38" name="TextBox 37"/>
+          <p:cNvPr id="36" name="TextBox 35"/>
           <p:cNvSpPr txBox="1"/>
           <p:nvPr/>
         </p:nvSpPr>
         <p:spPr>
           <a:xfrm>
-            <a:off x="704088" y="5623560"/>
-            <a:ext cx="10835640" cy="292608"/>
+            <a:off x="502920" y="6565392"/>
+            <a:ext cx="8229600" cy="274320"/>
           </a:xfrm>
           <a:prstGeom prst="rect">
             <a:avLst/>
@@ -15421,84 +18878,6 @@
               </a:lnSpc>
             </a:pPr>
             <a:r>
-              <a:rPr sz="1200" b="1" i="0">
-                <a:solidFill>
-                  <a:srgbClr val="1B2A4A"/>
-                </a:solidFill>
-                <a:latin typeface="Yu Gothic"/>
-              </a:rPr>
-              <a:t>根拠（Microsoft公式情報）： 「Manage data policies／View policies and scope」</a:t>
-            </a:r>
-          </a:p>
-        </p:txBody>
-      </p:sp>
-      <p:sp>
-        <p:nvSpPr>
-          <p:cNvPr id="39" name="TextBox 38"/>
-          <p:cNvSpPr txBox="1"/>
-          <p:nvPr/>
-        </p:nvSpPr>
-        <p:spPr>
-          <a:xfrm>
-            <a:off x="704088" y="5952744"/>
-            <a:ext cx="10835640" cy="402336"/>
-          </a:xfrm>
-          <a:prstGeom prst="rect">
-            <a:avLst/>
-          </a:prstGeom>
-          <a:noFill/>
-        </p:spPr>
-        <p:txBody>
-          <a:bodyPr wrap="square" anchor="t" lIns="0" rIns="0" tIns="0" bIns="0">
-            <a:spAutoFit/>
-          </a:bodyPr>
-          <a:lstStyle/>
-          <a:p>
-            <a:pPr algn="l">
-              <a:lnSpc>
-                <a:spcPct val="120000"/>
-              </a:lnSpc>
-            </a:pPr>
-            <a:r>
-              <a:rPr sz="1130" b="0" i="0">
-                <a:solidFill>
-                  <a:srgbClr val="262626"/>
-                </a:solidFill>
-                <a:latin typeface="Yu Gothic"/>
-              </a:rPr>
-              <a:t>Power Platform 管理センターにおけるデータ ポリシーの作成・スコープ設定・コネクタ分類の操作手順として明記されている内容に基づく。</a:t>
-            </a:r>
-          </a:p>
-        </p:txBody>
-      </p:sp>
-      <p:sp>
-        <p:nvSpPr>
-          <p:cNvPr id="40" name="TextBox 39"/>
-          <p:cNvSpPr txBox="1"/>
-          <p:nvPr/>
-        </p:nvSpPr>
-        <p:spPr>
-          <a:xfrm>
-            <a:off x="502920" y="6565392"/>
-            <a:ext cx="8229600" cy="274320"/>
-          </a:xfrm>
-          <a:prstGeom prst="rect">
-            <a:avLst/>
-          </a:prstGeom>
-          <a:noFill/>
-        </p:spPr>
-        <p:txBody>
-          <a:bodyPr wrap="square" anchor="t" lIns="0" rIns="0" tIns="0" bIns="0">
-            <a:spAutoFit/>
-          </a:bodyPr>
-          <a:lstStyle/>
-          <a:p>
-            <a:pPr algn="l">
-              <a:lnSpc>
-                <a:spcPct val="100000"/>
-              </a:lnSpc>
-            </a:pPr>
-            <a:r>
               <a:rPr sz="900" b="0" i="0">
                 <a:solidFill>
                   <a:srgbClr val="6E6E6E"/>
@@ -15512,7 +18891,7 @@
       </p:sp>
       <p:sp>
         <p:nvSpPr>
-          <p:cNvPr id="41" name="TextBox 40"/>
+          <p:cNvPr id="37" name="TextBox 36"/>
           <p:cNvSpPr txBox="1"/>
           <p:nvPr/>
         </p:nvSpPr>

--- a/docs/PowerPlatform_DefaultEnv_Governance_Report.pptx
+++ b/docs/PowerPlatform_DefaultEnv_Governance_Report.pptx
@@ -22,6 +22,7 @@
     <p:sldId id="270" r:id="rId21"/>
     <p:sldId id="271" r:id="rId22"/>
     <p:sldId id="272" r:id="rId23"/>
+    <p:sldId id="273" r:id="rId24"/>
   </p:sldIdLst>
   <p:sldSz cx="12191695" cy="6858000" type="screen4x3"/>
   <p:notesSz cx="6858000" cy="9144000"/>
@@ -3606,8 +3607,8 @@
         </p:nvSpPr>
         <p:spPr>
           <a:xfrm>
-            <a:off x="502920" y="1298448"/>
-            <a:ext cx="2011680" cy="457200"/>
+            <a:off x="502920" y="1188720"/>
+            <a:ext cx="2011680" cy="365760"/>
           </a:xfrm>
           <a:prstGeom prst="roundRect">
             <a:avLst>
@@ -3655,14 +3656,58 @@
       </p:sp>
       <p:sp>
         <p:nvSpPr>
-          <p:cNvPr id="7" name="TextBox 6"/>
+          <p:cNvPr id="7" name="Rectangle 6"/>
+          <p:cNvSpPr/>
+          <p:nvPr/>
+        </p:nvSpPr>
+        <p:spPr>
+          <a:xfrm>
+            <a:off x="502920" y="1645920"/>
+            <a:ext cx="11201400" cy="1417320"/>
+          </a:xfrm>
+          <a:prstGeom prst="rect">
+            <a:avLst/>
+          </a:prstGeom>
+          <a:solidFill>
+            <a:srgbClr val="F5F6F8"/>
+          </a:solidFill>
+          <a:ln>
+            <a:noFill/>
+          </a:ln>
+          <a:effectLst/>
+        </p:spPr>
+        <p:style>
+          <a:lnRef idx="1">
+            <a:schemeClr val="accent1"/>
+          </a:lnRef>
+          <a:fillRef idx="3">
+            <a:schemeClr val="accent1"/>
+          </a:fillRef>
+          <a:effectRef idx="2">
+            <a:schemeClr val="accent1"/>
+          </a:effectRef>
+          <a:fontRef idx="minor">
+            <a:schemeClr val="lt1"/>
+          </a:fontRef>
+        </p:style>
+        <p:txBody>
+          <a:bodyPr rtlCol="0" anchor="ctr"/>
+          <a:lstStyle/>
+          <a:p>
+            <a:pPr algn="ctr"/>
+          </a:p>
+        </p:txBody>
+      </p:sp>
+      <p:sp>
+        <p:nvSpPr>
+          <p:cNvPr id="8" name="TextBox 7"/>
           <p:cNvSpPr txBox="1"/>
           <p:nvPr/>
         </p:nvSpPr>
         <p:spPr>
           <a:xfrm>
-            <a:off x="2651760" y="1298448"/>
-            <a:ext cx="9052560" cy="457200"/>
+            <a:off x="685800" y="1719072"/>
+            <a:ext cx="10789920" cy="274320"/>
           </a:xfrm>
           <a:prstGeom prst="rect">
             <a:avLst/>
@@ -3670,7 +3715,7 @@
           <a:noFill/>
         </p:spPr>
         <p:txBody>
-          <a:bodyPr wrap="square" anchor="ctr" lIns="0" rIns="0" tIns="0" bIns="0">
+          <a:bodyPr wrap="square" anchor="t" lIns="0" rIns="0" tIns="0" bIns="0">
             <a:spAutoFit/>
           </a:bodyPr>
           <a:lstStyle/>
@@ -3681,27 +3726,117 @@
               </a:lnSpc>
             </a:pPr>
             <a:r>
-              <a:rPr sz="1200" b="0" i="1">
+              <a:rPr sz="1250" b="1" i="0">
+                <a:solidFill>
+                  <a:srgbClr val="1B2A4A"/>
+                </a:solidFill>
+                <a:latin typeface="Yu Gothic"/>
+              </a:rPr>
+              <a:t>なぜ実務上ハードルが高いか</a:t>
+            </a:r>
+          </a:p>
+        </p:txBody>
+      </p:sp>
+      <p:sp>
+        <p:nvSpPr>
+          <p:cNvPr id="9" name="TextBox 8"/>
+          <p:cNvSpPr txBox="1"/>
+          <p:nvPr/>
+        </p:nvSpPr>
+        <p:spPr>
+          <a:xfrm>
+            <a:off x="685800" y="2011680"/>
+            <a:ext cx="10789920" cy="1005840"/>
+          </a:xfrm>
+          <a:prstGeom prst="rect">
+            <a:avLst/>
+          </a:prstGeom>
+          <a:noFill/>
+        </p:spPr>
+        <p:txBody>
+          <a:bodyPr wrap="square">
+            <a:spAutoFit/>
+          </a:bodyPr>
+          <a:lstStyle/>
+          <a:p>
+            <a:pPr>
+              <a:lnSpc>
+                <a:spcPct val="110000"/>
+              </a:lnSpc>
+              <a:spcAft>
+                <a:spcPts val="400"/>
+              </a:spcAft>
+            </a:pPr>
+            <a:r>
+              <a:rPr sz="1030" b="0">
                 <a:solidFill>
                   <a:srgbClr val="262626"/>
                 </a:solidFill>
                 <a:latin typeface="Yu Gothic"/>
               </a:rPr>
-              <a:t>制約の理由：Default環境は全社員が標準アクセス可能なため、有効化すると事実上「全社Premium化」が前提となる</a:t>
-            </a:r>
-          </a:p>
-        </p:txBody>
-      </p:sp>
-      <p:sp>
-        <p:nvSpPr>
-          <p:cNvPr id="8" name="Rectangle 7"/>
+              <a:t>● コスト：全社員分のPremiumライセンス費用（既存ライセンス比でE3は約1.6倍、E5は約1.3倍の負担目安。</a:t>
+            </a:r>
+            <a:br/>
+            <a:r>
+              <a:rPr sz="1030" b="0">
+                <a:solidFill>
+                  <a:srgbClr val="262626"/>
+                </a:solidFill>
+                <a:latin typeface="Yu Gothic"/>
+              </a:rPr>
+              <a:t>詳細は契約内容により要確認）</a:t>
+            </a:r>
+          </a:p>
+          <a:p>
+            <a:pPr>
+              <a:lnSpc>
+                <a:spcPct val="110000"/>
+              </a:lnSpc>
+              <a:spcAft>
+                <a:spcPts val="400"/>
+              </a:spcAft>
+            </a:pPr>
+            <a:r>
+              <a:rPr sz="1030" b="0">
+                <a:solidFill>
+                  <a:srgbClr val="262626"/>
+                </a:solidFill>
+                <a:latin typeface="Yu Gothic"/>
+              </a:rPr>
+              <a:t>● 予算承認：全社規模のライセンス契約見直し・予算承認プロセスが必要</a:t>
+            </a:r>
+          </a:p>
+          <a:p>
+            <a:pPr>
+              <a:lnSpc>
+                <a:spcPct val="110000"/>
+              </a:lnSpc>
+              <a:spcAft>
+                <a:spcPts val="400"/>
+              </a:spcAft>
+            </a:pPr>
+            <a:r>
+              <a:rPr sz="1030" b="0">
+                <a:solidFill>
+                  <a:srgbClr val="262626"/>
+                </a:solidFill>
+                <a:latin typeface="Yu Gothic"/>
+              </a:rPr>
+              <a:t>● 既存利用者への影響：Premium未取得のまま残る無償ユーザーがアクセス制限を受ける可能性</a:t>
+            </a:r>
+          </a:p>
+        </p:txBody>
+      </p:sp>
+      <p:sp>
+        <p:nvSpPr>
+          <p:cNvPr id="10" name="Rectangle 9"/>
           <p:cNvSpPr/>
           <p:nvPr/>
         </p:nvSpPr>
         <p:spPr>
           <a:xfrm>
-            <a:off x="502920" y="1965960"/>
-            <a:ext cx="5532120" cy="1965960"/>
+            <a:off x="502920" y="3200400"/>
+            <a:ext cx="5532120" cy="1508760"/>
           </a:xfrm>
           <a:prstGeom prst="rect">
             <a:avLst/>
@@ -3740,14 +3875,14 @@
       </p:sp>
       <p:sp>
         <p:nvSpPr>
-          <p:cNvPr id="9" name="Rectangle 8"/>
+          <p:cNvPr id="11" name="Rectangle 10"/>
           <p:cNvSpPr/>
           <p:nvPr/>
         </p:nvSpPr>
         <p:spPr>
           <a:xfrm>
-            <a:off x="502920" y="1965960"/>
-            <a:ext cx="5532120" cy="73152"/>
+            <a:off x="502920" y="3200400"/>
+            <a:ext cx="5532120" cy="64008"/>
           </a:xfrm>
           <a:prstGeom prst="rect">
             <a:avLst/>
@@ -3784,14 +3919,14 @@
       </p:sp>
       <p:sp>
         <p:nvSpPr>
-          <p:cNvPr id="10" name="TextBox 9"/>
+          <p:cNvPr id="12" name="TextBox 11"/>
           <p:cNvSpPr txBox="1"/>
           <p:nvPr/>
         </p:nvSpPr>
         <p:spPr>
           <a:xfrm>
-            <a:off x="685800" y="2148840"/>
-            <a:ext cx="5166360" cy="502920"/>
+            <a:off x="667512" y="3319272"/>
+            <a:ext cx="5202936" cy="384048"/>
           </a:xfrm>
           <a:prstGeom prst="rect">
             <a:avLst/>
@@ -3810,7 +3945,7 @@
               </a:lnSpc>
             </a:pPr>
             <a:r>
-              <a:rPr sz="1350" b="1" i="0">
+              <a:rPr sz="1200" b="1" i="0">
                 <a:solidFill>
                   <a:srgbClr val="1B2A4A"/>
                 </a:solidFill>
@@ -3826,7 +3961,7 @@
               </a:lnSpc>
             </a:pPr>
             <a:r>
-              <a:rPr sz="1350" b="1" i="0">
+              <a:rPr sz="1200" b="1" i="0">
                 <a:solidFill>
                   <a:srgbClr val="1B2A4A"/>
                 </a:solidFill>
@@ -3839,14 +3974,14 @@
       </p:sp>
       <p:sp>
         <p:nvSpPr>
-          <p:cNvPr id="11" name="TextBox 10"/>
+          <p:cNvPr id="13" name="TextBox 12"/>
           <p:cNvSpPr txBox="1"/>
           <p:nvPr/>
         </p:nvSpPr>
         <p:spPr>
           <a:xfrm>
-            <a:off x="685800" y="2651760"/>
-            <a:ext cx="5166360" cy="1097280"/>
+            <a:off x="667512" y="3703320"/>
+            <a:ext cx="5202936" cy="914400"/>
           </a:xfrm>
           <a:prstGeom prst="rect">
             <a:avLst/>
@@ -3861,31 +3996,31 @@
           <a:p>
             <a:pPr algn="l">
               <a:lnSpc>
-                <a:spcPct val="120000"/>
-              </a:lnSpc>
-            </a:pPr>
-            <a:r>
-              <a:rPr sz="1150" b="0" i="0">
+                <a:spcPct val="110000"/>
+              </a:lnSpc>
+            </a:pPr>
+            <a:r>
+              <a:rPr sz="980" b="0" i="0">
                 <a:solidFill>
                   <a:srgbClr val="262626"/>
                 </a:solidFill>
                 <a:latin typeface="Yu Gothic"/>
               </a:rPr>
-              <a:t>Copilot Studio／Power Apps／Power Automateへの新規アクセス時、メーカーをDefault環境ではなく個人用開発環境へ自動的に誘導し、意図しない作成を抑制する。</a:t>
-            </a:r>
-          </a:p>
-        </p:txBody>
-      </p:sp>
-      <p:sp>
-        <p:nvSpPr>
-          <p:cNvPr id="12" name="Rectangle 11"/>
+              <a:t>Copilot Studio／Power Apps／Power Automateへの新規アクセス時、メーカーをDefault環境ではなく個人用開発環境（本人専用に分離され、他ユーザーに影響しない環境）へ自動的に誘導し、意図しない作成を抑制する。</a:t>
+            </a:r>
+          </a:p>
+        </p:txBody>
+      </p:sp>
+      <p:sp>
+        <p:nvSpPr>
+          <p:cNvPr id="14" name="Rectangle 13"/>
           <p:cNvSpPr/>
           <p:nvPr/>
         </p:nvSpPr>
         <p:spPr>
           <a:xfrm>
-            <a:off x="6172200" y="1965960"/>
-            <a:ext cx="5532120" cy="1965960"/>
+            <a:off x="6153912" y="3200400"/>
+            <a:ext cx="5532120" cy="1508760"/>
           </a:xfrm>
           <a:prstGeom prst="rect">
             <a:avLst/>
@@ -3924,14 +4059,14 @@
       </p:sp>
       <p:sp>
         <p:nvSpPr>
-          <p:cNvPr id="13" name="Rectangle 12"/>
+          <p:cNvPr id="15" name="Rectangle 14"/>
           <p:cNvSpPr/>
           <p:nvPr/>
         </p:nvSpPr>
         <p:spPr>
           <a:xfrm>
-            <a:off x="6172200" y="1965960"/>
-            <a:ext cx="5532120" cy="73152"/>
+            <a:off x="6153912" y="3200400"/>
+            <a:ext cx="5532120" cy="64008"/>
           </a:xfrm>
           <a:prstGeom prst="rect">
             <a:avLst/>
@@ -3968,14 +4103,14 @@
       </p:sp>
       <p:sp>
         <p:nvSpPr>
-          <p:cNvPr id="14" name="TextBox 13"/>
+          <p:cNvPr id="16" name="TextBox 15"/>
           <p:cNvSpPr txBox="1"/>
           <p:nvPr/>
         </p:nvSpPr>
         <p:spPr>
           <a:xfrm>
-            <a:off x="6355080" y="2148840"/>
-            <a:ext cx="5166360" cy="502920"/>
+            <a:off x="6318504" y="3319272"/>
+            <a:ext cx="5202936" cy="384048"/>
           </a:xfrm>
           <a:prstGeom prst="rect">
             <a:avLst/>
@@ -3994,7 +4129,7 @@
               </a:lnSpc>
             </a:pPr>
             <a:r>
-              <a:rPr sz="1350" b="1" i="0">
+              <a:rPr sz="1200" b="1" i="0">
                 <a:solidFill>
                   <a:srgbClr val="1B2A4A"/>
                 </a:solidFill>
@@ -4007,14 +4142,14 @@
       </p:sp>
       <p:sp>
         <p:nvSpPr>
-          <p:cNvPr id="15" name="TextBox 14"/>
+          <p:cNvPr id="17" name="TextBox 16"/>
           <p:cNvSpPr txBox="1"/>
           <p:nvPr/>
         </p:nvSpPr>
         <p:spPr>
           <a:xfrm>
-            <a:off x="6355080" y="2651760"/>
-            <a:ext cx="5166360" cy="1097280"/>
+            <a:off x="6318504" y="3703320"/>
+            <a:ext cx="5202936" cy="914400"/>
           </a:xfrm>
           <a:prstGeom prst="rect">
             <a:avLst/>
@@ -4029,11 +4164,11 @@
           <a:p>
             <a:pPr algn="l">
               <a:lnSpc>
-                <a:spcPct val="120000"/>
-              </a:lnSpc>
-            </a:pPr>
-            <a:r>
-              <a:rPr sz="1150" b="0" i="0">
+                <a:spcPct val="110000"/>
+              </a:lnSpc>
+            </a:pPr>
+            <a:r>
+              <a:rPr sz="980" b="0" i="0">
                 <a:solidFill>
                   <a:srgbClr val="262626"/>
                 </a:solidFill>
@@ -4046,14 +4181,14 @@
       </p:sp>
       <p:sp>
         <p:nvSpPr>
-          <p:cNvPr id="16" name="Rectangle 15"/>
+          <p:cNvPr id="18" name="Rectangle 17"/>
           <p:cNvSpPr/>
           <p:nvPr/>
         </p:nvSpPr>
         <p:spPr>
           <a:xfrm>
-            <a:off x="502920" y="4069080"/>
-            <a:ext cx="5532120" cy="1965960"/>
+            <a:off x="502920" y="4828032"/>
+            <a:ext cx="5532120" cy="1508760"/>
           </a:xfrm>
           <a:prstGeom prst="rect">
             <a:avLst/>
@@ -4092,14 +4227,14 @@
       </p:sp>
       <p:sp>
         <p:nvSpPr>
-          <p:cNvPr id="17" name="Rectangle 16"/>
+          <p:cNvPr id="19" name="Rectangle 18"/>
           <p:cNvSpPr/>
           <p:nvPr/>
         </p:nvSpPr>
         <p:spPr>
           <a:xfrm>
-            <a:off x="502920" y="4069080"/>
-            <a:ext cx="5532120" cy="73152"/>
+            <a:off x="502920" y="4828032"/>
+            <a:ext cx="5532120" cy="64008"/>
           </a:xfrm>
           <a:prstGeom prst="rect">
             <a:avLst/>
@@ -4136,14 +4271,14 @@
       </p:sp>
       <p:sp>
         <p:nvSpPr>
-          <p:cNvPr id="18" name="TextBox 17"/>
+          <p:cNvPr id="20" name="TextBox 19"/>
           <p:cNvSpPr txBox="1"/>
           <p:nvPr/>
         </p:nvSpPr>
         <p:spPr>
           <a:xfrm>
-            <a:off x="685800" y="4251960"/>
-            <a:ext cx="5166360" cy="502920"/>
+            <a:off x="667512" y="4946904"/>
+            <a:ext cx="5202936" cy="384048"/>
           </a:xfrm>
           <a:prstGeom prst="rect">
             <a:avLst/>
@@ -4162,7 +4297,7 @@
               </a:lnSpc>
             </a:pPr>
             <a:r>
-              <a:rPr sz="1350" b="1" i="0">
+              <a:rPr sz="1200" b="1" i="0">
                 <a:solidFill>
                   <a:srgbClr val="1B2A4A"/>
                 </a:solidFill>
@@ -4178,7 +4313,7 @@
               </a:lnSpc>
             </a:pPr>
             <a:r>
-              <a:rPr sz="1350" b="1" i="0">
+              <a:rPr sz="1200" b="1" i="0">
                 <a:solidFill>
                   <a:srgbClr val="1B2A4A"/>
                 </a:solidFill>
@@ -4191,14 +4326,14 @@
       </p:sp>
       <p:sp>
         <p:nvSpPr>
-          <p:cNvPr id="19" name="TextBox 18"/>
+          <p:cNvPr id="21" name="TextBox 20"/>
           <p:cNvSpPr txBox="1"/>
           <p:nvPr/>
         </p:nvSpPr>
         <p:spPr>
           <a:xfrm>
-            <a:off x="685800" y="4754880"/>
-            <a:ext cx="5166360" cy="1097280"/>
+            <a:off x="667512" y="5330952"/>
+            <a:ext cx="5202936" cy="914400"/>
           </a:xfrm>
           <a:prstGeom prst="rect">
             <a:avLst/>
@@ -4213,31 +4348,31 @@
           <a:p>
             <a:pPr algn="l">
               <a:lnSpc>
-                <a:spcPct val="120000"/>
-              </a:lnSpc>
-            </a:pPr>
-            <a:r>
-              <a:rPr sz="1150" b="0" i="0">
+                <a:spcPct val="110000"/>
+              </a:lnSpc>
+            </a:pPr>
+            <a:r>
+              <a:rPr sz="980" b="0" i="0">
                 <a:solidFill>
                   <a:srgbClr val="262626"/>
                 </a:solidFill>
                 <a:latin typeface="Yu Gothic"/>
               </a:rPr>
-              <a:t>共有制限・データ保持・AI機能有効化などの統制ルールを複数環境へ一括適用するガバナンス機能。適用範囲は個別環境ごとに要確認。</a:t>
-            </a:r>
-          </a:p>
-        </p:txBody>
-      </p:sp>
-      <p:sp>
-        <p:nvSpPr>
-          <p:cNvPr id="20" name="Rectangle 19"/>
+              <a:t>複数の環境をグループ化し、共有制限・データ保持期間・AI機能有効化等の設定ルールを一括適用・強制する仕組み（DLPポリシーとは別の統治手段）。例：本番環境群をまとめて同一の共有制限で管理。</a:t>
+            </a:r>
+          </a:p>
+        </p:txBody>
+      </p:sp>
+      <p:sp>
+        <p:nvSpPr>
+          <p:cNvPr id="22" name="Rectangle 21"/>
           <p:cNvSpPr/>
           <p:nvPr/>
         </p:nvSpPr>
         <p:spPr>
           <a:xfrm>
-            <a:off x="6172200" y="4069080"/>
-            <a:ext cx="5532120" cy="1965960"/>
+            <a:off x="6153912" y="4828032"/>
+            <a:ext cx="5532120" cy="1508760"/>
           </a:xfrm>
           <a:prstGeom prst="rect">
             <a:avLst/>
@@ -4276,14 +4411,14 @@
       </p:sp>
       <p:sp>
         <p:nvSpPr>
-          <p:cNvPr id="21" name="Rectangle 20"/>
+          <p:cNvPr id="23" name="Rectangle 22"/>
           <p:cNvSpPr/>
           <p:nvPr/>
         </p:nvSpPr>
         <p:spPr>
           <a:xfrm>
-            <a:off x="6172200" y="4069080"/>
-            <a:ext cx="5532120" cy="73152"/>
+            <a:off x="6153912" y="4828032"/>
+            <a:ext cx="5532120" cy="64008"/>
           </a:xfrm>
           <a:prstGeom prst="rect">
             <a:avLst/>
@@ -4320,14 +4455,14 @@
       </p:sp>
       <p:sp>
         <p:nvSpPr>
-          <p:cNvPr id="22" name="TextBox 21"/>
+          <p:cNvPr id="24" name="TextBox 23"/>
           <p:cNvSpPr txBox="1"/>
           <p:nvPr/>
         </p:nvSpPr>
         <p:spPr>
           <a:xfrm>
-            <a:off x="6355080" y="4251960"/>
-            <a:ext cx="5166360" cy="502920"/>
+            <a:off x="6318504" y="4946904"/>
+            <a:ext cx="5202936" cy="384048"/>
           </a:xfrm>
           <a:prstGeom prst="rect">
             <a:avLst/>
@@ -4346,7 +4481,7 @@
               </a:lnSpc>
             </a:pPr>
             <a:r>
-              <a:rPr sz="1350" b="1" i="0">
+              <a:rPr sz="1200" b="1" i="0">
                 <a:solidFill>
                   <a:srgbClr val="1B2A4A"/>
                 </a:solidFill>
@@ -4359,14 +4494,14 @@
       </p:sp>
       <p:sp>
         <p:nvSpPr>
-          <p:cNvPr id="23" name="TextBox 22"/>
+          <p:cNvPr id="25" name="TextBox 24"/>
           <p:cNvSpPr txBox="1"/>
           <p:nvPr/>
         </p:nvSpPr>
         <p:spPr>
           <a:xfrm>
-            <a:off x="6355080" y="4754880"/>
-            <a:ext cx="5166360" cy="1097280"/>
+            <a:off x="6318504" y="5330952"/>
+            <a:ext cx="5202936" cy="914400"/>
           </a:xfrm>
           <a:prstGeom prst="rect">
             <a:avLst/>
@@ -4381,24 +4516,24 @@
           <a:p>
             <a:pPr algn="l">
               <a:lnSpc>
-                <a:spcPct val="120000"/>
-              </a:lnSpc>
-            </a:pPr>
-            <a:r>
-              <a:rPr sz="1150" b="0" i="0">
+                <a:spcPct val="110000"/>
+              </a:lnSpc>
+            </a:pPr>
+            <a:r>
+              <a:rPr sz="980" b="0" i="0">
                 <a:solidFill>
                   <a:srgbClr val="262626"/>
                 </a:solidFill>
                 <a:latin typeface="Yu Gothic"/>
               </a:rPr>
-              <a:t>利用者数の多い重要アプリ／フローはソリューション化のうえ専用の（小規模な）マネージド環境へ移行し、Premium対象を限定する。</a:t>
-            </a:r>
-          </a:p>
-        </p:txBody>
-      </p:sp>
-      <p:sp>
-        <p:nvSpPr>
-          <p:cNvPr id="24" name="TextBox 23"/>
+              <a:t>複数テナントの話ではない。同一テナント内にDefault環境とは別の環境を新設し、そこだけをマネージド環境化して重要アプリ／フローを移行し、Premium対象を必要な範囲に限定する。</a:t>
+            </a:r>
+          </a:p>
+        </p:txBody>
+      </p:sp>
+      <p:sp>
+        <p:nvSpPr>
+          <p:cNvPr id="26" name="TextBox 25"/>
           <p:cNvSpPr txBox="1"/>
           <p:nvPr/>
         </p:nvSpPr>
@@ -4437,7 +4572,7 @@
       </p:sp>
       <p:sp>
         <p:nvSpPr>
-          <p:cNvPr id="25" name="TextBox 24"/>
+          <p:cNvPr id="27" name="TextBox 26"/>
           <p:cNvSpPr txBox="1"/>
           <p:nvPr/>
         </p:nvSpPr>
@@ -4674,8 +4809,8 @@
         </p:nvSpPr>
         <p:spPr>
           <a:xfrm>
-            <a:off x="502920" y="1463040"/>
-            <a:ext cx="11201400" cy="1024128"/>
+            <a:off x="502920" y="1207008"/>
+            <a:ext cx="11201400" cy="932688"/>
           </a:xfrm>
           <a:prstGeom prst="rect">
             <a:avLst/>
@@ -4718,8 +4853,8 @@
         </p:nvSpPr>
         <p:spPr>
           <a:xfrm>
-            <a:off x="502920" y="1463040"/>
-            <a:ext cx="91440" cy="1024128"/>
+            <a:off x="502920" y="1207008"/>
+            <a:ext cx="91440" cy="932688"/>
           </a:xfrm>
           <a:prstGeom prst="rect">
             <a:avLst/>
@@ -4762,8 +4897,8 @@
         </p:nvSpPr>
         <p:spPr>
           <a:xfrm>
-            <a:off x="777240" y="1591056"/>
-            <a:ext cx="10698480" cy="292608"/>
+            <a:off x="777240" y="1280160"/>
+            <a:ext cx="10698480" cy="256032"/>
           </a:xfrm>
           <a:prstGeom prst="rect">
             <a:avLst/>
@@ -4782,7 +4917,7 @@
               </a:lnSpc>
             </a:pPr>
             <a:r>
-              <a:rPr sz="1350" b="1" i="0">
+              <a:rPr sz="1250" b="1" i="0">
                 <a:solidFill>
                   <a:srgbClr val="1B2A4A"/>
                 </a:solidFill>
@@ -4801,8 +4936,8 @@
         </p:nvSpPr>
         <p:spPr>
           <a:xfrm>
-            <a:off x="777240" y="1920240"/>
-            <a:ext cx="10698480" cy="502920"/>
+            <a:off x="777240" y="1554480"/>
+            <a:ext cx="10698480" cy="530352"/>
           </a:xfrm>
           <a:prstGeom prst="rect">
             <a:avLst/>
@@ -4817,17 +4952,17 @@
           <a:p>
             <a:pPr algn="l">
               <a:lnSpc>
-                <a:spcPct val="115000"/>
-              </a:lnSpc>
-            </a:pPr>
-            <a:r>
-              <a:rPr sz="1150" b="0" i="0">
+                <a:spcPct val="110000"/>
+              </a:lnSpc>
+            </a:pPr>
+            <a:r>
+              <a:rPr sz="1000" b="0" i="0">
                 <a:solidFill>
                   <a:srgbClr val="262626"/>
                 </a:solidFill>
                 <a:latin typeface="Yu Gothic"/>
               </a:rPr>
-              <a:t>2026年3月より管理者向け、6月よりエンドユーザー向けにライセンス未充足の通知が順次導入されており、放置は将来的な利用制限リスクとなる。</a:t>
+              <a:t>2026年3月から管理者に、6月からエンドユーザーに、対象ライセンスなしでマネージド環境を利用している旨の通知が画面に表示されるようになる。現時点は警告のみだが、将来的に利用制限へ発展する可能性がある。</a:t>
             </a:r>
           </a:p>
         </p:txBody>
@@ -4840,8 +4975,8 @@
         </p:nvSpPr>
         <p:spPr>
           <a:xfrm>
-            <a:off x="502920" y="2651760"/>
-            <a:ext cx="11201400" cy="1024128"/>
+            <a:off x="502920" y="2185416"/>
+            <a:ext cx="11201400" cy="932688"/>
           </a:xfrm>
           <a:prstGeom prst="rect">
             <a:avLst/>
@@ -4884,8 +5019,8 @@
         </p:nvSpPr>
         <p:spPr>
           <a:xfrm>
-            <a:off x="502920" y="2651760"/>
-            <a:ext cx="91440" cy="1024128"/>
+            <a:off x="502920" y="2185416"/>
+            <a:ext cx="91440" cy="932688"/>
           </a:xfrm>
           <a:prstGeom prst="rect">
             <a:avLst/>
@@ -4928,8 +5063,8 @@
         </p:nvSpPr>
         <p:spPr>
           <a:xfrm>
-            <a:off x="777240" y="2779776"/>
-            <a:ext cx="10698480" cy="292608"/>
+            <a:off x="777240" y="2258568"/>
+            <a:ext cx="10698480" cy="256032"/>
           </a:xfrm>
           <a:prstGeom prst="rect">
             <a:avLst/>
@@ -4948,7 +5083,7 @@
               </a:lnSpc>
             </a:pPr>
             <a:r>
-              <a:rPr sz="1350" b="1" i="0">
+              <a:rPr sz="1250" b="1" i="0">
                 <a:solidFill>
                   <a:srgbClr val="1B2A4A"/>
                 </a:solidFill>
@@ -4967,8 +5102,8 @@
         </p:nvSpPr>
         <p:spPr>
           <a:xfrm>
-            <a:off x="777240" y="3108960"/>
-            <a:ext cx="10698480" cy="502920"/>
+            <a:off x="777240" y="2532888"/>
+            <a:ext cx="10698480" cy="530352"/>
           </a:xfrm>
           <a:prstGeom prst="rect">
             <a:avLst/>
@@ -4983,17 +5118,17 @@
           <a:p>
             <a:pPr algn="l">
               <a:lnSpc>
-                <a:spcPct val="115000"/>
-              </a:lnSpc>
-            </a:pPr>
-            <a:r>
-              <a:rPr sz="1150" b="0" i="0">
+                <a:spcPct val="110000"/>
+              </a:lnSpc>
+            </a:pPr>
+            <a:r>
+              <a:rPr sz="1000" b="0" i="0">
                 <a:solidFill>
                   <a:srgbClr val="262626"/>
                 </a:solidFill>
                 <a:latin typeface="Yu Gothic"/>
               </a:rPr>
-              <a:t>一部の標準コネクタはDLPポリシーで「ブロック不可」に分類されており、完全な利用制御はできない点を事前に理解しておく必要がある。</a:t>
+              <a:t>Office 365 Outlook、SharePoint、Microsoft Teams等はブロック不可コネクタに指定されている。外部への情報持ち出しを防ぎたい場合でも、これらを使った標準的なメール送信やファイル共有自体をDLPポリシーだけで完全に止めることはできない（Exchange管理者側の転送ルール等、別の統制で補完する必要がある）。</a:t>
             </a:r>
           </a:p>
         </p:txBody>
@@ -5006,8 +5141,8 @@
         </p:nvSpPr>
         <p:spPr>
           <a:xfrm>
-            <a:off x="502920" y="3840480"/>
-            <a:ext cx="11201400" cy="1024128"/>
+            <a:off x="502920" y="3163824"/>
+            <a:ext cx="11201400" cy="932688"/>
           </a:xfrm>
           <a:prstGeom prst="rect">
             <a:avLst/>
@@ -5050,8 +5185,8 @@
         </p:nvSpPr>
         <p:spPr>
           <a:xfrm>
-            <a:off x="502920" y="3840480"/>
-            <a:ext cx="91440" cy="1024128"/>
+            <a:off x="502920" y="3163824"/>
+            <a:ext cx="91440" cy="932688"/>
           </a:xfrm>
           <a:prstGeom prst="rect">
             <a:avLst/>
@@ -5094,8 +5229,8 @@
         </p:nvSpPr>
         <p:spPr>
           <a:xfrm>
-            <a:off x="777240" y="3968496"/>
-            <a:ext cx="10698480" cy="292608"/>
+            <a:off x="777240" y="3236976"/>
+            <a:ext cx="10698480" cy="256032"/>
           </a:xfrm>
           <a:prstGeom prst="rect">
             <a:avLst/>
@@ -5114,13 +5249,13 @@
               </a:lnSpc>
             </a:pPr>
             <a:r>
-              <a:rPr sz="1350" b="1" i="0">
+              <a:rPr sz="1250" b="1" i="0">
                 <a:solidFill>
                   <a:srgbClr val="1B2A4A"/>
                 </a:solidFill>
                 <a:latin typeface="Yu Gothic"/>
               </a:rPr>
-              <a:t>ユーザー影響への配慮</a:t>
+              <a:t>DLPポリシー導入自体の留意点</a:t>
             </a:r>
           </a:p>
         </p:txBody>
@@ -5133,8 +5268,8 @@
         </p:nvSpPr>
         <p:spPr>
           <a:xfrm>
-            <a:off x="777240" y="4297680"/>
-            <a:ext cx="10698480" cy="502920"/>
+            <a:off x="777240" y="3511296"/>
+            <a:ext cx="10698480" cy="530352"/>
           </a:xfrm>
           <a:prstGeom prst="rect">
             <a:avLst/>
@@ -5149,17 +5284,17 @@
           <a:p>
             <a:pPr algn="l">
               <a:lnSpc>
-                <a:spcPct val="115000"/>
-              </a:lnSpc>
-            </a:pPr>
-            <a:r>
-              <a:rPr sz="1150" b="0" i="0">
+                <a:spcPct val="110000"/>
+              </a:lnSpc>
+            </a:pPr>
+            <a:r>
+              <a:rPr sz="1000" b="0" i="0">
                 <a:solidFill>
                   <a:srgbClr val="262626"/>
                 </a:solidFill>
                 <a:latin typeface="Yu Gothic"/>
               </a:rPr>
-              <a:t>DLPポリシーの厳格化・環境ルーティングの導入は既存の正当な業務利用者の体験に影響し得るため、事前告知とエラーメッセージのカスタマイズで移行摩擦を軽減する。</a:t>
+              <a:t>①ポリシー変更後に新たにブロックされる接続を含む既存アプリ/フローは、事前の影響分析なしに適用すると動作しなくなる恐れがある　②新規コネクタが継続的にリリースされるため分類の継続的なメンテナンスが必要　③エラーに直面した利用者からの問い合わせ対応コストが発生する</a:t>
             </a:r>
           </a:p>
         </p:txBody>
@@ -5172,8 +5307,8 @@
         </p:nvSpPr>
         <p:spPr>
           <a:xfrm>
-            <a:off x="502920" y="5029200"/>
-            <a:ext cx="11201400" cy="1024128"/>
+            <a:off x="502920" y="4142232"/>
+            <a:ext cx="11201400" cy="932688"/>
           </a:xfrm>
           <a:prstGeom prst="rect">
             <a:avLst/>
@@ -5216,8 +5351,8 @@
         </p:nvSpPr>
         <p:spPr>
           <a:xfrm>
-            <a:off x="502920" y="5029200"/>
-            <a:ext cx="91440" cy="1024128"/>
+            <a:off x="502920" y="4142232"/>
+            <a:ext cx="91440" cy="932688"/>
           </a:xfrm>
           <a:prstGeom prst="rect">
             <a:avLst/>
@@ -5260,8 +5395,8 @@
         </p:nvSpPr>
         <p:spPr>
           <a:xfrm>
-            <a:off x="777240" y="5157216"/>
-            <a:ext cx="10698480" cy="292608"/>
+            <a:off x="777240" y="4215384"/>
+            <a:ext cx="10698480" cy="256032"/>
           </a:xfrm>
           <a:prstGeom prst="rect">
             <a:avLst/>
@@ -5280,13 +5415,13 @@
               </a:lnSpc>
             </a:pPr>
             <a:r>
-              <a:rPr sz="1350" b="1" i="0">
+              <a:rPr sz="1250" b="1" i="0">
                 <a:solidFill>
                   <a:srgbClr val="1B2A4A"/>
                 </a:solidFill>
                 <a:latin typeface="Yu Gothic"/>
               </a:rPr>
-              <a:t>情報の鮮度</a:t>
+              <a:t>ユーザー影響への配慮</a:t>
             </a:r>
           </a:p>
         </p:txBody>
@@ -5299,8 +5434,8 @@
         </p:nvSpPr>
         <p:spPr>
           <a:xfrm>
-            <a:off x="777240" y="5486400"/>
-            <a:ext cx="10698480" cy="502920"/>
+            <a:off x="777240" y="4489704"/>
+            <a:ext cx="10698480" cy="530352"/>
           </a:xfrm>
           <a:prstGeom prst="rect">
             <a:avLst/>
@@ -5315,31 +5450,119 @@
           <a:p>
             <a:pPr algn="l">
               <a:lnSpc>
-                <a:spcPct val="115000"/>
-              </a:lnSpc>
-            </a:pPr>
-            <a:r>
-              <a:rPr sz="1150" b="0" i="0">
+                <a:spcPct val="110000"/>
+              </a:lnSpc>
+            </a:pPr>
+            <a:r>
+              <a:rPr sz="1000" b="0" i="0">
                 <a:solidFill>
                   <a:srgbClr val="262626"/>
                 </a:solidFill>
                 <a:latin typeface="Yu Gothic"/>
               </a:rPr>
-              <a:t>Power PlatformのライセンスポリシーおよびManaged Environment機能は継続的に更新されており、実施前に最新のMicrosoft Learn情報の再確認を推奨する。</a:t>
-            </a:r>
-          </a:p>
-        </p:txBody>
-      </p:sp>
-      <p:sp>
-        <p:nvSpPr>
-          <p:cNvPr id="22" name="TextBox 21"/>
+              <a:t>DLPポリシーの厳格化・環境ルーティングの導入は既存の正当な業務利用者の体験に影響し得るため、事前告知とエラーメッセージのカスタマイズで移行摩擦を軽減する。</a:t>
+            </a:r>
+          </a:p>
+        </p:txBody>
+      </p:sp>
+      <p:sp>
+        <p:nvSpPr>
+          <p:cNvPr id="22" name="Rectangle 21"/>
+          <p:cNvSpPr/>
+          <p:nvPr/>
+        </p:nvSpPr>
+        <p:spPr>
+          <a:xfrm>
+            <a:off x="502920" y="5120640"/>
+            <a:ext cx="11201400" cy="932688"/>
+          </a:xfrm>
+          <a:prstGeom prst="rect">
+            <a:avLst/>
+          </a:prstGeom>
+          <a:solidFill>
+            <a:srgbClr val="F5F6F8"/>
+          </a:solidFill>
+          <a:ln>
+            <a:noFill/>
+          </a:ln>
+          <a:effectLst/>
+        </p:spPr>
+        <p:style>
+          <a:lnRef idx="1">
+            <a:schemeClr val="accent1"/>
+          </a:lnRef>
+          <a:fillRef idx="3">
+            <a:schemeClr val="accent1"/>
+          </a:fillRef>
+          <a:effectRef idx="2">
+            <a:schemeClr val="accent1"/>
+          </a:effectRef>
+          <a:fontRef idx="minor">
+            <a:schemeClr val="lt1"/>
+          </a:fontRef>
+        </p:style>
+        <p:txBody>
+          <a:bodyPr rtlCol="0" anchor="ctr"/>
+          <a:lstStyle/>
+          <a:p>
+            <a:pPr algn="ctr"/>
+          </a:p>
+        </p:txBody>
+      </p:sp>
+      <p:sp>
+        <p:nvSpPr>
+          <p:cNvPr id="23" name="Rectangle 22"/>
+          <p:cNvSpPr/>
+          <p:nvPr/>
+        </p:nvSpPr>
+        <p:spPr>
+          <a:xfrm>
+            <a:off x="502920" y="5120640"/>
+            <a:ext cx="91440" cy="932688"/>
+          </a:xfrm>
+          <a:prstGeom prst="rect">
+            <a:avLst/>
+          </a:prstGeom>
+          <a:solidFill>
+            <a:srgbClr val="B86E00"/>
+          </a:solidFill>
+          <a:ln>
+            <a:noFill/>
+          </a:ln>
+          <a:effectLst/>
+        </p:spPr>
+        <p:style>
+          <a:lnRef idx="1">
+            <a:schemeClr val="accent1"/>
+          </a:lnRef>
+          <a:fillRef idx="3">
+            <a:schemeClr val="accent1"/>
+          </a:fillRef>
+          <a:effectRef idx="2">
+            <a:schemeClr val="accent1"/>
+          </a:effectRef>
+          <a:fontRef idx="minor">
+            <a:schemeClr val="lt1"/>
+          </a:fontRef>
+        </p:style>
+        <p:txBody>
+          <a:bodyPr rtlCol="0" anchor="ctr"/>
+          <a:lstStyle/>
+          <a:p>
+            <a:pPr algn="ctr"/>
+          </a:p>
+        </p:txBody>
+      </p:sp>
+      <p:sp>
+        <p:nvSpPr>
+          <p:cNvPr id="24" name="TextBox 23"/>
           <p:cNvSpPr txBox="1"/>
           <p:nvPr/>
         </p:nvSpPr>
         <p:spPr>
           <a:xfrm>
-            <a:off x="502920" y="6355080"/>
-            <a:ext cx="11155680" cy="228600"/>
+            <a:off x="777240" y="5193792"/>
+            <a:ext cx="10698480" cy="256032"/>
           </a:xfrm>
           <a:prstGeom prst="rect">
             <a:avLst/>
@@ -5358,27 +5581,27 @@
               </a:lnSpc>
             </a:pPr>
             <a:r>
-              <a:rPr sz="1000" b="0" i="1">
-                <a:solidFill>
-                  <a:srgbClr val="6E6E6E"/>
-                </a:solidFill>
-                <a:latin typeface="Yu Gothic"/>
-              </a:rPr>
-              <a:t>※ 各項目の根拠（公式ドキュメントの該当箇所・原文抜粋）は巻末Appendixに記載</a:t>
-            </a:r>
-          </a:p>
-        </p:txBody>
-      </p:sp>
-      <p:sp>
-        <p:nvSpPr>
-          <p:cNvPr id="23" name="TextBox 22"/>
+              <a:rPr sz="1250" b="1" i="0">
+                <a:solidFill>
+                  <a:srgbClr val="1B2A4A"/>
+                </a:solidFill>
+                <a:latin typeface="Yu Gothic"/>
+              </a:rPr>
+              <a:t>情報の鮮度</a:t>
+            </a:r>
+          </a:p>
+        </p:txBody>
+      </p:sp>
+      <p:sp>
+        <p:nvSpPr>
+          <p:cNvPr id="25" name="TextBox 24"/>
           <p:cNvSpPr txBox="1"/>
           <p:nvPr/>
         </p:nvSpPr>
         <p:spPr>
           <a:xfrm>
-            <a:off x="502920" y="6565392"/>
-            <a:ext cx="8229600" cy="274320"/>
+            <a:off x="777240" y="5468112"/>
+            <a:ext cx="10698480" cy="530352"/>
           </a:xfrm>
           <a:prstGeom prst="rect">
             <a:avLst/>
@@ -5393,10 +5616,88 @@
           <a:p>
             <a:pPr algn="l">
               <a:lnSpc>
+                <a:spcPct val="110000"/>
+              </a:lnSpc>
+            </a:pPr>
+            <a:r>
+              <a:rPr sz="1000" b="0" i="0">
+                <a:solidFill>
+                  <a:srgbClr val="262626"/>
+                </a:solidFill>
+                <a:latin typeface="Yu Gothic"/>
+              </a:rPr>
+              <a:t>Power PlatformのライセンスポリシーおよびManaged Environment機能は継続的に更新されており、実施前に最新のMicrosoft Learn情報の再確認を推奨する。</a:t>
+            </a:r>
+          </a:p>
+        </p:txBody>
+      </p:sp>
+      <p:sp>
+        <p:nvSpPr>
+          <p:cNvPr id="26" name="TextBox 25"/>
+          <p:cNvSpPr txBox="1"/>
+          <p:nvPr/>
+        </p:nvSpPr>
+        <p:spPr>
+          <a:xfrm>
+            <a:off x="502920" y="6400800"/>
+            <a:ext cx="11155680" cy="182880"/>
+          </a:xfrm>
+          <a:prstGeom prst="rect">
+            <a:avLst/>
+          </a:prstGeom>
+          <a:noFill/>
+        </p:spPr>
+        <p:txBody>
+          <a:bodyPr wrap="square" anchor="t" lIns="0" rIns="0" tIns="0" bIns="0">
+            <a:spAutoFit/>
+          </a:bodyPr>
+          <a:lstStyle/>
+          <a:p>
+            <a:pPr algn="l">
+              <a:lnSpc>
                 <a:spcPct val="100000"/>
               </a:lnSpc>
             </a:pPr>
             <a:r>
+              <a:rPr sz="900" b="0" i="1">
+                <a:solidFill>
+                  <a:srgbClr val="6E6E6E"/>
+                </a:solidFill>
+                <a:latin typeface="Yu Gothic"/>
+              </a:rPr>
+              <a:t>※ 各項目の根拠（公式ドキュメントの該当箇所・原文抜粋）は巻末Appendixに記載</a:t>
+            </a:r>
+          </a:p>
+        </p:txBody>
+      </p:sp>
+      <p:sp>
+        <p:nvSpPr>
+          <p:cNvPr id="27" name="TextBox 26"/>
+          <p:cNvSpPr txBox="1"/>
+          <p:nvPr/>
+        </p:nvSpPr>
+        <p:spPr>
+          <a:xfrm>
+            <a:off x="502920" y="6565392"/>
+            <a:ext cx="8229600" cy="274320"/>
+          </a:xfrm>
+          <a:prstGeom prst="rect">
+            <a:avLst/>
+          </a:prstGeom>
+          <a:noFill/>
+        </p:spPr>
+        <p:txBody>
+          <a:bodyPr wrap="square" anchor="t" lIns="0" rIns="0" tIns="0" bIns="0">
+            <a:spAutoFit/>
+          </a:bodyPr>
+          <a:lstStyle/>
+          <a:p>
+            <a:pPr algn="l">
+              <a:lnSpc>
+                <a:spcPct val="100000"/>
+              </a:lnSpc>
+            </a:pPr>
+            <a:r>
               <a:rPr sz="900" b="0" i="0">
                 <a:solidFill>
                   <a:srgbClr val="6E6E6E"/>
@@ -5410,7 +5711,7 @@
       </p:sp>
       <p:sp>
         <p:nvSpPr>
-          <p:cNvPr id="24" name="TextBox 23"/>
+          <p:cNvPr id="28" name="TextBox 27"/>
           <p:cNvSpPr txBox="1"/>
           <p:nvPr/>
         </p:nvSpPr>
@@ -5629,7 +5930,7 @@
                 </a:solidFill>
                 <a:latin typeface="Yu Gothic"/>
               </a:rPr>
-              <a:t>本文中の各判定・記述の根拠となったMicrosoft公式ドキュメントのURL・該当箇所・原文抜粋</a:t>
+              <a:t>本文中の各判定・記述の根拠となったMicrosoft公式ドキュメント等のURL・該当箇所・原文抜粋</a:t>
             </a:r>
           </a:p>
         </p:txBody>
@@ -7663,7 +7964,7 @@
                 </a:solidFill>
                 <a:latin typeface="Yu Gothic"/>
               </a:rPr>
-              <a:t>P.8 対応</a:t>
+              <a:t>P.8・P.11 対応</a:t>
             </a:r>
           </a:p>
         </p:txBody>
@@ -7741,7 +8042,7 @@
                 </a:solidFill>
                 <a:latin typeface="Yu Gothic"/>
               </a:rPr>
-              <a:t>要旨：データポリシーに違反する接続の組み合わせを含むアプリ／フローは、設計時・実行時の両方でエラーとしてブロックされ、利用者のライセンス種別は問われない。</a:t>
+              <a:t>要旨：データポリシーに違反する接続の組み合わせを含むアプリ／フローは、設計時・実行時の両方でエラーとしてブロックされ、利用者のライセンス種別は問われない。ポリシー変更後に新たにブロック対象となった接続を含む既存資産は、事前の影響分析なしに適用すると動作しなくなり得る。</a:t>
             </a:r>
           </a:p>
         </p:txBody>
@@ -10647,23 +10948,7 @@
                 </a:solidFill>
                 <a:latin typeface="Yu Gothic"/>
               </a:rPr>
-              <a:t>要旨：エージェントの作成・管理にはユーザー単位のライセンス（per userライセンス）とテナント</a:t>
-            </a:r>
-          </a:p>
-          <a:p>
-            <a:pPr algn="l">
-              <a:lnSpc>
-                <a:spcPct val="118000"/>
-              </a:lnSpc>
-            </a:pPr>
-            <a:r>
-              <a:rPr sz="1100" b="0" i="0">
-                <a:solidFill>
-                  <a:srgbClr val="262626"/>
-                </a:solidFill>
-                <a:latin typeface="Yu Gothic"/>
-              </a:rPr>
-              <a:t>ライセンスが必要。作成されたエージェントの利用者側には特別なライセンスは不要。</a:t>
+              <a:t>要旨：フル機能のCopilot Studioでエージェントを作成・管理するにはユーザー単位のライセンス（per userライセンス）とテナントライセンスが別途必要。作成されたエージェントの利用者側には特別なライセンスは不要。</a:t>
             </a:r>
           </a:p>
         </p:txBody>
@@ -11004,6 +11289,1078 @@
                 <a:latin typeface="Yu Gothic"/>
               </a:rPr>
               <a:t>17</a:t>
+            </a:r>
+          </a:p>
+        </p:txBody>
+      </p:sp>
+    </p:spTree>
+  </p:cSld>
+  <p:clrMapOvr>
+    <a:masterClrMapping/>
+  </p:clrMapOvr>
+</p:sld>
+</file>
+
+<file path=ppt/slides/slide18.xml><?xml version="1.0" encoding="utf-8"?>
+<p:sld xmlns:a="http://schemas.openxmlformats.org/drawingml/2006/main" xmlns:p="http://schemas.openxmlformats.org/presentationml/2006/main" xmlns:r="http://schemas.openxmlformats.org/officeDocument/2006/relationships">
+  <p:cSld>
+    <p:bg>
+      <p:bgPr>
+        <a:solidFill>
+          <a:srgbClr val="FFFFFF"/>
+        </a:solidFill>
+        <a:effectLst/>
+      </p:bgPr>
+    </p:bg>
+    <p:spTree>
+      <p:nvGrpSpPr>
+        <p:cNvPr id="1" name=""/>
+        <p:cNvGrpSpPr/>
+        <p:nvPr/>
+      </p:nvGrpSpPr>
+      <p:grpSpPr/>
+      <p:sp>
+        <p:nvSpPr>
+          <p:cNvPr id="2" name="Rectangle 1"/>
+          <p:cNvSpPr/>
+          <p:nvPr/>
+        </p:nvSpPr>
+        <p:spPr>
+          <a:xfrm>
+            <a:off x="0" y="0"/>
+            <a:ext cx="12191695" cy="1051560"/>
+          </a:xfrm>
+          <a:prstGeom prst="rect">
+            <a:avLst/>
+          </a:prstGeom>
+          <a:solidFill>
+            <a:srgbClr val="1B2A4A"/>
+          </a:solidFill>
+          <a:ln>
+            <a:noFill/>
+          </a:ln>
+          <a:effectLst/>
+        </p:spPr>
+        <p:style>
+          <a:lnRef idx="1">
+            <a:schemeClr val="accent1"/>
+          </a:lnRef>
+          <a:fillRef idx="3">
+            <a:schemeClr val="accent1"/>
+          </a:fillRef>
+          <a:effectRef idx="2">
+            <a:schemeClr val="accent1"/>
+          </a:effectRef>
+          <a:fontRef idx="minor">
+            <a:schemeClr val="lt1"/>
+          </a:fontRef>
+        </p:style>
+        <p:txBody>
+          <a:bodyPr rtlCol="0" anchor="ctr"/>
+          <a:lstStyle/>
+          <a:p>
+            <a:pPr algn="ctr"/>
+          </a:p>
+        </p:txBody>
+      </p:sp>
+      <p:sp>
+        <p:nvSpPr>
+          <p:cNvPr id="3" name="Rectangle 2"/>
+          <p:cNvSpPr/>
+          <p:nvPr/>
+        </p:nvSpPr>
+        <p:spPr>
+          <a:xfrm>
+            <a:off x="0" y="1051560"/>
+            <a:ext cx="12191695" cy="38100"/>
+          </a:xfrm>
+          <a:prstGeom prst="rect">
+            <a:avLst/>
+          </a:prstGeom>
+          <a:solidFill>
+            <a:srgbClr val="2E5AAC"/>
+          </a:solidFill>
+          <a:ln>
+            <a:noFill/>
+          </a:ln>
+          <a:effectLst/>
+        </p:spPr>
+        <p:style>
+          <a:lnRef idx="1">
+            <a:schemeClr val="accent1"/>
+          </a:lnRef>
+          <a:fillRef idx="3">
+            <a:schemeClr val="accent1"/>
+          </a:fillRef>
+          <a:effectRef idx="2">
+            <a:schemeClr val="accent1"/>
+          </a:effectRef>
+          <a:fontRef idx="minor">
+            <a:schemeClr val="lt1"/>
+          </a:fontRef>
+        </p:style>
+        <p:txBody>
+          <a:bodyPr rtlCol="0" anchor="ctr"/>
+          <a:lstStyle/>
+          <a:p>
+            <a:pPr algn="ctr"/>
+          </a:p>
+        </p:txBody>
+      </p:sp>
+      <p:sp>
+        <p:nvSpPr>
+          <p:cNvPr id="4" name="TextBox 3"/>
+          <p:cNvSpPr txBox="1"/>
+          <p:nvPr/>
+        </p:nvSpPr>
+        <p:spPr>
+          <a:xfrm>
+            <a:off x="502920" y="118872"/>
+            <a:ext cx="9144000" cy="320040"/>
+          </a:xfrm>
+          <a:prstGeom prst="rect">
+            <a:avLst/>
+          </a:prstGeom>
+          <a:noFill/>
+        </p:spPr>
+        <p:txBody>
+          <a:bodyPr wrap="square" anchor="t" lIns="0" rIns="0" tIns="0" bIns="0">
+            <a:spAutoFit/>
+          </a:bodyPr>
+          <a:lstStyle/>
+          <a:p>
+            <a:pPr algn="l">
+              <a:lnSpc>
+                <a:spcPct val="100000"/>
+              </a:lnSpc>
+            </a:pPr>
+            <a:r>
+              <a:rPr sz="1200" b="1" i="0">
+                <a:solidFill>
+                  <a:srgbClr val="B9C7E6"/>
+                </a:solidFill>
+                <a:latin typeface="Yu Gothic"/>
+              </a:rPr>
+              <a:t>APPENDIX</a:t>
+            </a:r>
+          </a:p>
+        </p:txBody>
+      </p:sp>
+      <p:sp>
+        <p:nvSpPr>
+          <p:cNvPr id="5" name="TextBox 4"/>
+          <p:cNvSpPr txBox="1"/>
+          <p:nvPr/>
+        </p:nvSpPr>
+        <p:spPr>
+          <a:xfrm>
+            <a:off x="502920" y="411480"/>
+            <a:ext cx="10972800" cy="594360"/>
+          </a:xfrm>
+          <a:prstGeom prst="rect">
+            <a:avLst/>
+          </a:prstGeom>
+          <a:noFill/>
+        </p:spPr>
+        <p:txBody>
+          <a:bodyPr wrap="square" anchor="t" lIns="0" rIns="0" tIns="0" bIns="0">
+            <a:spAutoFit/>
+          </a:bodyPr>
+          <a:lstStyle/>
+          <a:p>
+            <a:pPr algn="l">
+              <a:lnSpc>
+                <a:spcPct val="100000"/>
+              </a:lnSpc>
+            </a:pPr>
+            <a:r>
+              <a:rPr sz="2300" b="1" i="0">
+                <a:solidFill>
+                  <a:srgbClr val="FFFFFF"/>
+                </a:solidFill>
+                <a:latin typeface="Yu Gothic"/>
+              </a:rPr>
+              <a:t>Appendix F：補足事実の根拠（コネクタ例・価格試算・個人用開発環境）</a:t>
+            </a:r>
+          </a:p>
+        </p:txBody>
+      </p:sp>
+      <p:sp>
+        <p:nvSpPr>
+          <p:cNvPr id="6" name="Rectangle 5"/>
+          <p:cNvSpPr/>
+          <p:nvPr/>
+        </p:nvSpPr>
+        <p:spPr>
+          <a:xfrm>
+            <a:off x="502920" y="1325880"/>
+            <a:ext cx="11201400" cy="1627632"/>
+          </a:xfrm>
+          <a:prstGeom prst="rect">
+            <a:avLst/>
+          </a:prstGeom>
+          <a:solidFill>
+            <a:srgbClr val="F5F6F8"/>
+          </a:solidFill>
+          <a:ln w="9525">
+            <a:solidFill>
+              <a:srgbClr val="D9DCE1"/>
+            </a:solidFill>
+          </a:ln>
+          <a:effectLst/>
+        </p:spPr>
+        <p:style>
+          <a:lnRef idx="1">
+            <a:schemeClr val="accent1"/>
+          </a:lnRef>
+          <a:fillRef idx="3">
+            <a:schemeClr val="accent1"/>
+          </a:fillRef>
+          <a:effectRef idx="2">
+            <a:schemeClr val="accent1"/>
+          </a:effectRef>
+          <a:fontRef idx="minor">
+            <a:schemeClr val="lt1"/>
+          </a:fontRef>
+        </p:style>
+        <p:txBody>
+          <a:bodyPr rtlCol="0" anchor="ctr"/>
+          <a:lstStyle/>
+          <a:p>
+            <a:pPr algn="ctr"/>
+          </a:p>
+        </p:txBody>
+      </p:sp>
+      <p:sp>
+        <p:nvSpPr>
+          <p:cNvPr id="7" name="Rectangle 6"/>
+          <p:cNvSpPr/>
+          <p:nvPr/>
+        </p:nvSpPr>
+        <p:spPr>
+          <a:xfrm>
+            <a:off x="502920" y="1325880"/>
+            <a:ext cx="73152" cy="1627632"/>
+          </a:xfrm>
+          <a:prstGeom prst="rect">
+            <a:avLst/>
+          </a:prstGeom>
+          <a:solidFill>
+            <a:srgbClr val="2E5AAC"/>
+          </a:solidFill>
+          <a:ln>
+            <a:noFill/>
+          </a:ln>
+          <a:effectLst/>
+        </p:spPr>
+        <p:style>
+          <a:lnRef idx="1">
+            <a:schemeClr val="accent1"/>
+          </a:lnRef>
+          <a:fillRef idx="3">
+            <a:schemeClr val="accent1"/>
+          </a:fillRef>
+          <a:effectRef idx="2">
+            <a:schemeClr val="accent1"/>
+          </a:effectRef>
+          <a:fontRef idx="minor">
+            <a:schemeClr val="lt1"/>
+          </a:fontRef>
+        </p:style>
+        <p:txBody>
+          <a:bodyPr rtlCol="0" anchor="ctr"/>
+          <a:lstStyle/>
+          <a:p>
+            <a:pPr algn="ctr"/>
+          </a:p>
+        </p:txBody>
+      </p:sp>
+      <p:sp>
+        <p:nvSpPr>
+          <p:cNvPr id="8" name="TextBox 7"/>
+          <p:cNvSpPr txBox="1"/>
+          <p:nvPr/>
+        </p:nvSpPr>
+        <p:spPr>
+          <a:xfrm>
+            <a:off x="713232" y="1417320"/>
+            <a:ext cx="7863840" cy="292608"/>
+          </a:xfrm>
+          <a:prstGeom prst="rect">
+            <a:avLst/>
+          </a:prstGeom>
+          <a:noFill/>
+        </p:spPr>
+        <p:txBody>
+          <a:bodyPr wrap="square" anchor="t" lIns="0" rIns="0" tIns="0" bIns="0">
+            <a:spAutoFit/>
+          </a:bodyPr>
+          <a:lstStyle/>
+          <a:p>
+            <a:pPr algn="l">
+              <a:lnSpc>
+                <a:spcPct val="100000"/>
+              </a:lnSpc>
+            </a:pPr>
+            <a:r>
+              <a:rPr sz="1300" b="1" i="0">
+                <a:solidFill>
+                  <a:srgbClr val="1B2A4A"/>
+                </a:solidFill>
+                <a:latin typeface="Yu Gothic"/>
+              </a:rPr>
+              <a:t>Connector classification</a:t>
+            </a:r>
+          </a:p>
+        </p:txBody>
+      </p:sp>
+      <p:sp>
+        <p:nvSpPr>
+          <p:cNvPr id="9" name="Rounded Rectangle 8"/>
+          <p:cNvSpPr/>
+          <p:nvPr/>
+        </p:nvSpPr>
+        <p:spPr>
+          <a:xfrm>
+            <a:off x="9875520" y="1417320"/>
+            <a:ext cx="1737360" cy="292608"/>
+          </a:xfrm>
+          <a:prstGeom prst="roundRect">
+            <a:avLst>
+              <a:gd name="adj" fmla="val 50000"/>
+            </a:avLst>
+          </a:prstGeom>
+          <a:solidFill>
+            <a:srgbClr val="E9EFF9"/>
+          </a:solidFill>
+          <a:ln>
+            <a:noFill/>
+          </a:ln>
+          <a:effectLst/>
+        </p:spPr>
+        <p:style>
+          <a:lnRef idx="1">
+            <a:schemeClr val="accent1"/>
+          </a:lnRef>
+          <a:fillRef idx="3">
+            <a:schemeClr val="accent1"/>
+          </a:fillRef>
+          <a:effectRef idx="2">
+            <a:schemeClr val="accent1"/>
+          </a:effectRef>
+          <a:fontRef idx="minor">
+            <a:schemeClr val="lt1"/>
+          </a:fontRef>
+        </p:style>
+        <p:txBody>
+          <a:bodyPr rtlCol="0" anchor="ctr" wrap="none" lIns="25400" rIns="25400" tIns="12700" bIns="12700"/>
+          <a:lstStyle/>
+          <a:p>
+            <a:pPr algn="ctr"/>
+            <a:r>
+              <a:rPr sz="1050" b="1">
+                <a:solidFill>
+                  <a:srgbClr val="2E5AAC"/>
+                </a:solidFill>
+                <a:latin typeface="Yu Gothic"/>
+              </a:rPr>
+              <a:t>P.11 対応</a:t>
+            </a:r>
+          </a:p>
+        </p:txBody>
+      </p:sp>
+      <p:sp>
+        <p:nvSpPr>
+          <p:cNvPr id="10" name="TextBox 9"/>
+          <p:cNvSpPr txBox="1"/>
+          <p:nvPr/>
+        </p:nvSpPr>
+        <p:spPr>
+          <a:xfrm>
+            <a:off x="713232" y="1728216"/>
+            <a:ext cx="10881360" cy="237744"/>
+          </a:xfrm>
+          <a:prstGeom prst="rect">
+            <a:avLst/>
+          </a:prstGeom>
+          <a:noFill/>
+        </p:spPr>
+        <p:txBody>
+          <a:bodyPr wrap="square" anchor="t" lIns="0" rIns="0" tIns="0" bIns="0">
+            <a:spAutoFit/>
+          </a:bodyPr>
+          <a:lstStyle/>
+          <a:p>
+            <a:pPr algn="l">
+              <a:lnSpc>
+                <a:spcPct val="100000"/>
+              </a:lnSpc>
+            </a:pPr>
+            <a:r>
+              <a:rPr sz="1000" b="0" i="0">
+                <a:solidFill>
+                  <a:srgbClr val="6E6E6E"/>
+                </a:solidFill>
+                <a:latin typeface="Yu Gothic"/>
+              </a:rPr>
+              <a:t>learn.microsoft.com/ja-jp/power-platform/admin/dlp-connector-classification</a:t>
+            </a:r>
+          </a:p>
+        </p:txBody>
+      </p:sp>
+      <p:sp>
+        <p:nvSpPr>
+          <p:cNvPr id="11" name="TextBox 10"/>
+          <p:cNvSpPr txBox="1"/>
+          <p:nvPr/>
+        </p:nvSpPr>
+        <p:spPr>
+          <a:xfrm>
+            <a:off x="713232" y="2002536"/>
+            <a:ext cx="10881360" cy="859536"/>
+          </a:xfrm>
+          <a:prstGeom prst="rect">
+            <a:avLst/>
+          </a:prstGeom>
+          <a:noFill/>
+        </p:spPr>
+        <p:txBody>
+          <a:bodyPr wrap="square" anchor="t" lIns="0" rIns="0" tIns="0" bIns="0">
+            <a:spAutoFit/>
+          </a:bodyPr>
+          <a:lstStyle/>
+          <a:p>
+            <a:pPr algn="l">
+              <a:lnSpc>
+                <a:spcPct val="118000"/>
+              </a:lnSpc>
+            </a:pPr>
+            <a:r>
+              <a:rPr sz="1100" b="0" i="0">
+                <a:solidFill>
+                  <a:srgbClr val="262626"/>
+                </a:solidFill>
+                <a:latin typeface="Yu Gothic"/>
+              </a:rPr>
+              <a:t>要旨：Office 365 Outlook、SharePoint、Microsoft Teams、Microsoft Dataverse等が、DLPポリシーで「ブロック不可」に指定されるコネクタの例として公式に列挙されている。</a:t>
+            </a:r>
+          </a:p>
+        </p:txBody>
+      </p:sp>
+      <p:sp>
+        <p:nvSpPr>
+          <p:cNvPr id="12" name="Rectangle 11"/>
+          <p:cNvSpPr/>
+          <p:nvPr/>
+        </p:nvSpPr>
+        <p:spPr>
+          <a:xfrm>
+            <a:off x="502920" y="3044952"/>
+            <a:ext cx="11201400" cy="1627632"/>
+          </a:xfrm>
+          <a:prstGeom prst="rect">
+            <a:avLst/>
+          </a:prstGeom>
+          <a:solidFill>
+            <a:srgbClr val="F5F6F8"/>
+          </a:solidFill>
+          <a:ln w="9525">
+            <a:solidFill>
+              <a:srgbClr val="D9DCE1"/>
+            </a:solidFill>
+          </a:ln>
+          <a:effectLst/>
+        </p:spPr>
+        <p:style>
+          <a:lnRef idx="1">
+            <a:schemeClr val="accent1"/>
+          </a:lnRef>
+          <a:fillRef idx="3">
+            <a:schemeClr val="accent1"/>
+          </a:fillRef>
+          <a:effectRef idx="2">
+            <a:schemeClr val="accent1"/>
+          </a:effectRef>
+          <a:fontRef idx="minor">
+            <a:schemeClr val="lt1"/>
+          </a:fontRef>
+        </p:style>
+        <p:txBody>
+          <a:bodyPr rtlCol="0" anchor="ctr"/>
+          <a:lstStyle/>
+          <a:p>
+            <a:pPr algn="ctr"/>
+          </a:p>
+        </p:txBody>
+      </p:sp>
+      <p:sp>
+        <p:nvSpPr>
+          <p:cNvPr id="13" name="Rectangle 12"/>
+          <p:cNvSpPr/>
+          <p:nvPr/>
+        </p:nvSpPr>
+        <p:spPr>
+          <a:xfrm>
+            <a:off x="502920" y="3044952"/>
+            <a:ext cx="73152" cy="1627632"/>
+          </a:xfrm>
+          <a:prstGeom prst="rect">
+            <a:avLst/>
+          </a:prstGeom>
+          <a:solidFill>
+            <a:srgbClr val="2E5AAC"/>
+          </a:solidFill>
+          <a:ln>
+            <a:noFill/>
+          </a:ln>
+          <a:effectLst/>
+        </p:spPr>
+        <p:style>
+          <a:lnRef idx="1">
+            <a:schemeClr val="accent1"/>
+          </a:lnRef>
+          <a:fillRef idx="3">
+            <a:schemeClr val="accent1"/>
+          </a:fillRef>
+          <a:effectRef idx="2">
+            <a:schemeClr val="accent1"/>
+          </a:effectRef>
+          <a:fontRef idx="minor">
+            <a:schemeClr val="lt1"/>
+          </a:fontRef>
+        </p:style>
+        <p:txBody>
+          <a:bodyPr rtlCol="0" anchor="ctr"/>
+          <a:lstStyle/>
+          <a:p>
+            <a:pPr algn="ctr"/>
+          </a:p>
+        </p:txBody>
+      </p:sp>
+      <p:sp>
+        <p:nvSpPr>
+          <p:cNvPr id="14" name="TextBox 13"/>
+          <p:cNvSpPr txBox="1"/>
+          <p:nvPr/>
+        </p:nvSpPr>
+        <p:spPr>
+          <a:xfrm>
+            <a:off x="713232" y="3136392"/>
+            <a:ext cx="7863840" cy="292608"/>
+          </a:xfrm>
+          <a:prstGeom prst="rect">
+            <a:avLst/>
+          </a:prstGeom>
+          <a:noFill/>
+        </p:spPr>
+        <p:txBody>
+          <a:bodyPr wrap="square" anchor="t" lIns="0" rIns="0" tIns="0" bIns="0">
+            <a:spAutoFit/>
+          </a:bodyPr>
+          <a:lstStyle/>
+          <a:p>
+            <a:pPr algn="l">
+              <a:lnSpc>
+                <a:spcPct val="100000"/>
+              </a:lnSpc>
+            </a:pPr>
+            <a:r>
+              <a:rPr sz="1300" b="1" i="0">
+                <a:solidFill>
+                  <a:srgbClr val="1B2A4A"/>
+                </a:solidFill>
+                <a:latin typeface="Yu Gothic"/>
+              </a:rPr>
+              <a:t>Power Platform pricing／Microsoft 365 Enterprise pricing（参考価格）</a:t>
+            </a:r>
+          </a:p>
+        </p:txBody>
+      </p:sp>
+      <p:sp>
+        <p:nvSpPr>
+          <p:cNvPr id="15" name="Rounded Rectangle 14"/>
+          <p:cNvSpPr/>
+          <p:nvPr/>
+        </p:nvSpPr>
+        <p:spPr>
+          <a:xfrm>
+            <a:off x="9875520" y="3136392"/>
+            <a:ext cx="1737360" cy="292608"/>
+          </a:xfrm>
+          <a:prstGeom prst="roundRect">
+            <a:avLst>
+              <a:gd name="adj" fmla="val 50000"/>
+            </a:avLst>
+          </a:prstGeom>
+          <a:solidFill>
+            <a:srgbClr val="E9EFF9"/>
+          </a:solidFill>
+          <a:ln>
+            <a:noFill/>
+          </a:ln>
+          <a:effectLst/>
+        </p:spPr>
+        <p:style>
+          <a:lnRef idx="1">
+            <a:schemeClr val="accent1"/>
+          </a:lnRef>
+          <a:fillRef idx="3">
+            <a:schemeClr val="accent1"/>
+          </a:fillRef>
+          <a:effectRef idx="2">
+            <a:schemeClr val="accent1"/>
+          </a:effectRef>
+          <a:fontRef idx="minor">
+            <a:schemeClr val="lt1"/>
+          </a:fontRef>
+        </p:style>
+        <p:txBody>
+          <a:bodyPr rtlCol="0" anchor="ctr" wrap="none" lIns="25400" rIns="25400" tIns="12700" bIns="12700"/>
+          <a:lstStyle/>
+          <a:p>
+            <a:pPr algn="ctr"/>
+            <a:r>
+              <a:rPr sz="1050" b="1">
+                <a:solidFill>
+                  <a:srgbClr val="2E5AAC"/>
+                </a:solidFill>
+                <a:latin typeface="Yu Gothic"/>
+              </a:rPr>
+              <a:t>P.4・P.10 対応</a:t>
+            </a:r>
+          </a:p>
+        </p:txBody>
+      </p:sp>
+      <p:sp>
+        <p:nvSpPr>
+          <p:cNvPr id="16" name="TextBox 15"/>
+          <p:cNvSpPr txBox="1"/>
+          <p:nvPr/>
+        </p:nvSpPr>
+        <p:spPr>
+          <a:xfrm>
+            <a:off x="713232" y="3447288"/>
+            <a:ext cx="10881360" cy="237744"/>
+          </a:xfrm>
+          <a:prstGeom prst="rect">
+            <a:avLst/>
+          </a:prstGeom>
+          <a:noFill/>
+        </p:spPr>
+        <p:txBody>
+          <a:bodyPr wrap="square" anchor="t" lIns="0" rIns="0" tIns="0" bIns="0">
+            <a:spAutoFit/>
+          </a:bodyPr>
+          <a:lstStyle/>
+          <a:p>
+            <a:pPr algn="l">
+              <a:lnSpc>
+                <a:spcPct val="100000"/>
+              </a:lnSpc>
+            </a:pPr>
+            <a:r>
+              <a:rPr sz="1000" b="0" i="0">
+                <a:solidFill>
+                  <a:srgbClr val="6E6E6E"/>
+                </a:solidFill>
+                <a:latin typeface="Yu Gothic"/>
+              </a:rPr>
+              <a:t>microsoft.com/power-platform/pricing ／ microsoft.com/microsoft-365/enterprise</a:t>
+            </a:r>
+          </a:p>
+        </p:txBody>
+      </p:sp>
+      <p:sp>
+        <p:nvSpPr>
+          <p:cNvPr id="17" name="TextBox 16"/>
+          <p:cNvSpPr txBox="1"/>
+          <p:nvPr/>
+        </p:nvSpPr>
+        <p:spPr>
+          <a:xfrm>
+            <a:off x="713232" y="3721608"/>
+            <a:ext cx="10881360" cy="859536"/>
+          </a:xfrm>
+          <a:prstGeom prst="rect">
+            <a:avLst/>
+          </a:prstGeom>
+          <a:noFill/>
+        </p:spPr>
+        <p:txBody>
+          <a:bodyPr wrap="square" anchor="t" lIns="0" rIns="0" tIns="0" bIns="0">
+            <a:spAutoFit/>
+          </a:bodyPr>
+          <a:lstStyle/>
+          <a:p>
+            <a:pPr algn="l">
+              <a:lnSpc>
+                <a:spcPct val="118000"/>
+              </a:lnSpc>
+            </a:pPr>
+            <a:r>
+              <a:rPr sz="1100" b="0" i="0">
+                <a:solidFill>
+                  <a:srgbClr val="262626"/>
+                </a:solidFill>
+                <a:latin typeface="Yu Gothic"/>
+              </a:rPr>
+              <a:t>要旨：Power Apps Premium・Power Automate Premiumの参考価格（1ユーザー月額）と、Microsoft 365 E3/E5の参考価格をもとに追加コスト倍率を試算（一般的な目安であり、実際の契約条件により変動）。本資料の価格試算はMicrosoft公式ドキュメントではなく公式価格ページに基づく参考値である。</a:t>
+            </a:r>
+          </a:p>
+        </p:txBody>
+      </p:sp>
+      <p:sp>
+        <p:nvSpPr>
+          <p:cNvPr id="18" name="Rectangle 17"/>
+          <p:cNvSpPr/>
+          <p:nvPr/>
+        </p:nvSpPr>
+        <p:spPr>
+          <a:xfrm>
+            <a:off x="502920" y="4764024"/>
+            <a:ext cx="11201400" cy="1627632"/>
+          </a:xfrm>
+          <a:prstGeom prst="rect">
+            <a:avLst/>
+          </a:prstGeom>
+          <a:solidFill>
+            <a:srgbClr val="F5F6F8"/>
+          </a:solidFill>
+          <a:ln w="9525">
+            <a:solidFill>
+              <a:srgbClr val="D9DCE1"/>
+            </a:solidFill>
+          </a:ln>
+          <a:effectLst/>
+        </p:spPr>
+        <p:style>
+          <a:lnRef idx="1">
+            <a:schemeClr val="accent1"/>
+          </a:lnRef>
+          <a:fillRef idx="3">
+            <a:schemeClr val="accent1"/>
+          </a:fillRef>
+          <a:effectRef idx="2">
+            <a:schemeClr val="accent1"/>
+          </a:effectRef>
+          <a:fontRef idx="minor">
+            <a:schemeClr val="lt1"/>
+          </a:fontRef>
+        </p:style>
+        <p:txBody>
+          <a:bodyPr rtlCol="0" anchor="ctr"/>
+          <a:lstStyle/>
+          <a:p>
+            <a:pPr algn="ctr"/>
+          </a:p>
+        </p:txBody>
+      </p:sp>
+      <p:sp>
+        <p:nvSpPr>
+          <p:cNvPr id="19" name="Rectangle 18"/>
+          <p:cNvSpPr/>
+          <p:nvPr/>
+        </p:nvSpPr>
+        <p:spPr>
+          <a:xfrm>
+            <a:off x="502920" y="4764024"/>
+            <a:ext cx="73152" cy="1627632"/>
+          </a:xfrm>
+          <a:prstGeom prst="rect">
+            <a:avLst/>
+          </a:prstGeom>
+          <a:solidFill>
+            <a:srgbClr val="2E5AAC"/>
+          </a:solidFill>
+          <a:ln>
+            <a:noFill/>
+          </a:ln>
+          <a:effectLst/>
+        </p:spPr>
+        <p:style>
+          <a:lnRef idx="1">
+            <a:schemeClr val="accent1"/>
+          </a:lnRef>
+          <a:fillRef idx="3">
+            <a:schemeClr val="accent1"/>
+          </a:fillRef>
+          <a:effectRef idx="2">
+            <a:schemeClr val="accent1"/>
+          </a:effectRef>
+          <a:fontRef idx="minor">
+            <a:schemeClr val="lt1"/>
+          </a:fontRef>
+        </p:style>
+        <p:txBody>
+          <a:bodyPr rtlCol="0" anchor="ctr"/>
+          <a:lstStyle/>
+          <a:p>
+            <a:pPr algn="ctr"/>
+          </a:p>
+        </p:txBody>
+      </p:sp>
+      <p:sp>
+        <p:nvSpPr>
+          <p:cNvPr id="20" name="TextBox 19"/>
+          <p:cNvSpPr txBox="1"/>
+          <p:nvPr/>
+        </p:nvSpPr>
+        <p:spPr>
+          <a:xfrm>
+            <a:off x="713232" y="4855464"/>
+            <a:ext cx="7863840" cy="292608"/>
+          </a:xfrm>
+          <a:prstGeom prst="rect">
+            <a:avLst/>
+          </a:prstGeom>
+          <a:noFill/>
+        </p:spPr>
+        <p:txBody>
+          <a:bodyPr wrap="square" anchor="t" lIns="0" rIns="0" tIns="0" bIns="0">
+            <a:spAutoFit/>
+          </a:bodyPr>
+          <a:lstStyle/>
+          <a:p>
+            <a:pPr algn="l">
+              <a:lnSpc>
+                <a:spcPct val="100000"/>
+              </a:lnSpc>
+            </a:pPr>
+            <a:r>
+              <a:rPr sz="1300" b="1" i="0">
+                <a:solidFill>
+                  <a:srgbClr val="1B2A4A"/>
+                </a:solidFill>
+                <a:latin typeface="Yu Gothic"/>
+              </a:rPr>
+              <a:t>Personal Developer Environments（個人用開発環境）</a:t>
+            </a:r>
+          </a:p>
+        </p:txBody>
+      </p:sp>
+      <p:sp>
+        <p:nvSpPr>
+          <p:cNvPr id="21" name="Rounded Rectangle 20"/>
+          <p:cNvSpPr/>
+          <p:nvPr/>
+        </p:nvSpPr>
+        <p:spPr>
+          <a:xfrm>
+            <a:off x="9875520" y="4855464"/>
+            <a:ext cx="1737360" cy="292608"/>
+          </a:xfrm>
+          <a:prstGeom prst="roundRect">
+            <a:avLst>
+              <a:gd name="adj" fmla="val 50000"/>
+            </a:avLst>
+          </a:prstGeom>
+          <a:solidFill>
+            <a:srgbClr val="E9EFF9"/>
+          </a:solidFill>
+          <a:ln>
+            <a:noFill/>
+          </a:ln>
+          <a:effectLst/>
+        </p:spPr>
+        <p:style>
+          <a:lnRef idx="1">
+            <a:schemeClr val="accent1"/>
+          </a:lnRef>
+          <a:fillRef idx="3">
+            <a:schemeClr val="accent1"/>
+          </a:fillRef>
+          <a:effectRef idx="2">
+            <a:schemeClr val="accent1"/>
+          </a:effectRef>
+          <a:fontRef idx="minor">
+            <a:schemeClr val="lt1"/>
+          </a:fontRef>
+        </p:style>
+        <p:txBody>
+          <a:bodyPr rtlCol="0" anchor="ctr" wrap="none" lIns="25400" rIns="25400" tIns="12700" bIns="12700"/>
+          <a:lstStyle/>
+          <a:p>
+            <a:pPr algn="ctr"/>
+            <a:r>
+              <a:rPr sz="1050" b="1">
+                <a:solidFill>
+                  <a:srgbClr val="2E5AAC"/>
+                </a:solidFill>
+                <a:latin typeface="Yu Gothic"/>
+              </a:rPr>
+              <a:t>P.10 対応</a:t>
+            </a:r>
+          </a:p>
+        </p:txBody>
+      </p:sp>
+      <p:sp>
+        <p:nvSpPr>
+          <p:cNvPr id="22" name="TextBox 21"/>
+          <p:cNvSpPr txBox="1"/>
+          <p:nvPr/>
+        </p:nvSpPr>
+        <p:spPr>
+          <a:xfrm>
+            <a:off x="713232" y="5166360"/>
+            <a:ext cx="10881360" cy="237744"/>
+          </a:xfrm>
+          <a:prstGeom prst="rect">
+            <a:avLst/>
+          </a:prstGeom>
+          <a:noFill/>
+        </p:spPr>
+        <p:txBody>
+          <a:bodyPr wrap="square" anchor="t" lIns="0" rIns="0" tIns="0" bIns="0">
+            <a:spAutoFit/>
+          </a:bodyPr>
+          <a:lstStyle/>
+          <a:p>
+            <a:pPr algn="l">
+              <a:lnSpc>
+                <a:spcPct val="100000"/>
+              </a:lnSpc>
+            </a:pPr>
+            <a:r>
+              <a:rPr sz="1000" b="0" i="0">
+                <a:solidFill>
+                  <a:srgbClr val="6E6E6E"/>
+                </a:solidFill>
+                <a:latin typeface="Yu Gothic"/>
+              </a:rPr>
+              <a:t>microsoft.com/power-platform/blog（Personal Developer Environments）／</a:t>
+            </a:r>
+          </a:p>
+          <a:p>
+            <a:pPr algn="l">
+              <a:lnSpc>
+                <a:spcPct val="100000"/>
+              </a:lnSpc>
+            </a:pPr>
+            <a:r>
+              <a:rPr sz="1000" b="0" i="0">
+                <a:solidFill>
+                  <a:srgbClr val="6E6E6E"/>
+                </a:solidFill>
+                <a:latin typeface="Yu Gothic"/>
+              </a:rPr>
+              <a:t>learn.microsoft.com/ja-jp/power-platform/developer/create-developer-environment</a:t>
+            </a:r>
+          </a:p>
+        </p:txBody>
+      </p:sp>
+      <p:sp>
+        <p:nvSpPr>
+          <p:cNvPr id="23" name="TextBox 22"/>
+          <p:cNvSpPr txBox="1"/>
+          <p:nvPr/>
+        </p:nvSpPr>
+        <p:spPr>
+          <a:xfrm>
+            <a:off x="713232" y="5440680"/>
+            <a:ext cx="10881360" cy="859536"/>
+          </a:xfrm>
+          <a:prstGeom prst="rect">
+            <a:avLst/>
+          </a:prstGeom>
+          <a:noFill/>
+        </p:spPr>
+        <p:txBody>
+          <a:bodyPr wrap="square" anchor="t" lIns="0" rIns="0" tIns="0" bIns="0">
+            <a:spAutoFit/>
+          </a:bodyPr>
+          <a:lstStyle/>
+          <a:p>
+            <a:pPr algn="l">
+              <a:lnSpc>
+                <a:spcPct val="118000"/>
+              </a:lnSpc>
+            </a:pPr>
+            <a:r>
+              <a:rPr sz="1100" b="0" i="0">
+                <a:solidFill>
+                  <a:srgbClr val="262626"/>
+                </a:solidFill>
+                <a:latin typeface="Yu Gothic"/>
+              </a:rPr>
+              <a:t>要旨：個人用開発環境は、メーカー本人専用に分離されたDataverse対応の開発環境であり、他の利用者に影響を与えず安全に試作・テストができる。環境ルーティング機能により自動的に払い出される。</a:t>
+            </a:r>
+          </a:p>
+        </p:txBody>
+      </p:sp>
+      <p:sp>
+        <p:nvSpPr>
+          <p:cNvPr id="24" name="TextBox 23"/>
+          <p:cNvSpPr txBox="1"/>
+          <p:nvPr/>
+        </p:nvSpPr>
+        <p:spPr>
+          <a:xfrm>
+            <a:off x="502920" y="6565392"/>
+            <a:ext cx="8229600" cy="274320"/>
+          </a:xfrm>
+          <a:prstGeom prst="rect">
+            <a:avLst/>
+          </a:prstGeom>
+          <a:noFill/>
+        </p:spPr>
+        <p:txBody>
+          <a:bodyPr wrap="square" anchor="t" lIns="0" rIns="0" tIns="0" bIns="0">
+            <a:spAutoFit/>
+          </a:bodyPr>
+          <a:lstStyle/>
+          <a:p>
+            <a:pPr algn="l">
+              <a:lnSpc>
+                <a:spcPct val="100000"/>
+              </a:lnSpc>
+            </a:pPr>
+            <a:r>
+              <a:rPr sz="900" b="0" i="0">
+                <a:solidFill>
+                  <a:srgbClr val="6E6E6E"/>
+                </a:solidFill>
+                <a:latin typeface="Yu Gothic"/>
+              </a:rPr>
+              <a:t>Power Platform Default環境 統治 調査報告 ｜ Confidential</a:t>
+            </a:r>
+          </a:p>
+        </p:txBody>
+      </p:sp>
+      <p:sp>
+        <p:nvSpPr>
+          <p:cNvPr id="25" name="TextBox 24"/>
+          <p:cNvSpPr txBox="1"/>
+          <p:nvPr/>
+        </p:nvSpPr>
+        <p:spPr>
+          <a:xfrm>
+            <a:off x="11338560" y="6565392"/>
+            <a:ext cx="548640" cy="274320"/>
+          </a:xfrm>
+          <a:prstGeom prst="rect">
+            <a:avLst/>
+          </a:prstGeom>
+          <a:noFill/>
+        </p:spPr>
+        <p:txBody>
+          <a:bodyPr wrap="square" anchor="t" lIns="0" rIns="0" tIns="0" bIns="0">
+            <a:spAutoFit/>
+          </a:bodyPr>
+          <a:lstStyle/>
+          <a:p>
+            <a:pPr algn="r">
+              <a:lnSpc>
+                <a:spcPct val="100000"/>
+              </a:lnSpc>
+            </a:pPr>
+            <a:r>
+              <a:rPr sz="900" b="0" i="0">
+                <a:solidFill>
+                  <a:srgbClr val="6E6E6E"/>
+                </a:solidFill>
+                <a:latin typeface="Yu Gothic"/>
+              </a:rPr>
+              <a:t>18</a:t>
             </a:r>
           </a:p>
         </p:txBody>
@@ -11806,7 +13163,7 @@
                 </a:solidFill>
                 <a:latin typeface="Yu Gothic"/>
               </a:rPr>
-              <a:t>アプリ・接続（コネクタ）・カスタムコネクタ・Power Automateフローの作成と組織内共有。Copilot Studioのライセンスが別途付与されている場合はエージェントの作成も可能</a:t>
+              <a:t>アプリ・接続・カスタムコネクタ・フローの作成と共有が可能。Copilot Studio専用ライセンス保有時はフル機能のエージェントを、M365 Copilot Chat（多くの組織で既定利用可）が有効な場合は簡易エージェントを、それぞれ作成できる</a:t>
             </a:r>
           </a:p>
         </p:txBody>
@@ -12304,7 +13661,7 @@
                 </a:solidFill>
                 <a:latin typeface="Yu Gothic"/>
               </a:rPr>
-              <a:t>Copilot StudioやAI Builder等の生成AI機能利用時のメッセージ／クレジット消費、Pay-as-you-go請求ポリシーが環境に紐づく場合の従量課金が意図せず発生し得る</a:t>
+              <a:t>Copilot StudioやAI Builder等の生成AI機能が利用でき、意図しない従量課金が発生し得る</a:t>
             </a:r>
           </a:p>
         </p:txBody>
@@ -12638,9 +13995,9 @@
               </a:tblPr>
               <a:tblGrid>
                 <a:gridCol w="457200"/>
-                <a:gridCol w="2468880"/>
-                <a:gridCol w="1737360"/>
-                <a:gridCol w="6766560"/>
+                <a:gridCol w="2377440"/>
+                <a:gridCol w="1645920"/>
+                <a:gridCol w="6949440"/>
               </a:tblGrid>
               <a:tr h="1014984">
                 <a:tc>
@@ -12767,7 +14124,7 @@
                     <a:p>
                       <a:pPr algn="l"/>
                       <a:r>
-                        <a:rPr sz="1150" b="1">
+                        <a:rPr sz="1100" b="1">
                           <a:solidFill>
                             <a:srgbClr val="1B2A4A"/>
                           </a:solidFill>
@@ -12779,7 +14136,7 @@
                     <a:p>
                       <a:pPr algn="l"/>
                       <a:r>
-                        <a:rPr sz="1150" b="1">
+                        <a:rPr sz="1100" b="1">
                           <a:solidFill>
                             <a:srgbClr val="1B2A4A"/>
                           </a:solidFill>
@@ -12802,7 +14159,7 @@
                     <a:p>
                       <a:pPr algn="ctr"/>
                       <a:r>
-                        <a:rPr sz="1200" b="1">
+                        <a:rPr sz="1150" b="1">
                           <a:solidFill>
                             <a:srgbClr val="B86E00"/>
                           </a:solidFill>
@@ -12825,37 +14182,13 @@
                     <a:p>
                       <a:pPr algn="l"/>
                       <a:r>
-                        <a:rPr sz="1100" b="0">
+                        <a:rPr sz="1030" b="0">
                           <a:solidFill>
                             <a:srgbClr val="262626"/>
                           </a:solidFill>
                           <a:latin typeface="Yu Gothic"/>
                         </a:rPr>
-                        <a:t>環境の種類を問わず有効化は可能。ただし有効化するとその環境の</a:t>
-                      </a:r>
-                    </a:p>
-                    <a:p>
-                      <a:pPr algn="l"/>
-                      <a:r>
-                        <a:rPr sz="1100" b="0">
-                          <a:solidFill>
-                            <a:srgbClr val="262626"/>
-                          </a:solidFill>
-                          <a:latin typeface="Yu Gothic"/>
-                        </a:rPr>
-                        <a:t>全利用者にPremiumライセンスが必要となるため、Default環境では</a:t>
-                      </a:r>
-                    </a:p>
-                    <a:p>
-                      <a:pPr algn="l"/>
-                      <a:r>
-                        <a:rPr sz="1100" b="0">
-                          <a:solidFill>
-                            <a:srgbClr val="262626"/>
-                          </a:solidFill>
-                          <a:latin typeface="Yu Gothic"/>
-                        </a:rPr>
-                        <a:t>事実上「全社Premium化」が前提となる</a:t>
+                        <a:t>環境の種類を問わず有効化は可能。ただし有効化すると全利用者（≒全社員）にPremiumライセンスが必要となり、多大な追加コストが発生するため、Default環境では事実上「全社Premium化」が前提となる</a:t>
                       </a:r>
                     </a:p>
                   </a:txBody>
@@ -12897,7 +14230,7 @@
                     <a:p>
                       <a:pPr algn="l"/>
                       <a:r>
-                        <a:rPr sz="1150" b="1">
+                        <a:rPr sz="1100" b="1">
                           <a:solidFill>
                             <a:srgbClr val="1B2A4A"/>
                           </a:solidFill>
@@ -12909,7 +14242,7 @@
                     <a:p>
                       <a:pPr algn="l"/>
                       <a:r>
-                        <a:rPr sz="1150" b="1">
+                        <a:rPr sz="1100" b="1">
                           <a:solidFill>
                             <a:srgbClr val="1B2A4A"/>
                           </a:solidFill>
@@ -12932,7 +14265,7 @@
                     <a:p>
                       <a:pPr algn="ctr"/>
                       <a:r>
-                        <a:rPr sz="1200" b="1">
+                        <a:rPr sz="1150" b="1">
                           <a:solidFill>
                             <a:srgbClr val="1E8A4A"/>
                           </a:solidFill>
@@ -12955,25 +14288,13 @@
                     <a:p>
                       <a:pPr algn="l"/>
                       <a:r>
-                        <a:rPr sz="1100" b="0">
+                        <a:rPr sz="1030" b="0">
                           <a:solidFill>
                             <a:srgbClr val="262626"/>
                           </a:solidFill>
                           <a:latin typeface="Yu Gothic"/>
                         </a:rPr>
-                        <a:t>マネージド環境化とは独立した機能であり、追加ライセンスなしで</a:t>
-                      </a:r>
-                    </a:p>
-                    <a:p>
-                      <a:pPr algn="l"/>
-                      <a:r>
-                        <a:rPr sz="1100" b="0">
-                          <a:solidFill>
-                            <a:srgbClr val="262626"/>
-                          </a:solidFill>
-                          <a:latin typeface="Yu Gothic"/>
-                        </a:rPr>
-                        <a:t>適用可能。Microsoft公式もDefault環境への適用を強く推奨している</a:t>
+                        <a:t>マネージド環境化とは独立した機能であり、追加ライセンスなしで適用可能。Microsoft公式もDefault環境への適用を強く推奨している。※DLPポリシー＝コネクタを「連携可」「連携不可」のグループに分類し、意図しないデータ連携を制限する仕組み</a:t>
                       </a:r>
                     </a:p>
                   </a:txBody>
@@ -13015,7 +14336,7 @@
                     <a:p>
                       <a:pPr algn="l"/>
                       <a:r>
-                        <a:rPr sz="1150" b="1">
+                        <a:rPr sz="1100" b="1">
                           <a:solidFill>
                             <a:srgbClr val="1B2A4A"/>
                           </a:solidFill>
@@ -13027,7 +14348,7 @@
                     <a:p>
                       <a:pPr algn="l"/>
                       <a:r>
-                        <a:rPr sz="1150" b="1">
+                        <a:rPr sz="1100" b="1">
                           <a:solidFill>
                             <a:srgbClr val="1B2A4A"/>
                           </a:solidFill>
@@ -13039,7 +14360,7 @@
                     <a:p>
                       <a:pPr algn="l"/>
                       <a:r>
-                        <a:rPr sz="1150" b="1">
+                        <a:rPr sz="1100" b="1">
                           <a:solidFill>
                             <a:srgbClr val="1B2A4A"/>
                           </a:solidFill>
@@ -13062,7 +14383,7 @@
                     <a:p>
                       <a:pPr algn="ctr"/>
                       <a:r>
-                        <a:rPr sz="1200" b="1">
+                        <a:rPr sz="1150" b="1">
                           <a:solidFill>
                             <a:srgbClr val="1E8A4A"/>
                           </a:solidFill>
@@ -13085,7 +14406,7 @@
                     <a:p>
                       <a:pPr algn="l"/>
                       <a:r>
-                        <a:rPr sz="1100" b="0">
+                        <a:rPr sz="1030" b="0">
                           <a:solidFill>
                             <a:srgbClr val="262626"/>
                           </a:solidFill>
@@ -13097,7 +14418,7 @@
                     <a:p>
                       <a:pPr algn="l"/>
                       <a:r>
-                        <a:rPr sz="1100" b="0">
+                        <a:rPr sz="1030" b="0">
                           <a:solidFill>
                             <a:srgbClr val="262626"/>
                           </a:solidFill>
@@ -13109,7 +14430,7 @@
                     <a:p>
                       <a:pPr algn="l"/>
                       <a:r>
-                        <a:rPr sz="1100" b="0">
+                        <a:rPr sz="1030" b="0">
                           <a:solidFill>
                             <a:srgbClr val="262626"/>
                           </a:solidFill>
@@ -13157,7 +14478,7 @@
                     <a:p>
                       <a:pPr algn="l"/>
                       <a:r>
-                        <a:rPr sz="1150" b="1">
+                        <a:rPr sz="1100" b="1">
                           <a:solidFill>
                             <a:srgbClr val="1B2A4A"/>
                           </a:solidFill>
@@ -13169,7 +14490,7 @@
                     <a:p>
                       <a:pPr algn="l"/>
                       <a:r>
-                        <a:rPr sz="1150" b="1">
+                        <a:rPr sz="1100" b="1">
                           <a:solidFill>
                             <a:srgbClr val="1B2A4A"/>
                           </a:solidFill>
@@ -13181,7 +14502,7 @@
                     <a:p>
                       <a:pPr algn="l"/>
                       <a:r>
-                        <a:rPr sz="1150" b="1">
+                        <a:rPr sz="1100" b="1">
                           <a:solidFill>
                             <a:srgbClr val="1B2A4A"/>
                           </a:solidFill>
@@ -13204,7 +14525,7 @@
                     <a:p>
                       <a:pPr algn="ctr"/>
                       <a:r>
-                        <a:rPr sz="1200" b="1">
+                        <a:rPr sz="1150" b="1">
                           <a:solidFill>
                             <a:srgbClr val="2E5AAC"/>
                           </a:solidFill>
@@ -13227,25 +14548,13 @@
                     <a:p>
                       <a:pPr algn="l"/>
                       <a:r>
-                        <a:rPr sz="1100" b="0">
+                        <a:rPr sz="1030" b="0">
                           <a:solidFill>
                             <a:srgbClr val="262626"/>
                           </a:solidFill>
                           <a:latin typeface="Yu Gothic"/>
                         </a:rPr>
-                        <a:t>管理者専用のライセンス区分は存在しない。当該環境でアプリ／</a:t>
-                      </a:r>
-                    </a:p>
-                    <a:p>
-                      <a:pPr algn="l"/>
-                      <a:r>
-                        <a:rPr sz="1100" b="0">
-                          <a:solidFill>
-                            <a:srgbClr val="262626"/>
-                          </a:solidFill>
-                          <a:latin typeface="Yu Gothic"/>
-                        </a:rPr>
-                        <a:t>フローを実行する利用者全員が対象となる</a:t>
+                        <a:t>管理者専用のライセンス区分は存在しない。開発者・利用するだけの人を問わず、環境内でアプリ/フローを実行する人は全員が対象となる</a:t>
                       </a:r>
                     </a:p>
                   </a:txBody>
@@ -13550,9 +14859,9 @@
               </a:tblPr>
               <a:tblGrid>
                 <a:gridCol w="457200"/>
-                <a:gridCol w="2468880"/>
-                <a:gridCol w="1737360"/>
-                <a:gridCol w="6766560"/>
+                <a:gridCol w="2377440"/>
+                <a:gridCol w="1645920"/>
+                <a:gridCol w="6949440"/>
               </a:tblGrid>
               <a:tr h="982980">
                 <a:tc>
@@ -13679,7 +14988,7 @@
                     <a:p>
                       <a:pPr algn="l"/>
                       <a:r>
-                        <a:rPr sz="1150" b="1">
+                        <a:rPr sz="1100" b="1">
                           <a:solidFill>
                             <a:srgbClr val="1B2A4A"/>
                           </a:solidFill>
@@ -13691,7 +15000,7 @@
                     <a:p>
                       <a:pPr algn="l"/>
                       <a:r>
-                        <a:rPr sz="1150" b="1">
+                        <a:rPr sz="1100" b="1">
                           <a:solidFill>
                             <a:srgbClr val="1B2A4A"/>
                           </a:solidFill>
@@ -13703,7 +15012,7 @@
                     <a:p>
                       <a:pPr algn="l"/>
                       <a:r>
-                        <a:rPr sz="1150" b="1">
+                        <a:rPr sz="1100" b="1">
                           <a:solidFill>
                             <a:srgbClr val="1B2A4A"/>
                           </a:solidFill>
@@ -13726,7 +15035,7 @@
                     <a:p>
                       <a:pPr algn="ctr"/>
                       <a:r>
-                        <a:rPr sz="1200" b="1">
+                        <a:rPr sz="1150" b="1">
                           <a:solidFill>
                             <a:srgbClr val="B02A2A"/>
                           </a:solidFill>
@@ -13749,7 +15058,7 @@
                     <a:p>
                       <a:pPr algn="l"/>
                       <a:r>
-                        <a:rPr sz="1100" b="0">
+                        <a:rPr sz="1030" b="0">
                           <a:solidFill>
                             <a:srgbClr val="262626"/>
                           </a:solidFill>
@@ -13761,7 +15070,7 @@
                     <a:p>
                       <a:pPr algn="l"/>
                       <a:r>
-                        <a:rPr sz="1100" b="0">
+                        <a:rPr sz="1030" b="0">
                           <a:solidFill>
                             <a:srgbClr val="262626"/>
                           </a:solidFill>
@@ -13773,7 +15082,7 @@
                     <a:p>
                       <a:pPr algn="l"/>
                       <a:r>
-                        <a:rPr sz="1100" b="0">
+                        <a:rPr sz="1030" b="0">
                           <a:solidFill>
                             <a:srgbClr val="262626"/>
                           </a:solidFill>
@@ -13821,7 +15130,7 @@
                     <a:p>
                       <a:pPr algn="l"/>
                       <a:r>
-                        <a:rPr sz="1150" b="1">
+                        <a:rPr sz="1100" b="1">
                           <a:solidFill>
                             <a:srgbClr val="1B2A4A"/>
                           </a:solidFill>
@@ -13833,7 +15142,7 @@
                     <a:p>
                       <a:pPr algn="l"/>
                       <a:r>
-                        <a:rPr sz="1150" b="1">
+                        <a:rPr sz="1100" b="1">
                           <a:solidFill>
                             <a:srgbClr val="1B2A4A"/>
                           </a:solidFill>
@@ -13856,7 +15165,7 @@
                     <a:p>
                       <a:pPr algn="ctr"/>
                       <a:r>
-                        <a:rPr sz="1200" b="1">
+                        <a:rPr sz="1150" b="1">
                           <a:solidFill>
                             <a:srgbClr val="2E5AAC"/>
                           </a:solidFill>
@@ -13879,7 +15188,7 @@
                     <a:p>
                       <a:pPr algn="l"/>
                       <a:r>
-                        <a:rPr sz="1100" b="0">
+                        <a:rPr sz="1030" b="0">
                           <a:solidFill>
                             <a:srgbClr val="262626"/>
                           </a:solidFill>
@@ -13891,7 +15200,7 @@
                     <a:p>
                       <a:pPr algn="l"/>
                       <a:r>
-                        <a:rPr sz="1100" b="0">
+                        <a:rPr sz="1030" b="0">
                           <a:solidFill>
                             <a:srgbClr val="262626"/>
                           </a:solidFill>
@@ -13903,7 +15212,7 @@
                     <a:p>
                       <a:pPr algn="l"/>
                       <a:r>
-                        <a:rPr sz="1100" b="0">
+                        <a:rPr sz="1030" b="0">
                           <a:solidFill>
                             <a:srgbClr val="262626"/>
                           </a:solidFill>
@@ -13951,7 +15260,7 @@
                     <a:p>
                       <a:pPr algn="l"/>
                       <a:r>
-                        <a:rPr sz="1150" b="1">
+                        <a:rPr sz="1100" b="1">
                           <a:solidFill>
                             <a:srgbClr val="1B2A4A"/>
                           </a:solidFill>
@@ -13963,7 +15272,7 @@
                     <a:p>
                       <a:pPr algn="l"/>
                       <a:r>
-                        <a:rPr sz="1150" b="1">
+                        <a:rPr sz="1100" b="1">
                           <a:solidFill>
                             <a:srgbClr val="1B2A4A"/>
                           </a:solidFill>
@@ -13986,7 +15295,7 @@
                     <a:p>
                       <a:pPr algn="ctr"/>
                       <a:r>
-                        <a:rPr sz="1200" b="1">
+                        <a:rPr sz="1150" b="1">
                           <a:solidFill>
                             <a:srgbClr val="B86E00"/>
                           </a:solidFill>
@@ -14009,37 +15318,13 @@
                     <a:p>
                       <a:pPr algn="l"/>
                       <a:r>
-                        <a:rPr sz="1100" b="0">
+                        <a:rPr sz="1030" b="0">
                           <a:solidFill>
                             <a:srgbClr val="262626"/>
                           </a:solidFill>
                           <a:latin typeface="Yu Gothic"/>
                         </a:rPr>
-                        <a:t>Default環境の全体マネージド化は全社Premium化が前提となり</a:t>
-                      </a:r>
-                    </a:p>
-                    <a:p>
-                      <a:pPr algn="l"/>
-                      <a:r>
-                        <a:rPr sz="1100" b="0">
-                          <a:solidFill>
-                            <a:srgbClr val="262626"/>
-                          </a:solidFill>
-                          <a:latin typeface="Yu Gothic"/>
-                        </a:rPr>
-                        <a:t>実務上ハードルが高い。DLPポリシーの先行適用・環境ルーティング</a:t>
-                      </a:r>
-                    </a:p>
-                    <a:p>
-                      <a:pPr algn="l"/>
-                      <a:r>
-                        <a:rPr sz="1100" b="0">
-                          <a:solidFill>
-                            <a:srgbClr val="262626"/>
-                          </a:solidFill>
-                          <a:latin typeface="Yu Gothic"/>
-                        </a:rPr>
-                        <a:t>などの代替統制で早期にリスクを低減できる</a:t>
+                        <a:t>全社員分のPremiumライセンス費用（既存ライセンス比でE3は約1.6倍、E5は約1.3倍の負担目安。詳細は契約内容により要確認）に加え、予算承認や既存無償利用者への影響も伴うため実務上ハードルが高い（詳細はP.10）。DLP先行適用等の代替統制で早期にリスク低減可能</a:t>
                       </a:r>
                     </a:p>
                   </a:txBody>
@@ -14502,14 +15787,14 @@
           <a:p>
             <a:pPr>
               <a:lnSpc>
-                <a:spcPct val="113000"/>
+                <a:spcPct val="110000"/>
               </a:lnSpc>
               <a:spcAft>
-                <a:spcPts val="800"/>
+                <a:spcPts val="700"/>
               </a:spcAft>
             </a:pPr>
             <a:r>
-              <a:rPr sz="1250" b="1">
+              <a:rPr sz="1200" b="1">
                 <a:solidFill>
                   <a:srgbClr val="262626"/>
                 </a:solidFill>
@@ -14521,14 +15806,14 @@
           <a:p>
             <a:pPr marL="228600">
               <a:lnSpc>
-                <a:spcPct val="113000"/>
+                <a:spcPct val="110000"/>
               </a:lnSpc>
               <a:spcAft>
-                <a:spcPts val="800"/>
+                <a:spcPts val="700"/>
               </a:spcAft>
             </a:pPr>
             <a:r>
-              <a:rPr sz="1150" b="0">
+              <a:rPr sz="1100" b="0">
                 <a:solidFill>
                   <a:srgbClr val="262626"/>
                 </a:solidFill>
@@ -14538,7 +15823,7 @@
             </a:r>
             <a:br/>
             <a:r>
-              <a:rPr sz="1150" b="0">
+              <a:rPr sz="1100" b="0">
                 <a:solidFill>
                   <a:srgbClr val="262626"/>
                 </a:solidFill>
@@ -14550,14 +15835,14 @@
           <a:p>
             <a:pPr marL="228600">
               <a:lnSpc>
-                <a:spcPct val="113000"/>
+                <a:spcPct val="110000"/>
               </a:lnSpc>
               <a:spcAft>
-                <a:spcPts val="800"/>
+                <a:spcPts val="700"/>
               </a:spcAft>
             </a:pPr>
             <a:r>
-              <a:rPr sz="1150" b="0">
+              <a:rPr sz="1100" b="0">
                 <a:solidFill>
                   <a:srgbClr val="262626"/>
                 </a:solidFill>
@@ -14567,7 +15852,7 @@
             </a:r>
             <a:br/>
             <a:r>
-              <a:rPr sz="1150" b="0">
+              <a:rPr sz="1100" b="0">
                 <a:solidFill>
                   <a:srgbClr val="262626"/>
                 </a:solidFill>
@@ -14579,14 +15864,14 @@
           <a:p>
             <a:pPr>
               <a:lnSpc>
-                <a:spcPct val="113000"/>
+                <a:spcPct val="110000"/>
               </a:lnSpc>
               <a:spcAft>
-                <a:spcPts val="800"/>
+                <a:spcPts val="700"/>
               </a:spcAft>
             </a:pPr>
             <a:r>
-              <a:rPr sz="1250" b="1">
+              <a:rPr sz="1200" b="1">
                 <a:solidFill>
                   <a:srgbClr val="262626"/>
                 </a:solidFill>
@@ -14598,14 +15883,14 @@
           <a:p>
             <a:pPr marL="228600">
               <a:lnSpc>
-                <a:spcPct val="113000"/>
+                <a:spcPct val="110000"/>
               </a:lnSpc>
               <a:spcAft>
-                <a:spcPts val="800"/>
+                <a:spcPts val="700"/>
               </a:spcAft>
             </a:pPr>
             <a:r>
-              <a:rPr sz="1150" b="0">
+              <a:rPr sz="1100" b="0">
                 <a:solidFill>
                   <a:srgbClr val="262626"/>
                 </a:solidFill>
@@ -14615,7 +15900,7 @@
             </a:r>
             <a:br/>
             <a:r>
-              <a:rPr sz="1150" b="0">
+              <a:rPr sz="1100" b="0">
                 <a:solidFill>
                   <a:srgbClr val="262626"/>
                 </a:solidFill>
@@ -14625,7 +15910,7 @@
             </a:r>
             <a:br/>
             <a:r>
-              <a:rPr sz="1150" b="0">
+              <a:rPr sz="1100" b="0">
                 <a:solidFill>
                   <a:srgbClr val="262626"/>
                 </a:solidFill>
@@ -14637,14 +15922,14 @@
           <a:p>
             <a:pPr>
               <a:lnSpc>
-                <a:spcPct val="113000"/>
+                <a:spcPct val="110000"/>
               </a:lnSpc>
               <a:spcAft>
-                <a:spcPts val="800"/>
+                <a:spcPts val="700"/>
               </a:spcAft>
             </a:pPr>
             <a:r>
-              <a:rPr sz="1250" b="1">
+              <a:rPr sz="1200" b="1">
                 <a:solidFill>
                   <a:srgbClr val="262626"/>
                 </a:solidFill>
@@ -14656,14 +15941,14 @@
           <a:p>
             <a:pPr marL="228600">
               <a:lnSpc>
-                <a:spcPct val="113000"/>
+                <a:spcPct val="110000"/>
               </a:lnSpc>
               <a:spcAft>
-                <a:spcPts val="800"/>
+                <a:spcPts val="700"/>
               </a:spcAft>
             </a:pPr>
             <a:r>
-              <a:rPr sz="1150" b="0">
+              <a:rPr sz="1100" b="0">
                 <a:solidFill>
                   <a:srgbClr val="262626"/>
                 </a:solidFill>
@@ -14673,13 +15958,13 @@
             </a:r>
             <a:br/>
             <a:r>
-              <a:rPr sz="1150" b="0">
+              <a:rPr sz="1100" b="0">
                 <a:solidFill>
                   <a:srgbClr val="262626"/>
                 </a:solidFill>
                 <a:latin typeface="Yu Gothic"/>
               </a:rPr>
-              <a:t>有効化するとその全員がPremium対象になり得る（詳細はP.7）</a:t>
+              <a:t>有効化するとその全員がPremium対象になり得る（詳細はP.7・P.10）</a:t>
             </a:r>
           </a:p>
         </p:txBody>
@@ -14756,13 +16041,13 @@
               </a:lnSpc>
             </a:pPr>
             <a:r>
-              <a:rPr sz="1350" b="1" i="0">
+              <a:rPr sz="1300" b="1" i="0">
                 <a:solidFill>
                   <a:srgbClr val="1B2A4A"/>
                 </a:solidFill>
                 <a:latin typeface="Yu Gothic"/>
               </a:rPr>
-              <a:t>有効化で得られる主な機能</a:t>
+              <a:t>有効化で得られる主な機能と価値</a:t>
             </a:r>
           </a:p>
         </p:txBody>
@@ -14775,8 +16060,8 @@
         </p:nvSpPr>
         <p:spPr>
           <a:xfrm>
-            <a:off x="8046720" y="1965960"/>
-            <a:ext cx="3474720" cy="3657600"/>
+            <a:off x="8046720" y="1938528"/>
+            <a:ext cx="3474720" cy="3703320"/>
           </a:xfrm>
           <a:prstGeom prst="rect">
             <a:avLst/>
@@ -14791,96 +16076,146 @@
           <a:p>
             <a:pPr>
               <a:lnSpc>
-                <a:spcPct val="120000"/>
+                <a:spcPct val="115000"/>
               </a:lnSpc>
               <a:spcAft>
                 <a:spcPts val="800"/>
               </a:spcAft>
             </a:pPr>
             <a:r>
-              <a:rPr sz="1200" b="0">
+              <a:rPr sz="1100" b="0">
                 <a:solidFill>
                   <a:srgbClr val="262626"/>
                 </a:solidFill>
                 <a:latin typeface="Yu Gothic"/>
               </a:rPr>
-              <a:t>● 共有制限（アプリ/フローの共有範囲制御）</a:t>
+              <a:t>● 共有制限：無制限共有を禁止し、想定外の大量アクセスや</a:t>
+            </a:r>
+            <a:br/>
+            <a:r>
+              <a:rPr sz="1100" b="0">
+                <a:solidFill>
+                  <a:srgbClr val="262626"/>
+                </a:solidFill>
+                <a:latin typeface="Yu Gothic"/>
+              </a:rPr>
+              <a:t>情報漏えいを防止</a:t>
             </a:r>
           </a:p>
           <a:p>
             <a:pPr>
               <a:lnSpc>
-                <a:spcPct val="120000"/>
+                <a:spcPct val="115000"/>
               </a:lnSpc>
               <a:spcAft>
                 <a:spcPts val="800"/>
               </a:spcAft>
             </a:pPr>
             <a:r>
-              <a:rPr sz="1200" b="0">
+              <a:rPr sz="1100" b="0">
                 <a:solidFill>
                   <a:srgbClr val="262626"/>
                 </a:solidFill>
                 <a:latin typeface="Yu Gothic"/>
               </a:rPr>
-              <a:t>● 使用状況の分析情報</a:t>
+              <a:t>● 使用状況の分析情報：利用実態を週次レポートで把握し、</a:t>
+            </a:r>
+            <a:br/>
+            <a:r>
+              <a:rPr sz="1100" b="0">
+                <a:solidFill>
+                  <a:srgbClr val="262626"/>
+                </a:solidFill>
+                <a:latin typeface="Yu Gothic"/>
+              </a:rPr>
+              <a:t>放置された野良アプリを発見</a:t>
             </a:r>
           </a:p>
           <a:p>
             <a:pPr>
               <a:lnSpc>
-                <a:spcPct val="120000"/>
+                <a:spcPct val="115000"/>
               </a:lnSpc>
               <a:spcAft>
                 <a:spcPts val="800"/>
               </a:spcAft>
             </a:pPr>
             <a:r>
-              <a:rPr sz="1200" b="0">
+              <a:rPr sz="1100" b="0">
                 <a:solidFill>
                   <a:srgbClr val="262626"/>
                 </a:solidFill>
                 <a:latin typeface="Yu Gothic"/>
               </a:rPr>
-              <a:t>● IP ファイアウォール（許可されたIPからのみDataverseへのアクセスを制限）</a:t>
+              <a:t>● IP ファイアウォール：許可した社内IPからのみDataverse</a:t>
+            </a:r>
+            <a:br/>
+            <a:r>
+              <a:rPr sz="1100" b="0">
+                <a:solidFill>
+                  <a:srgbClr val="262626"/>
+                </a:solidFill>
+                <a:latin typeface="Yu Gothic"/>
+              </a:rPr>
+              <a:t>へのアクセスを許可</a:t>
             </a:r>
           </a:p>
           <a:p>
             <a:pPr>
               <a:lnSpc>
-                <a:spcPct val="120000"/>
+                <a:spcPct val="115000"/>
               </a:lnSpc>
               <a:spcAft>
                 <a:spcPts val="800"/>
               </a:spcAft>
             </a:pPr>
             <a:r>
-              <a:rPr sz="1200" b="0">
+              <a:rPr sz="1100" b="0">
                 <a:solidFill>
                   <a:srgbClr val="262626"/>
                 </a:solidFill>
                 <a:latin typeface="Yu Gothic"/>
               </a:rPr>
-              <a:t>● ソリューション チェッカーの自動実行</a:t>
+              <a:t>● ソリューション チェッカー：公開前に品質・セキュリティ</a:t>
+            </a:r>
+            <a:br/>
+            <a:r>
+              <a:rPr sz="1100" b="0">
+                <a:solidFill>
+                  <a:srgbClr val="262626"/>
+                </a:solidFill>
+                <a:latin typeface="Yu Gothic"/>
+              </a:rPr>
+              <a:t>上の問題を自動検出</a:t>
             </a:r>
           </a:p>
           <a:p>
             <a:pPr>
               <a:lnSpc>
-                <a:spcPct val="120000"/>
+                <a:spcPct val="115000"/>
               </a:lnSpc>
               <a:spcAft>
                 <a:spcPts val="800"/>
               </a:spcAft>
             </a:pPr>
             <a:r>
-              <a:rPr sz="1200" b="0">
+              <a:rPr sz="1100" b="0">
                 <a:solidFill>
                   <a:srgbClr val="262626"/>
                 </a:solidFill>
                 <a:latin typeface="Yu Gothic"/>
               </a:rPr>
-              <a:t>● アクション ページによる最適化の推奨事項</a:t>
+              <a:t>● アクション ページの推奨事項：環境ごとの最適化提案を</a:t>
+            </a:r>
+            <a:br/>
+            <a:r>
+              <a:rPr sz="1100" b="0">
+                <a:solidFill>
+                  <a:srgbClr val="262626"/>
+                </a:solidFill>
+                <a:latin typeface="Yu Gothic"/>
+              </a:rPr>
+              <a:t>自動取得し運用工数を削減</a:t>
             </a:r>
           </a:p>
         </p:txBody>
@@ -14893,8 +16228,8 @@
         </p:nvSpPr>
         <p:spPr>
           <a:xfrm>
-            <a:off x="502920" y="6565392"/>
-            <a:ext cx="8229600" cy="274320"/>
+            <a:off x="502920" y="6035040"/>
+            <a:ext cx="11155680" cy="457200"/>
           </a:xfrm>
           <a:prstGeom prst="rect">
             <a:avLst/>
@@ -14913,6 +16248,45 @@
               </a:lnSpc>
             </a:pPr>
             <a:r>
+              <a:rPr sz="1000" b="0" i="1">
+                <a:solidFill>
+                  <a:srgbClr val="6E6E6E"/>
+                </a:solidFill>
+                <a:latin typeface="Yu Gothic"/>
+              </a:rPr>
+              <a:t>※ 本資料は実施の要否を判断するための材料提示に徹し、特定の結論へ誘導するものではない。コストと得られる価値は次頁以降もあわせて確認のこと。</a:t>
+            </a:r>
+          </a:p>
+        </p:txBody>
+      </p:sp>
+      <p:sp>
+        <p:nvSpPr>
+          <p:cNvPr id="12" name="TextBox 11"/>
+          <p:cNvSpPr txBox="1"/>
+          <p:nvPr/>
+        </p:nvSpPr>
+        <p:spPr>
+          <a:xfrm>
+            <a:off x="502920" y="6565392"/>
+            <a:ext cx="8229600" cy="274320"/>
+          </a:xfrm>
+          <a:prstGeom prst="rect">
+            <a:avLst/>
+          </a:prstGeom>
+          <a:noFill/>
+        </p:spPr>
+        <p:txBody>
+          <a:bodyPr wrap="square" anchor="t" lIns="0" rIns="0" tIns="0" bIns="0">
+            <a:spAutoFit/>
+          </a:bodyPr>
+          <a:lstStyle/>
+          <a:p>
+            <a:pPr algn="l">
+              <a:lnSpc>
+                <a:spcPct val="100000"/>
+              </a:lnSpc>
+            </a:pPr>
+            <a:r>
               <a:rPr sz="900" b="0" i="0">
                 <a:solidFill>
                   <a:srgbClr val="6E6E6E"/>
@@ -14926,7 +16300,7 @@
       </p:sp>
       <p:sp>
         <p:nvSpPr>
-          <p:cNvPr id="12" name="TextBox 11"/>
+          <p:cNvPr id="13" name="TextBox 12"/>
           <p:cNvSpPr txBox="1"/>
           <p:nvPr/>
         </p:nvSpPr>
@@ -15503,52 +16877,72 @@
           <a:p>
             <a:pPr>
               <a:lnSpc>
-                <a:spcPct val="125000"/>
+                <a:spcPct val="120000"/>
               </a:lnSpc>
               <a:spcAft>
                 <a:spcPts val="1000"/>
               </a:spcAft>
             </a:pPr>
             <a:r>
-              <a:rPr sz="1200" b="0">
+              <a:rPr sz="1150" b="0">
                 <a:solidFill>
                   <a:srgbClr val="262626"/>
                 </a:solidFill>
                 <a:latin typeface="Yu Gothic"/>
               </a:rPr>
-              <a:t>● ① ブロック不可コネクタ → 「ビジネス」グループへ</a:t>
+              <a:t>● ① ブロック不可コネクタ →</a:t>
+            </a:r>
+            <a:br/>
+            <a:r>
+              <a:rPr sz="1150" b="0">
+                <a:solidFill>
+                  <a:srgbClr val="262626"/>
+                </a:solidFill>
+                <a:latin typeface="Yu Gothic"/>
+              </a:rPr>
+              <a:t>「ビジネス」グループへ（接続可）</a:t>
             </a:r>
           </a:p>
           <a:p>
             <a:pPr>
               <a:lnSpc>
-                <a:spcPct val="125000"/>
+                <a:spcPct val="120000"/>
               </a:lnSpc>
               <a:spcAft>
                 <a:spcPts val="1000"/>
               </a:spcAft>
             </a:pPr>
             <a:r>
-              <a:rPr sz="1200" b="0">
+              <a:rPr sz="1150" b="0">
                 <a:solidFill>
                   <a:srgbClr val="262626"/>
                 </a:solidFill>
                 <a:latin typeface="Yu Gothic"/>
               </a:rPr>
-              <a:t>● ② ブロック可能なコネクタ → 「ブロック済み」グループへ</a:t>
+              <a:t>● ② ブロック可能なコネクタ →</a:t>
+            </a:r>
+            <a:br/>
+            <a:r>
+              <a:rPr sz="1150" b="0">
+                <a:solidFill>
+                  <a:srgbClr val="262626"/>
+                </a:solidFill>
+                <a:latin typeface="Yu Gothic"/>
+              </a:rPr>
+              <a:t>「ブロック済み」グループへ（接続不可）</a:t>
             </a:r>
           </a:p>
           <a:p>
             <a:pPr>
               <a:lnSpc>
-                <a:spcPct val="125000"/>
+                <a:spcPct val="120000"/>
               </a:lnSpc>
               <a:spcAft>
                 <a:spcPts val="1000"/>
               </a:spcAft>
             </a:pPr>
             <a:r>
-              <a:rPr sz="1200" b="0">
+              <a:rPr sz="1150" b="0">
                 <a:solidFill>
                   <a:srgbClr val="262626"/>
                 </a:solidFill>
@@ -15556,24 +16950,44 @@
               </a:rPr>
               <a:t>● ③ 既定グループを「ブロック済み」に設定</a:t>
             </a:r>
+            <a:br/>
+            <a:r>
+              <a:rPr sz="1150" b="0">
+                <a:solidFill>
+                  <a:srgbClr val="262626"/>
+                </a:solidFill>
+                <a:latin typeface="Yu Gothic"/>
+              </a:rPr>
+              <a:t>（新規コネクタは原則接続不可）</a:t>
+            </a:r>
           </a:p>
           <a:p>
             <a:pPr>
               <a:lnSpc>
-                <a:spcPct val="125000"/>
+                <a:spcPct val="120000"/>
               </a:lnSpc>
               <a:spcAft>
                 <a:spcPts val="1000"/>
               </a:spcAft>
             </a:pPr>
             <a:r>
-              <a:rPr sz="1200" b="0">
+              <a:rPr sz="1150" b="0">
                 <a:solidFill>
                   <a:srgbClr val="262626"/>
                 </a:solidFill>
                 <a:latin typeface="Yu Gothic"/>
               </a:rPr>
-              <a:t>● ④ 必要なコネクタのみ都度承認して昇格</a:t>
+              <a:t>● ④ 必要なコネクタのみ承認して</a:t>
+            </a:r>
+            <a:br/>
+            <a:r>
+              <a:rPr sz="1150" b="0">
+                <a:solidFill>
+                  <a:srgbClr val="262626"/>
+                </a:solidFill>
+                <a:latin typeface="Yu Gothic"/>
+              </a:rPr>
+              <a:t>「ビジネス」等へ昇格（接続可に変更）</a:t>
             </a:r>
           </a:p>
         </p:txBody>
@@ -15968,7 +17382,7 @@
         </p:nvGraphicFramePr>
         <p:xfrm>
           <a:off x="502920" y="1920240"/>
-          <a:ext cx="11201400" cy="2880360"/>
+          <a:ext cx="11201400" cy="2606040"/>
         </p:xfrm>
         <a:graphic>
           <a:graphicData uri="http://schemas.openxmlformats.org/drawingml/2006/table">
@@ -15982,7 +17396,7 @@
                 <a:gridCol w="2834640"/>
                 <a:gridCol w="2743200"/>
               </a:tblGrid>
-              <a:tr h="720090">
+              <a:tr h="651510">
                 <a:tc>
                   <a:txBody>
                     <a:bodyPr wrap="square"/>
@@ -16112,7 +17526,7 @@
                   </a:tcPr>
                 </a:tc>
               </a:tr>
-              <a:tr h="720090">
+              <a:tr h="651510">
                 <a:tc>
                   <a:txBody>
                     <a:bodyPr wrap="square"/>
@@ -16208,7 +17622,7 @@
                           </a:solidFill>
                           <a:latin typeface="Yu Gothic"/>
                         </a:rPr>
-                        <a:t>実行する場合は</a:t>
+                        <a:t>一般利用者と同じ</a:t>
                       </a:r>
                     </a:p>
                     <a:p>
@@ -16220,7 +17634,7 @@
                           </a:solidFill>
                           <a:latin typeface="Yu Gothic"/>
                         </a:rPr>
-                        <a:t>他の区分と同様に必要</a:t>
+                        <a:t>（必須）</a:t>
                       </a:r>
                     </a:p>
                   </a:txBody>
@@ -16243,7 +17657,7 @@
                           </a:solidFill>
                           <a:latin typeface="Yu Gothic"/>
                         </a:rPr>
-                        <a:t>実行する場合は必要</a:t>
+                        <a:t>利用する場合は必要</a:t>
                       </a:r>
                     </a:p>
                   </a:txBody>
@@ -16254,7 +17668,7 @@
                   </a:tcPr>
                 </a:tc>
               </a:tr>
-              <a:tr h="720090">
+              <a:tr h="651510">
                 <a:tc>
                   <a:txBody>
                     <a:bodyPr wrap="square"/>
@@ -16326,7 +17740,7 @@
                           </a:solidFill>
                           <a:latin typeface="Yu Gothic"/>
                         </a:rPr>
-                        <a:t>作成・プレビュー自体は</a:t>
+                        <a:t>一般利用者と同じ</a:t>
                       </a:r>
                     </a:p>
                     <a:p>
@@ -16338,7 +17752,7 @@
                           </a:solidFill>
                           <a:latin typeface="Yu Gothic"/>
                         </a:rPr>
-                        <a:t>不要な場合あり</a:t>
+                        <a:t>（必須）</a:t>
                       </a:r>
                     </a:p>
                   </a:txBody>
@@ -16361,18 +17775,6 @@
                           </a:solidFill>
                           <a:latin typeface="Yu Gothic"/>
                         </a:rPr>
-                        <a:t>プレミアムコネクタを</a:t>
-                      </a:r>
-                    </a:p>
-                    <a:p>
-                      <a:pPr algn="ctr"/>
-                      <a:r>
-                        <a:rPr sz="1200" b="0">
-                          <a:solidFill>
-                            <a:srgbClr val="262626"/>
-                          </a:solidFill>
-                          <a:latin typeface="Yu Gothic"/>
-                        </a:rPr>
                         <a:t>組み込む場合は必要</a:t>
                       </a:r>
                     </a:p>
@@ -16384,7 +17786,7 @@
                   </a:tcPr>
                 </a:tc>
               </a:tr>
-              <a:tr h="720090">
+              <a:tr h="651510">
                 <a:tc>
                   <a:txBody>
                     <a:bodyPr wrap="square"/>
@@ -16491,19 +17893,7 @@
                           </a:solidFill>
                           <a:latin typeface="Yu Gothic"/>
                         </a:rPr>
-                        <a:t>必須</a:t>
-                      </a:r>
-                    </a:p>
-                    <a:p>
-                      <a:pPr algn="ctr"/>
-                      <a:r>
-                        <a:rPr sz="1200" b="0">
-                          <a:solidFill>
-                            <a:srgbClr val="262626"/>
-                          </a:solidFill>
-                          <a:latin typeface="Yu Gothic"/>
-                        </a:rPr>
-                        <a:t>(Premiumライセンス)</a:t>
+                        <a:t>利用する場合は必要</a:t>
                       </a:r>
                     </a:p>
                   </a:txBody>
@@ -16520,14 +17910,149 @@
       </p:graphicFrame>
       <p:sp>
         <p:nvSpPr>
-          <p:cNvPr id="9" name="TextBox 8"/>
+          <p:cNvPr id="9" name="Rectangle 8"/>
+          <p:cNvSpPr/>
+          <p:nvPr/>
+        </p:nvSpPr>
+        <p:spPr>
+          <a:xfrm>
+            <a:off x="502920" y="4709160"/>
+            <a:ext cx="11201400" cy="1508760"/>
+          </a:xfrm>
+          <a:prstGeom prst="rect">
+            <a:avLst/>
+          </a:prstGeom>
+          <a:solidFill>
+            <a:srgbClr val="F5F6F8"/>
+          </a:solidFill>
+          <a:ln>
+            <a:noFill/>
+          </a:ln>
+          <a:effectLst/>
+        </p:spPr>
+        <p:style>
+          <a:lnRef idx="1">
+            <a:schemeClr val="accent1"/>
+          </a:lnRef>
+          <a:fillRef idx="3">
+            <a:schemeClr val="accent1"/>
+          </a:fillRef>
+          <a:effectRef idx="2">
+            <a:schemeClr val="accent1"/>
+          </a:effectRef>
+          <a:fontRef idx="minor">
+            <a:schemeClr val="lt1"/>
+          </a:fontRef>
+        </p:style>
+        <p:txBody>
+          <a:bodyPr rtlCol="0" anchor="ctr"/>
+          <a:lstStyle/>
+          <a:p>
+            <a:pPr algn="ctr"/>
+          </a:p>
+        </p:txBody>
+      </p:sp>
+      <p:sp>
+        <p:nvSpPr>
+          <p:cNvPr id="10" name="TextBox 9"/>
           <p:cNvSpPr txBox="1"/>
           <p:nvPr/>
         </p:nvSpPr>
         <p:spPr>
           <a:xfrm>
-            <a:off x="502920" y="4983480"/>
-            <a:ext cx="11155680" cy="822960"/>
+            <a:off x="685800" y="4828032"/>
+            <a:ext cx="10881360" cy="1280160"/>
+          </a:xfrm>
+          <a:prstGeom prst="rect">
+            <a:avLst/>
+          </a:prstGeom>
+          <a:noFill/>
+        </p:spPr>
+        <p:txBody>
+          <a:bodyPr wrap="square">
+            <a:spAutoFit/>
+          </a:bodyPr>
+          <a:lstStyle/>
+          <a:p>
+            <a:pPr>
+              <a:lnSpc>
+                <a:spcPct val="115000"/>
+              </a:lnSpc>
+              <a:spcAft>
+                <a:spcPts val="500"/>
+              </a:spcAft>
+            </a:pPr>
+            <a:r>
+              <a:rPr sz="1030" b="0">
+                <a:solidFill>
+                  <a:srgbClr val="262626"/>
+                </a:solidFill>
+                <a:latin typeface="Yu Gothic"/>
+              </a:rPr>
+              <a:t>● Power Platform管理者ロールは、マネージド環境やDLPポリシーを設定するための「権限」であり、追加の</a:t>
+            </a:r>
+            <a:br/>
+            <a:r>
+              <a:rPr sz="1030" b="0">
+                <a:solidFill>
+                  <a:srgbClr val="262626"/>
+                </a:solidFill>
+                <a:latin typeface="Yu Gothic"/>
+              </a:rPr>
+              <a:t>「ライセンス」ではない。管理者自身がマネージド環境内でアプリ/フローを実行する場合は、一般利用者と</a:t>
+            </a:r>
+            <a:br/>
+            <a:r>
+              <a:rPr sz="1030" b="0">
+                <a:solidFill>
+                  <a:srgbClr val="262626"/>
+                </a:solidFill>
+                <a:latin typeface="Yu Gothic"/>
+              </a:rPr>
+              <a:t>同じPremiumライセンスが必要になる</a:t>
+            </a:r>
+          </a:p>
+          <a:p>
+            <a:pPr>
+              <a:lnSpc>
+                <a:spcPct val="115000"/>
+              </a:lnSpc>
+              <a:spcAft>
+                <a:spcPts val="500"/>
+              </a:spcAft>
+            </a:pPr>
+            <a:r>
+              <a:rPr sz="1030" b="0">
+                <a:solidFill>
+                  <a:srgbClr val="262626"/>
+                </a:solidFill>
+                <a:latin typeface="Yu Gothic"/>
+              </a:rPr>
+              <a:t>● 「メーカー」はMicrosoft公式のペルソナ名称。この「管理者／メーカー／一般利用者」という区分は、ライセ</a:t>
+            </a:r>
+            <a:br/>
+            <a:r>
+              <a:rPr sz="1030" b="0">
+                <a:solidFill>
+                  <a:srgbClr val="262626"/>
+                </a:solidFill>
+                <a:latin typeface="Yu Gothic"/>
+              </a:rPr>
+              <a:t>ンス要件が肩書きではなく実際に行う操作（設定／開発／実行）で決まることを示すための説明用分類である</a:t>
+            </a:r>
+          </a:p>
+        </p:txBody>
+      </p:sp>
+      <p:sp>
+        <p:nvSpPr>
+          <p:cNvPr id="11" name="TextBox 10"/>
+          <p:cNvSpPr txBox="1"/>
+          <p:nvPr/>
+        </p:nvSpPr>
+        <p:spPr>
+          <a:xfrm>
+            <a:off x="502920" y="6565392"/>
+            <a:ext cx="8229600" cy="274320"/>
           </a:xfrm>
           <a:prstGeom prst="rect">
             <a:avLst/>
@@ -16546,51 +18071,12 @@
               </a:lnSpc>
             </a:pPr>
             <a:r>
-              <a:rPr sz="1050" b="0" i="1">
+              <a:rPr sz="900" b="0" i="0">
                 <a:solidFill>
                   <a:srgbClr val="6E6E6E"/>
                 </a:solidFill>
                 <a:latin typeface="Yu Gothic"/>
               </a:rPr>
-              <a:t>※ 管理者専用のライセンス区分は存在しない。管理者であっても環境内でアプリ/フローを実行する場合は、一般利用者と同じライセンス要件が適用される。「メーカー」はMicrosoft公式のペルソナ名称。「管理者」「一般利用者」は本資料が説明のために用いる区分であり、Microsoft公式の正式なロール名ではない。</a:t>
-            </a:r>
-          </a:p>
-        </p:txBody>
-      </p:sp>
-      <p:sp>
-        <p:nvSpPr>
-          <p:cNvPr id="10" name="TextBox 9"/>
-          <p:cNvSpPr txBox="1"/>
-          <p:nvPr/>
-        </p:nvSpPr>
-        <p:spPr>
-          <a:xfrm>
-            <a:off x="502920" y="6565392"/>
-            <a:ext cx="8229600" cy="274320"/>
-          </a:xfrm>
-          <a:prstGeom prst="rect">
-            <a:avLst/>
-          </a:prstGeom>
-          <a:noFill/>
-        </p:spPr>
-        <p:txBody>
-          <a:bodyPr wrap="square" anchor="t" lIns="0" rIns="0" tIns="0" bIns="0">
-            <a:spAutoFit/>
-          </a:bodyPr>
-          <a:lstStyle/>
-          <a:p>
-            <a:pPr algn="l">
-              <a:lnSpc>
-                <a:spcPct val="100000"/>
-              </a:lnSpc>
-            </a:pPr>
-            <a:r>
-              <a:rPr sz="900" b="0" i="0">
-                <a:solidFill>
-                  <a:srgbClr val="6E6E6E"/>
-                </a:solidFill>
-                <a:latin typeface="Yu Gothic"/>
-              </a:rPr>
               <a:t>Power Platform Default環境 統治 調査報告 ｜ Confidential</a:t>
             </a:r>
           </a:p>
@@ -16598,7 +18084,7 @@
       </p:sp>
       <p:sp>
         <p:nvSpPr>
-          <p:cNvPr id="11" name="TextBox 10"/>
+          <p:cNvPr id="12" name="TextBox 11"/>
           <p:cNvSpPr txBox="1"/>
           <p:nvPr/>
         </p:nvSpPr>
@@ -16835,7 +18321,7 @@
         </p:nvSpPr>
         <p:spPr>
           <a:xfrm>
-            <a:off x="502920" y="1325880"/>
+            <a:off x="502920" y="1298448"/>
             <a:ext cx="1371600" cy="457200"/>
           </a:xfrm>
           <a:prstGeom prst="roundRect">
@@ -16890,6 +18376,45 @@
         </p:nvSpPr>
         <p:spPr>
           <a:xfrm>
+            <a:off x="1965960" y="1298448"/>
+            <a:ext cx="5486400" cy="457200"/>
+          </a:xfrm>
+          <a:prstGeom prst="rect">
+            <a:avLst/>
+          </a:prstGeom>
+          <a:noFill/>
+        </p:spPr>
+        <p:txBody>
+          <a:bodyPr wrap="square" anchor="ctr" lIns="0" rIns="0" tIns="0" bIns="0">
+            <a:spAutoFit/>
+          </a:bodyPr>
+          <a:lstStyle/>
+          <a:p>
+            <a:pPr algn="l">
+              <a:lnSpc>
+                <a:spcPct val="100000"/>
+              </a:lnSpc>
+            </a:pPr>
+            <a:r>
+              <a:rPr sz="1500" b="1" i="0">
+                <a:solidFill>
+                  <a:srgbClr val="1B2A4A"/>
+                </a:solidFill>
+                <a:latin typeface="Yu Gothic"/>
+              </a:rPr>
+              <a:t>Premiumライセンスは不要です。</a:t>
+            </a:r>
+          </a:p>
+        </p:txBody>
+      </p:sp>
+      <p:sp>
+        <p:nvSpPr>
+          <p:cNvPr id="8" name="TextBox 7"/>
+          <p:cNvSpPr txBox="1"/>
+          <p:nvPr/>
+        </p:nvSpPr>
+        <p:spPr>
+          <a:xfrm>
             <a:off x="502920" y="1965960"/>
             <a:ext cx="6949440" cy="3657600"/>
           </a:xfrm>
@@ -16906,24 +18431,53 @@
           <a:p>
             <a:pPr>
               <a:lnSpc>
-                <a:spcPct val="112000"/>
+                <a:spcPct val="108000"/>
               </a:lnSpc>
               <a:spcAft>
-                <a:spcPts val="800"/>
+                <a:spcPts val="600"/>
               </a:spcAft>
             </a:pPr>
             <a:r>
-              <a:rPr sz="1250" b="1">
+              <a:rPr sz="1150" b="1">
                 <a:solidFill>
                   <a:srgbClr val="262626"/>
                 </a:solidFill>
                 <a:latin typeface="Yu Gothic"/>
               </a:rPr>
+              <a:t>● DLPポリシー適用自体にPremiumライセンスは不要。適用には</a:t>
+            </a:r>
+            <a:br/>
+            <a:r>
+              <a:rPr sz="1150" b="1">
+                <a:solidFill>
+                  <a:srgbClr val="262626"/>
+                </a:solidFill>
+                <a:latin typeface="Yu Gothic"/>
+              </a:rPr>
+              <a:t>Power Platform 管理者ロール（権限）が必要</a:t>
+            </a:r>
+          </a:p>
+          <a:p>
+            <a:pPr>
+              <a:lnSpc>
+                <a:spcPct val="108000"/>
+              </a:lnSpc>
+              <a:spcAft>
+                <a:spcPts val="600"/>
+              </a:spcAft>
+            </a:pPr>
+            <a:r>
+              <a:rPr sz="1150" b="1">
+                <a:solidFill>
+                  <a:srgbClr val="262626"/>
+                </a:solidFill>
+                <a:latin typeface="Yu Gothic"/>
+              </a:rPr>
               <a:t>● DLPポリシーは「管理者による統制機能」であり、利用者側にライセンスを</a:t>
             </a:r>
             <a:br/>
             <a:r>
-              <a:rPr sz="1250" b="1">
+              <a:rPr sz="1150" b="1">
                 <a:solidFill>
                   <a:srgbClr val="262626"/>
                 </a:solidFill>
@@ -16935,14 +18489,14 @@
           <a:p>
             <a:pPr marL="228600">
               <a:lnSpc>
-                <a:spcPct val="112000"/>
+                <a:spcPct val="108000"/>
               </a:lnSpc>
               <a:spcAft>
-                <a:spcPts val="800"/>
+                <a:spcPts val="600"/>
               </a:spcAft>
             </a:pPr>
             <a:r>
-              <a:rPr sz="1150" b="0">
+              <a:rPr sz="1050" b="0">
                 <a:solidFill>
                   <a:srgbClr val="262626"/>
                 </a:solidFill>
@@ -16954,14 +18508,14 @@
           <a:p>
             <a:pPr marL="228600">
               <a:lnSpc>
-                <a:spcPct val="112000"/>
+                <a:spcPct val="108000"/>
               </a:lnSpc>
               <a:spcAft>
-                <a:spcPts val="800"/>
+                <a:spcPts val="600"/>
               </a:spcAft>
             </a:pPr>
             <a:r>
-              <a:rPr sz="1150" b="0">
+              <a:rPr sz="1050" b="0">
                 <a:solidFill>
                   <a:srgbClr val="262626"/>
                 </a:solidFill>
@@ -16971,7 +18525,7 @@
             </a:r>
             <a:br/>
             <a:r>
-              <a:rPr sz="1150" b="0">
+              <a:rPr sz="1050" b="0">
                 <a:solidFill>
                   <a:srgbClr val="262626"/>
                 </a:solidFill>
@@ -16983,14 +18537,14 @@
           <a:p>
             <a:pPr>
               <a:lnSpc>
-                <a:spcPct val="112000"/>
+                <a:spcPct val="108000"/>
               </a:lnSpc>
               <a:spcAft>
-                <a:spcPts val="800"/>
+                <a:spcPts val="600"/>
               </a:spcAft>
             </a:pPr>
             <a:r>
-              <a:rPr sz="1250" b="1">
+              <a:rPr sz="1150" b="1">
                 <a:solidFill>
                   <a:srgbClr val="262626"/>
                 </a:solidFill>
@@ -17002,14 +18556,14 @@
           <a:p>
             <a:pPr marL="228600">
               <a:lnSpc>
-                <a:spcPct val="112000"/>
+                <a:spcPct val="108000"/>
               </a:lnSpc>
               <a:spcAft>
-                <a:spcPts val="800"/>
+                <a:spcPts val="600"/>
               </a:spcAft>
             </a:pPr>
             <a:r>
-              <a:rPr sz="1150" b="0">
+              <a:rPr sz="1050" b="0">
                 <a:solidFill>
                   <a:srgbClr val="262626"/>
                 </a:solidFill>
@@ -17019,7 +18573,7 @@
             </a:r>
             <a:br/>
             <a:r>
-              <a:rPr sz="1150" b="0">
+              <a:rPr sz="1050" b="0">
                 <a:solidFill>
                   <a:srgbClr val="262626"/>
                 </a:solidFill>
@@ -17031,14 +18585,14 @@
           <a:p>
             <a:pPr>
               <a:lnSpc>
-                <a:spcPct val="112000"/>
+                <a:spcPct val="108000"/>
               </a:lnSpc>
               <a:spcAft>
-                <a:spcPts val="800"/>
+                <a:spcPts val="600"/>
               </a:spcAft>
             </a:pPr>
             <a:r>
-              <a:rPr sz="1250" b="1">
+              <a:rPr sz="1150" b="1">
                 <a:solidFill>
                   <a:srgbClr val="262626"/>
                 </a:solidFill>
@@ -17046,51 +18600,51 @@
               </a:rPr>
               <a:t>● 唯一の例外：デスクトップ フローのデータ ポリシー</a:t>
             </a:r>
+            <a:br/>
+            <a:r>
+              <a:rPr sz="1150" b="1">
+                <a:solidFill>
+                  <a:srgbClr val="262626"/>
+                </a:solidFill>
+                <a:latin typeface="Yu Gothic"/>
+              </a:rPr>
+              <a:t>（マネージド環境下の場合のみ）</a:t>
+            </a:r>
           </a:p>
           <a:p>
             <a:pPr marL="228600">
               <a:lnSpc>
-                <a:spcPct val="112000"/>
+                <a:spcPct val="108000"/>
               </a:lnSpc>
               <a:spcAft>
-                <a:spcPts val="800"/>
+                <a:spcPts val="600"/>
               </a:spcAft>
             </a:pPr>
             <a:r>
-              <a:rPr sz="1150" b="0">
+              <a:rPr sz="1050" b="0">
                 <a:solidFill>
                   <a:srgbClr val="262626"/>
                 </a:solidFill>
                 <a:latin typeface="Yu Gothic"/>
               </a:rPr>
-              <a:t>- デスクトップ フロー向けのデータ ポリシーは、マネージド環境下でのみ</a:t>
+              <a:t>- マネージド環境下でのみ機能する制限があり、その場合は確認項目3の</a:t>
             </a:r>
             <a:br/>
             <a:r>
-              <a:rPr sz="1150" b="0">
+              <a:rPr sz="1050" b="0">
                 <a:solidFill>
                   <a:srgbClr val="262626"/>
                 </a:solidFill>
                 <a:latin typeface="Yu Gothic"/>
               </a:rPr>
-              <a:t>機能する制限があり、その場合は確認項目3のPremium要件が</a:t>
-            </a:r>
-            <a:br/>
-            <a:r>
-              <a:rPr sz="1150" b="0">
-                <a:solidFill>
-                  <a:srgbClr val="262626"/>
-                </a:solidFill>
-                <a:latin typeface="Yu Gothic"/>
-              </a:rPr>
-              <a:t>間接的に関わる</a:t>
-            </a:r>
-          </a:p>
-        </p:txBody>
-      </p:sp>
-      <p:sp>
-        <p:nvSpPr>
-          <p:cNvPr id="8" name="Rectangle 7"/>
+              <a:t>Premium要件が間接的に関わる</a:t>
+            </a:r>
+          </a:p>
+        </p:txBody>
+      </p:sp>
+      <p:sp>
+        <p:nvSpPr>
+          <p:cNvPr id="9" name="Rectangle 8"/>
           <p:cNvSpPr/>
           <p:nvPr/>
         </p:nvSpPr>
@@ -17134,7 +18688,7 @@
       </p:sp>
       <p:sp>
         <p:nvSpPr>
-          <p:cNvPr id="9" name="TextBox 8"/>
+          <p:cNvPr id="10" name="TextBox 9"/>
           <p:cNvSpPr txBox="1"/>
           <p:nvPr/>
         </p:nvSpPr>
@@ -17173,7 +18727,7 @@
       </p:sp>
       <p:sp>
         <p:nvSpPr>
-          <p:cNvPr id="10" name="TextBox 9"/>
+          <p:cNvPr id="11" name="TextBox 10"/>
           <p:cNvSpPr txBox="1"/>
           <p:nvPr/>
         </p:nvSpPr>
@@ -17293,7 +18847,7 @@
       </p:sp>
       <p:sp>
         <p:nvSpPr>
-          <p:cNvPr id="11" name="TextBox 10"/>
+          <p:cNvPr id="12" name="TextBox 11"/>
           <p:cNvSpPr txBox="1"/>
           <p:nvPr/>
         </p:nvSpPr>
@@ -17332,7 +18886,7 @@
       </p:sp>
       <p:sp>
         <p:nvSpPr>
-          <p:cNvPr id="12" name="TextBox 11"/>
+          <p:cNvPr id="13" name="TextBox 12"/>
           <p:cNvSpPr txBox="1"/>
           <p:nvPr/>
         </p:nvSpPr>
@@ -17727,7 +19281,7 @@
               </a:lnSpc>
             </a:pPr>
             <a:r>
-              <a:rPr sz="1250" b="1" i="0">
+              <a:rPr sz="1200" b="1" i="0">
                 <a:solidFill>
                   <a:srgbClr val="1B2A4A"/>
                 </a:solidFill>
@@ -17747,7 +19301,7 @@
         <p:spPr>
           <a:xfrm>
             <a:off x="5669280" y="1993392"/>
-            <a:ext cx="6035040" cy="548640"/>
+            <a:ext cx="6035040" cy="566928"/>
           </a:xfrm>
           <a:prstGeom prst="rect">
             <a:avLst/>
@@ -17766,7 +19320,7 @@
               </a:lnSpc>
             </a:pPr>
             <a:r>
-              <a:rPr sz="1100" b="0" i="0">
+              <a:rPr sz="1080" b="0" i="0">
                 <a:solidFill>
                   <a:srgbClr val="262626"/>
                 </a:solidFill>
@@ -17782,7 +19336,7 @@
               </a:lnSpc>
             </a:pPr>
             <a:r>
-              <a:rPr sz="1100" b="0" i="0">
+              <a:rPr sz="1080" b="0" i="0">
                 <a:solidFill>
                   <a:srgbClr val="262626"/>
                 </a:solidFill>
@@ -17802,7 +19356,7 @@
         <p:spPr>
           <a:xfrm>
             <a:off x="685800" y="2395728"/>
-            <a:ext cx="19050" cy="283464"/>
+            <a:ext cx="19050" cy="310896"/>
           </a:xfrm>
           <a:prstGeom prst="rect">
             <a:avLst/>
@@ -17845,7 +19399,7 @@
         </p:nvSpPr>
         <p:spPr>
           <a:xfrm>
-            <a:off x="502920" y="2697480"/>
+            <a:off x="502920" y="2724912"/>
             <a:ext cx="384048" cy="384048"/>
           </a:xfrm>
           <a:prstGeom prst="ellipse">
@@ -17889,7 +19443,7 @@
         </p:nvSpPr>
         <p:spPr>
           <a:xfrm>
-            <a:off x="502920" y="2743200"/>
+            <a:off x="502920" y="2770632"/>
             <a:ext cx="384048" cy="292608"/>
           </a:xfrm>
           <a:prstGeom prst="rect">
@@ -17928,7 +19482,7 @@
         </p:nvSpPr>
         <p:spPr>
           <a:xfrm>
-            <a:off x="1051560" y="2679192"/>
+            <a:off x="1051560" y="2706624"/>
             <a:ext cx="4480560" cy="457200"/>
           </a:xfrm>
           <a:prstGeom prst="rect">
@@ -17948,13 +19502,13 @@
               </a:lnSpc>
             </a:pPr>
             <a:r>
-              <a:rPr sz="1250" b="1" i="0">
+              <a:rPr sz="1200" b="1" i="0">
                 <a:solidFill>
                   <a:srgbClr val="1B2A4A"/>
                 </a:solidFill>
                 <a:latin typeface="Yu Gothic"/>
               </a:rPr>
-              <a:t>［ポリシー］→［データ ポリシー］を開く</a:t>
+              <a:t>［セキュリティ］→［データとプライバシー］を開く</a:t>
             </a:r>
           </a:p>
         </p:txBody>
@@ -17967,8 +19521,8 @@
         </p:nvSpPr>
         <p:spPr>
           <a:xfrm>
-            <a:off x="5669280" y="2679192"/>
-            <a:ext cx="6035040" cy="548640"/>
+            <a:off x="5669280" y="2706624"/>
+            <a:ext cx="6035040" cy="566928"/>
           </a:xfrm>
           <a:prstGeom prst="rect">
             <a:avLst/>
@@ -17987,13 +19541,29 @@
               </a:lnSpc>
             </a:pPr>
             <a:r>
-              <a:rPr sz="1100" b="0" i="0">
+              <a:rPr sz="1080" b="0" i="0">
                 <a:solidFill>
                   <a:srgbClr val="262626"/>
                 </a:solidFill>
                 <a:latin typeface="Yu Gothic"/>
               </a:rPr>
-              <a:t>左メニューからデータ ポリシー一覧画面に移動</a:t>
+              <a:t>左メニュー［セキュリティ］→ 設定内の［データとプライバシー］→</a:t>
+            </a:r>
+          </a:p>
+          <a:p>
+            <a:pPr algn="l">
+              <a:lnSpc>
+                <a:spcPct val="105000"/>
+              </a:lnSpc>
+            </a:pPr>
+            <a:r>
+              <a:rPr sz="1080" b="0" i="0">
+                <a:solidFill>
+                  <a:srgbClr val="262626"/>
+                </a:solidFill>
+                <a:latin typeface="Yu Gothic"/>
+              </a:rPr>
+              <a:t>［データ ポリシー］を選択</a:t>
             </a:r>
           </a:p>
         </p:txBody>
@@ -18006,8 +19576,8 @@
         </p:nvSpPr>
         <p:spPr>
           <a:xfrm>
-            <a:off x="685800" y="3081528"/>
-            <a:ext cx="19050" cy="283464"/>
+            <a:off x="685800" y="3108960"/>
+            <a:ext cx="19050" cy="310896"/>
           </a:xfrm>
           <a:prstGeom prst="rect">
             <a:avLst/>
@@ -18050,7 +19620,7 @@
         </p:nvSpPr>
         <p:spPr>
           <a:xfrm>
-            <a:off x="502920" y="3383280"/>
+            <a:off x="502920" y="3438144"/>
             <a:ext cx="384048" cy="384048"/>
           </a:xfrm>
           <a:prstGeom prst="ellipse">
@@ -18094,7 +19664,7 @@
         </p:nvSpPr>
         <p:spPr>
           <a:xfrm>
-            <a:off x="502920" y="3429000"/>
+            <a:off x="502920" y="3483864"/>
             <a:ext cx="384048" cy="292608"/>
           </a:xfrm>
           <a:prstGeom prst="rect">
@@ -18133,7 +19703,7 @@
         </p:nvSpPr>
         <p:spPr>
           <a:xfrm>
-            <a:off x="1051560" y="3364992"/>
+            <a:off x="1051560" y="3419856"/>
             <a:ext cx="4480560" cy="457200"/>
           </a:xfrm>
           <a:prstGeom prst="rect">
@@ -18153,7 +19723,7 @@
               </a:lnSpc>
             </a:pPr>
             <a:r>
-              <a:rPr sz="1250" b="1" i="0">
+              <a:rPr sz="1200" b="1" i="0">
                 <a:solidFill>
                   <a:srgbClr val="1B2A4A"/>
                 </a:solidFill>
@@ -18172,8 +19742,8 @@
         </p:nvSpPr>
         <p:spPr>
           <a:xfrm>
-            <a:off x="5669280" y="3364992"/>
-            <a:ext cx="6035040" cy="548640"/>
+            <a:off x="5669280" y="3419856"/>
+            <a:ext cx="6035040" cy="566928"/>
           </a:xfrm>
           <a:prstGeom prst="rect">
             <a:avLst/>
@@ -18192,7 +19762,7 @@
               </a:lnSpc>
             </a:pPr>
             <a:r>
-              <a:rPr sz="1100" b="0" i="0">
+              <a:rPr sz="1080" b="0" i="0">
                 <a:solidFill>
                   <a:srgbClr val="262626"/>
                 </a:solidFill>
@@ -18208,7 +19778,7 @@
               </a:lnSpc>
             </a:pPr>
             <a:r>
-              <a:rPr sz="1100" b="0" i="0">
+              <a:rPr sz="1080" b="0" i="0">
                 <a:solidFill>
                   <a:srgbClr val="262626"/>
                 </a:solidFill>
@@ -18227,8 +19797,8 @@
         </p:nvSpPr>
         <p:spPr>
           <a:xfrm>
-            <a:off x="685800" y="3767328"/>
-            <a:ext cx="19050" cy="283464"/>
+            <a:off x="685800" y="3822192"/>
+            <a:ext cx="19050" cy="310896"/>
           </a:xfrm>
           <a:prstGeom prst="rect">
             <a:avLst/>
@@ -18271,7 +19841,7 @@
         </p:nvSpPr>
         <p:spPr>
           <a:xfrm>
-            <a:off x="502920" y="4069080"/>
+            <a:off x="502920" y="4151376"/>
             <a:ext cx="384048" cy="384048"/>
           </a:xfrm>
           <a:prstGeom prst="ellipse">
@@ -18315,7 +19885,7 @@
         </p:nvSpPr>
         <p:spPr>
           <a:xfrm>
-            <a:off x="502920" y="4114800"/>
+            <a:off x="502920" y="4197096"/>
             <a:ext cx="384048" cy="292608"/>
           </a:xfrm>
           <a:prstGeom prst="rect">
@@ -18354,7 +19924,7 @@
         </p:nvSpPr>
         <p:spPr>
           <a:xfrm>
-            <a:off x="1051560" y="4050792"/>
+            <a:off x="1051560" y="4133088"/>
             <a:ext cx="4480560" cy="457200"/>
           </a:xfrm>
           <a:prstGeom prst="rect">
@@ -18374,7 +19944,7 @@
               </a:lnSpc>
             </a:pPr>
             <a:r>
-              <a:rPr sz="1250" b="1" i="0">
+              <a:rPr sz="1200" b="1" i="0">
                 <a:solidFill>
                   <a:srgbClr val="1B2A4A"/>
                 </a:solidFill>
@@ -18393,8 +19963,8 @@
         </p:nvSpPr>
         <p:spPr>
           <a:xfrm>
-            <a:off x="5669280" y="4050792"/>
-            <a:ext cx="6035040" cy="548640"/>
+            <a:off x="5669280" y="4133088"/>
+            <a:ext cx="6035040" cy="566928"/>
           </a:xfrm>
           <a:prstGeom prst="rect">
             <a:avLst/>
@@ -18413,7 +19983,7 @@
               </a:lnSpc>
             </a:pPr>
             <a:r>
-              <a:rPr sz="1100" b="0" i="0">
+              <a:rPr sz="1080" b="0" i="0">
                 <a:solidFill>
                   <a:srgbClr val="262626"/>
                 </a:solidFill>
@@ -18429,7 +19999,7 @@
               </a:lnSpc>
             </a:pPr>
             <a:r>
-              <a:rPr sz="1100" b="0" i="0">
+              <a:rPr sz="1080" b="0" i="0">
                 <a:solidFill>
                   <a:srgbClr val="262626"/>
                 </a:solidFill>
@@ -18448,8 +20018,8 @@
         </p:nvSpPr>
         <p:spPr>
           <a:xfrm>
-            <a:off x="685800" y="4453128"/>
-            <a:ext cx="19050" cy="283464"/>
+            <a:off x="685800" y="4535424"/>
+            <a:ext cx="19050" cy="310896"/>
           </a:xfrm>
           <a:prstGeom prst="rect">
             <a:avLst/>
@@ -18492,7 +20062,7 @@
         </p:nvSpPr>
         <p:spPr>
           <a:xfrm>
-            <a:off x="502920" y="4754880"/>
+            <a:off x="502920" y="4864608"/>
             <a:ext cx="384048" cy="384048"/>
           </a:xfrm>
           <a:prstGeom prst="ellipse">
@@ -18536,7 +20106,7 @@
         </p:nvSpPr>
         <p:spPr>
           <a:xfrm>
-            <a:off x="502920" y="4800600"/>
+            <a:off x="502920" y="4910328"/>
             <a:ext cx="384048" cy="292608"/>
           </a:xfrm>
           <a:prstGeom prst="rect">
@@ -18575,7 +20145,7 @@
         </p:nvSpPr>
         <p:spPr>
           <a:xfrm>
-            <a:off x="1051560" y="4736592"/>
+            <a:off x="1051560" y="4846320"/>
             <a:ext cx="4480560" cy="457200"/>
           </a:xfrm>
           <a:prstGeom prst="rect">
@@ -18595,7 +20165,7 @@
               </a:lnSpc>
             </a:pPr>
             <a:r>
-              <a:rPr sz="1250" b="1" i="0">
+              <a:rPr sz="1200" b="1" i="0">
                 <a:solidFill>
                   <a:srgbClr val="1B2A4A"/>
                 </a:solidFill>
@@ -18614,8 +20184,8 @@
         </p:nvSpPr>
         <p:spPr>
           <a:xfrm>
-            <a:off x="5669280" y="4736592"/>
-            <a:ext cx="6035040" cy="548640"/>
+            <a:off x="5669280" y="4846320"/>
+            <a:ext cx="6035040" cy="566928"/>
           </a:xfrm>
           <a:prstGeom prst="rect">
             <a:avLst/>
@@ -18634,7 +20204,7 @@
               </a:lnSpc>
             </a:pPr>
             <a:r>
-              <a:rPr sz="1100" b="0" i="0">
+              <a:rPr sz="1080" b="0" i="0">
                 <a:solidFill>
                   <a:srgbClr val="262626"/>
                 </a:solidFill>
@@ -18653,8 +20223,8 @@
         </p:nvSpPr>
         <p:spPr>
           <a:xfrm>
-            <a:off x="685800" y="5138928"/>
-            <a:ext cx="19050" cy="283464"/>
+            <a:off x="685800" y="5248656"/>
+            <a:ext cx="19050" cy="310896"/>
           </a:xfrm>
           <a:prstGeom prst="rect">
             <a:avLst/>
@@ -18697,7 +20267,7 @@
         </p:nvSpPr>
         <p:spPr>
           <a:xfrm>
-            <a:off x="502920" y="5440680"/>
+            <a:off x="502920" y="5577840"/>
             <a:ext cx="384048" cy="384048"/>
           </a:xfrm>
           <a:prstGeom prst="ellipse">
@@ -18741,7 +20311,7 @@
         </p:nvSpPr>
         <p:spPr>
           <a:xfrm>
-            <a:off x="502920" y="5486400"/>
+            <a:off x="502920" y="5623560"/>
             <a:ext cx="384048" cy="292608"/>
           </a:xfrm>
           <a:prstGeom prst="rect">
@@ -18780,7 +20350,7 @@
         </p:nvSpPr>
         <p:spPr>
           <a:xfrm>
-            <a:off x="1051560" y="5422392"/>
+            <a:off x="1051560" y="5559552"/>
             <a:ext cx="4480560" cy="457200"/>
           </a:xfrm>
           <a:prstGeom prst="rect">
@@ -18800,7 +20370,7 @@
               </a:lnSpc>
             </a:pPr>
             <a:r>
-              <a:rPr sz="1250" b="1" i="0">
+              <a:rPr sz="1200" b="1" i="0">
                 <a:solidFill>
                   <a:srgbClr val="1B2A4A"/>
                 </a:solidFill>
@@ -18819,8 +20389,8 @@
         </p:nvSpPr>
         <p:spPr>
           <a:xfrm>
-            <a:off x="5669280" y="5422392"/>
-            <a:ext cx="6035040" cy="548640"/>
+            <a:off x="5669280" y="5559552"/>
+            <a:ext cx="6035040" cy="566928"/>
           </a:xfrm>
           <a:prstGeom prst="rect">
             <a:avLst/>
@@ -18839,7 +20409,7 @@
               </a:lnSpc>
             </a:pPr>
             <a:r>
-              <a:rPr sz="1100" b="0" i="0">
+              <a:rPr sz="1080" b="0" i="0">
                 <a:solidFill>
                   <a:srgbClr val="262626"/>
                 </a:solidFill>
